--- a/output/5.pptx
+++ b/output/5.pptx
@@ -3174,8 +3174,8 @@
         </p:nvCxnSpPr>
         <p:spPr>
           <a:xfrm flipV="1">
-            <a:off x="4572000.0" y="2023110.0"/>
-            <a:ext cx="91440.0" cy="91440.0"/>
+            <a:off x="4572000.0" y="2043684.0"/>
+            <a:ext cx="45720.0" cy="208026.0"/>
           </a:xfrm>
           <a:prstGeom prst="line">
             <a:avLst/>
@@ -3209,8 +3209,8 @@
         </p:nvCxnSpPr>
         <p:spPr>
           <a:xfrm flipV="1">
-            <a:off x="4663440.0" y="1931670.0"/>
-            <a:ext cx="91440.0" cy="91440.0"/>
+            <a:off x="4617720.0" y="1957273.2"/>
+            <a:ext cx="45720.0" cy="86410.80000000005"/>
           </a:xfrm>
           <a:prstGeom prst="line">
             <a:avLst/>
@@ -3244,8 +3244,8 @@
         </p:nvCxnSpPr>
         <p:spPr>
           <a:xfrm flipV="1">
-            <a:off x="4754880.0" y="1863090.0"/>
-            <a:ext cx="91440.0" cy="68580.0"/>
+            <a:off x="4663440.0" y="1891436.4"/>
+            <a:ext cx="45720.0" cy="65836.80000000005"/>
           </a:xfrm>
           <a:prstGeom prst="line">
             <a:avLst/>
@@ -3279,8 +3279,8 @@
         </p:nvCxnSpPr>
         <p:spPr>
           <a:xfrm flipV="1">
-            <a:off x="4846320.0" y="1794510.0"/>
-            <a:ext cx="91440.0" cy="68580.0"/>
+            <a:off x="4709160.0" y="1835658.0"/>
+            <a:ext cx="45720.0" cy="55778.39999999991"/>
           </a:xfrm>
           <a:prstGeom prst="line">
             <a:avLst/>
@@ -3314,8 +3314,8 @@
         </p:nvCxnSpPr>
         <p:spPr>
           <a:xfrm flipV="1">
-            <a:off x="4937760.0" y="1725930.0"/>
-            <a:ext cx="91440.0" cy="68580.0"/>
+            <a:off x="4754880.0" y="1786280.4"/>
+            <a:ext cx="45720.0" cy="49377.60000000009"/>
           </a:xfrm>
           <a:prstGeom prst="line">
             <a:avLst/>
@@ -3349,8 +3349,8 @@
         </p:nvCxnSpPr>
         <p:spPr>
           <a:xfrm flipV="1">
-            <a:off x="5029200.0" y="1666494.0"/>
-            <a:ext cx="91440.0" cy="59436.0"/>
+            <a:off x="4800600.0" y="1741932.0"/>
+            <a:ext cx="45720.0" cy="44348.39999999991"/>
           </a:xfrm>
           <a:prstGeom prst="line">
             <a:avLst/>
@@ -3384,8 +3384,8 @@
         </p:nvCxnSpPr>
         <p:spPr>
           <a:xfrm flipV="1">
-            <a:off x="5120640.0" y="1611630.0"/>
-            <a:ext cx="91440.0" cy="54864.0"/>
+            <a:off x="4846320.0" y="1700784.0"/>
+            <a:ext cx="45720.0" cy="41148.0"/>
           </a:xfrm>
           <a:prstGeom prst="line">
             <a:avLst/>
@@ -3419,8 +3419,8 @@
         </p:nvCxnSpPr>
         <p:spPr>
           <a:xfrm flipV="1">
-            <a:off x="5212080.0" y="1556766.0"/>
-            <a:ext cx="91440.0" cy="54864.0"/>
+            <a:off x="4892040.0" y="1662836.4"/>
+            <a:ext cx="45720.0" cy="37947.60000000009"/>
           </a:xfrm>
           <a:prstGeom prst="line">
             <a:avLst/>
@@ -3454,8 +3454,8 @@
         </p:nvCxnSpPr>
         <p:spPr>
           <a:xfrm flipV="1">
-            <a:off x="5303520.0" y="1497330.0"/>
-            <a:ext cx="91440.0" cy="59436.0"/>
+            <a:off x="4937760.0" y="1626717.6"/>
+            <a:ext cx="45720.0" cy="36118.799999999814"/>
           </a:xfrm>
           <a:prstGeom prst="line">
             <a:avLst/>
@@ -3489,8 +3489,8 @@
         </p:nvCxnSpPr>
         <p:spPr>
           <a:xfrm flipV="1">
-            <a:off x="5394960.0" y="1437894.0"/>
-            <a:ext cx="91440.0" cy="59436.0"/>
+            <a:off x="4983480.0" y="1593342.0"/>
+            <a:ext cx="45720.0" cy="33375.60000000009"/>
           </a:xfrm>
           <a:prstGeom prst="line">
             <a:avLst/>
@@ -3524,8 +3524,8 @@
         </p:nvCxnSpPr>
         <p:spPr>
           <a:xfrm flipV="1">
-            <a:off x="5486400.0" y="1383030.0"/>
-            <a:ext cx="91440.0" cy="54864.0"/>
+            <a:off x="5029200.0" y="1561795.2"/>
+            <a:ext cx="45720.0" cy="31546.800000000047"/>
           </a:xfrm>
           <a:prstGeom prst="line">
             <a:avLst/>
@@ -3559,8 +3559,8 @@
         </p:nvCxnSpPr>
         <p:spPr>
           <a:xfrm flipV="1">
-            <a:off x="5577840.0" y="1328166.0"/>
-            <a:ext cx="91440.0" cy="54864.0"/>
+            <a:off x="5074920.0" y="1531162.8"/>
+            <a:ext cx="45720.0" cy="30632.399999999907"/>
           </a:xfrm>
           <a:prstGeom prst="line">
             <a:avLst/>
@@ -3594,8 +3594,8 @@
         </p:nvCxnSpPr>
         <p:spPr>
           <a:xfrm flipV="1">
-            <a:off x="5669280.0" y="1268730.0"/>
-            <a:ext cx="91440.0" cy="59436.0"/>
+            <a:off x="5120640.0" y="1501902.0"/>
+            <a:ext cx="45720.0" cy="29260.800000000047"/>
           </a:xfrm>
           <a:prstGeom prst="line">
             <a:avLst/>
@@ -3629,8 +3629,8 @@
         </p:nvCxnSpPr>
         <p:spPr>
           <a:xfrm flipV="1">
-            <a:off x="5760720.0" y="1223010.0"/>
-            <a:ext cx="91440.0" cy="45720.0"/>
+            <a:off x="5166360.0" y="1474012.8"/>
+            <a:ext cx="45720.0" cy="27889.199999999953"/>
           </a:xfrm>
           <a:prstGeom prst="line">
             <a:avLst/>
@@ -3664,8 +3664,8 @@
         </p:nvCxnSpPr>
         <p:spPr>
           <a:xfrm flipV="1">
-            <a:off x="5852160.0" y="1204722.0"/>
-            <a:ext cx="68580.0" cy="18288.0"/>
+            <a:off x="5212080.0" y="1447038.0"/>
+            <a:ext cx="45720.0" cy="26974.800000000047"/>
           </a:xfrm>
           <a:prstGeom prst="line">
             <a:avLst/>
@@ -3699,8 +3699,8 @@
         </p:nvCxnSpPr>
         <p:spPr>
           <a:xfrm flipV="1">
-            <a:off x="5943600.0" y="1634490.0"/>
-            <a:ext cx="91440.0" cy="22860.0"/>
+            <a:off x="5257800.0" y="1421434.8"/>
+            <a:ext cx="45720.0" cy="25603.199999999953"/>
           </a:xfrm>
           <a:prstGeom prst="line">
             <a:avLst/>
@@ -3734,8 +3734,8 @@
         </p:nvCxnSpPr>
         <p:spPr>
           <a:xfrm flipV="1">
-            <a:off x="6035040.0" y="1588770.0"/>
-            <a:ext cx="91440.0" cy="45720.0"/>
+            <a:off x="5303520.0" y="1396288.7999999998"/>
+            <a:ext cx="45720.0" cy="25146.000000000233"/>
           </a:xfrm>
           <a:prstGeom prst="line">
             <a:avLst/>
@@ -3769,8 +3769,8 @@
         </p:nvCxnSpPr>
         <p:spPr>
           <a:xfrm flipV="1">
-            <a:off x="6126480.0" y="1543050.0"/>
-            <a:ext cx="91440.0" cy="45720.0"/>
+            <a:off x="5349240.0" y="1372057.2"/>
+            <a:ext cx="45720.0" cy="24231.59999999986"/>
           </a:xfrm>
           <a:prstGeom prst="line">
             <a:avLst/>
@@ -3804,8 +3804,8 @@
         </p:nvCxnSpPr>
         <p:spPr>
           <a:xfrm flipV="1">
-            <a:off x="6217920.0" y="1483614.0"/>
-            <a:ext cx="91440.0" cy="59436.0"/>
+            <a:off x="5394960.0" y="1348740.0"/>
+            <a:ext cx="45720.0" cy="23317.199999999953"/>
           </a:xfrm>
           <a:prstGeom prst="line">
             <a:avLst/>
@@ -3839,8 +3839,8 @@
         </p:nvCxnSpPr>
         <p:spPr>
           <a:xfrm flipV="1">
-            <a:off x="6309360.0" y="1428750.0"/>
-            <a:ext cx="91440.0" cy="54864.0"/>
+            <a:off x="5440680.0" y="1325422.8"/>
+            <a:ext cx="45720.0" cy="23317.199999999953"/>
           </a:xfrm>
           <a:prstGeom prst="line">
             <a:avLst/>
@@ -3874,8 +3874,8 @@
         </p:nvCxnSpPr>
         <p:spPr>
           <a:xfrm flipV="1">
-            <a:off x="6400800.0" y="1360170.0"/>
-            <a:ext cx="91440.0" cy="68580.0"/>
+            <a:off x="5486400.0" y="1303477.2"/>
+            <a:ext cx="45720.0" cy="21945.600000000093"/>
           </a:xfrm>
           <a:prstGeom prst="line">
             <a:avLst/>
@@ -3909,8 +3909,8 @@
         </p:nvCxnSpPr>
         <p:spPr>
           <a:xfrm flipV="1">
-            <a:off x="6492240.0" y="1291590.0"/>
-            <a:ext cx="91440.0" cy="68580.0"/>
+            <a:off x="5532120.0" y="1281531.5999999999"/>
+            <a:ext cx="45720.0" cy="21945.600000000093"/>
           </a:xfrm>
           <a:prstGeom prst="line">
             <a:avLst/>
@@ -3944,8 +3944,8 @@
         </p:nvCxnSpPr>
         <p:spPr>
           <a:xfrm flipV="1">
-            <a:off x="6583680.0" y="1209294.0"/>
-            <a:ext cx="91440.0" cy="82296.0"/>
+            <a:off x="5577840.0" y="1260500.4000000001"/>
+            <a:ext cx="45720.0" cy="21031.19999999972"/>
           </a:xfrm>
           <a:prstGeom prst="line">
             <a:avLst/>
@@ -3979,8 +3979,8 @@
         </p:nvCxnSpPr>
         <p:spPr>
           <a:xfrm flipV="1">
-            <a:off x="6675120.0" y="1131570.0"/>
-            <a:ext cx="91440.0" cy="77724.0"/>
+            <a:off x="5623560.0" y="1239469.2"/>
+            <a:ext cx="45720.0" cy="21031.200000000186"/>
           </a:xfrm>
           <a:prstGeom prst="line">
             <a:avLst/>
@@ -4014,8 +4014,8 @@
         </p:nvCxnSpPr>
         <p:spPr>
           <a:xfrm flipV="1">
-            <a:off x="6766560.0" y="1040130.0"/>
-            <a:ext cx="91440.0" cy="91440.0"/>
+            <a:off x="5669280.0" y="1218895.2"/>
+            <a:ext cx="45720.0" cy="20574.0"/>
           </a:xfrm>
           <a:prstGeom prst="line">
             <a:avLst/>
@@ -4049,8 +4049,8 @@
         </p:nvCxnSpPr>
         <p:spPr>
           <a:xfrm flipV="1">
-            <a:off x="6858000.0" y="948690.0"/>
-            <a:ext cx="91440.0" cy="91440.0"/>
+            <a:off x="5715000.0" y="1199235.6"/>
+            <a:ext cx="45720.0" cy="19659.59999999986"/>
           </a:xfrm>
           <a:prstGeom prst="line">
             <a:avLst/>
@@ -4084,8 +4084,8 @@
         </p:nvCxnSpPr>
         <p:spPr>
           <a:xfrm flipV="1">
-            <a:off x="6949440.0" y="834390.0"/>
-            <a:ext cx="91440.0" cy="114300.0"/>
+            <a:off x="5760720.0" y="1179576.0"/>
+            <a:ext cx="45720.0" cy="19659.600000000093"/>
           </a:xfrm>
           <a:prstGeom prst="line">
             <a:avLst/>
@@ -4119,8 +4119,8 @@
         </p:nvCxnSpPr>
         <p:spPr>
           <a:xfrm flipV="1">
-            <a:off x="7040880.0" y="720090.0"/>
-            <a:ext cx="91440.0" cy="114300.0"/>
+            <a:off x="5806440.0" y="1159916.4"/>
+            <a:ext cx="45720.0" cy="19659.600000000093"/>
           </a:xfrm>
           <a:prstGeom prst="line">
             <a:avLst/>
@@ -4154,42 +4154,1092 @@
         </p:nvCxnSpPr>
         <p:spPr>
           <a:xfrm flipV="1">
-            <a:off x="7132320.0" y="605790.0"/>
-            <a:ext cx="91440.0" cy="114300.0"/>
-          </a:xfrm>
-          <a:prstGeom prst="line">
-            <a:avLst/>
-          </a:prstGeom>
-          <a:ln w="25400">
-            <a:solidFill>
-              <a:srgbClr val="00C8FF"/>
-            </a:solidFill>
-          </a:ln>
-        </p:spPr>
-        <p:style>
-          <a:lnRef idx="2">
-            <a:schemeClr val="accent1"/>
-          </a:lnRef>
-          <a:fillRef idx="0">
-            <a:schemeClr val="accent1"/>
-          </a:fillRef>
-          <a:effectRef idx="1">
-            <a:schemeClr val="accent1"/>
-          </a:effectRef>
-          <a:fontRef idx="minor">
-            <a:schemeClr val="tx1"/>
-          </a:fontRef>
-        </p:style>
-      </p:cxnSp>
-      <p:sp>
-        <p:nvSpPr>
-          <p:cNvPr id="33" name="Oval 32"/>
+            <a:off x="5852160.0" y="1141171.2"/>
+            <a:ext cx="45720.0" cy="18745.199999999953"/>
+          </a:xfrm>
+          <a:prstGeom prst="line">
+            <a:avLst/>
+          </a:prstGeom>
+          <a:ln w="25400">
+            <a:solidFill>
+              <a:srgbClr val="00C8FF"/>
+            </a:solidFill>
+          </a:ln>
+        </p:spPr>
+        <p:style>
+          <a:lnRef idx="2">
+            <a:schemeClr val="accent1"/>
+          </a:lnRef>
+          <a:fillRef idx="0">
+            <a:schemeClr val="accent1"/>
+          </a:fillRef>
+          <a:effectRef idx="1">
+            <a:schemeClr val="accent1"/>
+          </a:effectRef>
+          <a:fontRef idx="minor">
+            <a:schemeClr val="tx1"/>
+          </a:fontRef>
+        </p:style>
+      </p:cxnSp>
+      <p:cxnSp>
+        <p:nvCxnSpPr>
+          <p:cNvPr id="33" name="Connector 32"/>
+          <p:cNvCxnSpPr/>
+          <p:nvPr/>
+        </p:nvCxnSpPr>
+        <p:spPr>
+          <a:xfrm flipV="1">
+            <a:off x="5943600.0" y="1296162.0"/>
+            <a:ext cx="45720.0" cy="132588.0"/>
+          </a:xfrm>
+          <a:prstGeom prst="line">
+            <a:avLst/>
+          </a:prstGeom>
+          <a:ln w="25400">
+            <a:solidFill>
+              <a:srgbClr val="00C8FF"/>
+            </a:solidFill>
+          </a:ln>
+        </p:spPr>
+        <p:style>
+          <a:lnRef idx="2">
+            <a:schemeClr val="accent1"/>
+          </a:lnRef>
+          <a:fillRef idx="0">
+            <a:schemeClr val="accent1"/>
+          </a:fillRef>
+          <a:effectRef idx="1">
+            <a:schemeClr val="accent1"/>
+          </a:effectRef>
+          <a:fontRef idx="minor">
+            <a:schemeClr val="tx1"/>
+          </a:fontRef>
+        </p:style>
+      </p:cxnSp>
+      <p:cxnSp>
+        <p:nvCxnSpPr>
+          <p:cNvPr id="34" name="Connector 33"/>
+          <p:cNvCxnSpPr/>
+          <p:nvPr/>
+        </p:nvCxnSpPr>
+        <p:spPr>
+          <a:xfrm flipV="1">
+            <a:off x="5989320.0" y="1241298.0"/>
+            <a:ext cx="45720.0" cy="54864.0"/>
+          </a:xfrm>
+          <a:prstGeom prst="line">
+            <a:avLst/>
+          </a:prstGeom>
+          <a:ln w="25400">
+            <a:solidFill>
+              <a:srgbClr val="00C8FF"/>
+            </a:solidFill>
+          </a:ln>
+        </p:spPr>
+        <p:style>
+          <a:lnRef idx="2">
+            <a:schemeClr val="accent1"/>
+          </a:lnRef>
+          <a:fillRef idx="0">
+            <a:schemeClr val="accent1"/>
+          </a:fillRef>
+          <a:effectRef idx="1">
+            <a:schemeClr val="accent1"/>
+          </a:effectRef>
+          <a:fontRef idx="minor">
+            <a:schemeClr val="tx1"/>
+          </a:fontRef>
+        </p:style>
+      </p:cxnSp>
+      <p:cxnSp>
+        <p:nvCxnSpPr>
+          <p:cNvPr id="35" name="Connector 34"/>
+          <p:cNvCxnSpPr/>
+          <p:nvPr/>
+        </p:nvCxnSpPr>
+        <p:spPr>
+          <a:xfrm flipV="1">
+            <a:off x="6035040.0" y="1195578.0"/>
+            <a:ext cx="45720.0" cy="45720.0"/>
+          </a:xfrm>
+          <a:prstGeom prst="line">
+            <a:avLst/>
+          </a:prstGeom>
+          <a:ln w="25400">
+            <a:solidFill>
+              <a:srgbClr val="00C8FF"/>
+            </a:solidFill>
+          </a:ln>
+        </p:spPr>
+        <p:style>
+          <a:lnRef idx="2">
+            <a:schemeClr val="accent1"/>
+          </a:lnRef>
+          <a:fillRef idx="0">
+            <a:schemeClr val="accent1"/>
+          </a:fillRef>
+          <a:effectRef idx="1">
+            <a:schemeClr val="accent1"/>
+          </a:effectRef>
+          <a:fontRef idx="minor">
+            <a:schemeClr val="tx1"/>
+          </a:fontRef>
+        </p:style>
+      </p:cxnSp>
+      <p:cxnSp>
+        <p:nvCxnSpPr>
+          <p:cNvPr id="36" name="Connector 35"/>
+          <p:cNvCxnSpPr/>
+          <p:nvPr/>
+        </p:nvCxnSpPr>
+        <p:spPr>
+          <a:xfrm flipV="1">
+            <a:off x="6080760.0" y="1158544.7999999998"/>
+            <a:ext cx="45720.0" cy="37033.200000000186"/>
+          </a:xfrm>
+          <a:prstGeom prst="line">
+            <a:avLst/>
+          </a:prstGeom>
+          <a:ln w="25400">
+            <a:solidFill>
+              <a:srgbClr val="00C8FF"/>
+            </a:solidFill>
+          </a:ln>
+        </p:spPr>
+        <p:style>
+          <a:lnRef idx="2">
+            <a:schemeClr val="accent1"/>
+          </a:lnRef>
+          <a:fillRef idx="0">
+            <a:schemeClr val="accent1"/>
+          </a:fillRef>
+          <a:effectRef idx="1">
+            <a:schemeClr val="accent1"/>
+          </a:effectRef>
+          <a:fontRef idx="minor">
+            <a:schemeClr val="tx1"/>
+          </a:fontRef>
+        </p:style>
+      </p:cxnSp>
+      <p:cxnSp>
+        <p:nvCxnSpPr>
+          <p:cNvPr id="37" name="Connector 36"/>
+          <p:cNvCxnSpPr/>
+          <p:nvPr/>
+        </p:nvCxnSpPr>
+        <p:spPr>
+          <a:xfrm flipV="1">
+            <a:off x="6126480.0" y="1126540.8"/>
+            <a:ext cx="45720.0" cy="32003.999999999767"/>
+          </a:xfrm>
+          <a:prstGeom prst="line">
+            <a:avLst/>
+          </a:prstGeom>
+          <a:ln w="25400">
+            <a:solidFill>
+              <a:srgbClr val="00C8FF"/>
+            </a:solidFill>
+          </a:ln>
+        </p:spPr>
+        <p:style>
+          <a:lnRef idx="2">
+            <a:schemeClr val="accent1"/>
+          </a:lnRef>
+          <a:fillRef idx="0">
+            <a:schemeClr val="accent1"/>
+          </a:fillRef>
+          <a:effectRef idx="1">
+            <a:schemeClr val="accent1"/>
+          </a:effectRef>
+          <a:fontRef idx="minor">
+            <a:schemeClr val="tx1"/>
+          </a:fontRef>
+        </p:style>
+      </p:cxnSp>
+      <p:cxnSp>
+        <p:nvCxnSpPr>
+          <p:cNvPr id="38" name="Connector 37"/>
+          <p:cNvCxnSpPr/>
+          <p:nvPr/>
+        </p:nvCxnSpPr>
+        <p:spPr>
+          <a:xfrm flipV="1">
+            <a:off x="6172200.0" y="1097737.2"/>
+            <a:ext cx="45720.0" cy="28803.600000000093"/>
+          </a:xfrm>
+          <a:prstGeom prst="line">
+            <a:avLst/>
+          </a:prstGeom>
+          <a:ln w="25400">
+            <a:solidFill>
+              <a:srgbClr val="00C8FF"/>
+            </a:solidFill>
+          </a:ln>
+        </p:spPr>
+        <p:style>
+          <a:lnRef idx="2">
+            <a:schemeClr val="accent1"/>
+          </a:lnRef>
+          <a:fillRef idx="0">
+            <a:schemeClr val="accent1"/>
+          </a:fillRef>
+          <a:effectRef idx="1">
+            <a:schemeClr val="accent1"/>
+          </a:effectRef>
+          <a:fontRef idx="minor">
+            <a:schemeClr val="tx1"/>
+          </a:fontRef>
+        </p:style>
+      </p:cxnSp>
+      <p:cxnSp>
+        <p:nvCxnSpPr>
+          <p:cNvPr id="39" name="Connector 38"/>
+          <p:cNvCxnSpPr/>
+          <p:nvPr/>
+        </p:nvCxnSpPr>
+        <p:spPr>
+          <a:xfrm flipV="1">
+            <a:off x="6217920.0" y="1071219.6"/>
+            <a:ext cx="45720.0" cy="26517.59999999986"/>
+          </a:xfrm>
+          <a:prstGeom prst="line">
+            <a:avLst/>
+          </a:prstGeom>
+          <a:ln w="25400">
+            <a:solidFill>
+              <a:srgbClr val="00C8FF"/>
+            </a:solidFill>
+          </a:ln>
+        </p:spPr>
+        <p:style>
+          <a:lnRef idx="2">
+            <a:schemeClr val="accent1"/>
+          </a:lnRef>
+          <a:fillRef idx="0">
+            <a:schemeClr val="accent1"/>
+          </a:fillRef>
+          <a:effectRef idx="1">
+            <a:schemeClr val="accent1"/>
+          </a:effectRef>
+          <a:fontRef idx="minor">
+            <a:schemeClr val="tx1"/>
+          </a:fontRef>
+        </p:style>
+      </p:cxnSp>
+      <p:cxnSp>
+        <p:nvCxnSpPr>
+          <p:cNvPr id="40" name="Connector 39"/>
+          <p:cNvCxnSpPr/>
+          <p:nvPr/>
+        </p:nvCxnSpPr>
+        <p:spPr>
+          <a:xfrm flipV="1">
+            <a:off x="6263640.0" y="1046988.0"/>
+            <a:ext cx="45720.0" cy="24231.600000000093"/>
+          </a:xfrm>
+          <a:prstGeom prst="line">
+            <a:avLst/>
+          </a:prstGeom>
+          <a:ln w="25400">
+            <a:solidFill>
+              <a:srgbClr val="00C8FF"/>
+            </a:solidFill>
+          </a:ln>
+        </p:spPr>
+        <p:style>
+          <a:lnRef idx="2">
+            <a:schemeClr val="accent1"/>
+          </a:lnRef>
+          <a:fillRef idx="0">
+            <a:schemeClr val="accent1"/>
+          </a:fillRef>
+          <a:effectRef idx="1">
+            <a:schemeClr val="accent1"/>
+          </a:effectRef>
+          <a:fontRef idx="minor">
+            <a:schemeClr val="tx1"/>
+          </a:fontRef>
+        </p:style>
+      </p:cxnSp>
+      <p:cxnSp>
+        <p:nvCxnSpPr>
+          <p:cNvPr id="41" name="Connector 40"/>
+          <p:cNvCxnSpPr/>
+          <p:nvPr/>
+        </p:nvCxnSpPr>
+        <p:spPr>
+          <a:xfrm flipV="1">
+            <a:off x="6309360.0" y="1024128.0"/>
+            <a:ext cx="45720.0" cy="22860.0"/>
+          </a:xfrm>
+          <a:prstGeom prst="line">
+            <a:avLst/>
+          </a:prstGeom>
+          <a:ln w="25400">
+            <a:solidFill>
+              <a:srgbClr val="00C8FF"/>
+            </a:solidFill>
+          </a:ln>
+        </p:spPr>
+        <p:style>
+          <a:lnRef idx="2">
+            <a:schemeClr val="accent1"/>
+          </a:lnRef>
+          <a:fillRef idx="0">
+            <a:schemeClr val="accent1"/>
+          </a:fillRef>
+          <a:effectRef idx="1">
+            <a:schemeClr val="accent1"/>
+          </a:effectRef>
+          <a:fontRef idx="minor">
+            <a:schemeClr val="tx1"/>
+          </a:fontRef>
+        </p:style>
+      </p:cxnSp>
+      <p:cxnSp>
+        <p:nvCxnSpPr>
+          <p:cNvPr id="42" name="Connector 41"/>
+          <p:cNvCxnSpPr/>
+          <p:nvPr/>
+        </p:nvCxnSpPr>
+        <p:spPr>
+          <a:xfrm flipV="1">
+            <a:off x="6355080.0" y="1002639.6000000001"/>
+            <a:ext cx="45720.0" cy="21488.399999999907"/>
+          </a:xfrm>
+          <a:prstGeom prst="line">
+            <a:avLst/>
+          </a:prstGeom>
+          <a:ln w="25400">
+            <a:solidFill>
+              <a:srgbClr val="00C8FF"/>
+            </a:solidFill>
+          </a:ln>
+        </p:spPr>
+        <p:style>
+          <a:lnRef idx="2">
+            <a:schemeClr val="accent1"/>
+          </a:lnRef>
+          <a:fillRef idx="0">
+            <a:schemeClr val="accent1"/>
+          </a:fillRef>
+          <a:effectRef idx="1">
+            <a:schemeClr val="accent1"/>
+          </a:effectRef>
+          <a:fontRef idx="minor">
+            <a:schemeClr val="tx1"/>
+          </a:fontRef>
+        </p:style>
+      </p:cxnSp>
+      <p:cxnSp>
+        <p:nvCxnSpPr>
+          <p:cNvPr id="43" name="Connector 42"/>
+          <p:cNvCxnSpPr/>
+          <p:nvPr/>
+        </p:nvCxnSpPr>
+        <p:spPr>
+          <a:xfrm flipV="1">
+            <a:off x="6400800.0" y="982522.8"/>
+            <a:ext cx="45720.0" cy="20116.800000000047"/>
+          </a:xfrm>
+          <a:prstGeom prst="line">
+            <a:avLst/>
+          </a:prstGeom>
+          <a:ln w="25400">
+            <a:solidFill>
+              <a:srgbClr val="00C8FF"/>
+            </a:solidFill>
+          </a:ln>
+        </p:spPr>
+        <p:style>
+          <a:lnRef idx="2">
+            <a:schemeClr val="accent1"/>
+          </a:lnRef>
+          <a:fillRef idx="0">
+            <a:schemeClr val="accent1"/>
+          </a:fillRef>
+          <a:effectRef idx="1">
+            <a:schemeClr val="accent1"/>
+          </a:effectRef>
+          <a:fontRef idx="minor">
+            <a:schemeClr val="tx1"/>
+          </a:fontRef>
+        </p:style>
+      </p:cxnSp>
+      <p:cxnSp>
+        <p:nvCxnSpPr>
+          <p:cNvPr id="44" name="Connector 43"/>
+          <p:cNvCxnSpPr/>
+          <p:nvPr/>
+        </p:nvCxnSpPr>
+        <p:spPr>
+          <a:xfrm flipV="1">
+            <a:off x="6446520.0" y="963320.4000000001"/>
+            <a:ext cx="45720.0" cy="19202.399999999907"/>
+          </a:xfrm>
+          <a:prstGeom prst="line">
+            <a:avLst/>
+          </a:prstGeom>
+          <a:ln w="25400">
+            <a:solidFill>
+              <a:srgbClr val="00C8FF"/>
+            </a:solidFill>
+          </a:ln>
+        </p:spPr>
+        <p:style>
+          <a:lnRef idx="2">
+            <a:schemeClr val="accent1"/>
+          </a:lnRef>
+          <a:fillRef idx="0">
+            <a:schemeClr val="accent1"/>
+          </a:fillRef>
+          <a:effectRef idx="1">
+            <a:schemeClr val="accent1"/>
+          </a:effectRef>
+          <a:fontRef idx="minor">
+            <a:schemeClr val="tx1"/>
+          </a:fontRef>
+        </p:style>
+      </p:cxnSp>
+      <p:cxnSp>
+        <p:nvCxnSpPr>
+          <p:cNvPr id="45" name="Connector 44"/>
+          <p:cNvCxnSpPr/>
+          <p:nvPr/>
+        </p:nvCxnSpPr>
+        <p:spPr>
+          <a:xfrm flipV="1">
+            <a:off x="6492240.0" y="944575.2"/>
+            <a:ext cx="45720.0" cy="18745.200000000186"/>
+          </a:xfrm>
+          <a:prstGeom prst="line">
+            <a:avLst/>
+          </a:prstGeom>
+          <a:ln w="25400">
+            <a:solidFill>
+              <a:srgbClr val="00C8FF"/>
+            </a:solidFill>
+          </a:ln>
+        </p:spPr>
+        <p:style>
+          <a:lnRef idx="2">
+            <a:schemeClr val="accent1"/>
+          </a:lnRef>
+          <a:fillRef idx="0">
+            <a:schemeClr val="accent1"/>
+          </a:fillRef>
+          <a:effectRef idx="1">
+            <a:schemeClr val="accent1"/>
+          </a:effectRef>
+          <a:fontRef idx="minor">
+            <a:schemeClr val="tx1"/>
+          </a:fontRef>
+        </p:style>
+      </p:cxnSp>
+      <p:cxnSp>
+        <p:nvCxnSpPr>
+          <p:cNvPr id="46" name="Connector 45"/>
+          <p:cNvCxnSpPr/>
+          <p:nvPr/>
+        </p:nvCxnSpPr>
+        <p:spPr>
+          <a:xfrm flipV="1">
+            <a:off x="6537960.0" y="927201.6000000001"/>
+            <a:ext cx="45720.0" cy="17373.59999999986"/>
+          </a:xfrm>
+          <a:prstGeom prst="line">
+            <a:avLst/>
+          </a:prstGeom>
+          <a:ln w="25400">
+            <a:solidFill>
+              <a:srgbClr val="00C8FF"/>
+            </a:solidFill>
+          </a:ln>
+        </p:spPr>
+        <p:style>
+          <a:lnRef idx="2">
+            <a:schemeClr val="accent1"/>
+          </a:lnRef>
+          <a:fillRef idx="0">
+            <a:schemeClr val="accent1"/>
+          </a:fillRef>
+          <a:effectRef idx="1">
+            <a:schemeClr val="accent1"/>
+          </a:effectRef>
+          <a:fontRef idx="minor">
+            <a:schemeClr val="tx1"/>
+          </a:fontRef>
+        </p:style>
+      </p:cxnSp>
+      <p:cxnSp>
+        <p:nvCxnSpPr>
+          <p:cNvPr id="47" name="Connector 46"/>
+          <p:cNvCxnSpPr/>
+          <p:nvPr/>
+        </p:nvCxnSpPr>
+        <p:spPr>
+          <a:xfrm flipV="1">
+            <a:off x="6583680.0" y="909828.0"/>
+            <a:ext cx="45720.0" cy="17373.600000000093"/>
+          </a:xfrm>
+          <a:prstGeom prst="line">
+            <a:avLst/>
+          </a:prstGeom>
+          <a:ln w="25400">
+            <a:solidFill>
+              <a:srgbClr val="00C8FF"/>
+            </a:solidFill>
+          </a:ln>
+        </p:spPr>
+        <p:style>
+          <a:lnRef idx="2">
+            <a:schemeClr val="accent1"/>
+          </a:lnRef>
+          <a:fillRef idx="0">
+            <a:schemeClr val="accent1"/>
+          </a:fillRef>
+          <a:effectRef idx="1">
+            <a:schemeClr val="accent1"/>
+          </a:effectRef>
+          <a:fontRef idx="minor">
+            <a:schemeClr val="tx1"/>
+          </a:fontRef>
+        </p:style>
+      </p:cxnSp>
+      <p:cxnSp>
+        <p:nvCxnSpPr>
+          <p:cNvPr id="48" name="Connector 47"/>
+          <p:cNvCxnSpPr/>
+          <p:nvPr/>
+        </p:nvCxnSpPr>
+        <p:spPr>
+          <a:xfrm flipV="1">
+            <a:off x="6629400.0" y="893368.8"/>
+            <a:ext cx="45720.0" cy="16459.199999999953"/>
+          </a:xfrm>
+          <a:prstGeom prst="line">
+            <a:avLst/>
+          </a:prstGeom>
+          <a:ln w="25400">
+            <a:solidFill>
+              <a:srgbClr val="00C8FF"/>
+            </a:solidFill>
+          </a:ln>
+        </p:spPr>
+        <p:style>
+          <a:lnRef idx="2">
+            <a:schemeClr val="accent1"/>
+          </a:lnRef>
+          <a:fillRef idx="0">
+            <a:schemeClr val="accent1"/>
+          </a:fillRef>
+          <a:effectRef idx="1">
+            <a:schemeClr val="accent1"/>
+          </a:effectRef>
+          <a:fontRef idx="minor">
+            <a:schemeClr val="tx1"/>
+          </a:fontRef>
+        </p:style>
+      </p:cxnSp>
+      <p:cxnSp>
+        <p:nvCxnSpPr>
+          <p:cNvPr id="49" name="Connector 48"/>
+          <p:cNvCxnSpPr/>
+          <p:nvPr/>
+        </p:nvCxnSpPr>
+        <p:spPr>
+          <a:xfrm flipV="1">
+            <a:off x="6675120.0" y="877366.8"/>
+            <a:ext cx="45720.0" cy="16002.0"/>
+          </a:xfrm>
+          <a:prstGeom prst="line">
+            <a:avLst/>
+          </a:prstGeom>
+          <a:ln w="25400">
+            <a:solidFill>
+              <a:srgbClr val="00C8FF"/>
+            </a:solidFill>
+          </a:ln>
+        </p:spPr>
+        <p:style>
+          <a:lnRef idx="2">
+            <a:schemeClr val="accent1"/>
+          </a:lnRef>
+          <a:fillRef idx="0">
+            <a:schemeClr val="accent1"/>
+          </a:fillRef>
+          <a:effectRef idx="1">
+            <a:schemeClr val="accent1"/>
+          </a:effectRef>
+          <a:fontRef idx="minor">
+            <a:schemeClr val="tx1"/>
+          </a:fontRef>
+        </p:style>
+      </p:cxnSp>
+      <p:cxnSp>
+        <p:nvCxnSpPr>
+          <p:cNvPr id="50" name="Connector 49"/>
+          <p:cNvCxnSpPr/>
+          <p:nvPr/>
+        </p:nvCxnSpPr>
+        <p:spPr>
+          <a:xfrm flipV="1">
+            <a:off x="6720840.0" y="861822.0"/>
+            <a:ext cx="45720.0" cy="15544.800000000047"/>
+          </a:xfrm>
+          <a:prstGeom prst="line">
+            <a:avLst/>
+          </a:prstGeom>
+          <a:ln w="25400">
+            <a:solidFill>
+              <a:srgbClr val="00C8FF"/>
+            </a:solidFill>
+          </a:ln>
+        </p:spPr>
+        <p:style>
+          <a:lnRef idx="2">
+            <a:schemeClr val="accent1"/>
+          </a:lnRef>
+          <a:fillRef idx="0">
+            <a:schemeClr val="accent1"/>
+          </a:fillRef>
+          <a:effectRef idx="1">
+            <a:schemeClr val="accent1"/>
+          </a:effectRef>
+          <a:fontRef idx="minor">
+            <a:schemeClr val="tx1"/>
+          </a:fontRef>
+        </p:style>
+      </p:cxnSp>
+      <p:cxnSp>
+        <p:nvCxnSpPr>
+          <p:cNvPr id="51" name="Connector 50"/>
+          <p:cNvCxnSpPr/>
+          <p:nvPr/>
+        </p:nvCxnSpPr>
+        <p:spPr>
+          <a:xfrm flipV="1">
+            <a:off x="6766560.0" y="847191.6000000001"/>
+            <a:ext cx="45720.0" cy="14630.399999999907"/>
+          </a:xfrm>
+          <a:prstGeom prst="line">
+            <a:avLst/>
+          </a:prstGeom>
+          <a:ln w="25400">
+            <a:solidFill>
+              <a:srgbClr val="00C8FF"/>
+            </a:solidFill>
+          </a:ln>
+        </p:spPr>
+        <p:style>
+          <a:lnRef idx="2">
+            <a:schemeClr val="accent1"/>
+          </a:lnRef>
+          <a:fillRef idx="0">
+            <a:schemeClr val="accent1"/>
+          </a:fillRef>
+          <a:effectRef idx="1">
+            <a:schemeClr val="accent1"/>
+          </a:effectRef>
+          <a:fontRef idx="minor">
+            <a:schemeClr val="tx1"/>
+          </a:fontRef>
+        </p:style>
+      </p:cxnSp>
+      <p:cxnSp>
+        <p:nvCxnSpPr>
+          <p:cNvPr id="52" name="Connector 51"/>
+          <p:cNvCxnSpPr/>
+          <p:nvPr/>
+        </p:nvCxnSpPr>
+        <p:spPr>
+          <a:xfrm flipV="1">
+            <a:off x="6812280.0" y="832561.2000000002"/>
+            <a:ext cx="45720.0" cy="14630.399999999907"/>
+          </a:xfrm>
+          <a:prstGeom prst="line">
+            <a:avLst/>
+          </a:prstGeom>
+          <a:ln w="25400">
+            <a:solidFill>
+              <a:srgbClr val="00C8FF"/>
+            </a:solidFill>
+          </a:ln>
+        </p:spPr>
+        <p:style>
+          <a:lnRef idx="2">
+            <a:schemeClr val="accent1"/>
+          </a:lnRef>
+          <a:fillRef idx="0">
+            <a:schemeClr val="accent1"/>
+          </a:fillRef>
+          <a:effectRef idx="1">
+            <a:schemeClr val="accent1"/>
+          </a:effectRef>
+          <a:fontRef idx="minor">
+            <a:schemeClr val="tx1"/>
+          </a:fontRef>
+        </p:style>
+      </p:cxnSp>
+      <p:cxnSp>
+        <p:nvCxnSpPr>
+          <p:cNvPr id="53" name="Connector 52"/>
+          <p:cNvCxnSpPr/>
+          <p:nvPr/>
+        </p:nvCxnSpPr>
+        <p:spPr>
+          <a:xfrm flipV="1">
+            <a:off x="6858000.0" y="818388.0"/>
+            <a:ext cx="45720.0" cy="14173.200000000186"/>
+          </a:xfrm>
+          <a:prstGeom prst="line">
+            <a:avLst/>
+          </a:prstGeom>
+          <a:ln w="25400">
+            <a:solidFill>
+              <a:srgbClr val="00C8FF"/>
+            </a:solidFill>
+          </a:ln>
+        </p:spPr>
+        <p:style>
+          <a:lnRef idx="2">
+            <a:schemeClr val="accent1"/>
+          </a:lnRef>
+          <a:fillRef idx="0">
+            <a:schemeClr val="accent1"/>
+          </a:fillRef>
+          <a:effectRef idx="1">
+            <a:schemeClr val="accent1"/>
+          </a:effectRef>
+          <a:fontRef idx="minor">
+            <a:schemeClr val="tx1"/>
+          </a:fontRef>
+        </p:style>
+      </p:cxnSp>
+      <p:cxnSp>
+        <p:nvCxnSpPr>
+          <p:cNvPr id="54" name="Connector 53"/>
+          <p:cNvCxnSpPr/>
+          <p:nvPr/>
+        </p:nvCxnSpPr>
+        <p:spPr>
+          <a:xfrm flipV="1">
+            <a:off x="6903720.0" y="804672.0"/>
+            <a:ext cx="45720.0" cy="13716.0"/>
+          </a:xfrm>
+          <a:prstGeom prst="line">
+            <a:avLst/>
+          </a:prstGeom>
+          <a:ln w="25400">
+            <a:solidFill>
+              <a:srgbClr val="00C8FF"/>
+            </a:solidFill>
+          </a:ln>
+        </p:spPr>
+        <p:style>
+          <a:lnRef idx="2">
+            <a:schemeClr val="accent1"/>
+          </a:lnRef>
+          <a:fillRef idx="0">
+            <a:schemeClr val="accent1"/>
+          </a:fillRef>
+          <a:effectRef idx="1">
+            <a:schemeClr val="accent1"/>
+          </a:effectRef>
+          <a:fontRef idx="minor">
+            <a:schemeClr val="tx1"/>
+          </a:fontRef>
+        </p:style>
+      </p:cxnSp>
+      <p:cxnSp>
+        <p:nvCxnSpPr>
+          <p:cNvPr id="55" name="Connector 54"/>
+          <p:cNvCxnSpPr/>
+          <p:nvPr/>
+        </p:nvCxnSpPr>
+        <p:spPr>
+          <a:xfrm flipV="1">
+            <a:off x="6949440.0" y="791413.2"/>
+            <a:ext cx="45720.0" cy="13258.800000000047"/>
+          </a:xfrm>
+          <a:prstGeom prst="line">
+            <a:avLst/>
+          </a:prstGeom>
+          <a:ln w="25400">
+            <a:solidFill>
+              <a:srgbClr val="00C8FF"/>
+            </a:solidFill>
+          </a:ln>
+        </p:spPr>
+        <p:style>
+          <a:lnRef idx="2">
+            <a:schemeClr val="accent1"/>
+          </a:lnRef>
+          <a:fillRef idx="0">
+            <a:schemeClr val="accent1"/>
+          </a:fillRef>
+          <a:effectRef idx="1">
+            <a:schemeClr val="accent1"/>
+          </a:effectRef>
+          <a:fontRef idx="minor">
+            <a:schemeClr val="tx1"/>
+          </a:fontRef>
+        </p:style>
+      </p:cxnSp>
+      <p:cxnSp>
+        <p:nvCxnSpPr>
+          <p:cNvPr id="56" name="Connector 55"/>
+          <p:cNvCxnSpPr/>
+          <p:nvPr/>
+        </p:nvCxnSpPr>
+        <p:spPr>
+          <a:xfrm flipV="1">
+            <a:off x="6995160.0" y="778611.5999999999"/>
+            <a:ext cx="45720.0" cy="12801.600000000093"/>
+          </a:xfrm>
+          <a:prstGeom prst="line">
+            <a:avLst/>
+          </a:prstGeom>
+          <a:ln w="25400">
+            <a:solidFill>
+              <a:srgbClr val="00C8FF"/>
+            </a:solidFill>
+          </a:ln>
+        </p:spPr>
+        <p:style>
+          <a:lnRef idx="2">
+            <a:schemeClr val="accent1"/>
+          </a:lnRef>
+          <a:fillRef idx="0">
+            <a:schemeClr val="accent1"/>
+          </a:fillRef>
+          <a:effectRef idx="1">
+            <a:schemeClr val="accent1"/>
+          </a:effectRef>
+          <a:fontRef idx="minor">
+            <a:schemeClr val="tx1"/>
+          </a:fontRef>
+        </p:style>
+      </p:cxnSp>
+      <p:cxnSp>
+        <p:nvCxnSpPr>
+          <p:cNvPr id="57" name="Connector 56"/>
+          <p:cNvCxnSpPr/>
+          <p:nvPr/>
+        </p:nvCxnSpPr>
+        <p:spPr>
+          <a:xfrm flipV="1">
+            <a:off x="7040880.0" y="765810.0"/>
+            <a:ext cx="45720.0" cy="12801.59999999986"/>
+          </a:xfrm>
+          <a:prstGeom prst="line">
+            <a:avLst/>
+          </a:prstGeom>
+          <a:ln w="25400">
+            <a:solidFill>
+              <a:srgbClr val="00C8FF"/>
+            </a:solidFill>
+          </a:ln>
+        </p:spPr>
+        <p:style>
+          <a:lnRef idx="2">
+            <a:schemeClr val="accent1"/>
+          </a:lnRef>
+          <a:fillRef idx="0">
+            <a:schemeClr val="accent1"/>
+          </a:fillRef>
+          <a:effectRef idx="1">
+            <a:schemeClr val="accent1"/>
+          </a:effectRef>
+          <a:fontRef idx="minor">
+            <a:schemeClr val="tx1"/>
+          </a:fontRef>
+        </p:style>
+      </p:cxnSp>
+      <p:cxnSp>
+        <p:nvCxnSpPr>
+          <p:cNvPr id="58" name="Connector 57"/>
+          <p:cNvCxnSpPr/>
+          <p:nvPr/>
+        </p:nvCxnSpPr>
+        <p:spPr>
+          <a:xfrm flipV="1">
+            <a:off x="7086600.0" y="753465.6000000001"/>
+            <a:ext cx="45720.0" cy="12344.399999999907"/>
+          </a:xfrm>
+          <a:prstGeom prst="line">
+            <a:avLst/>
+          </a:prstGeom>
+          <a:ln w="25400">
+            <a:solidFill>
+              <a:srgbClr val="00C8FF"/>
+            </a:solidFill>
+          </a:ln>
+        </p:spPr>
+        <p:style>
+          <a:lnRef idx="2">
+            <a:schemeClr val="accent1"/>
+          </a:lnRef>
+          <a:fillRef idx="0">
+            <a:schemeClr val="accent1"/>
+          </a:fillRef>
+          <a:effectRef idx="1">
+            <a:schemeClr val="accent1"/>
+          </a:effectRef>
+          <a:fontRef idx="minor">
+            <a:schemeClr val="tx1"/>
+          </a:fontRef>
+        </p:style>
+      </p:cxnSp>
+      <p:cxnSp>
+        <p:nvCxnSpPr>
+          <p:cNvPr id="59" name="Connector 58"/>
+          <p:cNvCxnSpPr/>
+          <p:nvPr/>
+        </p:nvCxnSpPr>
+        <p:spPr>
+          <a:xfrm flipV="1">
+            <a:off x="7132320.0" y="741121.2000000002"/>
+            <a:ext cx="45720.0" cy="12344.399999999907"/>
+          </a:xfrm>
+          <a:prstGeom prst="line">
+            <a:avLst/>
+          </a:prstGeom>
+          <a:ln w="25400">
+            <a:solidFill>
+              <a:srgbClr val="00C8FF"/>
+            </a:solidFill>
+          </a:ln>
+        </p:spPr>
+        <p:style>
+          <a:lnRef idx="2">
+            <a:schemeClr val="accent1"/>
+          </a:lnRef>
+          <a:fillRef idx="0">
+            <a:schemeClr val="accent1"/>
+          </a:fillRef>
+          <a:effectRef idx="1">
+            <a:schemeClr val="accent1"/>
+          </a:effectRef>
+          <a:fontRef idx="minor">
+            <a:schemeClr val="tx1"/>
+          </a:fontRef>
+        </p:style>
+      </p:cxnSp>
+      <p:cxnSp>
+        <p:nvCxnSpPr>
+          <p:cNvPr id="60" name="Connector 59"/>
+          <p:cNvCxnSpPr/>
+          <p:nvPr/>
+        </p:nvCxnSpPr>
+        <p:spPr>
+          <a:xfrm flipV="1">
+            <a:off x="7178040.0" y="729234.0"/>
+            <a:ext cx="45720.0" cy="11887.200000000186"/>
+          </a:xfrm>
+          <a:prstGeom prst="line">
+            <a:avLst/>
+          </a:prstGeom>
+          <a:ln w="25400">
+            <a:solidFill>
+              <a:srgbClr val="00C8FF"/>
+            </a:solidFill>
+          </a:ln>
+        </p:spPr>
+        <p:style>
+          <a:lnRef idx="2">
+            <a:schemeClr val="accent1"/>
+          </a:lnRef>
+          <a:fillRef idx="0">
+            <a:schemeClr val="accent1"/>
+          </a:fillRef>
+          <a:effectRef idx="1">
+            <a:schemeClr val="accent1"/>
+          </a:effectRef>
+          <a:fontRef idx="minor">
+            <a:schemeClr val="tx1"/>
+          </a:fontRef>
+        </p:style>
+      </p:cxnSp>
+      <p:cxnSp>
+        <p:nvCxnSpPr>
+          <p:cNvPr id="61" name="Connector 60"/>
+          <p:cNvCxnSpPr/>
+          <p:nvPr/>
+        </p:nvCxnSpPr>
+        <p:spPr>
+          <a:xfrm flipV="1">
+            <a:off x="7223760.0" y="717804.0000000002"/>
+            <a:ext cx="45720.0" cy="11429.999999999767"/>
+          </a:xfrm>
+          <a:prstGeom prst="line">
+            <a:avLst/>
+          </a:prstGeom>
+          <a:ln w="25400">
+            <a:solidFill>
+              <a:srgbClr val="00C8FF"/>
+            </a:solidFill>
+          </a:ln>
+        </p:spPr>
+        <p:style>
+          <a:lnRef idx="2">
+            <a:schemeClr val="accent1"/>
+          </a:lnRef>
+          <a:fillRef idx="0">
+            <a:schemeClr val="accent1"/>
+          </a:fillRef>
+          <a:effectRef idx="1">
+            <a:schemeClr val="accent1"/>
+          </a:effectRef>
+          <a:fontRef idx="minor">
+            <a:schemeClr val="tx1"/>
+          </a:fontRef>
+        </p:style>
+      </p:cxnSp>
+      <p:cxnSp>
+        <p:nvCxnSpPr>
+          <p:cNvPr id="62" name="Connector 61"/>
+          <p:cNvCxnSpPr/>
+          <p:nvPr/>
+        </p:nvCxnSpPr>
+        <p:spPr>
+          <a:xfrm flipV="1">
+            <a:off x="7269480.0" y="706374.0"/>
+            <a:ext cx="45720.0" cy="11430.000000000233"/>
+          </a:xfrm>
+          <a:prstGeom prst="line">
+            <a:avLst/>
+          </a:prstGeom>
+          <a:ln w="25400">
+            <a:solidFill>
+              <a:srgbClr val="00C8FF"/>
+            </a:solidFill>
+          </a:ln>
+        </p:spPr>
+        <p:style>
+          <a:lnRef idx="2">
+            <a:schemeClr val="accent1"/>
+          </a:lnRef>
+          <a:fillRef idx="0">
+            <a:schemeClr val="accent1"/>
+          </a:fillRef>
+          <a:effectRef idx="1">
+            <a:schemeClr val="accent1"/>
+          </a:effectRef>
+          <a:fontRef idx="minor">
+            <a:schemeClr val="tx1"/>
+          </a:fontRef>
+        </p:style>
+      </p:cxnSp>
+      <p:sp>
+        <p:nvSpPr>
+          <p:cNvPr id="63" name="Oval 62"/>
           <p:cNvSpPr/>
           <p:nvPr/>
         </p:nvSpPr>
         <p:spPr>
           <a:xfrm>
-            <a:off x="5905500" y="1162050"/>
+            <a:off x="5905500" y="1070610"/>
             <a:ext cx="76200" cy="76200"/>
           </a:xfrm>
           <a:prstGeom prst="ellipse">
@@ -4226,13 +5276,13 @@
       </p:sp>
       <p:sp>
         <p:nvSpPr>
-          <p:cNvPr id="34" name="Oval 33"/>
+          <p:cNvPr id="64" name="Oval 63"/>
           <p:cNvSpPr/>
           <p:nvPr/>
         </p:nvSpPr>
         <p:spPr>
           <a:xfrm>
-            <a:off x="5905500" y="1619250"/>
+            <a:off x="5905500" y="1390650"/>
             <a:ext cx="76200" cy="76200"/>
           </a:xfrm>
           <a:prstGeom prst="ellipse">
@@ -4271,13 +5321,13 @@
       </p:sp>
       <p:sp>
         <p:nvSpPr>
-          <p:cNvPr id="35" name="TextBox 34"/>
+          <p:cNvPr id="65" name="TextBox 64"/>
           <p:cNvSpPr txBox="1"/>
           <p:nvPr/>
         </p:nvSpPr>
         <p:spPr>
           <a:xfrm>
-            <a:off x="5943600" y="2663190"/>
+            <a:off x="6629400" y="742950"/>
             <a:ext cx="635000" cy="254000"/>
           </a:xfrm>
           <a:prstGeom prst="rect">
@@ -4300,43 +5350,7 @@
               </a:defRPr>
             </a:pPr>
             <a:r>
-              <a:t>a</a:t>
-            </a:r>
-          </a:p>
-        </p:txBody>
-      </p:sp>
-      <p:sp>
-        <p:nvSpPr>
-          <p:cNvPr id="36" name="TextBox 35"/>
-          <p:cNvSpPr txBox="1"/>
-          <p:nvPr/>
-        </p:nvSpPr>
-        <p:spPr>
-          <a:xfrm>
-            <a:off x="6400800" y="742950"/>
-            <a:ext cx="635000" cy="254000"/>
-          </a:xfrm>
-          <a:prstGeom prst="rect">
-            <a:avLst/>
-          </a:prstGeom>
-          <a:noFill/>
-        </p:spPr>
-        <p:txBody>
-          <a:bodyPr wrap="none">
-            <a:spAutoFit/>
-          </a:bodyPr>
-          <a:lstStyle/>
-          <a:p>
-            <a:pPr>
-              <a:defRPr sz="1200">
-                <a:solidFill>
-                  <a:srgbClr val="FFFFFF"/>
-                </a:solidFill>
-                <a:latin typeface="Inter"/>
-              </a:defRPr>
-            </a:pPr>
-            <a:r>
-              <a:t>y=f(x)</a:t>
+              <a:t>$y=f(x)$</a:t>
             </a:r>
           </a:p>
         </p:txBody>

--- a/output/5.pptx
+++ b/output/5.pptx
@@ -3084,7 +3084,7 @@
     <p:bg>
       <p:bgPr>
         <a:solidFill>
-          <a:srgbClr val="1E1E23"/>
+          <a:srgbClr val="000000"/>
         </a:solidFill>
         <a:effectLst/>
       </p:bgPr>
@@ -3104,8 +3104,8 @@
         </p:nvCxnSpPr>
         <p:spPr>
           <a:xfrm>
-            <a:off x="4343400.0" y="2571750.0"/>
-            <a:ext cx="2514600.0" cy="0.0"/>
+            <a:off x="4572000.0" y="2571750.0"/>
+            <a:ext cx="2743200.0" cy="0.0"/>
           </a:xfrm>
           <a:prstGeom prst="line">
             <a:avLst/>
@@ -3139,8 +3139,8 @@
         </p:nvCxnSpPr>
         <p:spPr>
           <a:xfrm flipV="1">
-            <a:off x="4572000.0" y="742950.0"/>
-            <a:ext cx="0.0" cy="2057400.0"/>
+            <a:off x="4572000.0" y="285750.0"/>
+            <a:ext cx="0.0" cy="2286000.0"/>
           </a:xfrm>
           <a:prstGeom prst="line">
             <a:avLst/>
@@ -3174,8 +3174,8 @@
         </p:nvSpPr>
         <p:spPr>
           <a:xfrm>
-            <a:off x="4572000" y="1822902"/>
-            <a:ext cx="1143000" cy="428808"/>
+            <a:off x="4663440" y="717347"/>
+            <a:ext cx="1508760" cy="1400861"/>
           </a:xfrm>
           <a:custGeom>
             <a:avLst/>
@@ -3184,1204 +3184,1204 @@
             <a:cxnLst/>
             <a:rect l="l" t="t" r="r" b="b"/>
             <a:pathLst>
-              <a:path w="1143000" h="428808">
+              <a:path w="1508760" h="1400861">
                 <a:moveTo>
-                  <a:pt x="0" y="428808"/>
+                  <a:pt x="0" y="1400861"/>
                 </a:moveTo>
                 <a:lnTo>
-                  <a:pt x="3823" y="423466"/>
-                </a:lnTo>
-                <a:close/>
-                <a:lnTo>
-                  <a:pt x="7645" y="418880"/>
-                </a:lnTo>
-                <a:close/>
-                <a:lnTo>
-                  <a:pt x="11468" y="414918"/>
-                </a:lnTo>
-                <a:close/>
-                <a:lnTo>
-                  <a:pt x="15291" y="411445"/>
-                </a:lnTo>
-                <a:close/>
-                <a:lnTo>
-                  <a:pt x="19114" y="408329"/>
-                </a:lnTo>
-                <a:close/>
-                <a:lnTo>
-                  <a:pt x="22936" y="405434"/>
-                </a:lnTo>
-                <a:close/>
-                <a:lnTo>
-                  <a:pt x="26759" y="402652"/>
-                </a:lnTo>
-                <a:close/>
-                <a:lnTo>
-                  <a:pt x="30582" y="399963"/>
-                </a:lnTo>
-                <a:close/>
-                <a:lnTo>
-                  <a:pt x="34405" y="397368"/>
-                </a:lnTo>
-                <a:close/>
-                <a:lnTo>
-                  <a:pt x="38227" y="394864"/>
-                </a:lnTo>
-                <a:close/>
-                <a:lnTo>
-                  <a:pt x="42050" y="392440"/>
-                </a:lnTo>
-                <a:close/>
-                <a:lnTo>
-                  <a:pt x="45873" y="390081"/>
-                </a:lnTo>
-                <a:close/>
-                <a:lnTo>
-                  <a:pt x="49696" y="387774"/>
-                </a:lnTo>
-                <a:close/>
-                <a:lnTo>
-                  <a:pt x="53518" y="385514"/>
-                </a:lnTo>
-                <a:close/>
-                <a:lnTo>
-                  <a:pt x="57341" y="383298"/>
-                </a:lnTo>
-                <a:close/>
-                <a:lnTo>
-                  <a:pt x="61164" y="381124"/>
-                </a:lnTo>
-                <a:close/>
-                <a:lnTo>
-                  <a:pt x="64987" y="378986"/>
-                </a:lnTo>
-                <a:close/>
-                <a:lnTo>
-                  <a:pt x="68809" y="376882"/>
-                </a:lnTo>
-                <a:close/>
-                <a:lnTo>
-                  <a:pt x="72632" y="374807"/>
-                </a:lnTo>
-                <a:close/>
-                <a:lnTo>
-                  <a:pt x="76455" y="372760"/>
-                </a:lnTo>
-                <a:close/>
-                <a:lnTo>
-                  <a:pt x="80278" y="370740"/>
-                </a:lnTo>
-                <a:close/>
-                <a:lnTo>
-                  <a:pt x="84100" y="368747"/>
-                </a:lnTo>
-                <a:close/>
-                <a:lnTo>
-                  <a:pt x="87923" y="366777"/>
-                </a:lnTo>
-                <a:close/>
-                <a:lnTo>
-                  <a:pt x="91746" y="364828"/>
-                </a:lnTo>
-                <a:close/>
-                <a:lnTo>
-                  <a:pt x="95569" y="362898"/>
-                </a:lnTo>
-                <a:close/>
-                <a:lnTo>
-                  <a:pt x="99391" y="360988"/>
-                </a:lnTo>
-                <a:close/>
-                <a:lnTo>
-                  <a:pt x="103214" y="359099"/>
-                </a:lnTo>
-                <a:close/>
-                <a:lnTo>
-                  <a:pt x="107037" y="357231"/>
-                </a:lnTo>
-                <a:close/>
-                <a:lnTo>
-                  <a:pt x="110860" y="355383"/>
-                </a:lnTo>
-                <a:close/>
-                <a:lnTo>
-                  <a:pt x="114682" y="353554"/>
-                </a:lnTo>
-                <a:close/>
-                <a:lnTo>
-                  <a:pt x="118505" y="351739"/>
-                </a:lnTo>
-                <a:close/>
-                <a:lnTo>
-                  <a:pt x="122328" y="349937"/>
-                </a:lnTo>
-                <a:close/>
-                <a:lnTo>
-                  <a:pt x="126151" y="348144"/>
-                </a:lnTo>
-                <a:close/>
-                <a:lnTo>
-                  <a:pt x="129973" y="346359"/>
-                </a:lnTo>
-                <a:close/>
-                <a:lnTo>
-                  <a:pt x="133796" y="344585"/>
-                </a:lnTo>
-                <a:close/>
-                <a:lnTo>
-                  <a:pt x="137619" y="342827"/>
-                </a:lnTo>
-                <a:close/>
-                <a:lnTo>
-                  <a:pt x="141441" y="341088"/>
-                </a:lnTo>
-                <a:close/>
-                <a:lnTo>
-                  <a:pt x="145264" y="339363"/>
-                </a:lnTo>
-                <a:close/>
-                <a:lnTo>
-                  <a:pt x="149087" y="337649"/>
-                </a:lnTo>
-                <a:close/>
-                <a:lnTo>
-                  <a:pt x="152910" y="335942"/>
-                </a:lnTo>
-                <a:close/>
-                <a:lnTo>
-                  <a:pt x="156732" y="334246"/>
-                </a:lnTo>
-                <a:close/>
-                <a:lnTo>
-                  <a:pt x="160555" y="332561"/>
-                </a:lnTo>
-                <a:close/>
-                <a:lnTo>
-                  <a:pt x="164378" y="330888"/>
-                </a:lnTo>
-                <a:close/>
-                <a:lnTo>
-                  <a:pt x="168201" y="329224"/>
-                </a:lnTo>
-                <a:close/>
-                <a:lnTo>
-                  <a:pt x="172023" y="327564"/>
-                </a:lnTo>
-                <a:close/>
-                <a:lnTo>
-                  <a:pt x="175846" y="325906"/>
-                </a:lnTo>
-                <a:close/>
-                <a:lnTo>
-                  <a:pt x="179669" y="324254"/>
-                </a:lnTo>
-                <a:close/>
-                <a:lnTo>
-                  <a:pt x="183492" y="322613"/>
-                </a:lnTo>
-                <a:close/>
-                <a:lnTo>
-                  <a:pt x="187314" y="320985"/>
-                </a:lnTo>
-                <a:close/>
-                <a:lnTo>
-                  <a:pt x="191137" y="319367"/>
-                </a:lnTo>
-                <a:close/>
-                <a:lnTo>
-                  <a:pt x="194960" y="317755"/>
-                </a:lnTo>
-                <a:close/>
-                <a:lnTo>
-                  <a:pt x="198783" y="316145"/>
-                </a:lnTo>
-                <a:close/>
-                <a:lnTo>
-                  <a:pt x="202605" y="314540"/>
-                </a:lnTo>
-                <a:close/>
-                <a:lnTo>
-                  <a:pt x="206428" y="312940"/>
-                </a:lnTo>
-                <a:close/>
-                <a:lnTo>
-                  <a:pt x="210251" y="311346"/>
-                </a:lnTo>
-                <a:close/>
-                <a:lnTo>
-                  <a:pt x="214074" y="309757"/>
-                </a:lnTo>
-                <a:close/>
-                <a:lnTo>
-                  <a:pt x="217896" y="308172"/>
-                </a:lnTo>
-                <a:close/>
-                <a:lnTo>
-                  <a:pt x="221719" y="306590"/>
-                </a:lnTo>
-                <a:close/>
-                <a:lnTo>
-                  <a:pt x="225542" y="305016"/>
-                </a:lnTo>
-                <a:close/>
-                <a:lnTo>
-                  <a:pt x="229365" y="303452"/>
-                </a:lnTo>
-                <a:close/>
-                <a:lnTo>
-                  <a:pt x="233187" y="301900"/>
-                </a:lnTo>
-                <a:close/>
-                <a:lnTo>
-                  <a:pt x="237010" y="300359"/>
-                </a:lnTo>
-                <a:close/>
-                <a:lnTo>
-                  <a:pt x="240833" y="298824"/>
-                </a:lnTo>
-                <a:close/>
-                <a:lnTo>
-                  <a:pt x="244656" y="297294"/>
-                </a:lnTo>
-                <a:close/>
-                <a:lnTo>
-                  <a:pt x="248478" y="295766"/>
-                </a:lnTo>
-                <a:close/>
-                <a:lnTo>
-                  <a:pt x="252301" y="294238"/>
-                </a:lnTo>
-                <a:close/>
-                <a:lnTo>
-                  <a:pt x="256124" y="292708"/>
-                </a:lnTo>
-                <a:close/>
-                <a:lnTo>
-                  <a:pt x="259946" y="291178"/>
-                </a:lnTo>
-                <a:close/>
-                <a:lnTo>
-                  <a:pt x="263769" y="289651"/>
-                </a:lnTo>
-                <a:close/>
-                <a:lnTo>
-                  <a:pt x="267592" y="288130"/>
-                </a:lnTo>
-                <a:close/>
-                <a:lnTo>
-                  <a:pt x="271415" y="286617"/>
-                </a:lnTo>
-                <a:close/>
-                <a:lnTo>
-                  <a:pt x="275237" y="285117"/>
-                </a:lnTo>
-                <a:close/>
-                <a:lnTo>
-                  <a:pt x="279060" y="283631"/>
-                </a:lnTo>
-                <a:close/>
-                <a:lnTo>
-                  <a:pt x="282883" y="282151"/>
-                </a:lnTo>
-                <a:close/>
-                <a:lnTo>
-                  <a:pt x="286706" y="280670"/>
-                </a:lnTo>
-                <a:close/>
-                <a:lnTo>
-                  <a:pt x="290528" y="279186"/>
-                </a:lnTo>
-                <a:close/>
-                <a:lnTo>
-                  <a:pt x="294351" y="277702"/>
-                </a:lnTo>
-                <a:close/>
-                <a:lnTo>
-                  <a:pt x="298174" y="276222"/>
-                </a:lnTo>
-                <a:close/>
-                <a:lnTo>
-                  <a:pt x="301997" y="274749"/>
-                </a:lnTo>
-                <a:close/>
-                <a:lnTo>
-                  <a:pt x="305819" y="273283"/>
-                </a:lnTo>
-                <a:close/>
-                <a:lnTo>
-                  <a:pt x="309642" y="271824"/>
-                </a:lnTo>
-                <a:close/>
-                <a:lnTo>
-                  <a:pt x="313465" y="270370"/>
-                </a:lnTo>
-                <a:close/>
-                <a:lnTo>
-                  <a:pt x="317288" y="268919"/>
-                </a:lnTo>
-                <a:close/>
-                <a:lnTo>
-                  <a:pt x="321110" y="267467"/>
-                </a:lnTo>
-                <a:close/>
-                <a:lnTo>
-                  <a:pt x="324933" y="266013"/>
-                </a:lnTo>
-                <a:close/>
-                <a:lnTo>
-                  <a:pt x="328756" y="264559"/>
-                </a:lnTo>
-                <a:close/>
-                <a:lnTo>
-                  <a:pt x="332579" y="263111"/>
-                </a:lnTo>
-                <a:close/>
-                <a:lnTo>
-                  <a:pt x="336401" y="261669"/>
-                </a:lnTo>
-                <a:close/>
-                <a:lnTo>
-                  <a:pt x="340224" y="260233"/>
-                </a:lnTo>
-                <a:close/>
-                <a:lnTo>
-                  <a:pt x="344047" y="258805"/>
-                </a:lnTo>
-                <a:close/>
-                <a:lnTo>
-                  <a:pt x="347870" y="257382"/>
-                </a:lnTo>
-                <a:close/>
-                <a:lnTo>
-                  <a:pt x="351692" y="255961"/>
-                </a:lnTo>
-                <a:close/>
-                <a:lnTo>
-                  <a:pt x="355515" y="254540"/>
-                </a:lnTo>
-                <a:close/>
-                <a:lnTo>
-                  <a:pt x="359338" y="253116"/>
-                </a:lnTo>
-                <a:close/>
-                <a:lnTo>
-                  <a:pt x="363161" y="251694"/>
-                </a:lnTo>
-                <a:close/>
-                <a:lnTo>
-                  <a:pt x="366983" y="250276"/>
-                </a:lnTo>
-                <a:close/>
-                <a:lnTo>
-                  <a:pt x="370806" y="248864"/>
-                </a:lnTo>
-                <a:close/>
-                <a:lnTo>
-                  <a:pt x="374629" y="247460"/>
-                </a:lnTo>
-                <a:close/>
-                <a:lnTo>
-                  <a:pt x="378452" y="246062"/>
-                </a:lnTo>
-                <a:close/>
-                <a:lnTo>
-                  <a:pt x="382274" y="244670"/>
-                </a:lnTo>
-                <a:close/>
-                <a:lnTo>
-                  <a:pt x="386097" y="243280"/>
-                </a:lnTo>
-                <a:close/>
-                <a:lnTo>
-                  <a:pt x="389920" y="241888"/>
-                </a:lnTo>
-                <a:close/>
-                <a:lnTo>
-                  <a:pt x="393742" y="240494"/>
-                </a:lnTo>
-                <a:close/>
-                <a:lnTo>
-                  <a:pt x="397565" y="239103"/>
-                </a:lnTo>
-                <a:close/>
-                <a:lnTo>
-                  <a:pt x="401388" y="237718"/>
-                </a:lnTo>
-                <a:close/>
-                <a:lnTo>
-                  <a:pt x="405211" y="236340"/>
-                </a:lnTo>
-                <a:close/>
-                <a:lnTo>
-                  <a:pt x="409033" y="234966"/>
-                </a:lnTo>
-                <a:close/>
-                <a:lnTo>
-                  <a:pt x="412856" y="233591"/>
-                </a:lnTo>
-                <a:close/>
-                <a:lnTo>
-                  <a:pt x="416679" y="232213"/>
-                </a:lnTo>
-                <a:close/>
-                <a:lnTo>
-                  <a:pt x="420502" y="230837"/>
-                </a:lnTo>
-                <a:close/>
-                <a:lnTo>
-                  <a:pt x="424324" y="229465"/>
-                </a:lnTo>
-                <a:close/>
-                <a:lnTo>
-                  <a:pt x="428147" y="228100"/>
-                </a:lnTo>
-                <a:close/>
-                <a:lnTo>
-                  <a:pt x="431970" y="226742"/>
-                </a:lnTo>
-                <a:close/>
-                <a:lnTo>
-                  <a:pt x="435793" y="225390"/>
-                </a:lnTo>
-                <a:close/>
-                <a:lnTo>
-                  <a:pt x="439615" y="224043"/>
-                </a:lnTo>
-                <a:close/>
-                <a:lnTo>
-                  <a:pt x="443438" y="222699"/>
-                </a:lnTo>
-                <a:close/>
-                <a:lnTo>
-                  <a:pt x="447261" y="221355"/>
-                </a:lnTo>
-                <a:close/>
-                <a:lnTo>
-                  <a:pt x="451084" y="220011"/>
-                </a:lnTo>
-                <a:close/>
-                <a:lnTo>
-                  <a:pt x="454906" y="218664"/>
-                </a:lnTo>
-                <a:close/>
-                <a:lnTo>
-                  <a:pt x="458729" y="217317"/>
-                </a:lnTo>
-                <a:close/>
-                <a:lnTo>
-                  <a:pt x="462552" y="215968"/>
-                </a:lnTo>
-                <a:close/>
-                <a:lnTo>
-                  <a:pt x="466375" y="214623"/>
-                </a:lnTo>
-                <a:close/>
-                <a:lnTo>
-                  <a:pt x="470197" y="213285"/>
-                </a:lnTo>
-                <a:close/>
-                <a:lnTo>
-                  <a:pt x="474020" y="211954"/>
-                </a:lnTo>
-                <a:close/>
-                <a:lnTo>
-                  <a:pt x="477843" y="210626"/>
-                </a:lnTo>
-                <a:close/>
-                <a:lnTo>
-                  <a:pt x="481666" y="209296"/>
-                </a:lnTo>
-                <a:close/>
-                <a:lnTo>
-                  <a:pt x="485488" y="207963"/>
-                </a:lnTo>
-                <a:close/>
-                <a:lnTo>
-                  <a:pt x="489311" y="206633"/>
-                </a:lnTo>
-                <a:close/>
-                <a:lnTo>
-                  <a:pt x="493134" y="205309"/>
-                </a:lnTo>
-                <a:close/>
-                <a:lnTo>
-                  <a:pt x="496957" y="203993"/>
-                </a:lnTo>
-                <a:close/>
-                <a:lnTo>
-                  <a:pt x="500779" y="202680"/>
-                </a:lnTo>
-                <a:close/>
-                <a:lnTo>
-                  <a:pt x="504602" y="201368"/>
-                </a:lnTo>
-                <a:close/>
-                <a:lnTo>
-                  <a:pt x="508425" y="200054"/>
-                </a:lnTo>
-                <a:close/>
-                <a:lnTo>
-                  <a:pt x="512247" y="198738"/>
-                </a:lnTo>
-                <a:close/>
-                <a:lnTo>
-                  <a:pt x="516070" y="197420"/>
-                </a:lnTo>
-                <a:close/>
-                <a:lnTo>
-                  <a:pt x="519893" y="196103"/>
-                </a:lnTo>
-                <a:close/>
-                <a:lnTo>
-                  <a:pt x="523716" y="194789"/>
-                </a:lnTo>
-                <a:close/>
-                <a:lnTo>
-                  <a:pt x="527538" y="193481"/>
-                </a:lnTo>
-                <a:close/>
-                <a:lnTo>
-                  <a:pt x="531361" y="192180"/>
-                </a:lnTo>
-                <a:close/>
-                <a:lnTo>
-                  <a:pt x="535184" y="190883"/>
-                </a:lnTo>
-                <a:close/>
-                <a:lnTo>
-                  <a:pt x="539007" y="189585"/>
-                </a:lnTo>
-                <a:close/>
-                <a:lnTo>
-                  <a:pt x="542829" y="188287"/>
-                </a:lnTo>
-                <a:close/>
-                <a:lnTo>
-                  <a:pt x="546652" y="186986"/>
-                </a:lnTo>
-                <a:close/>
-                <a:lnTo>
-                  <a:pt x="550475" y="185684"/>
-                </a:lnTo>
-                <a:close/>
-                <a:lnTo>
-                  <a:pt x="554298" y="184382"/>
-                </a:lnTo>
-                <a:close/>
-                <a:lnTo>
-                  <a:pt x="558120" y="183083"/>
-                </a:lnTo>
-                <a:close/>
-                <a:lnTo>
-                  <a:pt x="561943" y="181791"/>
-                </a:lnTo>
-                <a:close/>
-                <a:lnTo>
-                  <a:pt x="565766" y="180505"/>
-                </a:lnTo>
-                <a:close/>
-                <a:lnTo>
-                  <a:pt x="569589" y="179223"/>
-                </a:lnTo>
-                <a:close/>
-                <a:lnTo>
-                  <a:pt x="573411" y="177941"/>
-                </a:lnTo>
-                <a:close/>
-                <a:lnTo>
-                  <a:pt x="577234" y="176658"/>
-                </a:lnTo>
-                <a:close/>
-                <a:lnTo>
-                  <a:pt x="581057" y="175372"/>
-                </a:lnTo>
-                <a:close/>
-                <a:lnTo>
-                  <a:pt x="584880" y="174085"/>
-                </a:lnTo>
-                <a:close/>
-                <a:lnTo>
-                  <a:pt x="588702" y="172799"/>
-                </a:lnTo>
-                <a:close/>
-                <a:lnTo>
-                  <a:pt x="592525" y="171515"/>
-                </a:lnTo>
-                <a:close/>
-                <a:lnTo>
-                  <a:pt x="596348" y="170239"/>
-                </a:lnTo>
-                <a:close/>
-                <a:lnTo>
-                  <a:pt x="600171" y="168969"/>
-                </a:lnTo>
-                <a:close/>
-                <a:lnTo>
-                  <a:pt x="603993" y="167702"/>
-                </a:lnTo>
-                <a:close/>
-                <a:lnTo>
-                  <a:pt x="607816" y="166435"/>
-                </a:lnTo>
-                <a:close/>
-                <a:lnTo>
-                  <a:pt x="611639" y="165167"/>
-                </a:lnTo>
-                <a:close/>
-                <a:lnTo>
-                  <a:pt x="615462" y="163897"/>
-                </a:lnTo>
-                <a:close/>
-                <a:lnTo>
-                  <a:pt x="619284" y="162625"/>
-                </a:lnTo>
-                <a:close/>
-                <a:lnTo>
-                  <a:pt x="623107" y="161354"/>
-                </a:lnTo>
-                <a:close/>
-                <a:lnTo>
-                  <a:pt x="626930" y="160086"/>
-                </a:lnTo>
-                <a:close/>
-                <a:lnTo>
-                  <a:pt x="630753" y="158825"/>
-                </a:lnTo>
-                <a:close/>
-                <a:lnTo>
-                  <a:pt x="634575" y="157570"/>
-                </a:lnTo>
-                <a:close/>
-                <a:lnTo>
-                  <a:pt x="638398" y="156319"/>
-                </a:lnTo>
-                <a:close/>
-                <a:lnTo>
-                  <a:pt x="642221" y="155067"/>
-                </a:lnTo>
-                <a:close/>
-                <a:lnTo>
-                  <a:pt x="646043" y="153813"/>
-                </a:lnTo>
-                <a:close/>
-                <a:lnTo>
-                  <a:pt x="649866" y="152558"/>
-                </a:lnTo>
-                <a:close/>
-                <a:lnTo>
-                  <a:pt x="653689" y="151305"/>
-                </a:lnTo>
-                <a:close/>
-                <a:lnTo>
-                  <a:pt x="657512" y="150051"/>
-                </a:lnTo>
-                <a:close/>
-                <a:lnTo>
-                  <a:pt x="661334" y="148797"/>
-                </a:lnTo>
-                <a:close/>
-                <a:lnTo>
-                  <a:pt x="665157" y="147541"/>
-                </a:lnTo>
-                <a:close/>
-                <a:lnTo>
-                  <a:pt x="668980" y="146285"/>
-                </a:lnTo>
-                <a:close/>
-                <a:lnTo>
-                  <a:pt x="672803" y="145033"/>
-                </a:lnTo>
-                <a:close/>
-                <a:lnTo>
-                  <a:pt x="676625" y="143787"/>
-                </a:lnTo>
-                <a:close/>
-                <a:lnTo>
-                  <a:pt x="680448" y="142548"/>
-                </a:lnTo>
-                <a:close/>
-                <a:lnTo>
-                  <a:pt x="684271" y="141312"/>
-                </a:lnTo>
-                <a:close/>
-                <a:lnTo>
-                  <a:pt x="688094" y="140076"/>
-                </a:lnTo>
-                <a:close/>
-                <a:lnTo>
-                  <a:pt x="691916" y="138838"/>
-                </a:lnTo>
-                <a:close/>
-                <a:lnTo>
-                  <a:pt x="695739" y="137599"/>
-                </a:lnTo>
-                <a:close/>
-                <a:lnTo>
-                  <a:pt x="699562" y="136357"/>
-                </a:lnTo>
-                <a:close/>
-                <a:lnTo>
-                  <a:pt x="703385" y="135115"/>
-                </a:lnTo>
-                <a:close/>
-                <a:lnTo>
-                  <a:pt x="707207" y="133879"/>
-                </a:lnTo>
-                <a:close/>
-                <a:lnTo>
-                  <a:pt x="711030" y="132651"/>
-                </a:lnTo>
-                <a:close/>
-                <a:lnTo>
-                  <a:pt x="714853" y="131430"/>
-                </a:lnTo>
-                <a:close/>
-                <a:lnTo>
-                  <a:pt x="718676" y="130208"/>
-                </a:lnTo>
-                <a:close/>
-                <a:lnTo>
-                  <a:pt x="722498" y="128976"/>
-                </a:lnTo>
-                <a:close/>
-                <a:lnTo>
-                  <a:pt x="726321" y="127736"/>
-                </a:lnTo>
-                <a:close/>
-                <a:lnTo>
-                  <a:pt x="730144" y="126496"/>
-                </a:lnTo>
-                <a:close/>
-                <a:lnTo>
-                  <a:pt x="733967" y="125261"/>
-                </a:lnTo>
-                <a:close/>
-                <a:lnTo>
-                  <a:pt x="737789" y="124034"/>
-                </a:lnTo>
-                <a:close/>
-                <a:lnTo>
-                  <a:pt x="741612" y="122817"/>
-                </a:lnTo>
-                <a:close/>
-                <a:lnTo>
-                  <a:pt x="745435" y="121607"/>
-                </a:lnTo>
-                <a:close/>
-                <a:lnTo>
-                  <a:pt x="749258" y="120402"/>
-                </a:lnTo>
-                <a:close/>
-                <a:lnTo>
-                  <a:pt x="753080" y="119194"/>
-                </a:lnTo>
-                <a:close/>
-                <a:lnTo>
-                  <a:pt x="756903" y="117976"/>
-                </a:lnTo>
-                <a:close/>
-                <a:lnTo>
-                  <a:pt x="760726" y="116750"/>
-                </a:lnTo>
-                <a:close/>
-                <a:lnTo>
-                  <a:pt x="764548" y="115526"/>
-                </a:lnTo>
-                <a:close/>
-                <a:lnTo>
-                  <a:pt x="768371" y="114309"/>
-                </a:lnTo>
-                <a:close/>
-                <a:lnTo>
-                  <a:pt x="772194" y="113101"/>
-                </a:lnTo>
-                <a:close/>
-                <a:lnTo>
-                  <a:pt x="776017" y="111897"/>
-                </a:lnTo>
-                <a:close/>
-                <a:lnTo>
-                  <a:pt x="779839" y="110692"/>
-                </a:lnTo>
-                <a:close/>
-                <a:lnTo>
-                  <a:pt x="783662" y="109484"/>
-                </a:lnTo>
-                <a:close/>
-                <a:lnTo>
-                  <a:pt x="787485" y="108275"/>
-                </a:lnTo>
-                <a:close/>
-                <a:lnTo>
-                  <a:pt x="791308" y="107063"/>
-                </a:lnTo>
-                <a:close/>
-                <a:lnTo>
-                  <a:pt x="795130" y="105852"/>
-                </a:lnTo>
-                <a:close/>
-                <a:lnTo>
-                  <a:pt x="798953" y="104647"/>
-                </a:lnTo>
-                <a:close/>
-                <a:lnTo>
-                  <a:pt x="802776" y="103452"/>
-                </a:lnTo>
-                <a:close/>
-                <a:lnTo>
-                  <a:pt x="806599" y="102262"/>
-                </a:lnTo>
-                <a:close/>
-                <a:lnTo>
-                  <a:pt x="810421" y="101069"/>
-                </a:lnTo>
-                <a:close/>
-                <a:lnTo>
-                  <a:pt x="814244" y="99866"/>
-                </a:lnTo>
-                <a:close/>
-                <a:lnTo>
-                  <a:pt x="818067" y="98656"/>
-                </a:lnTo>
-                <a:close/>
-                <a:lnTo>
-                  <a:pt x="821890" y="97447"/>
-                </a:lnTo>
-                <a:close/>
-                <a:lnTo>
-                  <a:pt x="825712" y="96246"/>
-                </a:lnTo>
-                <a:close/>
-                <a:lnTo>
-                  <a:pt x="829535" y="95053"/>
-                </a:lnTo>
-                <a:close/>
-                <a:lnTo>
-                  <a:pt x="833358" y="93864"/>
-                </a:lnTo>
-                <a:close/>
-                <a:lnTo>
-                  <a:pt x="837181" y="92674"/>
-                </a:lnTo>
-                <a:close/>
-                <a:lnTo>
-                  <a:pt x="841003" y="91482"/>
-                </a:lnTo>
-                <a:close/>
-                <a:lnTo>
-                  <a:pt x="844826" y="90288"/>
-                </a:lnTo>
-                <a:close/>
-                <a:lnTo>
-                  <a:pt x="848649" y="89092"/>
-                </a:lnTo>
-                <a:close/>
-                <a:lnTo>
-                  <a:pt x="852472" y="87896"/>
-                </a:lnTo>
-                <a:close/>
-                <a:lnTo>
-                  <a:pt x="856294" y="86707"/>
-                </a:lnTo>
-                <a:close/>
-                <a:lnTo>
-                  <a:pt x="860117" y="85527"/>
-                </a:lnTo>
-                <a:close/>
-                <a:lnTo>
-                  <a:pt x="863940" y="84352"/>
-                </a:lnTo>
-                <a:close/>
-                <a:lnTo>
-                  <a:pt x="867763" y="83175"/>
-                </a:lnTo>
-                <a:close/>
-                <a:lnTo>
-                  <a:pt x="871585" y="81986"/>
-                </a:lnTo>
-                <a:close/>
-                <a:lnTo>
-                  <a:pt x="875408" y="80791"/>
-                </a:lnTo>
-                <a:close/>
-                <a:lnTo>
-                  <a:pt x="879231" y="79598"/>
-                </a:lnTo>
-                <a:close/>
-                <a:lnTo>
-                  <a:pt x="883054" y="78413"/>
-                </a:lnTo>
-                <a:close/>
-                <a:lnTo>
-                  <a:pt x="886876" y="77236"/>
-                </a:lnTo>
-                <a:close/>
-                <a:lnTo>
-                  <a:pt x="890699" y="76062"/>
-                </a:lnTo>
-                <a:close/>
-                <a:lnTo>
-                  <a:pt x="894522" y="74887"/>
-                </a:lnTo>
-                <a:close/>
-                <a:lnTo>
-                  <a:pt x="898344" y="73709"/>
-                </a:lnTo>
-                <a:close/>
-                <a:lnTo>
-                  <a:pt x="902167" y="72531"/>
-                </a:lnTo>
-                <a:close/>
-                <a:lnTo>
-                  <a:pt x="905990" y="71354"/>
-                </a:lnTo>
-                <a:close/>
-                <a:lnTo>
-                  <a:pt x="909813" y="70177"/>
-                </a:lnTo>
-                <a:close/>
-                <a:lnTo>
-                  <a:pt x="913635" y="68999"/>
-                </a:lnTo>
-                <a:close/>
-                <a:lnTo>
-                  <a:pt x="917458" y="67818"/>
-                </a:lnTo>
-                <a:close/>
-                <a:lnTo>
-                  <a:pt x="921281" y="66639"/>
-                </a:lnTo>
-                <a:close/>
-                <a:lnTo>
-                  <a:pt x="925104" y="65465"/>
-                </a:lnTo>
-                <a:close/>
-                <a:lnTo>
-                  <a:pt x="928926" y="64300"/>
-                </a:lnTo>
-                <a:close/>
-                <a:lnTo>
-                  <a:pt x="932749" y="63141"/>
-                </a:lnTo>
-                <a:close/>
-                <a:lnTo>
-                  <a:pt x="936572" y="61978"/>
-                </a:lnTo>
-                <a:close/>
-                <a:lnTo>
-                  <a:pt x="940395" y="60805"/>
-                </a:lnTo>
-                <a:close/>
-                <a:lnTo>
-                  <a:pt x="944217" y="59625"/>
-                </a:lnTo>
-                <a:close/>
-                <a:lnTo>
-                  <a:pt x="948040" y="58447"/>
-                </a:lnTo>
-                <a:close/>
-                <a:lnTo>
-                  <a:pt x="951863" y="57278"/>
-                </a:lnTo>
-                <a:close/>
-                <a:lnTo>
-                  <a:pt x="955686" y="56117"/>
-                </a:lnTo>
-                <a:close/>
-                <a:lnTo>
-                  <a:pt x="959508" y="54958"/>
-                </a:lnTo>
-                <a:close/>
-                <a:lnTo>
-                  <a:pt x="963331" y="53798"/>
-                </a:lnTo>
-                <a:close/>
-                <a:lnTo>
-                  <a:pt x="967154" y="52635"/>
-                </a:lnTo>
-                <a:close/>
-                <a:lnTo>
-                  <a:pt x="970977" y="51472"/>
-                </a:lnTo>
-                <a:close/>
-                <a:lnTo>
-                  <a:pt x="974799" y="50311"/>
-                </a:lnTo>
-                <a:close/>
-                <a:lnTo>
-                  <a:pt x="978622" y="49149"/>
-                </a:lnTo>
-                <a:close/>
-                <a:lnTo>
-                  <a:pt x="982445" y="47986"/>
-                </a:lnTo>
-                <a:close/>
-                <a:lnTo>
-                  <a:pt x="986268" y="46821"/>
-                </a:lnTo>
-                <a:close/>
-                <a:lnTo>
-                  <a:pt x="990090" y="45657"/>
-                </a:lnTo>
-                <a:close/>
-                <a:lnTo>
-                  <a:pt x="993913" y="44498"/>
-                </a:lnTo>
-                <a:close/>
-                <a:lnTo>
-                  <a:pt x="997736" y="43350"/>
-                </a:lnTo>
-                <a:close/>
-                <a:lnTo>
-                  <a:pt x="1001559" y="42206"/>
-                </a:lnTo>
-                <a:close/>
-                <a:lnTo>
-                  <a:pt x="1005381" y="41058"/>
-                </a:lnTo>
-                <a:close/>
-                <a:lnTo>
-                  <a:pt x="1009204" y="39899"/>
-                </a:lnTo>
-                <a:close/>
-                <a:lnTo>
-                  <a:pt x="1013027" y="38734"/>
-                </a:lnTo>
-                <a:close/>
-                <a:lnTo>
-                  <a:pt x="1016849" y="37572"/>
-                </a:lnTo>
-                <a:close/>
-                <a:lnTo>
-                  <a:pt x="1020672" y="36419"/>
-                </a:lnTo>
-                <a:close/>
-                <a:lnTo>
-                  <a:pt x="1024495" y="35274"/>
-                </a:lnTo>
-                <a:close/>
-                <a:lnTo>
-                  <a:pt x="1028318" y="34130"/>
-                </a:lnTo>
-                <a:close/>
-                <a:lnTo>
-                  <a:pt x="1032140" y="32985"/>
-                </a:lnTo>
-                <a:close/>
-                <a:lnTo>
-                  <a:pt x="1035963" y="31837"/>
-                </a:lnTo>
-                <a:close/>
-                <a:lnTo>
-                  <a:pt x="1039786" y="30690"/>
-                </a:lnTo>
-                <a:close/>
-                <a:lnTo>
-                  <a:pt x="1043609" y="29544"/>
-                </a:lnTo>
-                <a:close/>
-                <a:lnTo>
-                  <a:pt x="1047431" y="28397"/>
-                </a:lnTo>
-                <a:close/>
-                <a:lnTo>
-                  <a:pt x="1051254" y="27250"/>
-                </a:lnTo>
-                <a:close/>
-                <a:lnTo>
-                  <a:pt x="1055077" y="26100"/>
-                </a:lnTo>
-                <a:close/>
-                <a:lnTo>
-                  <a:pt x="1058900" y="24951"/>
-                </a:lnTo>
-                <a:close/>
-                <a:lnTo>
-                  <a:pt x="1062722" y="23808"/>
-                </a:lnTo>
-                <a:close/>
-                <a:lnTo>
-                  <a:pt x="1066545" y="22676"/>
-                </a:lnTo>
-                <a:close/>
-                <a:lnTo>
-                  <a:pt x="1070368" y="21547"/>
-                </a:lnTo>
-                <a:close/>
-                <a:lnTo>
-                  <a:pt x="1074191" y="20414"/>
-                </a:lnTo>
-                <a:close/>
-                <a:lnTo>
-                  <a:pt x="1078013" y="19270"/>
-                </a:lnTo>
-                <a:close/>
-                <a:lnTo>
-                  <a:pt x="1081836" y="18120"/>
-                </a:lnTo>
-                <a:close/>
-                <a:lnTo>
-                  <a:pt x="1085659" y="16974"/>
-                </a:lnTo>
-                <a:close/>
-                <a:lnTo>
-                  <a:pt x="1089482" y="15836"/>
-                </a:lnTo>
-                <a:close/>
-                <a:lnTo>
-                  <a:pt x="1093304" y="14706"/>
-                </a:lnTo>
-                <a:close/>
-                <a:lnTo>
-                  <a:pt x="1097127" y="13578"/>
-                </a:lnTo>
-                <a:close/>
-                <a:lnTo>
-                  <a:pt x="1100950" y="12448"/>
-                </a:lnTo>
-                <a:close/>
-                <a:lnTo>
-                  <a:pt x="1104773" y="11316"/>
-                </a:lnTo>
-                <a:close/>
-                <a:lnTo>
-                  <a:pt x="1108595" y="10184"/>
-                </a:lnTo>
-                <a:close/>
-                <a:lnTo>
-                  <a:pt x="1112418" y="9052"/>
-                </a:lnTo>
-                <a:close/>
-                <a:lnTo>
-                  <a:pt x="1116241" y="7921"/>
-                </a:lnTo>
-                <a:close/>
-                <a:lnTo>
-                  <a:pt x="1120064" y="6789"/>
-                </a:lnTo>
-                <a:close/>
-                <a:lnTo>
-                  <a:pt x="1123886" y="5658"/>
-                </a:lnTo>
-                <a:close/>
-                <a:lnTo>
-                  <a:pt x="1127709" y="4526"/>
-                </a:lnTo>
-                <a:close/>
-                <a:lnTo>
-                  <a:pt x="1131532" y="3395"/>
-                </a:lnTo>
-                <a:close/>
-                <a:lnTo>
-                  <a:pt x="1135355" y="2263"/>
-                </a:lnTo>
-                <a:close/>
-                <a:lnTo>
-                  <a:pt x="1139177" y="1132"/>
-                </a:lnTo>
-                <a:close/>
-                <a:lnTo>
-                  <a:pt x="1143000" y="0"/>
+                  <a:pt x="5046" y="1387863"/>
+                </a:lnTo>
+                <a:close/>
+                <a:lnTo>
+                  <a:pt x="10092" y="1375400"/>
+                </a:lnTo>
+                <a:close/>
+                <a:lnTo>
+                  <a:pt x="15138" y="1363434"/>
+                </a:lnTo>
+                <a:close/>
+                <a:lnTo>
+                  <a:pt x="20184" y="1351926"/>
+                </a:lnTo>
+                <a:close/>
+                <a:lnTo>
+                  <a:pt x="25230" y="1340839"/>
+                </a:lnTo>
+                <a:close/>
+                <a:lnTo>
+                  <a:pt x="30276" y="1330136"/>
+                </a:lnTo>
+                <a:close/>
+                <a:lnTo>
+                  <a:pt x="35322" y="1319778"/>
+                </a:lnTo>
+                <a:close/>
+                <a:lnTo>
+                  <a:pt x="40368" y="1309727"/>
+                </a:lnTo>
+                <a:close/>
+                <a:lnTo>
+                  <a:pt x="45414" y="1299947"/>
+                </a:lnTo>
+                <a:close/>
+                <a:lnTo>
+                  <a:pt x="50460" y="1290402"/>
+                </a:lnTo>
+                <a:close/>
+                <a:lnTo>
+                  <a:pt x="55506" y="1281070"/>
+                </a:lnTo>
+                <a:close/>
+                <a:lnTo>
+                  <a:pt x="60552" y="1271934"/>
+                </a:lnTo>
+                <a:close/>
+                <a:lnTo>
+                  <a:pt x="65598" y="1262975"/>
+                </a:lnTo>
+                <a:close/>
+                <a:lnTo>
+                  <a:pt x="70644" y="1254176"/>
+                </a:lnTo>
+                <a:close/>
+                <a:lnTo>
+                  <a:pt x="75690" y="1245522"/>
+                </a:lnTo>
+                <a:close/>
+                <a:lnTo>
+                  <a:pt x="80736" y="1237005"/>
+                </a:lnTo>
+                <a:close/>
+                <a:lnTo>
+                  <a:pt x="85782" y="1228617"/>
+                </a:lnTo>
+                <a:close/>
+                <a:lnTo>
+                  <a:pt x="90828" y="1220347"/>
+                </a:lnTo>
+                <a:close/>
+                <a:lnTo>
+                  <a:pt x="95874" y="1212188"/>
+                </a:lnTo>
+                <a:close/>
+                <a:lnTo>
+                  <a:pt x="100920" y="1204133"/>
+                </a:lnTo>
+                <a:close/>
+                <a:lnTo>
+                  <a:pt x="105966" y="1196176"/>
+                </a:lnTo>
+                <a:close/>
+                <a:lnTo>
+                  <a:pt x="111012" y="1188311"/>
+                </a:lnTo>
+                <a:close/>
+                <a:lnTo>
+                  <a:pt x="116058" y="1180532"/>
+                </a:lnTo>
+                <a:close/>
+                <a:lnTo>
+                  <a:pt x="121104" y="1172837"/>
+                </a:lnTo>
+                <a:close/>
+                <a:lnTo>
+                  <a:pt x="126151" y="1165228"/>
+                </a:lnTo>
+                <a:close/>
+                <a:lnTo>
+                  <a:pt x="131197" y="1157709"/>
+                </a:lnTo>
+                <a:close/>
+                <a:lnTo>
+                  <a:pt x="136243" y="1150283"/>
+                </a:lnTo>
+                <a:close/>
+                <a:lnTo>
+                  <a:pt x="141289" y="1142953"/>
+                </a:lnTo>
+                <a:close/>
+                <a:lnTo>
+                  <a:pt x="146335" y="1135713"/>
+                </a:lnTo>
+                <a:close/>
+                <a:lnTo>
+                  <a:pt x="151381" y="1128557"/>
+                </a:lnTo>
+                <a:close/>
+                <a:lnTo>
+                  <a:pt x="156427" y="1121479"/>
+                </a:lnTo>
+                <a:close/>
+                <a:lnTo>
+                  <a:pt x="161473" y="1114472"/>
+                </a:lnTo>
+                <a:close/>
+                <a:lnTo>
+                  <a:pt x="166519" y="1107528"/>
+                </a:lnTo>
+                <a:close/>
+                <a:lnTo>
+                  <a:pt x="171565" y="1100644"/>
+                </a:lnTo>
+                <a:close/>
+                <a:lnTo>
+                  <a:pt x="176611" y="1093813"/>
+                </a:lnTo>
+                <a:close/>
+                <a:lnTo>
+                  <a:pt x="181657" y="1087030"/>
+                </a:lnTo>
+                <a:close/>
+                <a:lnTo>
+                  <a:pt x="186703" y="1080291"/>
+                </a:lnTo>
+                <a:close/>
+                <a:lnTo>
+                  <a:pt x="191749" y="1073593"/>
+                </a:lnTo>
+                <a:close/>
+                <a:lnTo>
+                  <a:pt x="196795" y="1066933"/>
+                </a:lnTo>
+                <a:close/>
+                <a:lnTo>
+                  <a:pt x="201841" y="1060311"/>
+                </a:lnTo>
+                <a:close/>
+                <a:lnTo>
+                  <a:pt x="206887" y="1053723"/>
+                </a:lnTo>
+                <a:close/>
+                <a:lnTo>
+                  <a:pt x="211933" y="1047174"/>
+                </a:lnTo>
+                <a:close/>
+                <a:lnTo>
+                  <a:pt x="216979" y="1040673"/>
+                </a:lnTo>
+                <a:close/>
+                <a:lnTo>
+                  <a:pt x="222025" y="1034234"/>
+                </a:lnTo>
+                <a:close/>
+                <a:lnTo>
+                  <a:pt x="227071" y="1027869"/>
+                </a:lnTo>
+                <a:close/>
+                <a:lnTo>
+                  <a:pt x="232117" y="1021588"/>
+                </a:lnTo>
+                <a:close/>
+                <a:lnTo>
+                  <a:pt x="237163" y="1015385"/>
+                </a:lnTo>
+                <a:close/>
+                <a:lnTo>
+                  <a:pt x="242209" y="1009240"/>
+                </a:lnTo>
+                <a:close/>
+                <a:lnTo>
+                  <a:pt x="247255" y="1003136"/>
+                </a:lnTo>
+                <a:close/>
+                <a:lnTo>
+                  <a:pt x="252301" y="997055"/>
+                </a:lnTo>
+                <a:close/>
+                <a:lnTo>
+                  <a:pt x="257347" y="990982"/>
+                </a:lnTo>
+                <a:close/>
+                <a:lnTo>
+                  <a:pt x="262393" y="984918"/>
+                </a:lnTo>
+                <a:close/>
+                <a:lnTo>
+                  <a:pt x="267439" y="978866"/>
+                </a:lnTo>
+                <a:close/>
+                <a:lnTo>
+                  <a:pt x="272485" y="972828"/>
+                </a:lnTo>
+                <a:close/>
+                <a:lnTo>
+                  <a:pt x="277531" y="966805"/>
+                </a:lnTo>
+                <a:close/>
+                <a:lnTo>
+                  <a:pt x="282577" y="960804"/>
+                </a:lnTo>
+                <a:close/>
+                <a:lnTo>
+                  <a:pt x="287623" y="954837"/>
+                </a:lnTo>
+                <a:close/>
+                <a:lnTo>
+                  <a:pt x="292669" y="948912"/>
+                </a:lnTo>
+                <a:close/>
+                <a:lnTo>
+                  <a:pt x="297715" y="943041"/>
+                </a:lnTo>
+                <a:close/>
+                <a:lnTo>
+                  <a:pt x="302761" y="937227"/>
+                </a:lnTo>
+                <a:close/>
+                <a:lnTo>
+                  <a:pt x="307807" y="931462"/>
+                </a:lnTo>
+                <a:close/>
+                <a:lnTo>
+                  <a:pt x="312853" y="925730"/>
+                </a:lnTo>
+                <a:close/>
+                <a:lnTo>
+                  <a:pt x="317899" y="920020"/>
+                </a:lnTo>
+                <a:close/>
+                <a:lnTo>
+                  <a:pt x="322945" y="914318"/>
+                </a:lnTo>
+                <a:close/>
+                <a:lnTo>
+                  <a:pt x="327991" y="908626"/>
+                </a:lnTo>
+                <a:close/>
+                <a:lnTo>
+                  <a:pt x="333037" y="902957"/>
+                </a:lnTo>
+                <a:close/>
+                <a:lnTo>
+                  <a:pt x="338083" y="897326"/>
+                </a:lnTo>
+                <a:close/>
+                <a:lnTo>
+                  <a:pt x="343129" y="891745"/>
+                </a:lnTo>
+                <a:close/>
+                <a:lnTo>
+                  <a:pt x="348175" y="886223"/>
+                </a:lnTo>
+                <a:close/>
+                <a:lnTo>
+                  <a:pt x="353221" y="880753"/>
+                </a:lnTo>
+                <a:close/>
+                <a:lnTo>
+                  <a:pt x="358267" y="875322"/>
+                </a:lnTo>
+                <a:close/>
+                <a:lnTo>
+                  <a:pt x="363313" y="869921"/>
+                </a:lnTo>
+                <a:close/>
+                <a:lnTo>
+                  <a:pt x="368359" y="864536"/>
+                </a:lnTo>
+                <a:close/>
+                <a:lnTo>
+                  <a:pt x="373405" y="859164"/>
+                </a:lnTo>
+                <a:close/>
+                <a:lnTo>
+                  <a:pt x="378452" y="853808"/>
+                </a:lnTo>
+                <a:close/>
+                <a:lnTo>
+                  <a:pt x="383498" y="848472"/>
+                </a:lnTo>
+                <a:close/>
+                <a:lnTo>
+                  <a:pt x="388544" y="843157"/>
+                </a:lnTo>
+                <a:close/>
+                <a:lnTo>
+                  <a:pt x="393590" y="837867"/>
+                </a:lnTo>
+                <a:close/>
+                <a:lnTo>
+                  <a:pt x="398636" y="832601"/>
+                </a:lnTo>
+                <a:close/>
+                <a:lnTo>
+                  <a:pt x="403682" y="827359"/>
+                </a:lnTo>
+                <a:close/>
+                <a:lnTo>
+                  <a:pt x="408728" y="822140"/>
+                </a:lnTo>
+                <a:close/>
+                <a:lnTo>
+                  <a:pt x="413774" y="816942"/>
+                </a:lnTo>
+                <a:close/>
+                <a:lnTo>
+                  <a:pt x="418820" y="811767"/>
+                </a:lnTo>
+                <a:close/>
+                <a:lnTo>
+                  <a:pt x="423866" y="806613"/>
+                </a:lnTo>
+                <a:close/>
+                <a:lnTo>
+                  <a:pt x="428912" y="801481"/>
+                </a:lnTo>
+                <a:close/>
+                <a:lnTo>
+                  <a:pt x="433958" y="796371"/>
+                </a:lnTo>
+                <a:close/>
+                <a:lnTo>
+                  <a:pt x="439004" y="791284"/>
+                </a:lnTo>
+                <a:close/>
+                <a:lnTo>
+                  <a:pt x="444050" y="786219"/>
+                </a:lnTo>
+                <a:close/>
+                <a:lnTo>
+                  <a:pt x="449096" y="781177"/>
+                </a:lnTo>
+                <a:close/>
+                <a:lnTo>
+                  <a:pt x="454142" y="776157"/>
+                </a:lnTo>
+                <a:close/>
+                <a:lnTo>
+                  <a:pt x="459188" y="771159"/>
+                </a:lnTo>
+                <a:close/>
+                <a:lnTo>
+                  <a:pt x="464234" y="766183"/>
+                </a:lnTo>
+                <a:close/>
+                <a:lnTo>
+                  <a:pt x="469280" y="761229"/>
+                </a:lnTo>
+                <a:close/>
+                <a:lnTo>
+                  <a:pt x="474326" y="756298"/>
+                </a:lnTo>
+                <a:close/>
+                <a:lnTo>
+                  <a:pt x="479372" y="751390"/>
+                </a:lnTo>
+                <a:close/>
+                <a:lnTo>
+                  <a:pt x="484418" y="746504"/>
+                </a:lnTo>
+                <a:close/>
+                <a:lnTo>
+                  <a:pt x="489464" y="741641"/>
+                </a:lnTo>
+                <a:close/>
+                <a:lnTo>
+                  <a:pt x="494510" y="736800"/>
+                </a:lnTo>
+                <a:close/>
+                <a:lnTo>
+                  <a:pt x="499556" y="731979"/>
+                </a:lnTo>
+                <a:close/>
+                <a:lnTo>
+                  <a:pt x="504602" y="727179"/>
+                </a:lnTo>
+                <a:close/>
+                <a:lnTo>
+                  <a:pt x="509648" y="722399"/>
+                </a:lnTo>
+                <a:close/>
+                <a:lnTo>
+                  <a:pt x="514694" y="717642"/>
+                </a:lnTo>
+                <a:close/>
+                <a:lnTo>
+                  <a:pt x="519740" y="712912"/>
+                </a:lnTo>
+                <a:close/>
+                <a:lnTo>
+                  <a:pt x="524786" y="708211"/>
+                </a:lnTo>
+                <a:close/>
+                <a:lnTo>
+                  <a:pt x="529832" y="703540"/>
+                </a:lnTo>
+                <a:close/>
+                <a:lnTo>
+                  <a:pt x="534878" y="698893"/>
+                </a:lnTo>
+                <a:close/>
+                <a:lnTo>
+                  <a:pt x="539924" y="694260"/>
+                </a:lnTo>
+                <a:close/>
+                <a:lnTo>
+                  <a:pt x="544970" y="689629"/>
+                </a:lnTo>
+                <a:close/>
+                <a:lnTo>
+                  <a:pt x="550016" y="684991"/>
+                </a:lnTo>
+                <a:close/>
+                <a:lnTo>
+                  <a:pt x="555062" y="680341"/>
+                </a:lnTo>
+                <a:close/>
+                <a:lnTo>
+                  <a:pt x="560108" y="675688"/>
+                </a:lnTo>
+                <a:close/>
+                <a:lnTo>
+                  <a:pt x="565154" y="671042"/>
+                </a:lnTo>
+                <a:close/>
+                <a:lnTo>
+                  <a:pt x="570200" y="666414"/>
+                </a:lnTo>
+                <a:close/>
+                <a:lnTo>
+                  <a:pt x="575246" y="661812"/>
+                </a:lnTo>
+                <a:close/>
+                <a:lnTo>
+                  <a:pt x="580292" y="657240"/>
+                </a:lnTo>
+                <a:close/>
+                <a:lnTo>
+                  <a:pt x="585338" y="652698"/>
+                </a:lnTo>
+                <a:close/>
+                <a:lnTo>
+                  <a:pt x="590384" y="648186"/>
+                </a:lnTo>
+                <a:close/>
+                <a:lnTo>
+                  <a:pt x="595430" y="643703"/>
+                </a:lnTo>
+                <a:close/>
+                <a:lnTo>
+                  <a:pt x="600476" y="639248"/>
+                </a:lnTo>
+                <a:close/>
+                <a:lnTo>
+                  <a:pt x="605522" y="634810"/>
+                </a:lnTo>
+                <a:close/>
+                <a:lnTo>
+                  <a:pt x="610568" y="630380"/>
+                </a:lnTo>
+                <a:close/>
+                <a:lnTo>
+                  <a:pt x="615614" y="625947"/>
+                </a:lnTo>
+                <a:close/>
+                <a:lnTo>
+                  <a:pt x="620660" y="621504"/>
+                </a:lnTo>
+                <a:close/>
+                <a:lnTo>
+                  <a:pt x="625706" y="617053"/>
+                </a:lnTo>
+                <a:close/>
+                <a:lnTo>
+                  <a:pt x="630753" y="612604"/>
+                </a:lnTo>
+                <a:close/>
+                <a:lnTo>
+                  <a:pt x="635799" y="608166"/>
+                </a:lnTo>
+                <a:close/>
+                <a:lnTo>
+                  <a:pt x="640845" y="603751"/>
+                </a:lnTo>
+                <a:close/>
+                <a:lnTo>
+                  <a:pt x="645891" y="599365"/>
+                </a:lnTo>
+                <a:close/>
+                <a:lnTo>
+                  <a:pt x="650937" y="595009"/>
+                </a:lnTo>
+                <a:close/>
+                <a:lnTo>
+                  <a:pt x="655983" y="590681"/>
+                </a:lnTo>
+                <a:close/>
+                <a:lnTo>
+                  <a:pt x="661029" y="586380"/>
+                </a:lnTo>
+                <a:close/>
+                <a:lnTo>
+                  <a:pt x="666075" y="582107"/>
+                </a:lnTo>
+                <a:close/>
+                <a:lnTo>
+                  <a:pt x="671121" y="577855"/>
+                </a:lnTo>
+                <a:close/>
+                <a:lnTo>
+                  <a:pt x="676167" y="573620"/>
+                </a:lnTo>
+                <a:close/>
+                <a:lnTo>
+                  <a:pt x="681213" y="569394"/>
+                </a:lnTo>
+                <a:close/>
+                <a:lnTo>
+                  <a:pt x="686259" y="565172"/>
+                </a:lnTo>
+                <a:close/>
+                <a:lnTo>
+                  <a:pt x="691305" y="560949"/>
+                </a:lnTo>
+                <a:close/>
+                <a:lnTo>
+                  <a:pt x="696351" y="556719"/>
+                </a:lnTo>
+                <a:close/>
+                <a:lnTo>
+                  <a:pt x="701397" y="552480"/>
+                </a:lnTo>
+                <a:close/>
+                <a:lnTo>
+                  <a:pt x="706443" y="548227"/>
+                </a:lnTo>
+                <a:close/>
+                <a:lnTo>
+                  <a:pt x="711489" y="543959"/>
+                </a:lnTo>
+                <a:close/>
+                <a:lnTo>
+                  <a:pt x="716535" y="539684"/>
+                </a:lnTo>
+                <a:close/>
+                <a:lnTo>
+                  <a:pt x="721581" y="535423"/>
+                </a:lnTo>
+                <a:close/>
+                <a:lnTo>
+                  <a:pt x="726627" y="531197"/>
+                </a:lnTo>
+                <a:close/>
+                <a:lnTo>
+                  <a:pt x="731673" y="527026"/>
+                </a:lnTo>
+                <a:close/>
+                <a:lnTo>
+                  <a:pt x="736719" y="522924"/>
+                </a:lnTo>
+                <a:close/>
+                <a:lnTo>
+                  <a:pt x="741765" y="518877"/>
+                </a:lnTo>
+                <a:close/>
+                <a:lnTo>
+                  <a:pt x="746811" y="514864"/>
+                </a:lnTo>
+                <a:close/>
+                <a:lnTo>
+                  <a:pt x="751857" y="510865"/>
+                </a:lnTo>
+                <a:close/>
+                <a:lnTo>
+                  <a:pt x="756903" y="506858"/>
+                </a:lnTo>
+                <a:close/>
+                <a:lnTo>
+                  <a:pt x="761949" y="502836"/>
+                </a:lnTo>
+                <a:close/>
+                <a:lnTo>
+                  <a:pt x="766995" y="498800"/>
+                </a:lnTo>
+                <a:close/>
+                <a:lnTo>
+                  <a:pt x="772041" y="494753"/>
+                </a:lnTo>
+                <a:close/>
+                <a:lnTo>
+                  <a:pt x="777087" y="490698"/>
+                </a:lnTo>
+                <a:close/>
+                <a:lnTo>
+                  <a:pt x="782133" y="486639"/>
+                </a:lnTo>
+                <a:close/>
+                <a:lnTo>
+                  <a:pt x="787179" y="482583"/>
+                </a:lnTo>
+                <a:close/>
+                <a:lnTo>
+                  <a:pt x="792225" y="478542"/>
+                </a:lnTo>
+                <a:close/>
+                <a:lnTo>
+                  <a:pt x="797271" y="474525"/>
+                </a:lnTo>
+                <a:close/>
+                <a:lnTo>
+                  <a:pt x="802317" y="470542"/>
+                </a:lnTo>
+                <a:close/>
+                <a:lnTo>
+                  <a:pt x="807363" y="466593"/>
+                </a:lnTo>
+                <a:close/>
+                <a:lnTo>
+                  <a:pt x="812409" y="462664"/>
+                </a:lnTo>
+                <a:close/>
+                <a:lnTo>
+                  <a:pt x="817455" y="458742"/>
+                </a:lnTo>
+                <a:close/>
+                <a:lnTo>
+                  <a:pt x="822501" y="454814"/>
+                </a:lnTo>
+                <a:close/>
+                <a:lnTo>
+                  <a:pt x="827547" y="450870"/>
+                </a:lnTo>
+                <a:close/>
+                <a:lnTo>
+                  <a:pt x="832593" y="446918"/>
+                </a:lnTo>
+                <a:close/>
+                <a:lnTo>
+                  <a:pt x="837639" y="442972"/>
+                </a:lnTo>
+                <a:close/>
+                <a:lnTo>
+                  <a:pt x="842685" y="439047"/>
+                </a:lnTo>
+                <a:close/>
+                <a:lnTo>
+                  <a:pt x="847731" y="435157"/>
+                </a:lnTo>
+                <a:close/>
+                <a:lnTo>
+                  <a:pt x="852777" y="431304"/>
+                </a:lnTo>
+                <a:close/>
+                <a:lnTo>
+                  <a:pt x="857823" y="427476"/>
+                </a:lnTo>
+                <a:close/>
+                <a:lnTo>
+                  <a:pt x="862869" y="423657"/>
+                </a:lnTo>
+                <a:close/>
+                <a:lnTo>
+                  <a:pt x="867915" y="419833"/>
+                </a:lnTo>
+                <a:close/>
+                <a:lnTo>
+                  <a:pt x="872961" y="415993"/>
+                </a:lnTo>
+                <a:close/>
+                <a:lnTo>
+                  <a:pt x="878007" y="412143"/>
+                </a:lnTo>
+                <a:close/>
+                <a:lnTo>
+                  <a:pt x="883054" y="408298"/>
+                </a:lnTo>
+                <a:close/>
+                <a:lnTo>
+                  <a:pt x="888100" y="404471"/>
+                </a:lnTo>
+                <a:close/>
+                <a:lnTo>
+                  <a:pt x="893146" y="400675"/>
+                </a:lnTo>
+                <a:close/>
+                <a:lnTo>
+                  <a:pt x="898192" y="396915"/>
+                </a:lnTo>
+                <a:close/>
+                <a:lnTo>
+                  <a:pt x="903238" y="393182"/>
+                </a:lnTo>
+                <a:close/>
+                <a:lnTo>
+                  <a:pt x="908284" y="389464"/>
+                </a:lnTo>
+                <a:close/>
+                <a:lnTo>
+                  <a:pt x="913330" y="385751"/>
+                </a:lnTo>
+                <a:close/>
+                <a:lnTo>
+                  <a:pt x="918376" y="382031"/>
+                </a:lnTo>
+                <a:close/>
+                <a:lnTo>
+                  <a:pt x="923422" y="378302"/>
+                </a:lnTo>
+                <a:close/>
+                <a:lnTo>
+                  <a:pt x="928468" y="374567"/>
+                </a:lnTo>
+                <a:close/>
+                <a:lnTo>
+                  <a:pt x="933514" y="370826"/>
+                </a:lnTo>
+                <a:close/>
+                <a:lnTo>
+                  <a:pt x="938560" y="367081"/>
+                </a:lnTo>
+                <a:close/>
+                <a:lnTo>
+                  <a:pt x="943606" y="363334"/>
+                </a:lnTo>
+                <a:close/>
+                <a:lnTo>
+                  <a:pt x="948652" y="359591"/>
+                </a:lnTo>
+                <a:close/>
+                <a:lnTo>
+                  <a:pt x="953698" y="355858"/>
+                </a:lnTo>
+                <a:close/>
+                <a:lnTo>
+                  <a:pt x="958744" y="352140"/>
+                </a:lnTo>
+                <a:close/>
+                <a:lnTo>
+                  <a:pt x="963790" y="348443"/>
+                </a:lnTo>
+                <a:close/>
+                <a:lnTo>
+                  <a:pt x="968836" y="344774"/>
+                </a:lnTo>
+                <a:close/>
+                <a:lnTo>
+                  <a:pt x="973882" y="341135"/>
+                </a:lnTo>
+                <a:close/>
+                <a:lnTo>
+                  <a:pt x="978928" y="337533"/>
+                </a:lnTo>
+                <a:close/>
+                <a:lnTo>
+                  <a:pt x="983974" y="333972"/>
+                </a:lnTo>
+                <a:close/>
+                <a:lnTo>
+                  <a:pt x="989020" y="330449"/>
+                </a:lnTo>
+                <a:close/>
+                <a:lnTo>
+                  <a:pt x="994066" y="326941"/>
+                </a:lnTo>
+                <a:close/>
+                <a:lnTo>
+                  <a:pt x="999112" y="323422"/>
+                </a:lnTo>
+                <a:close/>
+                <a:lnTo>
+                  <a:pt x="1004158" y="319866"/>
+                </a:lnTo>
+                <a:close/>
+                <a:lnTo>
+                  <a:pt x="1009204" y="316251"/>
+                </a:lnTo>
+                <a:close/>
+                <a:lnTo>
+                  <a:pt x="1014250" y="312593"/>
+                </a:lnTo>
+                <a:close/>
+                <a:lnTo>
+                  <a:pt x="1019296" y="308927"/>
+                </a:lnTo>
+                <a:close/>
+                <a:lnTo>
+                  <a:pt x="1024342" y="305293"/>
+                </a:lnTo>
+                <a:close/>
+                <a:lnTo>
+                  <a:pt x="1029388" y="301728"/>
+                </a:lnTo>
+                <a:close/>
+                <a:lnTo>
+                  <a:pt x="1034434" y="298253"/>
+                </a:lnTo>
+                <a:close/>
+                <a:lnTo>
+                  <a:pt x="1039480" y="294837"/>
+                </a:lnTo>
+                <a:close/>
+                <a:lnTo>
+                  <a:pt x="1044526" y="291440"/>
+                </a:lnTo>
+                <a:close/>
+                <a:lnTo>
+                  <a:pt x="1049572" y="288024"/>
+                </a:lnTo>
+                <a:close/>
+                <a:lnTo>
+                  <a:pt x="1054618" y="284552"/>
+                </a:lnTo>
+                <a:close/>
+                <a:lnTo>
+                  <a:pt x="1059664" y="281025"/>
+                </a:lnTo>
+                <a:close/>
+                <a:lnTo>
+                  <a:pt x="1064710" y="277470"/>
+                </a:lnTo>
+                <a:close/>
+                <a:lnTo>
+                  <a:pt x="1069756" y="273918"/>
+                </a:lnTo>
+                <a:close/>
+                <a:lnTo>
+                  <a:pt x="1074802" y="270397"/>
+                </a:lnTo>
+                <a:close/>
+                <a:lnTo>
+                  <a:pt x="1079848" y="266927"/>
+                </a:lnTo>
+                <a:close/>
+                <a:lnTo>
+                  <a:pt x="1084894" y="263495"/>
+                </a:lnTo>
+                <a:close/>
+                <a:lnTo>
+                  <a:pt x="1089940" y="260082"/>
+                </a:lnTo>
+                <a:close/>
+                <a:lnTo>
+                  <a:pt x="1094986" y="256672"/>
+                </a:lnTo>
+                <a:close/>
+                <a:lnTo>
+                  <a:pt x="1100032" y="253246"/>
+                </a:lnTo>
+                <a:close/>
+                <a:lnTo>
+                  <a:pt x="1105078" y="249803"/>
+                </a:lnTo>
+                <a:close/>
+                <a:lnTo>
+                  <a:pt x="1110124" y="246358"/>
+                </a:lnTo>
+                <a:close/>
+                <a:lnTo>
+                  <a:pt x="1115170" y="242926"/>
+                </a:lnTo>
+                <a:close/>
+                <a:lnTo>
+                  <a:pt x="1120216" y="239521"/>
+                </a:lnTo>
+                <a:close/>
+                <a:lnTo>
+                  <a:pt x="1125262" y="236154"/>
+                </a:lnTo>
+                <a:close/>
+                <a:lnTo>
+                  <a:pt x="1130308" y="232817"/>
+                </a:lnTo>
+                <a:close/>
+                <a:lnTo>
+                  <a:pt x="1135355" y="229500"/>
+                </a:lnTo>
+                <a:close/>
+                <a:lnTo>
+                  <a:pt x="1140401" y="226190"/>
+                </a:lnTo>
+                <a:close/>
+                <a:lnTo>
+                  <a:pt x="1145447" y="222878"/>
+                </a:lnTo>
+                <a:close/>
+                <a:lnTo>
+                  <a:pt x="1150493" y="219558"/>
+                </a:lnTo>
+                <a:close/>
+                <a:lnTo>
+                  <a:pt x="1155539" y="216230"/>
+                </a:lnTo>
+                <a:close/>
+                <a:lnTo>
+                  <a:pt x="1160585" y="212893"/>
+                </a:lnTo>
+                <a:close/>
+                <a:lnTo>
+                  <a:pt x="1165631" y="209550"/>
+                </a:lnTo>
+                <a:close/>
+                <a:lnTo>
+                  <a:pt x="1170677" y="206200"/>
+                </a:lnTo>
+                <a:close/>
+                <a:lnTo>
+                  <a:pt x="1175723" y="202853"/>
+                </a:lnTo>
+                <a:close/>
+                <a:lnTo>
+                  <a:pt x="1180769" y="199518"/>
+                </a:lnTo>
+                <a:close/>
+                <a:lnTo>
+                  <a:pt x="1185815" y="196204"/>
+                </a:lnTo>
+                <a:close/>
+                <a:lnTo>
+                  <a:pt x="1190861" y="192922"/>
+                </a:lnTo>
+                <a:close/>
+                <a:lnTo>
+                  <a:pt x="1195907" y="189671"/>
+                </a:lnTo>
+                <a:close/>
+                <a:lnTo>
+                  <a:pt x="1200953" y="186444"/>
+                </a:lnTo>
+                <a:close/>
+                <a:lnTo>
+                  <a:pt x="1205999" y="183230"/>
+                </a:lnTo>
+                <a:close/>
+                <a:lnTo>
+                  <a:pt x="1211045" y="180020"/>
+                </a:lnTo>
+                <a:close/>
+                <a:lnTo>
+                  <a:pt x="1216091" y="176805"/>
+                </a:lnTo>
+                <a:close/>
+                <a:lnTo>
+                  <a:pt x="1221137" y="173582"/>
+                </a:lnTo>
+                <a:close/>
+                <a:lnTo>
+                  <a:pt x="1226183" y="170351"/>
+                </a:lnTo>
+                <a:close/>
+                <a:lnTo>
+                  <a:pt x="1231229" y="167113"/>
+                </a:lnTo>
+                <a:close/>
+                <a:lnTo>
+                  <a:pt x="1236275" y="163868"/>
+                </a:lnTo>
+                <a:close/>
+                <a:lnTo>
+                  <a:pt x="1241321" y="160620"/>
+                </a:lnTo>
+                <a:close/>
+                <a:lnTo>
+                  <a:pt x="1246367" y="157377"/>
+                </a:lnTo>
+                <a:close/>
+                <a:lnTo>
+                  <a:pt x="1251413" y="154150"/>
+                </a:lnTo>
+                <a:close/>
+                <a:lnTo>
+                  <a:pt x="1256459" y="150949"/>
+                </a:lnTo>
+                <a:close/>
+                <a:lnTo>
+                  <a:pt x="1261505" y="147781"/>
+                </a:lnTo>
+                <a:close/>
+                <a:lnTo>
+                  <a:pt x="1266551" y="144643"/>
+                </a:lnTo>
+                <a:close/>
+                <a:lnTo>
+                  <a:pt x="1271597" y="141523"/>
+                </a:lnTo>
+                <a:close/>
+                <a:lnTo>
+                  <a:pt x="1276643" y="138413"/>
+                </a:lnTo>
+                <a:close/>
+                <a:lnTo>
+                  <a:pt x="1281689" y="135302"/>
+                </a:lnTo>
+                <a:close/>
+                <a:lnTo>
+                  <a:pt x="1286735" y="132185"/>
+                </a:lnTo>
+                <a:close/>
+                <a:lnTo>
+                  <a:pt x="1291781" y="129060"/>
+                </a:lnTo>
+                <a:close/>
+                <a:lnTo>
+                  <a:pt x="1296827" y="125927"/>
+                </a:lnTo>
+                <a:close/>
+                <a:lnTo>
+                  <a:pt x="1301873" y="122787"/>
+                </a:lnTo>
+                <a:close/>
+                <a:lnTo>
+                  <a:pt x="1306919" y="119640"/>
+                </a:lnTo>
+                <a:close/>
+                <a:lnTo>
+                  <a:pt x="1311965" y="116493"/>
+                </a:lnTo>
+                <a:close/>
+                <a:lnTo>
+                  <a:pt x="1317011" y="113356"/>
+                </a:lnTo>
+                <a:close/>
+                <a:lnTo>
+                  <a:pt x="1322057" y="110240"/>
+                </a:lnTo>
+                <a:close/>
+                <a:lnTo>
+                  <a:pt x="1327103" y="107154"/>
+                </a:lnTo>
+                <a:close/>
+                <a:lnTo>
+                  <a:pt x="1332149" y="104102"/>
+                </a:lnTo>
+                <a:close/>
+                <a:lnTo>
+                  <a:pt x="1337195" y="101075"/>
+                </a:lnTo>
+                <a:close/>
+                <a:lnTo>
+                  <a:pt x="1342241" y="98061"/>
+                </a:lnTo>
+                <a:close/>
+                <a:lnTo>
+                  <a:pt x="1347287" y="95051"/>
+                </a:lnTo>
+                <a:close/>
+                <a:lnTo>
+                  <a:pt x="1352333" y="92033"/>
+                </a:lnTo>
+                <a:close/>
+                <a:lnTo>
+                  <a:pt x="1357379" y="89007"/>
+                </a:lnTo>
+                <a:close/>
+                <a:lnTo>
+                  <a:pt x="1362425" y="85977"/>
+                </a:lnTo>
+                <a:close/>
+                <a:lnTo>
+                  <a:pt x="1367471" y="82946"/>
+                </a:lnTo>
+                <a:close/>
+                <a:lnTo>
+                  <a:pt x="1372517" y="79917"/>
+                </a:lnTo>
+                <a:close/>
+                <a:lnTo>
+                  <a:pt x="1377563" y="76892"/>
+                </a:lnTo>
+                <a:close/>
+                <a:lnTo>
+                  <a:pt x="1382609" y="73868"/>
+                </a:lnTo>
+                <a:close/>
+                <a:lnTo>
+                  <a:pt x="1387656" y="70842"/>
+                </a:lnTo>
+                <a:close/>
+                <a:lnTo>
+                  <a:pt x="1392702" y="67810"/>
+                </a:lnTo>
+                <a:close/>
+                <a:lnTo>
+                  <a:pt x="1397748" y="64768"/>
+                </a:lnTo>
+                <a:close/>
+                <a:lnTo>
+                  <a:pt x="1402794" y="61723"/>
+                </a:lnTo>
+                <a:close/>
+                <a:lnTo>
+                  <a:pt x="1407840" y="58685"/>
+                </a:lnTo>
+                <a:close/>
+                <a:lnTo>
+                  <a:pt x="1412886" y="55665"/>
+                </a:lnTo>
+                <a:close/>
+                <a:lnTo>
+                  <a:pt x="1417932" y="52674"/>
+                </a:lnTo>
+                <a:close/>
+                <a:lnTo>
+                  <a:pt x="1422978" y="49718"/>
+                </a:lnTo>
+                <a:close/>
+                <a:lnTo>
+                  <a:pt x="1428024" y="46789"/>
+                </a:lnTo>
+                <a:close/>
+                <a:lnTo>
+                  <a:pt x="1433070" y="43876"/>
+                </a:lnTo>
+                <a:close/>
+                <a:lnTo>
+                  <a:pt x="1438116" y="40967"/>
+                </a:lnTo>
+                <a:close/>
+                <a:lnTo>
+                  <a:pt x="1443162" y="38053"/>
+                </a:lnTo>
+                <a:close/>
+                <a:lnTo>
+                  <a:pt x="1448208" y="35131"/>
+                </a:lnTo>
+                <a:close/>
+                <a:lnTo>
+                  <a:pt x="1453254" y="32202"/>
+                </a:lnTo>
+                <a:close/>
+                <a:lnTo>
+                  <a:pt x="1458300" y="29271"/>
+                </a:lnTo>
+                <a:close/>
+                <a:lnTo>
+                  <a:pt x="1463346" y="26340"/>
+                </a:lnTo>
+                <a:close/>
+                <a:lnTo>
+                  <a:pt x="1468392" y="23411"/>
+                </a:lnTo>
+                <a:close/>
+                <a:lnTo>
+                  <a:pt x="1473438" y="20483"/>
+                </a:lnTo>
+                <a:close/>
+                <a:lnTo>
+                  <a:pt x="1478484" y="17557"/>
+                </a:lnTo>
+                <a:close/>
+                <a:lnTo>
+                  <a:pt x="1483530" y="14632"/>
+                </a:lnTo>
+                <a:close/>
+                <a:lnTo>
+                  <a:pt x="1488576" y="11708"/>
+                </a:lnTo>
+                <a:close/>
+                <a:lnTo>
+                  <a:pt x="1493622" y="8783"/>
+                </a:lnTo>
+                <a:close/>
+                <a:lnTo>
+                  <a:pt x="1498668" y="5857"/>
+                </a:lnTo>
+                <a:close/>
+                <a:lnTo>
+                  <a:pt x="1503714" y="2929"/>
+                </a:lnTo>
+                <a:close/>
+                <a:lnTo>
+                  <a:pt x="1508760" y="0"/>
                 </a:lnTo>
                 <a:close/>
               </a:path>
@@ -4389,7 +4389,7 @@
           </a:custGeom>
           <a:ln w="31750">
             <a:solidFill>
-              <a:srgbClr val="00E5FF"/>
+              <a:srgbClr val="FFFFFF"/>
             </a:solidFill>
           </a:ln>
         </p:spPr>
@@ -4423,8 +4423,8 @@
         </p:nvSpPr>
         <p:spPr>
           <a:xfrm>
-            <a:off x="5715000" y="759226"/>
-            <a:ext cx="1143000" cy="1035290"/>
+            <a:off x="6172200" y="877824"/>
+            <a:ext cx="914400" cy="413766"/>
           </a:xfrm>
           <a:custGeom>
             <a:avLst/>
@@ -4433,1204 +4433,1204 @@
             <a:cxnLst/>
             <a:rect l="l" t="t" r="r" b="b"/>
             <a:pathLst>
-              <a:path w="1143000" h="1035290">
+              <a:path w="914400" h="413766">
                 <a:moveTo>
-                  <a:pt x="0" y="1035284"/>
+                  <a:pt x="0" y="413766"/>
                 </a:moveTo>
                 <a:lnTo>
-                  <a:pt x="3823" y="1035290"/>
-                </a:lnTo>
-                <a:close/>
-                <a:lnTo>
-                  <a:pt x="7645" y="1035275"/>
-                </a:lnTo>
-                <a:close/>
-                <a:lnTo>
-                  <a:pt x="11468" y="1035238"/>
-                </a:lnTo>
-                <a:close/>
-                <a:lnTo>
-                  <a:pt x="15291" y="1035175"/>
-                </a:lnTo>
-                <a:close/>
-                <a:lnTo>
-                  <a:pt x="19114" y="1035084"/>
-                </a:lnTo>
-                <a:close/>
-                <a:lnTo>
-                  <a:pt x="22936" y="1034961"/>
-                </a:lnTo>
-                <a:close/>
-                <a:lnTo>
-                  <a:pt x="26759" y="1034806"/>
-                </a:lnTo>
-                <a:close/>
-                <a:lnTo>
-                  <a:pt x="30582" y="1034621"/>
-                </a:lnTo>
-                <a:close/>
-                <a:lnTo>
-                  <a:pt x="34405" y="1034409"/>
-                </a:lnTo>
-                <a:close/>
-                <a:lnTo>
-                  <a:pt x="38227" y="1034172"/>
-                </a:lnTo>
-                <a:close/>
-                <a:lnTo>
-                  <a:pt x="42050" y="1033912"/>
-                </a:lnTo>
-                <a:close/>
-                <a:lnTo>
-                  <a:pt x="45873" y="1033626"/>
-                </a:lnTo>
-                <a:close/>
-                <a:lnTo>
-                  <a:pt x="49696" y="1033315"/>
-                </a:lnTo>
-                <a:close/>
-                <a:lnTo>
-                  <a:pt x="53518" y="1032978"/>
-                </a:lnTo>
-                <a:close/>
-                <a:lnTo>
-                  <a:pt x="57341" y="1032613"/>
-                </a:lnTo>
-                <a:close/>
-                <a:lnTo>
-                  <a:pt x="61164" y="1032221"/>
-                </a:lnTo>
-                <a:close/>
-                <a:lnTo>
-                  <a:pt x="64987" y="1031805"/>
-                </a:lnTo>
-                <a:close/>
-                <a:lnTo>
-                  <a:pt x="68809" y="1031371"/>
-                </a:lnTo>
-                <a:close/>
-                <a:lnTo>
-                  <a:pt x="72632" y="1030921"/>
-                </a:lnTo>
-                <a:close/>
-                <a:lnTo>
-                  <a:pt x="76455" y="1030448"/>
-                </a:lnTo>
-                <a:close/>
-                <a:lnTo>
-                  <a:pt x="80278" y="1029944"/>
-                </a:lnTo>
-                <a:close/>
-                <a:lnTo>
-                  <a:pt x="84100" y="1029404"/>
-                </a:lnTo>
-                <a:close/>
-                <a:lnTo>
-                  <a:pt x="87923" y="1028834"/>
-                </a:lnTo>
-                <a:close/>
-                <a:lnTo>
-                  <a:pt x="91746" y="1028241"/>
-                </a:lnTo>
-                <a:close/>
-                <a:lnTo>
-                  <a:pt x="95569" y="1027630"/>
-                </a:lnTo>
-                <a:close/>
-                <a:lnTo>
-                  <a:pt x="99391" y="1027002"/>
-                </a:lnTo>
-                <a:close/>
-                <a:lnTo>
-                  <a:pt x="103214" y="1026355"/>
-                </a:lnTo>
-                <a:close/>
-                <a:lnTo>
-                  <a:pt x="107037" y="1025688"/>
-                </a:lnTo>
-                <a:close/>
-                <a:lnTo>
-                  <a:pt x="110860" y="1024999"/>
-                </a:lnTo>
-                <a:close/>
-                <a:lnTo>
-                  <a:pt x="114682" y="1024284"/>
-                </a:lnTo>
-                <a:close/>
-                <a:lnTo>
-                  <a:pt x="118505" y="1023544"/>
-                </a:lnTo>
-                <a:close/>
-                <a:lnTo>
-                  <a:pt x="122328" y="1022776"/>
-                </a:lnTo>
-                <a:close/>
-                <a:lnTo>
-                  <a:pt x="126151" y="1021982"/>
-                </a:lnTo>
-                <a:close/>
-                <a:lnTo>
-                  <a:pt x="129973" y="1021162"/>
-                </a:lnTo>
-                <a:close/>
-                <a:lnTo>
-                  <a:pt x="133796" y="1020317"/>
-                </a:lnTo>
-                <a:close/>
-                <a:lnTo>
-                  <a:pt x="137619" y="1019451"/>
-                </a:lnTo>
-                <a:close/>
-                <a:lnTo>
-                  <a:pt x="141441" y="1018566"/>
-                </a:lnTo>
-                <a:close/>
-                <a:lnTo>
-                  <a:pt x="145264" y="1017661"/>
-                </a:lnTo>
-                <a:close/>
-                <a:lnTo>
-                  <a:pt x="149087" y="1016738"/>
-                </a:lnTo>
-                <a:close/>
-                <a:lnTo>
-                  <a:pt x="152910" y="1015794"/>
-                </a:lnTo>
-                <a:close/>
-                <a:lnTo>
-                  <a:pt x="156732" y="1014828"/>
-                </a:lnTo>
-                <a:close/>
-                <a:lnTo>
-                  <a:pt x="160555" y="1013838"/>
-                </a:lnTo>
-                <a:close/>
-                <a:lnTo>
-                  <a:pt x="164378" y="1012822"/>
-                </a:lnTo>
-                <a:close/>
-                <a:lnTo>
-                  <a:pt x="168201" y="1011778"/>
-                </a:lnTo>
-                <a:close/>
-                <a:lnTo>
-                  <a:pt x="172023" y="1010707"/>
-                </a:lnTo>
-                <a:close/>
-                <a:lnTo>
-                  <a:pt x="175846" y="1009609"/>
-                </a:lnTo>
-                <a:close/>
-                <a:lnTo>
-                  <a:pt x="179669" y="1008489"/>
-                </a:lnTo>
-                <a:close/>
-                <a:lnTo>
-                  <a:pt x="183492" y="1007348"/>
-                </a:lnTo>
-                <a:close/>
-                <a:lnTo>
-                  <a:pt x="187314" y="1006190"/>
-                </a:lnTo>
-                <a:close/>
-                <a:lnTo>
-                  <a:pt x="191137" y="1005011"/>
-                </a:lnTo>
-                <a:close/>
-                <a:lnTo>
-                  <a:pt x="194960" y="1003804"/>
-                </a:lnTo>
-                <a:close/>
-                <a:lnTo>
-                  <a:pt x="198783" y="1002570"/>
-                </a:lnTo>
-                <a:close/>
-                <a:lnTo>
-                  <a:pt x="202605" y="1001310"/>
-                </a:lnTo>
-                <a:close/>
-                <a:lnTo>
-                  <a:pt x="206428" y="1000031"/>
-                </a:lnTo>
-                <a:close/>
-                <a:lnTo>
-                  <a:pt x="210251" y="998735"/>
-                </a:lnTo>
-                <a:close/>
-                <a:lnTo>
-                  <a:pt x="214074" y="997417"/>
-                </a:lnTo>
-                <a:close/>
-                <a:lnTo>
-                  <a:pt x="217896" y="996073"/>
-                </a:lnTo>
-                <a:close/>
-                <a:lnTo>
-                  <a:pt x="221719" y="994700"/>
-                </a:lnTo>
-                <a:close/>
-                <a:lnTo>
-                  <a:pt x="225542" y="993303"/>
-                </a:lnTo>
-                <a:close/>
-                <a:lnTo>
-                  <a:pt x="229365" y="991885"/>
-                </a:lnTo>
-                <a:close/>
-                <a:lnTo>
-                  <a:pt x="233187" y="990450"/>
-                </a:lnTo>
-                <a:close/>
-                <a:lnTo>
-                  <a:pt x="237010" y="988994"/>
-                </a:lnTo>
-                <a:close/>
-                <a:lnTo>
-                  <a:pt x="240833" y="987513"/>
-                </a:lnTo>
-                <a:close/>
-                <a:lnTo>
-                  <a:pt x="244656" y="986006"/>
-                </a:lnTo>
-                <a:close/>
-                <a:lnTo>
-                  <a:pt x="248478" y="984471"/>
-                </a:lnTo>
-                <a:close/>
-                <a:lnTo>
-                  <a:pt x="252301" y="982909"/>
-                </a:lnTo>
-                <a:close/>
-                <a:lnTo>
-                  <a:pt x="256124" y="981321"/>
-                </a:lnTo>
-                <a:close/>
-                <a:lnTo>
-                  <a:pt x="259946" y="979709"/>
-                </a:lnTo>
-                <a:close/>
-                <a:lnTo>
-                  <a:pt x="263769" y="978077"/>
-                </a:lnTo>
-                <a:close/>
-                <a:lnTo>
-                  <a:pt x="267592" y="976424"/>
-                </a:lnTo>
-                <a:close/>
-                <a:lnTo>
-                  <a:pt x="271415" y="974753"/>
-                </a:lnTo>
-                <a:close/>
-                <a:lnTo>
-                  <a:pt x="275237" y="973063"/>
-                </a:lnTo>
-                <a:close/>
-                <a:lnTo>
-                  <a:pt x="279060" y="971354"/>
-                </a:lnTo>
-                <a:close/>
-                <a:lnTo>
-                  <a:pt x="282883" y="969621"/>
-                </a:lnTo>
-                <a:close/>
-                <a:lnTo>
-                  <a:pt x="286706" y="967862"/>
-                </a:lnTo>
-                <a:close/>
-                <a:lnTo>
-                  <a:pt x="290528" y="966074"/>
-                </a:lnTo>
-                <a:close/>
-                <a:lnTo>
-                  <a:pt x="294351" y="964262"/>
-                </a:lnTo>
-                <a:close/>
-                <a:lnTo>
-                  <a:pt x="298174" y="962432"/>
-                </a:lnTo>
-                <a:close/>
-                <a:lnTo>
-                  <a:pt x="301997" y="960583"/>
-                </a:lnTo>
-                <a:close/>
-                <a:lnTo>
-                  <a:pt x="305819" y="958713"/>
-                </a:lnTo>
-                <a:close/>
-                <a:lnTo>
-                  <a:pt x="309642" y="956816"/>
-                </a:lnTo>
-                <a:close/>
-                <a:lnTo>
-                  <a:pt x="313465" y="954891"/>
-                </a:lnTo>
-                <a:close/>
-                <a:lnTo>
-                  <a:pt x="317288" y="952941"/>
-                </a:lnTo>
-                <a:close/>
-                <a:lnTo>
-                  <a:pt x="321110" y="950972"/>
-                </a:lnTo>
-                <a:close/>
-                <a:lnTo>
-                  <a:pt x="324933" y="948985"/>
-                </a:lnTo>
-                <a:close/>
-                <a:lnTo>
-                  <a:pt x="328756" y="946977"/>
-                </a:lnTo>
-                <a:close/>
-                <a:lnTo>
-                  <a:pt x="332579" y="944943"/>
-                </a:lnTo>
-                <a:close/>
-                <a:lnTo>
-                  <a:pt x="336401" y="942880"/>
-                </a:lnTo>
-                <a:close/>
-                <a:lnTo>
-                  <a:pt x="340224" y="940792"/>
-                </a:lnTo>
-                <a:close/>
-                <a:lnTo>
-                  <a:pt x="344047" y="938683"/>
-                </a:lnTo>
-                <a:close/>
-                <a:lnTo>
-                  <a:pt x="347870" y="936555"/>
-                </a:lnTo>
-                <a:close/>
-                <a:lnTo>
-                  <a:pt x="351692" y="934409"/>
-                </a:lnTo>
-                <a:close/>
-                <a:lnTo>
-                  <a:pt x="355515" y="932244"/>
-                </a:lnTo>
-                <a:close/>
-                <a:lnTo>
-                  <a:pt x="359338" y="930059"/>
-                </a:lnTo>
-                <a:close/>
-                <a:lnTo>
-                  <a:pt x="363161" y="927850"/>
-                </a:lnTo>
-                <a:close/>
-                <a:lnTo>
-                  <a:pt x="366983" y="925615"/>
-                </a:lnTo>
-                <a:close/>
-                <a:lnTo>
-                  <a:pt x="370806" y="923351"/>
-                </a:lnTo>
-                <a:close/>
-                <a:lnTo>
-                  <a:pt x="374629" y="921064"/>
-                </a:lnTo>
-                <a:close/>
-                <a:lnTo>
-                  <a:pt x="378452" y="918758"/>
-                </a:lnTo>
-                <a:close/>
-                <a:lnTo>
-                  <a:pt x="382274" y="916433"/>
-                </a:lnTo>
-                <a:close/>
-                <a:lnTo>
-                  <a:pt x="386097" y="914088"/>
-                </a:lnTo>
-                <a:close/>
-                <a:lnTo>
-                  <a:pt x="389920" y="911717"/>
-                </a:lnTo>
-                <a:close/>
-                <a:lnTo>
-                  <a:pt x="393742" y="909319"/>
-                </a:lnTo>
-                <a:close/>
-                <a:lnTo>
-                  <a:pt x="397565" y="906893"/>
-                </a:lnTo>
-                <a:close/>
-                <a:lnTo>
-                  <a:pt x="401388" y="904440"/>
-                </a:lnTo>
-                <a:close/>
-                <a:lnTo>
-                  <a:pt x="405211" y="901962"/>
-                </a:lnTo>
-                <a:close/>
-                <a:lnTo>
-                  <a:pt x="409033" y="899460"/>
-                </a:lnTo>
-                <a:close/>
-                <a:lnTo>
-                  <a:pt x="412856" y="896941"/>
-                </a:lnTo>
-                <a:close/>
-                <a:lnTo>
-                  <a:pt x="416679" y="894402"/>
-                </a:lnTo>
-                <a:close/>
-                <a:lnTo>
-                  <a:pt x="420502" y="891842"/>
-                </a:lnTo>
-                <a:close/>
-                <a:lnTo>
-                  <a:pt x="424324" y="889253"/>
-                </a:lnTo>
-                <a:close/>
-                <a:lnTo>
-                  <a:pt x="428147" y="886637"/>
-                </a:lnTo>
-                <a:close/>
-                <a:lnTo>
-                  <a:pt x="431970" y="883997"/>
-                </a:lnTo>
-                <a:close/>
-                <a:lnTo>
-                  <a:pt x="435793" y="881338"/>
-                </a:lnTo>
-                <a:close/>
-                <a:lnTo>
-                  <a:pt x="439615" y="878662"/>
-                </a:lnTo>
-                <a:close/>
-                <a:lnTo>
-                  <a:pt x="443438" y="875963"/>
-                </a:lnTo>
-                <a:close/>
-                <a:lnTo>
-                  <a:pt x="447261" y="873237"/>
-                </a:lnTo>
-                <a:close/>
-                <a:lnTo>
-                  <a:pt x="451084" y="870483"/>
-                </a:lnTo>
-                <a:close/>
-                <a:lnTo>
-                  <a:pt x="454906" y="867705"/>
-                </a:lnTo>
-                <a:close/>
-                <a:lnTo>
-                  <a:pt x="458729" y="864908"/>
-                </a:lnTo>
-                <a:close/>
-                <a:lnTo>
-                  <a:pt x="462552" y="862093"/>
-                </a:lnTo>
-                <a:close/>
-                <a:lnTo>
-                  <a:pt x="466375" y="859256"/>
-                </a:lnTo>
-                <a:close/>
-                <a:lnTo>
-                  <a:pt x="470197" y="856393"/>
-                </a:lnTo>
-                <a:close/>
-                <a:lnTo>
-                  <a:pt x="474020" y="853503"/>
-                </a:lnTo>
-                <a:close/>
-                <a:lnTo>
-                  <a:pt x="477843" y="850587"/>
-                </a:lnTo>
-                <a:close/>
-                <a:lnTo>
-                  <a:pt x="481666" y="847645"/>
-                </a:lnTo>
-                <a:close/>
-                <a:lnTo>
-                  <a:pt x="485488" y="844679"/>
-                </a:lnTo>
-                <a:close/>
-                <a:lnTo>
-                  <a:pt x="489311" y="841686"/>
-                </a:lnTo>
-                <a:close/>
-                <a:lnTo>
-                  <a:pt x="493134" y="838666"/>
-                </a:lnTo>
-                <a:close/>
-                <a:lnTo>
-                  <a:pt x="496957" y="835620"/>
-                </a:lnTo>
-                <a:close/>
-                <a:lnTo>
-                  <a:pt x="500779" y="832551"/>
-                </a:lnTo>
-                <a:close/>
-                <a:lnTo>
-                  <a:pt x="504602" y="829463"/>
-                </a:lnTo>
-                <a:close/>
-                <a:lnTo>
-                  <a:pt x="508425" y="826357"/>
-                </a:lnTo>
-                <a:close/>
-                <a:lnTo>
-                  <a:pt x="512247" y="823228"/>
-                </a:lnTo>
-                <a:close/>
-                <a:lnTo>
-                  <a:pt x="516070" y="820075"/>
-                </a:lnTo>
-                <a:close/>
-                <a:lnTo>
-                  <a:pt x="519893" y="816894"/>
-                </a:lnTo>
-                <a:close/>
-                <a:lnTo>
-                  <a:pt x="523716" y="813686"/>
-                </a:lnTo>
-                <a:close/>
-                <a:lnTo>
-                  <a:pt x="527538" y="810450"/>
-                </a:lnTo>
-                <a:close/>
-                <a:lnTo>
-                  <a:pt x="531361" y="807189"/>
-                </a:lnTo>
-                <a:close/>
-                <a:lnTo>
-                  <a:pt x="535184" y="803906"/>
-                </a:lnTo>
-                <a:close/>
-                <a:lnTo>
-                  <a:pt x="539007" y="800603"/>
-                </a:lnTo>
-                <a:close/>
-                <a:lnTo>
-                  <a:pt x="542829" y="797282"/>
-                </a:lnTo>
-                <a:close/>
-                <a:lnTo>
-                  <a:pt x="546652" y="793939"/>
-                </a:lnTo>
-                <a:close/>
-                <a:lnTo>
-                  <a:pt x="550475" y="790571"/>
-                </a:lnTo>
-                <a:close/>
-                <a:lnTo>
-                  <a:pt x="554298" y="787176"/>
-                </a:lnTo>
-                <a:close/>
-                <a:lnTo>
-                  <a:pt x="558120" y="783753"/>
-                </a:lnTo>
-                <a:close/>
-                <a:lnTo>
-                  <a:pt x="561943" y="780300"/>
-                </a:lnTo>
-                <a:close/>
-                <a:lnTo>
-                  <a:pt x="565766" y="776820"/>
-                </a:lnTo>
-                <a:close/>
-                <a:lnTo>
-                  <a:pt x="569589" y="773323"/>
-                </a:lnTo>
-                <a:close/>
-                <a:lnTo>
-                  <a:pt x="573411" y="769817"/>
-                </a:lnTo>
-                <a:close/>
-                <a:lnTo>
-                  <a:pt x="577234" y="766299"/>
-                </a:lnTo>
-                <a:close/>
-                <a:lnTo>
-                  <a:pt x="581057" y="762757"/>
-                </a:lnTo>
-                <a:close/>
-                <a:lnTo>
-                  <a:pt x="584880" y="759181"/>
-                </a:lnTo>
-                <a:close/>
-                <a:lnTo>
-                  <a:pt x="588702" y="755568"/>
-                </a:lnTo>
-                <a:close/>
-                <a:lnTo>
-                  <a:pt x="592525" y="751928"/>
-                </a:lnTo>
-                <a:close/>
-                <a:lnTo>
-                  <a:pt x="596348" y="748271"/>
-                </a:lnTo>
-                <a:close/>
-                <a:lnTo>
-                  <a:pt x="600171" y="744597"/>
-                </a:lnTo>
-                <a:close/>
-                <a:lnTo>
-                  <a:pt x="603993" y="740902"/>
-                </a:lnTo>
-                <a:close/>
-                <a:lnTo>
-                  <a:pt x="607816" y="737178"/>
-                </a:lnTo>
-                <a:close/>
-                <a:lnTo>
-                  <a:pt x="611639" y="733426"/>
-                </a:lnTo>
-                <a:close/>
-                <a:lnTo>
-                  <a:pt x="615462" y="729651"/>
-                </a:lnTo>
-                <a:close/>
-                <a:lnTo>
-                  <a:pt x="619284" y="725858"/>
-                </a:lnTo>
-                <a:close/>
-                <a:lnTo>
-                  <a:pt x="623107" y="722047"/>
-                </a:lnTo>
-                <a:close/>
-                <a:lnTo>
-                  <a:pt x="626930" y="718213"/>
-                </a:lnTo>
-                <a:close/>
-                <a:lnTo>
-                  <a:pt x="630753" y="714351"/>
-                </a:lnTo>
-                <a:close/>
-                <a:lnTo>
-                  <a:pt x="634575" y="710462"/>
-                </a:lnTo>
-                <a:close/>
-                <a:lnTo>
-                  <a:pt x="638398" y="706548"/>
-                </a:lnTo>
-                <a:close/>
-                <a:lnTo>
-                  <a:pt x="642221" y="702615"/>
-                </a:lnTo>
-                <a:close/>
-                <a:lnTo>
-                  <a:pt x="646043" y="698662"/>
-                </a:lnTo>
-                <a:close/>
-                <a:lnTo>
-                  <a:pt x="649866" y="694692"/>
-                </a:lnTo>
-                <a:close/>
-                <a:lnTo>
-                  <a:pt x="653689" y="690702"/>
-                </a:lnTo>
-                <a:close/>
-                <a:lnTo>
-                  <a:pt x="657512" y="686691"/>
-                </a:lnTo>
-                <a:close/>
-                <a:lnTo>
-                  <a:pt x="661334" y="682657"/>
-                </a:lnTo>
-                <a:close/>
-                <a:lnTo>
-                  <a:pt x="665157" y="678594"/>
-                </a:lnTo>
-                <a:close/>
-                <a:lnTo>
-                  <a:pt x="668980" y="674505"/>
-                </a:lnTo>
-                <a:close/>
-                <a:lnTo>
-                  <a:pt x="672803" y="670393"/>
-                </a:lnTo>
-                <a:close/>
-                <a:lnTo>
-                  <a:pt x="676625" y="666261"/>
-                </a:lnTo>
-                <a:close/>
-                <a:lnTo>
-                  <a:pt x="680448" y="662110"/>
-                </a:lnTo>
-                <a:close/>
-                <a:lnTo>
-                  <a:pt x="684271" y="657939"/>
-                </a:lnTo>
-                <a:close/>
-                <a:lnTo>
-                  <a:pt x="688094" y="653748"/>
-                </a:lnTo>
-                <a:close/>
-                <a:lnTo>
-                  <a:pt x="691916" y="649535"/>
-                </a:lnTo>
-                <a:close/>
-                <a:lnTo>
-                  <a:pt x="695739" y="645302"/>
-                </a:lnTo>
-                <a:close/>
-                <a:lnTo>
-                  <a:pt x="699562" y="641051"/>
-                </a:lnTo>
-                <a:close/>
-                <a:lnTo>
-                  <a:pt x="703385" y="636780"/>
-                </a:lnTo>
-                <a:close/>
-                <a:lnTo>
-                  <a:pt x="707207" y="632484"/>
-                </a:lnTo>
-                <a:close/>
-                <a:lnTo>
-                  <a:pt x="711030" y="628161"/>
-                </a:lnTo>
-                <a:close/>
-                <a:lnTo>
-                  <a:pt x="714853" y="623811"/>
-                </a:lnTo>
-                <a:close/>
-                <a:lnTo>
-                  <a:pt x="718676" y="619438"/>
-                </a:lnTo>
-                <a:close/>
-                <a:lnTo>
-                  <a:pt x="722498" y="615045"/>
-                </a:lnTo>
-                <a:close/>
-                <a:lnTo>
-                  <a:pt x="726321" y="610632"/>
-                </a:lnTo>
-                <a:close/>
-                <a:lnTo>
-                  <a:pt x="730144" y="606201"/>
-                </a:lnTo>
-                <a:close/>
-                <a:lnTo>
-                  <a:pt x="733967" y="601751"/>
-                </a:lnTo>
-                <a:close/>
-                <a:lnTo>
-                  <a:pt x="737789" y="597281"/>
-                </a:lnTo>
-                <a:close/>
-                <a:lnTo>
-                  <a:pt x="741612" y="592785"/>
-                </a:lnTo>
-                <a:close/>
-                <a:lnTo>
-                  <a:pt x="745435" y="588263"/>
-                </a:lnTo>
-                <a:close/>
-                <a:lnTo>
-                  <a:pt x="749258" y="583713"/>
-                </a:lnTo>
-                <a:close/>
-                <a:lnTo>
-                  <a:pt x="753080" y="579141"/>
-                </a:lnTo>
-                <a:close/>
-                <a:lnTo>
-                  <a:pt x="756903" y="574548"/>
-                </a:lnTo>
-                <a:close/>
-                <a:lnTo>
-                  <a:pt x="760726" y="569936"/>
-                </a:lnTo>
-                <a:close/>
-                <a:lnTo>
-                  <a:pt x="764548" y="565306"/>
-                </a:lnTo>
-                <a:close/>
-                <a:lnTo>
-                  <a:pt x="768371" y="560657"/>
-                </a:lnTo>
-                <a:close/>
-                <a:lnTo>
-                  <a:pt x="772194" y="555986"/>
-                </a:lnTo>
-                <a:close/>
-                <a:lnTo>
-                  <a:pt x="776017" y="551291"/>
-                </a:lnTo>
-                <a:close/>
-                <a:lnTo>
-                  <a:pt x="779839" y="546569"/>
-                </a:lnTo>
-                <a:close/>
-                <a:lnTo>
-                  <a:pt x="783662" y="541820"/>
-                </a:lnTo>
-                <a:close/>
-                <a:lnTo>
-                  <a:pt x="787485" y="537048"/>
-                </a:lnTo>
-                <a:close/>
-                <a:lnTo>
-                  <a:pt x="791308" y="532256"/>
-                </a:lnTo>
-                <a:close/>
-                <a:lnTo>
-                  <a:pt x="795130" y="527445"/>
-                </a:lnTo>
-                <a:close/>
-                <a:lnTo>
-                  <a:pt x="798953" y="522615"/>
-                </a:lnTo>
-                <a:close/>
-                <a:lnTo>
-                  <a:pt x="802776" y="517767"/>
-                </a:lnTo>
-                <a:close/>
-                <a:lnTo>
-                  <a:pt x="806599" y="512897"/>
-                </a:lnTo>
-                <a:close/>
-                <a:lnTo>
-                  <a:pt x="810421" y="508002"/>
-                </a:lnTo>
-                <a:close/>
-                <a:lnTo>
-                  <a:pt x="814244" y="503080"/>
-                </a:lnTo>
-                <a:close/>
-                <a:lnTo>
-                  <a:pt x="818067" y="498132"/>
-                </a:lnTo>
-                <a:close/>
-                <a:lnTo>
-                  <a:pt x="821890" y="493160"/>
-                </a:lnTo>
-                <a:close/>
-                <a:lnTo>
-                  <a:pt x="825712" y="488169"/>
-                </a:lnTo>
-                <a:close/>
-                <a:lnTo>
-                  <a:pt x="829535" y="483160"/>
-                </a:lnTo>
-                <a:close/>
-                <a:lnTo>
-                  <a:pt x="833358" y="478130"/>
-                </a:lnTo>
-                <a:close/>
-                <a:lnTo>
-                  <a:pt x="837181" y="473079"/>
-                </a:lnTo>
-                <a:close/>
-                <a:lnTo>
-                  <a:pt x="841003" y="468007"/>
-                </a:lnTo>
-                <a:close/>
-                <a:lnTo>
-                  <a:pt x="844826" y="462916"/>
-                </a:lnTo>
-                <a:close/>
-                <a:lnTo>
-                  <a:pt x="848649" y="457806"/>
-                </a:lnTo>
-                <a:close/>
-                <a:lnTo>
-                  <a:pt x="852472" y="452676"/>
-                </a:lnTo>
-                <a:close/>
-                <a:lnTo>
-                  <a:pt x="856294" y="447521"/>
-                </a:lnTo>
-                <a:close/>
-                <a:lnTo>
-                  <a:pt x="860117" y="442338"/>
-                </a:lnTo>
-                <a:close/>
-                <a:lnTo>
-                  <a:pt x="863940" y="437128"/>
-                </a:lnTo>
-                <a:close/>
-                <a:lnTo>
-                  <a:pt x="867763" y="431896"/>
-                </a:lnTo>
-                <a:close/>
-                <a:lnTo>
-                  <a:pt x="871585" y="426644"/>
-                </a:lnTo>
-                <a:close/>
-                <a:lnTo>
-                  <a:pt x="875408" y="421374"/>
-                </a:lnTo>
-                <a:close/>
-                <a:lnTo>
-                  <a:pt x="879231" y="416083"/>
-                </a:lnTo>
-                <a:close/>
-                <a:lnTo>
-                  <a:pt x="883054" y="410772"/>
-                </a:lnTo>
-                <a:close/>
-                <a:lnTo>
-                  <a:pt x="886876" y="405439"/>
-                </a:lnTo>
-                <a:close/>
-                <a:lnTo>
-                  <a:pt x="890699" y="400087"/>
-                </a:lnTo>
-                <a:close/>
-                <a:lnTo>
-                  <a:pt x="894522" y="394717"/>
-                </a:lnTo>
-                <a:close/>
-                <a:lnTo>
-                  <a:pt x="898344" y="389325"/>
-                </a:lnTo>
-                <a:close/>
-                <a:lnTo>
-                  <a:pt x="902167" y="383909"/>
-                </a:lnTo>
-                <a:close/>
-                <a:lnTo>
-                  <a:pt x="905990" y="378465"/>
-                </a:lnTo>
-                <a:close/>
-                <a:lnTo>
-                  <a:pt x="909813" y="372994"/>
-                </a:lnTo>
-                <a:close/>
-                <a:lnTo>
-                  <a:pt x="913635" y="367501"/>
-                </a:lnTo>
-                <a:close/>
-                <a:lnTo>
-                  <a:pt x="917458" y="361989"/>
-                </a:lnTo>
-                <a:close/>
-                <a:lnTo>
-                  <a:pt x="921281" y="356458"/>
-                </a:lnTo>
-                <a:close/>
-                <a:lnTo>
-                  <a:pt x="925104" y="350907"/>
-                </a:lnTo>
-                <a:close/>
-                <a:lnTo>
-                  <a:pt x="928926" y="345335"/>
-                </a:lnTo>
-                <a:close/>
-                <a:lnTo>
-                  <a:pt x="932749" y="339742"/>
-                </a:lnTo>
-                <a:close/>
-                <a:lnTo>
-                  <a:pt x="936572" y="334129"/>
-                </a:lnTo>
-                <a:close/>
-                <a:lnTo>
-                  <a:pt x="940395" y="328495"/>
-                </a:lnTo>
-                <a:close/>
-                <a:lnTo>
-                  <a:pt x="944217" y="322841"/>
-                </a:lnTo>
-                <a:close/>
-                <a:lnTo>
-                  <a:pt x="948040" y="317167"/>
-                </a:lnTo>
-                <a:close/>
-                <a:lnTo>
-                  <a:pt x="951863" y="311471"/>
-                </a:lnTo>
-                <a:close/>
-                <a:lnTo>
-                  <a:pt x="955686" y="305755"/>
-                </a:lnTo>
-                <a:close/>
-                <a:lnTo>
-                  <a:pt x="959508" y="300020"/>
-                </a:lnTo>
-                <a:close/>
-                <a:lnTo>
-                  <a:pt x="963331" y="294267"/>
-                </a:lnTo>
-                <a:close/>
-                <a:lnTo>
-                  <a:pt x="967154" y="288492"/>
-                </a:lnTo>
-                <a:close/>
-                <a:lnTo>
-                  <a:pt x="970977" y="282691"/>
-                </a:lnTo>
-                <a:close/>
-                <a:lnTo>
-                  <a:pt x="974799" y="276860"/>
-                </a:lnTo>
-                <a:close/>
-                <a:lnTo>
-                  <a:pt x="978622" y="271004"/>
-                </a:lnTo>
-                <a:close/>
-                <a:lnTo>
-                  <a:pt x="982445" y="265131"/>
-                </a:lnTo>
-                <a:close/>
-                <a:lnTo>
-                  <a:pt x="986268" y="259248"/>
-                </a:lnTo>
-                <a:close/>
-                <a:lnTo>
-                  <a:pt x="990090" y="253351"/>
-                </a:lnTo>
-                <a:close/>
-                <a:lnTo>
-                  <a:pt x="993913" y="247431"/>
-                </a:lnTo>
-                <a:close/>
-                <a:lnTo>
-                  <a:pt x="997736" y="241482"/>
-                </a:lnTo>
-                <a:close/>
-                <a:lnTo>
-                  <a:pt x="1001559" y="235505"/>
-                </a:lnTo>
-                <a:close/>
-                <a:lnTo>
-                  <a:pt x="1005381" y="229505"/>
-                </a:lnTo>
-                <a:close/>
-                <a:lnTo>
-                  <a:pt x="1009204" y="223486"/>
-                </a:lnTo>
-                <a:close/>
-                <a:lnTo>
-                  <a:pt x="1013027" y="217448"/>
-                </a:lnTo>
-                <a:close/>
-                <a:lnTo>
-                  <a:pt x="1016849" y="211391"/>
-                </a:lnTo>
-                <a:close/>
-                <a:lnTo>
-                  <a:pt x="1020672" y="205313"/>
-                </a:lnTo>
-                <a:close/>
-                <a:lnTo>
-                  <a:pt x="1024495" y="199214"/>
-                </a:lnTo>
-                <a:close/>
-                <a:lnTo>
-                  <a:pt x="1028318" y="193095"/>
-                </a:lnTo>
-                <a:close/>
-                <a:lnTo>
-                  <a:pt x="1032140" y="186955"/>
-                </a:lnTo>
-                <a:close/>
-                <a:lnTo>
-                  <a:pt x="1035963" y="180794"/>
-                </a:lnTo>
-                <a:close/>
-                <a:lnTo>
-                  <a:pt x="1039786" y="174614"/>
-                </a:lnTo>
-                <a:close/>
-                <a:lnTo>
-                  <a:pt x="1043609" y="168412"/>
-                </a:lnTo>
-                <a:close/>
-                <a:lnTo>
-                  <a:pt x="1047431" y="162191"/>
-                </a:lnTo>
-                <a:close/>
-                <a:lnTo>
-                  <a:pt x="1051254" y="155949"/>
-                </a:lnTo>
-                <a:close/>
-                <a:lnTo>
-                  <a:pt x="1055077" y="149686"/>
-                </a:lnTo>
-                <a:close/>
-                <a:lnTo>
-                  <a:pt x="1058900" y="143403"/>
-                </a:lnTo>
-                <a:close/>
-                <a:lnTo>
-                  <a:pt x="1062722" y="137099"/>
-                </a:lnTo>
-                <a:close/>
-                <a:lnTo>
-                  <a:pt x="1066545" y="130775"/>
-                </a:lnTo>
-                <a:close/>
-                <a:lnTo>
-                  <a:pt x="1070368" y="124431"/>
-                </a:lnTo>
-                <a:close/>
-                <a:lnTo>
-                  <a:pt x="1074191" y="118066"/>
-                </a:lnTo>
-                <a:close/>
-                <a:lnTo>
-                  <a:pt x="1078013" y="111681"/>
-                </a:lnTo>
-                <a:close/>
-                <a:lnTo>
-                  <a:pt x="1081836" y="105275"/>
-                </a:lnTo>
-                <a:close/>
-                <a:lnTo>
-                  <a:pt x="1085659" y="98849"/>
-                </a:lnTo>
-                <a:close/>
-                <a:lnTo>
-                  <a:pt x="1089482" y="92402"/>
-                </a:lnTo>
-                <a:close/>
-                <a:lnTo>
-                  <a:pt x="1093304" y="85935"/>
-                </a:lnTo>
-                <a:close/>
-                <a:lnTo>
-                  <a:pt x="1097127" y="79447"/>
-                </a:lnTo>
-                <a:close/>
-                <a:lnTo>
-                  <a:pt x="1100950" y="72939"/>
-                </a:lnTo>
-                <a:close/>
-                <a:lnTo>
-                  <a:pt x="1104773" y="66411"/>
-                </a:lnTo>
-                <a:close/>
-                <a:lnTo>
-                  <a:pt x="1108595" y="59862"/>
-                </a:lnTo>
-                <a:close/>
-                <a:lnTo>
-                  <a:pt x="1112418" y="53292"/>
-                </a:lnTo>
-                <a:close/>
-                <a:lnTo>
-                  <a:pt x="1116241" y="46702"/>
-                </a:lnTo>
-                <a:close/>
-                <a:lnTo>
-                  <a:pt x="1120064" y="40092"/>
-                </a:lnTo>
-                <a:close/>
-                <a:lnTo>
-                  <a:pt x="1123886" y="33461"/>
-                </a:lnTo>
-                <a:close/>
-                <a:lnTo>
-                  <a:pt x="1127709" y="26810"/>
-                </a:lnTo>
-                <a:close/>
-                <a:lnTo>
-                  <a:pt x="1131532" y="20138"/>
-                </a:lnTo>
-                <a:close/>
-                <a:lnTo>
-                  <a:pt x="1135355" y="13446"/>
-                </a:lnTo>
-                <a:close/>
-                <a:lnTo>
-                  <a:pt x="1139177" y="6733"/>
-                </a:lnTo>
-                <a:close/>
-                <a:lnTo>
-                  <a:pt x="1143000" y="0"/>
+                  <a:pt x="3058" y="413711"/>
+                </a:lnTo>
+                <a:close/>
+                <a:lnTo>
+                  <a:pt x="6116" y="413654"/>
+                </a:lnTo>
+                <a:close/>
+                <a:lnTo>
+                  <a:pt x="9175" y="413594"/>
+                </a:lnTo>
+                <a:close/>
+                <a:lnTo>
+                  <a:pt x="12233" y="413532"/>
+                </a:lnTo>
+                <a:close/>
+                <a:lnTo>
+                  <a:pt x="15291" y="413469"/>
+                </a:lnTo>
+                <a:close/>
+                <a:lnTo>
+                  <a:pt x="18349" y="413405"/>
+                </a:lnTo>
+                <a:close/>
+                <a:lnTo>
+                  <a:pt x="21407" y="413340"/>
+                </a:lnTo>
+                <a:close/>
+                <a:lnTo>
+                  <a:pt x="24466" y="413275"/>
+                </a:lnTo>
+                <a:close/>
+                <a:lnTo>
+                  <a:pt x="27524" y="413210"/>
+                </a:lnTo>
+                <a:close/>
+                <a:lnTo>
+                  <a:pt x="30582" y="413146"/>
+                </a:lnTo>
+                <a:close/>
+                <a:lnTo>
+                  <a:pt x="33640" y="413083"/>
+                </a:lnTo>
+                <a:close/>
+                <a:lnTo>
+                  <a:pt x="36698" y="413021"/>
+                </a:lnTo>
+                <a:close/>
+                <a:lnTo>
+                  <a:pt x="39757" y="412961"/>
+                </a:lnTo>
+                <a:close/>
+                <a:lnTo>
+                  <a:pt x="42815" y="412904"/>
+                </a:lnTo>
+                <a:close/>
+                <a:lnTo>
+                  <a:pt x="45873" y="412849"/>
+                </a:lnTo>
+                <a:close/>
+                <a:lnTo>
+                  <a:pt x="48931" y="412797"/>
+                </a:lnTo>
+                <a:close/>
+                <a:lnTo>
+                  <a:pt x="51989" y="412746"/>
+                </a:lnTo>
+                <a:close/>
+                <a:lnTo>
+                  <a:pt x="55047" y="412693"/>
+                </a:lnTo>
+                <a:close/>
+                <a:lnTo>
+                  <a:pt x="58106" y="412638"/>
+                </a:lnTo>
+                <a:close/>
+                <a:lnTo>
+                  <a:pt x="61164" y="412577"/>
+                </a:lnTo>
+                <a:close/>
+                <a:lnTo>
+                  <a:pt x="64222" y="412509"/>
+                </a:lnTo>
+                <a:close/>
+                <a:lnTo>
+                  <a:pt x="67280" y="412431"/>
+                </a:lnTo>
+                <a:close/>
+                <a:lnTo>
+                  <a:pt x="70338" y="412342"/>
+                </a:lnTo>
+                <a:close/>
+                <a:lnTo>
+                  <a:pt x="73397" y="412241"/>
+                </a:lnTo>
+                <a:close/>
+                <a:lnTo>
+                  <a:pt x="76455" y="412129"/>
+                </a:lnTo>
+                <a:close/>
+                <a:lnTo>
+                  <a:pt x="79513" y="412009"/>
+                </a:lnTo>
+                <a:close/>
+                <a:lnTo>
+                  <a:pt x="82571" y="411881"/>
+                </a:lnTo>
+                <a:close/>
+                <a:lnTo>
+                  <a:pt x="85629" y="411747"/>
+                </a:lnTo>
+                <a:close/>
+                <a:lnTo>
+                  <a:pt x="88688" y="411608"/>
+                </a:lnTo>
+                <a:close/>
+                <a:lnTo>
+                  <a:pt x="91746" y="411466"/>
+                </a:lnTo>
+                <a:close/>
+                <a:lnTo>
+                  <a:pt x="94804" y="411320"/>
+                </a:lnTo>
+                <a:close/>
+                <a:lnTo>
+                  <a:pt x="97862" y="411168"/>
+                </a:lnTo>
+                <a:close/>
+                <a:lnTo>
+                  <a:pt x="100920" y="411007"/>
+                </a:lnTo>
+                <a:close/>
+                <a:lnTo>
+                  <a:pt x="103979" y="410833"/>
+                </a:lnTo>
+                <a:close/>
+                <a:lnTo>
+                  <a:pt x="107037" y="410644"/>
+                </a:lnTo>
+                <a:close/>
+                <a:lnTo>
+                  <a:pt x="110095" y="410434"/>
+                </a:lnTo>
+                <a:close/>
+                <a:lnTo>
+                  <a:pt x="113153" y="410202"/>
+                </a:lnTo>
+                <a:close/>
+                <a:lnTo>
+                  <a:pt x="116211" y="409944"/>
+                </a:lnTo>
+                <a:close/>
+                <a:lnTo>
+                  <a:pt x="119270" y="409662"/>
+                </a:lnTo>
+                <a:close/>
+                <a:lnTo>
+                  <a:pt x="122328" y="409362"/>
+                </a:lnTo>
+                <a:close/>
+                <a:lnTo>
+                  <a:pt x="125386" y="409048"/>
+                </a:lnTo>
+                <a:close/>
+                <a:lnTo>
+                  <a:pt x="128444" y="408728"/>
+                </a:lnTo>
+                <a:close/>
+                <a:lnTo>
+                  <a:pt x="131502" y="408405"/>
+                </a:lnTo>
+                <a:close/>
+                <a:lnTo>
+                  <a:pt x="134561" y="408086"/>
+                </a:lnTo>
+                <a:close/>
+                <a:lnTo>
+                  <a:pt x="137619" y="407777"/>
+                </a:lnTo>
+                <a:close/>
+                <a:lnTo>
+                  <a:pt x="140677" y="407479"/>
+                </a:lnTo>
+                <a:close/>
+                <a:lnTo>
+                  <a:pt x="143735" y="407189"/>
+                </a:lnTo>
+                <a:close/>
+                <a:lnTo>
+                  <a:pt x="146793" y="406901"/>
+                </a:lnTo>
+                <a:close/>
+                <a:lnTo>
+                  <a:pt x="149852" y="406609"/>
+                </a:lnTo>
+                <a:close/>
+                <a:lnTo>
+                  <a:pt x="152910" y="406307"/>
+                </a:lnTo>
+                <a:close/>
+                <a:lnTo>
+                  <a:pt x="155968" y="405990"/>
+                </a:lnTo>
+                <a:close/>
+                <a:lnTo>
+                  <a:pt x="159026" y="405652"/>
+                </a:lnTo>
+                <a:close/>
+                <a:lnTo>
+                  <a:pt x="162084" y="405287"/>
+                </a:lnTo>
+                <a:close/>
+                <a:lnTo>
+                  <a:pt x="165142" y="404897"/>
+                </a:lnTo>
+                <a:close/>
+                <a:lnTo>
+                  <a:pt x="168201" y="404486"/>
+                </a:lnTo>
+                <a:close/>
+                <a:lnTo>
+                  <a:pt x="171259" y="404056"/>
+                </a:lnTo>
+                <a:close/>
+                <a:lnTo>
+                  <a:pt x="174317" y="403613"/>
+                </a:lnTo>
+                <a:close/>
+                <a:lnTo>
+                  <a:pt x="177375" y="403161"/>
+                </a:lnTo>
+                <a:close/>
+                <a:lnTo>
+                  <a:pt x="180433" y="402703"/>
+                </a:lnTo>
+                <a:close/>
+                <a:lnTo>
+                  <a:pt x="183492" y="402244"/>
+                </a:lnTo>
+                <a:close/>
+                <a:lnTo>
+                  <a:pt x="186550" y="401786"/>
+                </a:lnTo>
+                <a:close/>
+                <a:lnTo>
+                  <a:pt x="189608" y="401325"/>
+                </a:lnTo>
+                <a:close/>
+                <a:lnTo>
+                  <a:pt x="192666" y="400856"/>
+                </a:lnTo>
+                <a:close/>
+                <a:lnTo>
+                  <a:pt x="195724" y="400377"/>
+                </a:lnTo>
+                <a:close/>
+                <a:lnTo>
+                  <a:pt x="198783" y="399882"/>
+                </a:lnTo>
+                <a:close/>
+                <a:lnTo>
+                  <a:pt x="201841" y="399368"/>
+                </a:lnTo>
+                <a:close/>
+                <a:lnTo>
+                  <a:pt x="204899" y="398831"/>
+                </a:lnTo>
+                <a:close/>
+                <a:lnTo>
+                  <a:pt x="207957" y="398267"/>
+                </a:lnTo>
+                <a:close/>
+                <a:lnTo>
+                  <a:pt x="211015" y="397678"/>
+                </a:lnTo>
+                <a:close/>
+                <a:lnTo>
+                  <a:pt x="214074" y="397071"/>
+                </a:lnTo>
+                <a:close/>
+                <a:lnTo>
+                  <a:pt x="217132" y="396450"/>
+                </a:lnTo>
+                <a:close/>
+                <a:lnTo>
+                  <a:pt x="220190" y="395823"/>
+                </a:lnTo>
+                <a:close/>
+                <a:lnTo>
+                  <a:pt x="223248" y="395194"/>
+                </a:lnTo>
+                <a:close/>
+                <a:lnTo>
+                  <a:pt x="226306" y="394569"/>
+                </a:lnTo>
+                <a:close/>
+                <a:lnTo>
+                  <a:pt x="229365" y="393954"/>
+                </a:lnTo>
+                <a:close/>
+                <a:lnTo>
+                  <a:pt x="232423" y="393351"/>
+                </a:lnTo>
+                <a:close/>
+                <a:lnTo>
+                  <a:pt x="235481" y="392756"/>
+                </a:lnTo>
+                <a:close/>
+                <a:lnTo>
+                  <a:pt x="238539" y="392161"/>
+                </a:lnTo>
+                <a:close/>
+                <a:lnTo>
+                  <a:pt x="241597" y="391563"/>
+                </a:lnTo>
+                <a:close/>
+                <a:lnTo>
+                  <a:pt x="244656" y="390954"/>
+                </a:lnTo>
+                <a:close/>
+                <a:lnTo>
+                  <a:pt x="247714" y="390329"/>
+                </a:lnTo>
+                <a:close/>
+                <a:lnTo>
+                  <a:pt x="250772" y="389683"/>
+                </a:lnTo>
+                <a:close/>
+                <a:lnTo>
+                  <a:pt x="253830" y="389011"/>
+                </a:lnTo>
+                <a:close/>
+                <a:lnTo>
+                  <a:pt x="256888" y="388312"/>
+                </a:lnTo>
+                <a:close/>
+                <a:lnTo>
+                  <a:pt x="259946" y="387593"/>
+                </a:lnTo>
+                <a:close/>
+                <a:lnTo>
+                  <a:pt x="263005" y="386856"/>
+                </a:lnTo>
+                <a:close/>
+                <a:lnTo>
+                  <a:pt x="266063" y="386106"/>
+                </a:lnTo>
+                <a:close/>
+                <a:lnTo>
+                  <a:pt x="269121" y="385347"/>
+                </a:lnTo>
+                <a:close/>
+                <a:lnTo>
+                  <a:pt x="272179" y="384583"/>
+                </a:lnTo>
+                <a:close/>
+                <a:lnTo>
+                  <a:pt x="275237" y="383819"/>
+                </a:lnTo>
+                <a:close/>
+                <a:lnTo>
+                  <a:pt x="278296" y="383054"/>
+                </a:lnTo>
+                <a:close/>
+                <a:lnTo>
+                  <a:pt x="281354" y="382287"/>
+                </a:lnTo>
+                <a:close/>
+                <a:lnTo>
+                  <a:pt x="284412" y="381512"/>
+                </a:lnTo>
+                <a:close/>
+                <a:lnTo>
+                  <a:pt x="287470" y="380725"/>
+                </a:lnTo>
+                <a:close/>
+                <a:lnTo>
+                  <a:pt x="290528" y="379923"/>
+                </a:lnTo>
+                <a:close/>
+                <a:lnTo>
+                  <a:pt x="293587" y="379101"/>
+                </a:lnTo>
+                <a:close/>
+                <a:lnTo>
+                  <a:pt x="296645" y="378255"/>
+                </a:lnTo>
+                <a:close/>
+                <a:lnTo>
+                  <a:pt x="299703" y="377382"/>
+                </a:lnTo>
+                <a:close/>
+                <a:lnTo>
+                  <a:pt x="302761" y="376486"/>
+                </a:lnTo>
+                <a:close/>
+                <a:lnTo>
+                  <a:pt x="305819" y="375571"/>
+                </a:lnTo>
+                <a:close/>
+                <a:lnTo>
+                  <a:pt x="308878" y="374644"/>
+                </a:lnTo>
+                <a:close/>
+                <a:lnTo>
+                  <a:pt x="311936" y="373710"/>
+                </a:lnTo>
+                <a:close/>
+                <a:lnTo>
+                  <a:pt x="314994" y="372775"/>
+                </a:lnTo>
+                <a:close/>
+                <a:lnTo>
+                  <a:pt x="318052" y="371846"/>
+                </a:lnTo>
+                <a:close/>
+                <a:lnTo>
+                  <a:pt x="321110" y="370926"/>
+                </a:lnTo>
+                <a:close/>
+                <a:lnTo>
+                  <a:pt x="324169" y="370019"/>
+                </a:lnTo>
+                <a:close/>
+                <a:lnTo>
+                  <a:pt x="327227" y="369117"/>
+                </a:lnTo>
+                <a:close/>
+                <a:lnTo>
+                  <a:pt x="330285" y="368217"/>
+                </a:lnTo>
+                <a:close/>
+                <a:lnTo>
+                  <a:pt x="333343" y="367312"/>
+                </a:lnTo>
+                <a:close/>
+                <a:lnTo>
+                  <a:pt x="336401" y="366396"/>
+                </a:lnTo>
+                <a:close/>
+                <a:lnTo>
+                  <a:pt x="339460" y="365464"/>
+                </a:lnTo>
+                <a:close/>
+                <a:lnTo>
+                  <a:pt x="342518" y="364510"/>
+                </a:lnTo>
+                <a:close/>
+                <a:lnTo>
+                  <a:pt x="345576" y="363528"/>
+                </a:lnTo>
+                <a:close/>
+                <a:lnTo>
+                  <a:pt x="348634" y="362522"/>
+                </a:lnTo>
+                <a:close/>
+                <a:lnTo>
+                  <a:pt x="351692" y="361495"/>
+                </a:lnTo>
+                <a:close/>
+                <a:lnTo>
+                  <a:pt x="354751" y="360451"/>
+                </a:lnTo>
+                <a:close/>
+                <a:lnTo>
+                  <a:pt x="357809" y="359394"/>
+                </a:lnTo>
+                <a:close/>
+                <a:lnTo>
+                  <a:pt x="360867" y="358328"/>
+                </a:lnTo>
+                <a:close/>
+                <a:lnTo>
+                  <a:pt x="363925" y="357258"/>
+                </a:lnTo>
+                <a:close/>
+                <a:lnTo>
+                  <a:pt x="366983" y="356188"/>
+                </a:lnTo>
+                <a:close/>
+                <a:lnTo>
+                  <a:pt x="370041" y="355118"/>
+                </a:lnTo>
+                <a:close/>
+                <a:lnTo>
+                  <a:pt x="373100" y="354044"/>
+                </a:lnTo>
+                <a:close/>
+                <a:lnTo>
+                  <a:pt x="376158" y="352962"/>
+                </a:lnTo>
+                <a:close/>
+                <a:lnTo>
+                  <a:pt x="379216" y="351868"/>
+                </a:lnTo>
+                <a:close/>
+                <a:lnTo>
+                  <a:pt x="382274" y="350758"/>
+                </a:lnTo>
+                <a:close/>
+                <a:lnTo>
+                  <a:pt x="385332" y="349628"/>
+                </a:lnTo>
+                <a:close/>
+                <a:lnTo>
+                  <a:pt x="388391" y="348474"/>
+                </a:lnTo>
+                <a:close/>
+                <a:lnTo>
+                  <a:pt x="391449" y="347293"/>
+                </a:lnTo>
+                <a:close/>
+                <a:lnTo>
+                  <a:pt x="394507" y="346088"/>
+                </a:lnTo>
+                <a:close/>
+                <a:lnTo>
+                  <a:pt x="397565" y="344866"/>
+                </a:lnTo>
+                <a:close/>
+                <a:lnTo>
+                  <a:pt x="400623" y="343632"/>
+                </a:lnTo>
+                <a:close/>
+                <a:lnTo>
+                  <a:pt x="403682" y="342392"/>
+                </a:lnTo>
+                <a:close/>
+                <a:lnTo>
+                  <a:pt x="406740" y="341152"/>
+                </a:lnTo>
+                <a:close/>
+                <a:lnTo>
+                  <a:pt x="409798" y="339917"/>
+                </a:lnTo>
+                <a:close/>
+                <a:lnTo>
+                  <a:pt x="412856" y="338693"/>
+                </a:lnTo>
+                <a:close/>
+                <a:lnTo>
+                  <a:pt x="415914" y="337481"/>
+                </a:lnTo>
+                <a:close/>
+                <a:lnTo>
+                  <a:pt x="418973" y="336274"/>
+                </a:lnTo>
+                <a:close/>
+                <a:lnTo>
+                  <a:pt x="422031" y="335068"/>
+                </a:lnTo>
+                <a:close/>
+                <a:lnTo>
+                  <a:pt x="425089" y="333856"/>
+                </a:lnTo>
+                <a:close/>
+                <a:lnTo>
+                  <a:pt x="428147" y="332633"/>
+                </a:lnTo>
+                <a:close/>
+                <a:lnTo>
+                  <a:pt x="431205" y="331393"/>
+                </a:lnTo>
+                <a:close/>
+                <a:lnTo>
+                  <a:pt x="434264" y="330130"/>
+                </a:lnTo>
+                <a:close/>
+                <a:lnTo>
+                  <a:pt x="437322" y="328841"/>
+                </a:lnTo>
+                <a:close/>
+                <a:lnTo>
+                  <a:pt x="440380" y="327526"/>
+                </a:lnTo>
+                <a:close/>
+                <a:lnTo>
+                  <a:pt x="443438" y="326191"/>
+                </a:lnTo>
+                <a:close/>
+                <a:lnTo>
+                  <a:pt x="446496" y="324840"/>
+                </a:lnTo>
+                <a:close/>
+                <a:lnTo>
+                  <a:pt x="449555" y="323476"/>
+                </a:lnTo>
+                <a:close/>
+                <a:lnTo>
+                  <a:pt x="452613" y="322104"/>
+                </a:lnTo>
+                <a:close/>
+                <a:lnTo>
+                  <a:pt x="455671" y="320728"/>
+                </a:lnTo>
+                <a:close/>
+                <a:lnTo>
+                  <a:pt x="458729" y="319352"/>
+                </a:lnTo>
+                <a:close/>
+                <a:lnTo>
+                  <a:pt x="461787" y="317976"/>
+                </a:lnTo>
+                <a:close/>
+                <a:lnTo>
+                  <a:pt x="464845" y="316595"/>
+                </a:lnTo>
+                <a:close/>
+                <a:lnTo>
+                  <a:pt x="467904" y="315207"/>
+                </a:lnTo>
+                <a:close/>
+                <a:lnTo>
+                  <a:pt x="470962" y="313806"/>
+                </a:lnTo>
+                <a:close/>
+                <a:lnTo>
+                  <a:pt x="474020" y="312388"/>
+                </a:lnTo>
+                <a:close/>
+                <a:lnTo>
+                  <a:pt x="477078" y="310950"/>
+                </a:lnTo>
+                <a:close/>
+                <a:lnTo>
+                  <a:pt x="480136" y="309488"/>
+                </a:lnTo>
+                <a:close/>
+                <a:lnTo>
+                  <a:pt x="483195" y="307998"/>
+                </a:lnTo>
+                <a:close/>
+                <a:lnTo>
+                  <a:pt x="486253" y="306486"/>
+                </a:lnTo>
+                <a:close/>
+                <a:lnTo>
+                  <a:pt x="489311" y="304956"/>
+                </a:lnTo>
+                <a:close/>
+                <a:lnTo>
+                  <a:pt x="492369" y="303416"/>
+                </a:lnTo>
+                <a:close/>
+                <a:lnTo>
+                  <a:pt x="495427" y="301870"/>
+                </a:lnTo>
+                <a:close/>
+                <a:lnTo>
+                  <a:pt x="498486" y="300324"/>
+                </a:lnTo>
+                <a:close/>
+                <a:lnTo>
+                  <a:pt x="501544" y="298784"/>
+                </a:lnTo>
+                <a:close/>
+                <a:lnTo>
+                  <a:pt x="504602" y="297255"/>
+                </a:lnTo>
+                <a:close/>
+                <a:lnTo>
+                  <a:pt x="507660" y="295738"/>
+                </a:lnTo>
+                <a:close/>
+                <a:lnTo>
+                  <a:pt x="510718" y="294226"/>
+                </a:lnTo>
+                <a:close/>
+                <a:lnTo>
+                  <a:pt x="513777" y="292713"/>
+                </a:lnTo>
+                <a:close/>
+                <a:lnTo>
+                  <a:pt x="516835" y="291195"/>
+                </a:lnTo>
+                <a:close/>
+                <a:lnTo>
+                  <a:pt x="519893" y="289665"/>
+                </a:lnTo>
+                <a:close/>
+                <a:lnTo>
+                  <a:pt x="522951" y="288117"/>
+                </a:lnTo>
+                <a:close/>
+                <a:lnTo>
+                  <a:pt x="526009" y="286546"/>
+                </a:lnTo>
+                <a:close/>
+                <a:lnTo>
+                  <a:pt x="529068" y="284947"/>
+                </a:lnTo>
+                <a:close/>
+                <a:lnTo>
+                  <a:pt x="532126" y="283325"/>
+                </a:lnTo>
+                <a:close/>
+                <a:lnTo>
+                  <a:pt x="535184" y="281682"/>
+                </a:lnTo>
+                <a:close/>
+                <a:lnTo>
+                  <a:pt x="538242" y="280024"/>
+                </a:lnTo>
+                <a:close/>
+                <a:lnTo>
+                  <a:pt x="541300" y="278353"/>
+                </a:lnTo>
+                <a:close/>
+                <a:lnTo>
+                  <a:pt x="544359" y="276675"/>
+                </a:lnTo>
+                <a:close/>
+                <a:lnTo>
+                  <a:pt x="547417" y="274993"/>
+                </a:lnTo>
+                <a:close/>
+                <a:lnTo>
+                  <a:pt x="550475" y="273311"/>
+                </a:lnTo>
+                <a:close/>
+                <a:lnTo>
+                  <a:pt x="553533" y="271629"/>
+                </a:lnTo>
+                <a:close/>
+                <a:lnTo>
+                  <a:pt x="556591" y="269942"/>
+                </a:lnTo>
+                <a:close/>
+                <a:lnTo>
+                  <a:pt x="559649" y="268246"/>
+                </a:lnTo>
+                <a:close/>
+                <a:lnTo>
+                  <a:pt x="562708" y="266538"/>
+                </a:lnTo>
+                <a:close/>
+                <a:lnTo>
+                  <a:pt x="565766" y="264813"/>
+                </a:lnTo>
+                <a:close/>
+                <a:lnTo>
+                  <a:pt x="568824" y="263067"/>
+                </a:lnTo>
+                <a:close/>
+                <a:lnTo>
+                  <a:pt x="571882" y="261296"/>
+                </a:lnTo>
+                <a:close/>
+                <a:lnTo>
+                  <a:pt x="574940" y="259498"/>
+                </a:lnTo>
+                <a:close/>
+                <a:lnTo>
+                  <a:pt x="577999" y="257677"/>
+                </a:lnTo>
+                <a:close/>
+                <a:lnTo>
+                  <a:pt x="581057" y="255841"/>
+                </a:lnTo>
+                <a:close/>
+                <a:lnTo>
+                  <a:pt x="584115" y="253994"/>
+                </a:lnTo>
+                <a:close/>
+                <a:lnTo>
+                  <a:pt x="587173" y="252142"/>
+                </a:lnTo>
+                <a:close/>
+                <a:lnTo>
+                  <a:pt x="590231" y="250290"/>
+                </a:lnTo>
+                <a:close/>
+                <a:lnTo>
+                  <a:pt x="593290" y="248445"/>
+                </a:lnTo>
+                <a:close/>
+                <a:lnTo>
+                  <a:pt x="596348" y="246612"/>
+                </a:lnTo>
+                <a:close/>
+                <a:lnTo>
+                  <a:pt x="599406" y="244790"/>
+                </a:lnTo>
+                <a:close/>
+                <a:lnTo>
+                  <a:pt x="602464" y="242972"/>
+                </a:lnTo>
+                <a:close/>
+                <a:lnTo>
+                  <a:pt x="605522" y="241154"/>
+                </a:lnTo>
+                <a:close/>
+                <a:lnTo>
+                  <a:pt x="608581" y="239329"/>
+                </a:lnTo>
+                <a:close/>
+                <a:lnTo>
+                  <a:pt x="611639" y="237491"/>
+                </a:lnTo>
+                <a:close/>
+                <a:lnTo>
+                  <a:pt x="614697" y="235635"/>
+                </a:lnTo>
+                <a:close/>
+                <a:lnTo>
+                  <a:pt x="617755" y="233755"/>
+                </a:lnTo>
+                <a:close/>
+                <a:lnTo>
+                  <a:pt x="620813" y="231849"/>
+                </a:lnTo>
+                <a:close/>
+                <a:lnTo>
+                  <a:pt x="623872" y="229918"/>
+                </a:lnTo>
+                <a:close/>
+                <a:lnTo>
+                  <a:pt x="626930" y="227968"/>
+                </a:lnTo>
+                <a:close/>
+                <a:lnTo>
+                  <a:pt x="629988" y="226002"/>
+                </a:lnTo>
+                <a:close/>
+                <a:lnTo>
+                  <a:pt x="633046" y="224025"/>
+                </a:lnTo>
+                <a:close/>
+                <a:lnTo>
+                  <a:pt x="636104" y="222040"/>
+                </a:lnTo>
+                <a:close/>
+                <a:lnTo>
+                  <a:pt x="639163" y="220052"/>
+                </a:lnTo>
+                <a:close/>
+                <a:lnTo>
+                  <a:pt x="642221" y="218065"/>
+                </a:lnTo>
+                <a:close/>
+                <a:lnTo>
+                  <a:pt x="645279" y="216076"/>
+                </a:lnTo>
+                <a:close/>
+                <a:lnTo>
+                  <a:pt x="648337" y="214083"/>
+                </a:lnTo>
+                <a:close/>
+                <a:lnTo>
+                  <a:pt x="651395" y="212080"/>
+                </a:lnTo>
+                <a:close/>
+                <a:lnTo>
+                  <a:pt x="654454" y="210065"/>
+                </a:lnTo>
+                <a:close/>
+                <a:lnTo>
+                  <a:pt x="657512" y="208032"/>
+                </a:lnTo>
+                <a:close/>
+                <a:lnTo>
+                  <a:pt x="660570" y="205978"/>
+                </a:lnTo>
+                <a:close/>
+                <a:lnTo>
+                  <a:pt x="663628" y="203898"/>
+                </a:lnTo>
+                <a:close/>
+                <a:lnTo>
+                  <a:pt x="666686" y="201792"/>
+                </a:lnTo>
+                <a:close/>
+                <a:lnTo>
+                  <a:pt x="669744" y="199664"/>
+                </a:lnTo>
+                <a:close/>
+                <a:lnTo>
+                  <a:pt x="672803" y="197520"/>
+                </a:lnTo>
+                <a:close/>
+                <a:lnTo>
+                  <a:pt x="675861" y="195367"/>
+                </a:lnTo>
+                <a:close/>
+                <a:lnTo>
+                  <a:pt x="678919" y="193208"/>
+                </a:lnTo>
+                <a:close/>
+                <a:lnTo>
+                  <a:pt x="681977" y="191052"/>
+                </a:lnTo>
+                <a:close/>
+                <a:lnTo>
+                  <a:pt x="685035" y="188902"/>
+                </a:lnTo>
+                <a:close/>
+                <a:lnTo>
+                  <a:pt x="688094" y="186764"/>
+                </a:lnTo>
+                <a:close/>
+                <a:lnTo>
+                  <a:pt x="691152" y="184637"/>
+                </a:lnTo>
+                <a:close/>
+                <a:lnTo>
+                  <a:pt x="694210" y="182514"/>
+                </a:lnTo>
+                <a:close/>
+                <a:lnTo>
+                  <a:pt x="697268" y="180389"/>
+                </a:lnTo>
+                <a:close/>
+                <a:lnTo>
+                  <a:pt x="700326" y="178257"/>
+                </a:lnTo>
+                <a:close/>
+                <a:lnTo>
+                  <a:pt x="703385" y="176112"/>
+                </a:lnTo>
+                <a:close/>
+                <a:lnTo>
+                  <a:pt x="706443" y="173948"/>
+                </a:lnTo>
+                <a:close/>
+                <a:lnTo>
+                  <a:pt x="709501" y="171760"/>
+                </a:lnTo>
+                <a:close/>
+                <a:lnTo>
+                  <a:pt x="712559" y="169545"/>
+                </a:lnTo>
+                <a:close/>
+                <a:lnTo>
+                  <a:pt x="715617" y="167306"/>
+                </a:lnTo>
+                <a:close/>
+                <a:lnTo>
+                  <a:pt x="718676" y="165049"/>
+                </a:lnTo>
+                <a:close/>
+                <a:lnTo>
+                  <a:pt x="721734" y="162776"/>
+                </a:lnTo>
+                <a:close/>
+                <a:lnTo>
+                  <a:pt x="724792" y="160492"/>
+                </a:lnTo>
+                <a:close/>
+                <a:lnTo>
+                  <a:pt x="727850" y="158201"/>
+                </a:lnTo>
+                <a:close/>
+                <a:lnTo>
+                  <a:pt x="730908" y="155907"/>
+                </a:lnTo>
+                <a:close/>
+                <a:lnTo>
+                  <a:pt x="733967" y="153613"/>
+                </a:lnTo>
+                <a:close/>
+                <a:lnTo>
+                  <a:pt x="737025" y="151319"/>
+                </a:lnTo>
+                <a:close/>
+                <a:lnTo>
+                  <a:pt x="740083" y="149019"/>
+                </a:lnTo>
+                <a:close/>
+                <a:lnTo>
+                  <a:pt x="743141" y="146709"/>
+                </a:lnTo>
+                <a:close/>
+                <a:lnTo>
+                  <a:pt x="746199" y="144386"/>
+                </a:lnTo>
+                <a:close/>
+                <a:lnTo>
+                  <a:pt x="749258" y="142046"/>
+                </a:lnTo>
+                <a:close/>
+                <a:lnTo>
+                  <a:pt x="752316" y="139683"/>
+                </a:lnTo>
+                <a:close/>
+                <a:lnTo>
+                  <a:pt x="755374" y="137295"/>
+                </a:lnTo>
+                <a:close/>
+                <a:lnTo>
+                  <a:pt x="758432" y="134881"/>
+                </a:lnTo>
+                <a:close/>
+                <a:lnTo>
+                  <a:pt x="761490" y="132445"/>
+                </a:lnTo>
+                <a:close/>
+                <a:lnTo>
+                  <a:pt x="764548" y="129994"/>
+                </a:lnTo>
+                <a:close/>
+                <a:lnTo>
+                  <a:pt x="767607" y="127534"/>
+                </a:lnTo>
+                <a:close/>
+                <a:lnTo>
+                  <a:pt x="770665" y="125070"/>
+                </a:lnTo>
+                <a:close/>
+                <a:lnTo>
+                  <a:pt x="773723" y="122608"/>
+                </a:lnTo>
+                <a:close/>
+                <a:lnTo>
+                  <a:pt x="776781" y="120154"/>
+                </a:lnTo>
+                <a:close/>
+                <a:lnTo>
+                  <a:pt x="779839" y="117711"/>
+                </a:lnTo>
+                <a:close/>
+                <a:lnTo>
+                  <a:pt x="782898" y="115279"/>
+                </a:lnTo>
+                <a:close/>
+                <a:lnTo>
+                  <a:pt x="785956" y="112850"/>
+                </a:lnTo>
+                <a:close/>
+                <a:lnTo>
+                  <a:pt x="789014" y="110418"/>
+                </a:lnTo>
+                <a:close/>
+                <a:lnTo>
+                  <a:pt x="792072" y="107980"/>
+                </a:lnTo>
+                <a:close/>
+                <a:lnTo>
+                  <a:pt x="795130" y="105527"/>
+                </a:lnTo>
+                <a:close/>
+                <a:lnTo>
+                  <a:pt x="798189" y="103056"/>
+                </a:lnTo>
+                <a:close/>
+                <a:lnTo>
+                  <a:pt x="801247" y="100559"/>
+                </a:lnTo>
+                <a:close/>
+                <a:lnTo>
+                  <a:pt x="804305" y="98036"/>
+                </a:lnTo>
+                <a:close/>
+                <a:lnTo>
+                  <a:pt x="807363" y="95490"/>
+                </a:lnTo>
+                <a:close/>
+                <a:lnTo>
+                  <a:pt x="810421" y="92924"/>
+                </a:lnTo>
+                <a:close/>
+                <a:lnTo>
+                  <a:pt x="813480" y="90344"/>
+                </a:lnTo>
+                <a:close/>
+                <a:lnTo>
+                  <a:pt x="816538" y="87754"/>
+                </a:lnTo>
+                <a:close/>
+                <a:lnTo>
+                  <a:pt x="819596" y="85156"/>
+                </a:lnTo>
+                <a:close/>
+                <a:lnTo>
+                  <a:pt x="822654" y="82556"/>
+                </a:lnTo>
+                <a:close/>
+                <a:lnTo>
+                  <a:pt x="825712" y="79956"/>
+                </a:lnTo>
+                <a:close/>
+                <a:lnTo>
+                  <a:pt x="828771" y="77355"/>
+                </a:lnTo>
+                <a:close/>
+                <a:lnTo>
+                  <a:pt x="831829" y="74748"/>
+                </a:lnTo>
+                <a:close/>
+                <a:lnTo>
+                  <a:pt x="834887" y="72131"/>
+                </a:lnTo>
+                <a:close/>
+                <a:lnTo>
+                  <a:pt x="837945" y="69500"/>
+                </a:lnTo>
+                <a:close/>
+                <a:lnTo>
+                  <a:pt x="841003" y="66852"/>
+                </a:lnTo>
+                <a:close/>
+                <a:lnTo>
+                  <a:pt x="844062" y="64183"/>
+                </a:lnTo>
+                <a:close/>
+                <a:lnTo>
+                  <a:pt x="847120" y="61488"/>
+                </a:lnTo>
+                <a:close/>
+                <a:lnTo>
+                  <a:pt x="850178" y="58768"/>
+                </a:lnTo>
+                <a:close/>
+                <a:lnTo>
+                  <a:pt x="853236" y="56027"/>
+                </a:lnTo>
+                <a:close/>
+                <a:lnTo>
+                  <a:pt x="856294" y="53271"/>
+                </a:lnTo>
+                <a:close/>
+                <a:lnTo>
+                  <a:pt x="859353" y="50506"/>
+                </a:lnTo>
+                <a:close/>
+                <a:lnTo>
+                  <a:pt x="862411" y="47735"/>
+                </a:lnTo>
+                <a:close/>
+                <a:lnTo>
+                  <a:pt x="865469" y="44965"/>
+                </a:lnTo>
+                <a:close/>
+                <a:lnTo>
+                  <a:pt x="868527" y="42200"/>
+                </a:lnTo>
+                <a:close/>
+                <a:lnTo>
+                  <a:pt x="871585" y="39445"/>
+                </a:lnTo>
+                <a:close/>
+                <a:lnTo>
+                  <a:pt x="874643" y="36698"/>
+                </a:lnTo>
+                <a:close/>
+                <a:lnTo>
+                  <a:pt x="877702" y="33954"/>
+                </a:lnTo>
+                <a:close/>
+                <a:lnTo>
+                  <a:pt x="880760" y="31211"/>
+                </a:lnTo>
+                <a:close/>
+                <a:lnTo>
+                  <a:pt x="883818" y="28464"/>
+                </a:lnTo>
+                <a:close/>
+                <a:lnTo>
+                  <a:pt x="886876" y="25710"/>
+                </a:lnTo>
+                <a:close/>
+                <a:lnTo>
+                  <a:pt x="889934" y="22945"/>
+                </a:lnTo>
+                <a:close/>
+                <a:lnTo>
+                  <a:pt x="892993" y="20166"/>
+                </a:lnTo>
+                <a:close/>
+                <a:lnTo>
+                  <a:pt x="896051" y="17369"/>
+                </a:lnTo>
+                <a:close/>
+                <a:lnTo>
+                  <a:pt x="899109" y="14550"/>
+                </a:lnTo>
+                <a:close/>
+                <a:lnTo>
+                  <a:pt x="902167" y="11706"/>
+                </a:lnTo>
+                <a:close/>
+                <a:lnTo>
+                  <a:pt x="905225" y="8832"/>
+                </a:lnTo>
+                <a:close/>
+                <a:lnTo>
+                  <a:pt x="908284" y="5926"/>
+                </a:lnTo>
+                <a:close/>
+                <a:lnTo>
+                  <a:pt x="911342" y="2983"/>
+                </a:lnTo>
+                <a:close/>
+                <a:lnTo>
+                  <a:pt x="914400" y="0"/>
                 </a:lnTo>
                 <a:close/>
               </a:path>
@@ -5638,7 +5638,7 @@
           </a:custGeom>
           <a:ln w="31750">
             <a:solidFill>
-              <a:srgbClr val="00E5FF"/>
+              <a:srgbClr val="FFFFFF"/>
             </a:solidFill>
           </a:ln>
         </p:spPr>
@@ -5672,8 +5672,8 @@
         </p:nvCxnSpPr>
         <p:spPr>
           <a:xfrm flipV="1">
-            <a:off x="5715000.0" y="1337310.0"/>
-            <a:ext cx="0.0" cy="1234440.0"/>
+            <a:off x="6172200.0" y="742950.0"/>
+            <a:ext cx="0.0" cy="1828800.0"/>
           </a:xfrm>
           <a:prstGeom prst="line">
             <a:avLst/>
@@ -5708,14 +5708,14 @@
         </p:nvSpPr>
         <p:spPr>
           <a:xfrm>
-            <a:off x="5664200" y="1286510"/>
+            <a:off x="6121400" y="692150"/>
             <a:ext cx="101600" cy="101600"/>
           </a:xfrm>
           <a:prstGeom prst="ellipse">
             <a:avLst/>
           </a:prstGeom>
           <a:solidFill>
-            <a:srgbClr val="0A0A0A"/>
+            <a:srgbClr val="000000"/>
           </a:solidFill>
           <a:ln w="12700">
             <a:solidFill>
@@ -5753,7 +5753,7 @@
         </p:nvSpPr>
         <p:spPr>
           <a:xfrm>
-            <a:off x="5664200" y="1743710"/>
+            <a:off x="6121400" y="1240790"/>
             <a:ext cx="101600" cy="101600"/>
           </a:xfrm>
           <a:prstGeom prst="ellipse">
@@ -5798,8 +5798,8 @@
         </p:nvSpPr>
         <p:spPr>
           <a:xfrm>
-            <a:off x="5029200" y="1844070"/>
-            <a:ext cx="640080" cy="196688"/>
+            <a:off x="5486400" y="743864"/>
+            <a:ext cx="640080" cy="427940"/>
           </a:xfrm>
           <a:custGeom>
             <a:avLst/>
@@ -5808,400 +5808,400 @@
             <a:cxnLst/>
             <a:rect l="l" t="t" r="r" b="b"/>
             <a:pathLst>
-              <a:path w="640080" h="196688">
+              <a:path w="640080" h="427940">
                 <a:moveTo>
-                  <a:pt x="0" y="196688"/>
+                  <a:pt x="0" y="427940"/>
                 </a:moveTo>
                 <a:lnTo>
-                  <a:pt x="6468" y="194459"/>
-                </a:lnTo>
-                <a:close/>
-                <a:lnTo>
-                  <a:pt x="12935" y="192239"/>
-                </a:lnTo>
-                <a:close/>
-                <a:lnTo>
-                  <a:pt x="19402" y="190028"/>
-                </a:lnTo>
-                <a:close/>
-                <a:lnTo>
-                  <a:pt x="25868" y="187824"/>
-                </a:lnTo>
-                <a:close/>
-                <a:lnTo>
-                  <a:pt x="32334" y="185628"/>
-                </a:lnTo>
-                <a:close/>
-                <a:lnTo>
-                  <a:pt x="38800" y="183439"/>
-                </a:lnTo>
-                <a:close/>
-                <a:lnTo>
-                  <a:pt x="45267" y="181256"/>
-                </a:lnTo>
-                <a:close/>
-                <a:lnTo>
-                  <a:pt x="51733" y="179078"/>
-                </a:lnTo>
-                <a:close/>
-                <a:lnTo>
-                  <a:pt x="58200" y="176906"/>
-                </a:lnTo>
-                <a:close/>
-                <a:lnTo>
-                  <a:pt x="64668" y="174739"/>
-                </a:lnTo>
-                <a:close/>
-                <a:lnTo>
-                  <a:pt x="71136" y="172576"/>
-                </a:lnTo>
-                <a:close/>
-                <a:lnTo>
-                  <a:pt x="77605" y="170417"/>
-                </a:lnTo>
-                <a:close/>
-                <a:lnTo>
-                  <a:pt x="84074" y="168264"/>
-                </a:lnTo>
-                <a:close/>
-                <a:lnTo>
-                  <a:pt x="90541" y="166116"/>
-                </a:lnTo>
-                <a:close/>
-                <a:lnTo>
-                  <a:pt x="97005" y="163975"/>
-                </a:lnTo>
-                <a:close/>
-                <a:lnTo>
-                  <a:pt x="103467" y="161841"/>
-                </a:lnTo>
-                <a:close/>
-                <a:lnTo>
-                  <a:pt x="109926" y="159715"/>
-                </a:lnTo>
-                <a:close/>
-                <a:lnTo>
-                  <a:pt x="116383" y="157596"/>
-                </a:lnTo>
-                <a:close/>
-                <a:lnTo>
-                  <a:pt x="122839" y="155484"/>
-                </a:lnTo>
-                <a:close/>
-                <a:lnTo>
-                  <a:pt x="129297" y="153377"/>
-                </a:lnTo>
-                <a:close/>
-                <a:lnTo>
-                  <a:pt x="135757" y="151277"/>
-                </a:lnTo>
-                <a:close/>
-                <a:lnTo>
-                  <a:pt x="142221" y="149181"/>
-                </a:lnTo>
-                <a:close/>
-                <a:lnTo>
-                  <a:pt x="148687" y="147089"/>
-                </a:lnTo>
-                <a:close/>
-                <a:lnTo>
-                  <a:pt x="155155" y="145002"/>
-                </a:lnTo>
-                <a:close/>
-                <a:lnTo>
-                  <a:pt x="161623" y="142918"/>
-                </a:lnTo>
-                <a:close/>
-                <a:lnTo>
-                  <a:pt x="168092" y="140836"/>
-                </a:lnTo>
-                <a:close/>
-                <a:lnTo>
-                  <a:pt x="174560" y="138757"/>
-                </a:lnTo>
-                <a:close/>
-                <a:lnTo>
-                  <a:pt x="181027" y="136681"/>
-                </a:lnTo>
-                <a:close/>
-                <a:lnTo>
-                  <a:pt x="187494" y="134608"/>
-                </a:lnTo>
-                <a:close/>
-                <a:lnTo>
-                  <a:pt x="193960" y="132541"/>
-                </a:lnTo>
-                <a:close/>
-                <a:lnTo>
-                  <a:pt x="200426" y="130478"/>
-                </a:lnTo>
-                <a:close/>
-                <a:lnTo>
-                  <a:pt x="206893" y="128422"/>
-                </a:lnTo>
-                <a:close/>
-                <a:lnTo>
-                  <a:pt x="213360" y="126372"/>
-                </a:lnTo>
-                <a:close/>
-                <a:lnTo>
-                  <a:pt x="219827" y="124327"/>
-                </a:lnTo>
-                <a:close/>
-                <a:lnTo>
-                  <a:pt x="226294" y="122286"/>
-                </a:lnTo>
-                <a:close/>
-                <a:lnTo>
-                  <a:pt x="232761" y="120248"/>
-                </a:lnTo>
-                <a:close/>
-                <a:lnTo>
-                  <a:pt x="239227" y="118213"/>
-                </a:lnTo>
-                <a:close/>
-                <a:lnTo>
-                  <a:pt x="245694" y="116179"/>
-                </a:lnTo>
-                <a:close/>
-                <a:lnTo>
-                  <a:pt x="252160" y="114149"/>
-                </a:lnTo>
-                <a:close/>
-                <a:lnTo>
-                  <a:pt x="258627" y="112123"/>
-                </a:lnTo>
-                <a:close/>
-                <a:lnTo>
-                  <a:pt x="265094" y="110102"/>
-                </a:lnTo>
-                <a:close/>
-                <a:lnTo>
-                  <a:pt x="271562" y="108087"/>
-                </a:lnTo>
-                <a:close/>
-                <a:lnTo>
-                  <a:pt x="278031" y="106078"/>
-                </a:lnTo>
-                <a:close/>
-                <a:lnTo>
-                  <a:pt x="284499" y="104075"/>
-                </a:lnTo>
-                <a:close/>
-                <a:lnTo>
-                  <a:pt x="290967" y="102077"/>
-                </a:lnTo>
-                <a:close/>
-                <a:lnTo>
-                  <a:pt x="297433" y="100081"/>
-                </a:lnTo>
-                <a:close/>
-                <a:lnTo>
-                  <a:pt x="303895" y="98089"/>
-                </a:lnTo>
-                <a:close/>
-                <a:lnTo>
-                  <a:pt x="310355" y="96098"/>
-                </a:lnTo>
-                <a:close/>
-                <a:lnTo>
-                  <a:pt x="316812" y="94110"/>
-                </a:lnTo>
-                <a:close/>
-                <a:lnTo>
-                  <a:pt x="323268" y="92126"/>
-                </a:lnTo>
-                <a:close/>
-                <a:lnTo>
-                  <a:pt x="329725" y="90147"/>
-                </a:lnTo>
-                <a:close/>
-                <a:lnTo>
-                  <a:pt x="336185" y="88173"/>
-                </a:lnTo>
-                <a:close/>
-                <a:lnTo>
-                  <a:pt x="342647" y="86206"/>
-                </a:lnTo>
-                <a:close/>
-                <a:lnTo>
-                  <a:pt x="349113" y="84244"/>
-                </a:lnTo>
-                <a:close/>
-                <a:lnTo>
-                  <a:pt x="355581" y="82288"/>
-                </a:lnTo>
-                <a:close/>
-                <a:lnTo>
-                  <a:pt x="362049" y="80335"/>
-                </a:lnTo>
-                <a:close/>
-                <a:lnTo>
-                  <a:pt x="368518" y="78385"/>
-                </a:lnTo>
-                <a:close/>
-                <a:lnTo>
-                  <a:pt x="374986" y="76438"/>
-                </a:lnTo>
-                <a:close/>
-                <a:lnTo>
-                  <a:pt x="381453" y="74493"/>
-                </a:lnTo>
-                <a:close/>
-                <a:lnTo>
-                  <a:pt x="387920" y="72551"/>
-                </a:lnTo>
-                <a:close/>
-                <a:lnTo>
-                  <a:pt x="394386" y="70613"/>
-                </a:lnTo>
-                <a:close/>
-                <a:lnTo>
-                  <a:pt x="400853" y="68681"/>
-                </a:lnTo>
-                <a:close/>
-                <a:lnTo>
-                  <a:pt x="407319" y="66754"/>
-                </a:lnTo>
-                <a:close/>
-                <a:lnTo>
-                  <a:pt x="413786" y="64834"/>
-                </a:lnTo>
-                <a:close/>
-                <a:lnTo>
-                  <a:pt x="420253" y="62919"/>
-                </a:lnTo>
-                <a:close/>
-                <a:lnTo>
-                  <a:pt x="426720" y="61008"/>
-                </a:lnTo>
-                <a:close/>
-                <a:lnTo>
-                  <a:pt x="433187" y="59102"/>
-                </a:lnTo>
-                <a:close/>
-                <a:lnTo>
-                  <a:pt x="439654" y="57199"/>
-                </a:lnTo>
-                <a:close/>
-                <a:lnTo>
-                  <a:pt x="446120" y="55298"/>
-                </a:lnTo>
-                <a:close/>
-                <a:lnTo>
-                  <a:pt x="452586" y="53401"/>
-                </a:lnTo>
-                <a:close/>
-                <a:lnTo>
-                  <a:pt x="459053" y="51506"/>
-                </a:lnTo>
-                <a:close/>
-                <a:lnTo>
-                  <a:pt x="465520" y="49614"/>
-                </a:lnTo>
-                <a:close/>
-                <a:lnTo>
-                  <a:pt x="471988" y="47724"/>
-                </a:lnTo>
-                <a:close/>
-                <a:lnTo>
-                  <a:pt x="478457" y="45838"/>
-                </a:lnTo>
-                <a:close/>
-                <a:lnTo>
-                  <a:pt x="484925" y="43955"/>
-                </a:lnTo>
-                <a:close/>
-                <a:lnTo>
-                  <a:pt x="491393" y="42076"/>
-                </a:lnTo>
-                <a:close/>
-                <a:lnTo>
-                  <a:pt x="497859" y="40202"/>
-                </a:lnTo>
-                <a:close/>
-                <a:lnTo>
-                  <a:pt x="504323" y="38334"/>
-                </a:lnTo>
-                <a:close/>
-                <a:lnTo>
-                  <a:pt x="510783" y="36472"/>
-                </a:lnTo>
-                <a:close/>
-                <a:lnTo>
-                  <a:pt x="517241" y="34615"/>
-                </a:lnTo>
-                <a:close/>
-                <a:lnTo>
-                  <a:pt x="523697" y="32763"/>
-                </a:lnTo>
-                <a:close/>
-                <a:lnTo>
-                  <a:pt x="530154" y="30915"/>
-                </a:lnTo>
-                <a:close/>
-                <a:lnTo>
-                  <a:pt x="536613" y="29071"/>
-                </a:lnTo>
-                <a:close/>
-                <a:lnTo>
-                  <a:pt x="543075" y="27230"/>
-                </a:lnTo>
-                <a:close/>
-                <a:lnTo>
-                  <a:pt x="549539" y="25392"/>
-                </a:lnTo>
-                <a:close/>
-                <a:lnTo>
-                  <a:pt x="556006" y="23556"/>
-                </a:lnTo>
-                <a:close/>
-                <a:lnTo>
-                  <a:pt x="562475" y="21724"/>
-                </a:lnTo>
-                <a:close/>
-                <a:lnTo>
-                  <a:pt x="568944" y="19895"/>
-                </a:lnTo>
-                <a:close/>
-                <a:lnTo>
-                  <a:pt x="575412" y="18069"/>
-                </a:lnTo>
-                <a:close/>
-                <a:lnTo>
-                  <a:pt x="581880" y="16247"/>
-                </a:lnTo>
-                <a:close/>
-                <a:lnTo>
-                  <a:pt x="588347" y="14428"/>
-                </a:lnTo>
-                <a:close/>
-                <a:lnTo>
-                  <a:pt x="594813" y="12613"/>
-                </a:lnTo>
-                <a:close/>
-                <a:lnTo>
-                  <a:pt x="601280" y="10801"/>
-                </a:lnTo>
-                <a:close/>
-                <a:lnTo>
-                  <a:pt x="607746" y="8993"/>
-                </a:lnTo>
-                <a:close/>
-                <a:lnTo>
-                  <a:pt x="614212" y="7188"/>
-                </a:lnTo>
-                <a:close/>
-                <a:lnTo>
-                  <a:pt x="620678" y="5386"/>
-                </a:lnTo>
-                <a:close/>
-                <a:lnTo>
-                  <a:pt x="627145" y="3588"/>
-                </a:lnTo>
-                <a:close/>
-                <a:lnTo>
-                  <a:pt x="633612" y="1792"/>
+                  <a:pt x="6465" y="422805"/>
+                </a:lnTo>
+                <a:close/>
+                <a:lnTo>
+                  <a:pt x="12931" y="417752"/>
+                </a:lnTo>
+                <a:close/>
+                <a:lnTo>
+                  <a:pt x="19396" y="412762"/>
+                </a:lnTo>
+                <a:close/>
+                <a:lnTo>
+                  <a:pt x="25862" y="407818"/>
+                </a:lnTo>
+                <a:close/>
+                <a:lnTo>
+                  <a:pt x="32327" y="402902"/>
+                </a:lnTo>
+                <a:close/>
+                <a:lnTo>
+                  <a:pt x="38793" y="397998"/>
+                </a:lnTo>
+                <a:close/>
+                <a:lnTo>
+                  <a:pt x="45258" y="393087"/>
+                </a:lnTo>
+                <a:close/>
+                <a:lnTo>
+                  <a:pt x="51724" y="388157"/>
+                </a:lnTo>
+                <a:close/>
+                <a:lnTo>
+                  <a:pt x="58189" y="383226"/>
+                </a:lnTo>
+                <a:close/>
+                <a:lnTo>
+                  <a:pt x="64655" y="378319"/>
+                </a:lnTo>
+                <a:close/>
+                <a:lnTo>
+                  <a:pt x="71120" y="373460"/>
+                </a:lnTo>
+                <a:close/>
+                <a:lnTo>
+                  <a:pt x="77585" y="368656"/>
+                </a:lnTo>
+                <a:close/>
+                <a:lnTo>
+                  <a:pt x="84051" y="363885"/>
+                </a:lnTo>
+                <a:close/>
+                <a:lnTo>
+                  <a:pt x="90516" y="359126"/>
+                </a:lnTo>
+                <a:close/>
+                <a:lnTo>
+                  <a:pt x="96982" y="354357"/>
+                </a:lnTo>
+                <a:close/>
+                <a:lnTo>
+                  <a:pt x="103447" y="349576"/>
+                </a:lnTo>
+                <a:close/>
+                <a:lnTo>
+                  <a:pt x="109913" y="344784"/>
+                </a:lnTo>
+                <a:close/>
+                <a:lnTo>
+                  <a:pt x="116378" y="339986"/>
+                </a:lnTo>
+                <a:close/>
+                <a:lnTo>
+                  <a:pt x="122844" y="335186"/>
+                </a:lnTo>
+                <a:close/>
+                <a:lnTo>
+                  <a:pt x="129309" y="330396"/>
+                </a:lnTo>
+                <a:close/>
+                <a:lnTo>
+                  <a:pt x="135775" y="325630"/>
+                </a:lnTo>
+                <a:close/>
+                <a:lnTo>
+                  <a:pt x="142240" y="320898"/>
+                </a:lnTo>
+                <a:close/>
+                <a:lnTo>
+                  <a:pt x="148705" y="316212"/>
+                </a:lnTo>
+                <a:close/>
+                <a:lnTo>
+                  <a:pt x="155171" y="311582"/>
+                </a:lnTo>
+                <a:close/>
+                <a:lnTo>
+                  <a:pt x="161636" y="307019"/>
+                </a:lnTo>
+                <a:close/>
+                <a:lnTo>
+                  <a:pt x="168102" y="302512"/>
+                </a:lnTo>
+                <a:close/>
+                <a:lnTo>
+                  <a:pt x="174567" y="298012"/>
+                </a:lnTo>
+                <a:close/>
+                <a:lnTo>
+                  <a:pt x="181033" y="293466"/>
+                </a:lnTo>
+                <a:close/>
+                <a:lnTo>
+                  <a:pt x="187498" y="288828"/>
+                </a:lnTo>
+                <a:close/>
+                <a:lnTo>
+                  <a:pt x="193964" y="284132"/>
+                </a:lnTo>
+                <a:close/>
+                <a:lnTo>
+                  <a:pt x="200429" y="279458"/>
+                </a:lnTo>
+                <a:close/>
+                <a:lnTo>
+                  <a:pt x="206895" y="274887"/>
+                </a:lnTo>
+                <a:close/>
+                <a:lnTo>
+                  <a:pt x="213360" y="270455"/>
+                </a:lnTo>
+                <a:close/>
+                <a:lnTo>
+                  <a:pt x="219825" y="266095"/>
+                </a:lnTo>
+                <a:close/>
+                <a:lnTo>
+                  <a:pt x="226291" y="261726"/>
+                </a:lnTo>
+                <a:close/>
+                <a:lnTo>
+                  <a:pt x="232756" y="257271"/>
+                </a:lnTo>
+                <a:close/>
+                <a:lnTo>
+                  <a:pt x="239222" y="252736"/>
+                </a:lnTo>
+                <a:close/>
+                <a:lnTo>
+                  <a:pt x="245687" y="248180"/>
+                </a:lnTo>
+                <a:close/>
+                <a:lnTo>
+                  <a:pt x="252153" y="243665"/>
+                </a:lnTo>
+                <a:close/>
+                <a:lnTo>
+                  <a:pt x="258618" y="239230"/>
+                </a:lnTo>
+                <a:close/>
+                <a:lnTo>
+                  <a:pt x="265084" y="234847"/>
+                </a:lnTo>
+                <a:close/>
+                <a:lnTo>
+                  <a:pt x="271549" y="230478"/>
+                </a:lnTo>
+                <a:close/>
+                <a:lnTo>
+                  <a:pt x="278015" y="226087"/>
+                </a:lnTo>
+                <a:close/>
+                <a:lnTo>
+                  <a:pt x="284480" y="221673"/>
+                </a:lnTo>
+                <a:close/>
+                <a:lnTo>
+                  <a:pt x="290945" y="217268"/>
+                </a:lnTo>
+                <a:close/>
+                <a:lnTo>
+                  <a:pt x="297411" y="212901"/>
+                </a:lnTo>
+                <a:close/>
+                <a:lnTo>
+                  <a:pt x="303876" y="208593"/>
+                </a:lnTo>
+                <a:close/>
+                <a:lnTo>
+                  <a:pt x="310342" y="204330"/>
+                </a:lnTo>
+                <a:close/>
+                <a:lnTo>
+                  <a:pt x="316807" y="200088"/>
+                </a:lnTo>
+                <a:close/>
+                <a:lnTo>
+                  <a:pt x="323273" y="195844"/>
+                </a:lnTo>
+                <a:close/>
+                <a:lnTo>
+                  <a:pt x="329738" y="191587"/>
+                </a:lnTo>
+                <a:close/>
+                <a:lnTo>
+                  <a:pt x="336204" y="187317"/>
+                </a:lnTo>
+                <a:close/>
+                <a:lnTo>
+                  <a:pt x="342669" y="183034"/>
+                </a:lnTo>
+                <a:close/>
+                <a:lnTo>
+                  <a:pt x="349135" y="178742"/>
+                </a:lnTo>
+                <a:close/>
+                <a:lnTo>
+                  <a:pt x="355600" y="174458"/>
+                </a:lnTo>
+                <a:close/>
+                <a:lnTo>
+                  <a:pt x="362065" y="170203"/>
+                </a:lnTo>
+                <a:close/>
+                <a:lnTo>
+                  <a:pt x="368531" y="165997"/>
+                </a:lnTo>
+                <a:close/>
+                <a:lnTo>
+                  <a:pt x="374996" y="161841"/>
+                </a:lnTo>
+                <a:close/>
+                <a:lnTo>
+                  <a:pt x="381462" y="157717"/>
+                </a:lnTo>
+                <a:close/>
+                <a:lnTo>
+                  <a:pt x="387927" y="153603"/>
+                </a:lnTo>
+                <a:close/>
+                <a:lnTo>
+                  <a:pt x="394393" y="149482"/>
+                </a:lnTo>
+                <a:close/>
+                <a:lnTo>
+                  <a:pt x="400858" y="145349"/>
+                </a:lnTo>
+                <a:close/>
+                <a:lnTo>
+                  <a:pt x="407324" y="141203"/>
+                </a:lnTo>
+                <a:close/>
+                <a:lnTo>
+                  <a:pt x="413789" y="137046"/>
+                </a:lnTo>
+                <a:close/>
+                <a:lnTo>
+                  <a:pt x="420255" y="132884"/>
+                </a:lnTo>
+                <a:close/>
+                <a:lnTo>
+                  <a:pt x="426720" y="128739"/>
+                </a:lnTo>
+                <a:close/>
+                <a:lnTo>
+                  <a:pt x="433185" y="124630"/>
+                </a:lnTo>
+                <a:close/>
+                <a:lnTo>
+                  <a:pt x="439651" y="120574"/>
+                </a:lnTo>
+                <a:close/>
+                <a:lnTo>
+                  <a:pt x="446116" y="116563"/>
+                </a:lnTo>
+                <a:close/>
+                <a:lnTo>
+                  <a:pt x="452582" y="112574"/>
+                </a:lnTo>
+                <a:close/>
+                <a:lnTo>
+                  <a:pt x="459047" y="108589"/>
+                </a:lnTo>
+                <a:close/>
+                <a:lnTo>
+                  <a:pt x="465513" y="104592"/>
+                </a:lnTo>
+                <a:close/>
+                <a:lnTo>
+                  <a:pt x="471978" y="100584"/>
+                </a:lnTo>
+                <a:close/>
+                <a:lnTo>
+                  <a:pt x="478444" y="96562"/>
+                </a:lnTo>
+                <a:close/>
+                <a:lnTo>
+                  <a:pt x="484909" y="92530"/>
+                </a:lnTo>
+                <a:close/>
+                <a:lnTo>
+                  <a:pt x="491375" y="88501"/>
+                </a:lnTo>
+                <a:close/>
+                <a:lnTo>
+                  <a:pt x="497840" y="84497"/>
+                </a:lnTo>
+                <a:close/>
+                <a:lnTo>
+                  <a:pt x="504305" y="80539"/>
+                </a:lnTo>
+                <a:close/>
+                <a:lnTo>
+                  <a:pt x="510771" y="76634"/>
+                </a:lnTo>
+                <a:close/>
+                <a:lnTo>
+                  <a:pt x="517236" y="72764"/>
+                </a:lnTo>
+                <a:close/>
+                <a:lnTo>
+                  <a:pt x="523702" y="68907"/>
+                </a:lnTo>
+                <a:close/>
+                <a:lnTo>
+                  <a:pt x="530167" y="65041"/>
+                </a:lnTo>
+                <a:close/>
+                <a:lnTo>
+                  <a:pt x="536633" y="61162"/>
+                </a:lnTo>
+                <a:close/>
+                <a:lnTo>
+                  <a:pt x="543098" y="57278"/>
+                </a:lnTo>
+                <a:close/>
+                <a:lnTo>
+                  <a:pt x="549564" y="53396"/>
+                </a:lnTo>
+                <a:close/>
+                <a:lnTo>
+                  <a:pt x="556029" y="49520"/>
+                </a:lnTo>
+                <a:close/>
+                <a:lnTo>
+                  <a:pt x="562495" y="45645"/>
+                </a:lnTo>
+                <a:close/>
+                <a:lnTo>
+                  <a:pt x="568960" y="41763"/>
+                </a:lnTo>
+                <a:close/>
+                <a:lnTo>
+                  <a:pt x="575425" y="37867"/>
+                </a:lnTo>
+                <a:close/>
+                <a:lnTo>
+                  <a:pt x="581891" y="33969"/>
+                </a:lnTo>
+                <a:close/>
+                <a:lnTo>
+                  <a:pt x="588356" y="30087"/>
+                </a:lnTo>
+                <a:close/>
+                <a:lnTo>
+                  <a:pt x="594822" y="26245"/>
+                </a:lnTo>
+                <a:close/>
+                <a:lnTo>
+                  <a:pt x="601287" y="22456"/>
+                </a:lnTo>
+                <a:close/>
+                <a:lnTo>
+                  <a:pt x="607753" y="18708"/>
+                </a:lnTo>
+                <a:close/>
+                <a:lnTo>
+                  <a:pt x="614218" y="14984"/>
+                </a:lnTo>
+                <a:close/>
+                <a:lnTo>
+                  <a:pt x="620684" y="11269"/>
+                </a:lnTo>
+                <a:close/>
+                <a:lnTo>
+                  <a:pt x="627149" y="7544"/>
+                </a:lnTo>
+                <a:close/>
+                <a:lnTo>
+                  <a:pt x="633615" y="3793"/>
                 </a:lnTo>
                 <a:close/>
                 <a:lnTo>
@@ -6247,8 +6247,8 @@
         </p:nvSpPr>
         <p:spPr>
           <a:xfrm>
-            <a:off x="5806440" y="1415491"/>
-            <a:ext cx="594360" cy="465293"/>
+            <a:off x="6217920" y="1066190"/>
+            <a:ext cx="640080" cy="224486"/>
           </a:xfrm>
           <a:custGeom>
             <a:avLst/>
@@ -6257,404 +6257,404 @@
             <a:cxnLst/>
             <a:rect l="l" t="t" r="r" b="b"/>
             <a:pathLst>
-              <a:path w="594360" h="465293">
+              <a:path w="640080" h="224486">
                 <a:moveTo>
-                  <a:pt x="594360" y="0"/>
+                  <a:pt x="640080" y="0"/>
                 </a:moveTo>
                 <a:lnTo>
-                  <a:pt x="588354" y="5785"/>
-                </a:lnTo>
-                <a:close/>
-                <a:lnTo>
-                  <a:pt x="582350" y="11549"/>
-                </a:lnTo>
-                <a:close/>
-                <a:lnTo>
-                  <a:pt x="576349" y="17290"/>
-                </a:lnTo>
-                <a:close/>
-                <a:lnTo>
-                  <a:pt x="570349" y="23009"/>
-                </a:lnTo>
-                <a:close/>
-                <a:lnTo>
-                  <a:pt x="564350" y="28705"/>
-                </a:lnTo>
-                <a:close/>
-                <a:lnTo>
-                  <a:pt x="558352" y="34377"/>
-                </a:lnTo>
-                <a:close/>
-                <a:lnTo>
-                  <a:pt x="552352" y="40026"/>
-                </a:lnTo>
-                <a:close/>
-                <a:lnTo>
-                  <a:pt x="546352" y="45650"/>
-                </a:lnTo>
-                <a:close/>
-                <a:lnTo>
-                  <a:pt x="540349" y="51249"/>
-                </a:lnTo>
-                <a:close/>
-                <a:lnTo>
-                  <a:pt x="534344" y="56823"/>
-                </a:lnTo>
-                <a:close/>
-                <a:lnTo>
-                  <a:pt x="528336" y="62371"/>
-                </a:lnTo>
-                <a:close/>
-                <a:lnTo>
-                  <a:pt x="522326" y="67893"/>
-                </a:lnTo>
-                <a:close/>
-                <a:lnTo>
-                  <a:pt x="516314" y="73389"/>
-                </a:lnTo>
-                <a:close/>
-                <a:lnTo>
-                  <a:pt x="510302" y="78861"/>
-                </a:lnTo>
-                <a:close/>
-                <a:lnTo>
-                  <a:pt x="504292" y="84309"/>
-                </a:lnTo>
-                <a:close/>
-                <a:lnTo>
-                  <a:pt x="498284" y="89732"/>
-                </a:lnTo>
-                <a:close/>
-                <a:lnTo>
-                  <a:pt x="492279" y="95132"/>
-                </a:lnTo>
-                <a:close/>
-                <a:lnTo>
-                  <a:pt x="486277" y="100510"/>
-                </a:lnTo>
-                <a:close/>
-                <a:lnTo>
-                  <a:pt x="480277" y="105865"/>
-                </a:lnTo>
-                <a:close/>
-                <a:lnTo>
-                  <a:pt x="474277" y="111198"/>
-                </a:lnTo>
-                <a:close/>
-                <a:lnTo>
-                  <a:pt x="468277" y="116509"/>
-                </a:lnTo>
-                <a:close/>
-                <a:lnTo>
-                  <a:pt x="462276" y="121799"/>
-                </a:lnTo>
-                <a:close/>
-                <a:lnTo>
-                  <a:pt x="456275" y="127068"/>
-                </a:lnTo>
-                <a:close/>
-                <a:lnTo>
-                  <a:pt x="450273" y="132315"/>
-                </a:lnTo>
-                <a:close/>
-                <a:lnTo>
-                  <a:pt x="444270" y="137539"/>
-                </a:lnTo>
-                <a:close/>
-                <a:lnTo>
-                  <a:pt x="438268" y="142739"/>
-                </a:lnTo>
-                <a:close/>
-                <a:lnTo>
-                  <a:pt x="432265" y="147916"/>
-                </a:lnTo>
-                <a:close/>
-                <a:lnTo>
-                  <a:pt x="426263" y="153069"/>
-                </a:lnTo>
-                <a:close/>
-                <a:lnTo>
-                  <a:pt x="420261" y="158197"/>
-                </a:lnTo>
-                <a:close/>
-                <a:lnTo>
-                  <a:pt x="414259" y="163301"/>
-                </a:lnTo>
-                <a:close/>
-                <a:lnTo>
-                  <a:pt x="408258" y="168380"/>
-                </a:lnTo>
-                <a:close/>
-                <a:lnTo>
-                  <a:pt x="402258" y="173435"/>
-                </a:lnTo>
-                <a:close/>
-                <a:lnTo>
-                  <a:pt x="396259" y="178465"/>
-                </a:lnTo>
-                <a:close/>
-                <a:lnTo>
-                  <a:pt x="390258" y="183473"/>
-                </a:lnTo>
-                <a:close/>
-                <a:lnTo>
-                  <a:pt x="384256" y="188460"/>
-                </a:lnTo>
-                <a:close/>
-                <a:lnTo>
-                  <a:pt x="378252" y="193427"/>
-                </a:lnTo>
-                <a:close/>
-                <a:lnTo>
-                  <a:pt x="372245" y="198376"/>
-                </a:lnTo>
-                <a:close/>
-                <a:lnTo>
-                  <a:pt x="366234" y="203306"/>
-                </a:lnTo>
-                <a:close/>
-                <a:lnTo>
-                  <a:pt x="360222" y="208217"/>
-                </a:lnTo>
-                <a:close/>
-                <a:lnTo>
-                  <a:pt x="354210" y="213105"/>
-                </a:lnTo>
-                <a:close/>
-                <a:lnTo>
-                  <a:pt x="348200" y="217971"/>
-                </a:lnTo>
-                <a:close/>
-                <a:lnTo>
-                  <a:pt x="342192" y="222811"/>
-                </a:lnTo>
-                <a:close/>
-                <a:lnTo>
-                  <a:pt x="336187" y="227625"/>
-                </a:lnTo>
-                <a:close/>
-                <a:lnTo>
-                  <a:pt x="330185" y="232415"/>
-                </a:lnTo>
-                <a:close/>
-                <a:lnTo>
-                  <a:pt x="324185" y="237182"/>
-                </a:lnTo>
-                <a:close/>
-                <a:lnTo>
-                  <a:pt x="318185" y="241927"/>
-                </a:lnTo>
-                <a:close/>
-                <a:lnTo>
-                  <a:pt x="312185" y="246653"/>
-                </a:lnTo>
-                <a:close/>
-                <a:lnTo>
-                  <a:pt x="306183" y="251360"/>
-                </a:lnTo>
-                <a:close/>
-                <a:lnTo>
-                  <a:pt x="300181" y="256048"/>
-                </a:lnTo>
-                <a:close/>
-                <a:lnTo>
-                  <a:pt x="294179" y="260717"/>
-                </a:lnTo>
-                <a:close/>
-                <a:lnTo>
-                  <a:pt x="288177" y="265365"/>
-                </a:lnTo>
-                <a:close/>
-                <a:lnTo>
-                  <a:pt x="282175" y="269994"/>
-                </a:lnTo>
-                <a:close/>
-                <a:lnTo>
-                  <a:pt x="276175" y="274602"/>
-                </a:lnTo>
-                <a:close/>
-                <a:lnTo>
-                  <a:pt x="270175" y="279189"/>
-                </a:lnTo>
-                <a:close/>
-                <a:lnTo>
-                  <a:pt x="264175" y="283756"/>
-                </a:lnTo>
-                <a:close/>
-                <a:lnTo>
-                  <a:pt x="258173" y="288303"/>
-                </a:lnTo>
-                <a:close/>
-                <a:lnTo>
-                  <a:pt x="252168" y="292829"/>
-                </a:lnTo>
-                <a:close/>
-                <a:lnTo>
-                  <a:pt x="246160" y="297335"/>
-                </a:lnTo>
-                <a:close/>
-                <a:lnTo>
-                  <a:pt x="240150" y="301821"/>
-                </a:lnTo>
-                <a:close/>
-                <a:lnTo>
-                  <a:pt x="234138" y="306287"/>
-                </a:lnTo>
-                <a:close/>
-                <a:lnTo>
-                  <a:pt x="228126" y="310733"/>
-                </a:lnTo>
-                <a:close/>
-                <a:lnTo>
-                  <a:pt x="222115" y="315159"/>
-                </a:lnTo>
-                <a:close/>
-                <a:lnTo>
-                  <a:pt x="216108" y="319564"/>
-                </a:lnTo>
-                <a:close/>
-                <a:lnTo>
-                  <a:pt x="210104" y="323949"/>
-                </a:lnTo>
-                <a:close/>
-                <a:lnTo>
-                  <a:pt x="204102" y="328314"/>
-                </a:lnTo>
-                <a:close/>
-                <a:lnTo>
-                  <a:pt x="198101" y="332658"/>
-                </a:lnTo>
-                <a:close/>
-                <a:lnTo>
-                  <a:pt x="192102" y="336983"/>
-                </a:lnTo>
-                <a:close/>
-                <a:lnTo>
-                  <a:pt x="186102" y="341288"/>
-                </a:lnTo>
-                <a:close/>
-                <a:lnTo>
-                  <a:pt x="180101" y="345573"/>
-                </a:lnTo>
-                <a:close/>
-                <a:lnTo>
-                  <a:pt x="174099" y="349838"/>
-                </a:lnTo>
-                <a:close/>
-                <a:lnTo>
-                  <a:pt x="168097" y="354082"/>
-                </a:lnTo>
-                <a:close/>
-                <a:lnTo>
-                  <a:pt x="162095" y="358305"/>
-                </a:lnTo>
-                <a:close/>
-                <a:lnTo>
-                  <a:pt x="156092" y="362506"/>
-                </a:lnTo>
-                <a:close/>
-                <a:lnTo>
-                  <a:pt x="150090" y="366686"/>
-                </a:lnTo>
-                <a:close/>
-                <a:lnTo>
-                  <a:pt x="144087" y="370846"/>
-                </a:lnTo>
-                <a:close/>
-                <a:lnTo>
-                  <a:pt x="138085" y="374987"/>
-                </a:lnTo>
-                <a:close/>
-                <a:lnTo>
-                  <a:pt x="132084" y="379110"/>
-                </a:lnTo>
-                <a:close/>
-                <a:lnTo>
-                  <a:pt x="126083" y="383218"/>
-                </a:lnTo>
-                <a:close/>
-                <a:lnTo>
-                  <a:pt x="120083" y="387311"/>
-                </a:lnTo>
-                <a:close/>
-                <a:lnTo>
-                  <a:pt x="114083" y="391389"/>
-                </a:lnTo>
-                <a:close/>
-                <a:lnTo>
-                  <a:pt x="108083" y="395450"/>
-                </a:lnTo>
-                <a:close/>
-                <a:lnTo>
-                  <a:pt x="102081" y="399491"/>
-                </a:lnTo>
-                <a:close/>
-                <a:lnTo>
-                  <a:pt x="96076" y="403512"/>
-                </a:lnTo>
-                <a:close/>
-                <a:lnTo>
-                  <a:pt x="90068" y="407511"/>
-                </a:lnTo>
-                <a:close/>
-                <a:lnTo>
-                  <a:pt x="84058" y="411487"/>
-                </a:lnTo>
-                <a:close/>
-                <a:lnTo>
-                  <a:pt x="78046" y="415443"/>
-                </a:lnTo>
-                <a:close/>
-                <a:lnTo>
-                  <a:pt x="72034" y="419380"/>
-                </a:lnTo>
-                <a:close/>
-                <a:lnTo>
-                  <a:pt x="66024" y="423300"/>
-                </a:lnTo>
-                <a:close/>
-                <a:lnTo>
-                  <a:pt x="60016" y="427204"/>
-                </a:lnTo>
-                <a:close/>
-                <a:lnTo>
-                  <a:pt x="54011" y="431093"/>
-                </a:lnTo>
-                <a:close/>
-                <a:lnTo>
-                  <a:pt x="48008" y="434965"/>
-                </a:lnTo>
-                <a:close/>
-                <a:lnTo>
-                  <a:pt x="42008" y="438822"/>
-                </a:lnTo>
-                <a:close/>
-                <a:lnTo>
-                  <a:pt x="36008" y="442661"/>
-                </a:lnTo>
-                <a:close/>
-                <a:lnTo>
-                  <a:pt x="30010" y="446482"/>
-                </a:lnTo>
-                <a:close/>
-                <a:lnTo>
-                  <a:pt x="24011" y="450284"/>
-                </a:lnTo>
-                <a:close/>
-                <a:lnTo>
-                  <a:pt x="18011" y="454067"/>
-                </a:lnTo>
-                <a:close/>
-                <a:lnTo>
-                  <a:pt x="12010" y="457830"/>
-                </a:lnTo>
-                <a:close/>
-                <a:lnTo>
-                  <a:pt x="6006" y="461572"/>
-                </a:lnTo>
-                <a:close/>
-                <a:lnTo>
-                  <a:pt x="0" y="465293"/>
+                  <a:pt x="633615" y="4668"/>
+                </a:lnTo>
+                <a:close/>
+                <a:lnTo>
+                  <a:pt x="627149" y="9214"/>
+                </a:lnTo>
+                <a:close/>
+                <a:lnTo>
+                  <a:pt x="620684" y="13657"/>
+                </a:lnTo>
+                <a:close/>
+                <a:lnTo>
+                  <a:pt x="614218" y="18018"/>
+                </a:lnTo>
+                <a:close/>
+                <a:lnTo>
+                  <a:pt x="607753" y="22313"/>
+                </a:lnTo>
+                <a:close/>
+                <a:lnTo>
+                  <a:pt x="601287" y="26564"/>
+                </a:lnTo>
+                <a:close/>
+                <a:lnTo>
+                  <a:pt x="594822" y="30789"/>
+                </a:lnTo>
+                <a:close/>
+                <a:lnTo>
+                  <a:pt x="588356" y="34999"/>
+                </a:lnTo>
+                <a:close/>
+                <a:lnTo>
+                  <a:pt x="581891" y="39173"/>
+                </a:lnTo>
+                <a:close/>
+                <a:lnTo>
+                  <a:pt x="575425" y="43277"/>
+                </a:lnTo>
+                <a:close/>
+                <a:lnTo>
+                  <a:pt x="568960" y="47278"/>
+                </a:lnTo>
+                <a:close/>
+                <a:lnTo>
+                  <a:pt x="562495" y="51179"/>
+                </a:lnTo>
+                <a:close/>
+                <a:lnTo>
+                  <a:pt x="556029" y="55030"/>
+                </a:lnTo>
+                <a:close/>
+                <a:lnTo>
+                  <a:pt x="549564" y="58883"/>
+                </a:lnTo>
+                <a:close/>
+                <a:lnTo>
+                  <a:pt x="543098" y="62780"/>
+                </a:lnTo>
+                <a:close/>
+                <a:lnTo>
+                  <a:pt x="536633" y="66694"/>
+                </a:lnTo>
+                <a:close/>
+                <a:lnTo>
+                  <a:pt x="530167" y="70570"/>
+                </a:lnTo>
+                <a:close/>
+                <a:lnTo>
+                  <a:pt x="523702" y="74356"/>
+                </a:lnTo>
+                <a:close/>
+                <a:lnTo>
+                  <a:pt x="517236" y="78032"/>
+                </a:lnTo>
+                <a:close/>
+                <a:lnTo>
+                  <a:pt x="510771" y="81631"/>
+                </a:lnTo>
+                <a:close/>
+                <a:lnTo>
+                  <a:pt x="504305" y="85192"/>
+                </a:lnTo>
+                <a:close/>
+                <a:lnTo>
+                  <a:pt x="497840" y="88748"/>
+                </a:lnTo>
+                <a:close/>
+                <a:lnTo>
+                  <a:pt x="491375" y="92282"/>
+                </a:lnTo>
+                <a:close/>
+                <a:lnTo>
+                  <a:pt x="484909" y="95756"/>
+                </a:lnTo>
+                <a:close/>
+                <a:lnTo>
+                  <a:pt x="478444" y="99131"/>
+                </a:lnTo>
+                <a:close/>
+                <a:lnTo>
+                  <a:pt x="471978" y="102398"/>
+                </a:lnTo>
+                <a:close/>
+                <a:lnTo>
+                  <a:pt x="465513" y="105606"/>
+                </a:lnTo>
+                <a:close/>
+                <a:lnTo>
+                  <a:pt x="459047" y="108807"/>
+                </a:lnTo>
+                <a:close/>
+                <a:lnTo>
+                  <a:pt x="452582" y="112051"/>
+                </a:lnTo>
+                <a:close/>
+                <a:lnTo>
+                  <a:pt x="446116" y="115319"/>
+                </a:lnTo>
+                <a:close/>
+                <a:lnTo>
+                  <a:pt x="439651" y="118558"/>
+                </a:lnTo>
+                <a:close/>
+                <a:lnTo>
+                  <a:pt x="433185" y="121713"/>
+                </a:lnTo>
+                <a:close/>
+                <a:lnTo>
+                  <a:pt x="426720" y="124757"/>
+                </a:lnTo>
+                <a:close/>
+                <a:lnTo>
+                  <a:pt x="420255" y="127718"/>
+                </a:lnTo>
+                <a:close/>
+                <a:lnTo>
+                  <a:pt x="413789" y="130635"/>
+                </a:lnTo>
+                <a:close/>
+                <a:lnTo>
+                  <a:pt x="407324" y="133545"/>
+                </a:lnTo>
+                <a:close/>
+                <a:lnTo>
+                  <a:pt x="400858" y="136437"/>
+                </a:lnTo>
+                <a:close/>
+                <a:lnTo>
+                  <a:pt x="394393" y="139276"/>
+                </a:lnTo>
+                <a:close/>
+                <a:lnTo>
+                  <a:pt x="387927" y="142021"/>
+                </a:lnTo>
+                <a:close/>
+                <a:lnTo>
+                  <a:pt x="381462" y="144655"/>
+                </a:lnTo>
+                <a:close/>
+                <a:lnTo>
+                  <a:pt x="374996" y="147221"/>
+                </a:lnTo>
+                <a:close/>
+                <a:lnTo>
+                  <a:pt x="368531" y="149773"/>
+                </a:lnTo>
+                <a:close/>
+                <a:lnTo>
+                  <a:pt x="362065" y="152363"/>
+                </a:lnTo>
+                <a:close/>
+                <a:lnTo>
+                  <a:pt x="355600" y="154984"/>
+                </a:lnTo>
+                <a:close/>
+                <a:lnTo>
+                  <a:pt x="349135" y="157584"/>
+                </a:lnTo>
+                <a:close/>
+                <a:lnTo>
+                  <a:pt x="342669" y="160109"/>
+                </a:lnTo>
+                <a:close/>
+                <a:lnTo>
+                  <a:pt x="336204" y="162520"/>
+                </a:lnTo>
+                <a:close/>
+                <a:lnTo>
+                  <a:pt x="329738" y="164844"/>
+                </a:lnTo>
+                <a:close/>
+                <a:lnTo>
+                  <a:pt x="323273" y="167119"/>
+                </a:lnTo>
+                <a:close/>
+                <a:lnTo>
+                  <a:pt x="316807" y="169382"/>
+                </a:lnTo>
+                <a:close/>
+                <a:lnTo>
+                  <a:pt x="310342" y="171633"/>
+                </a:lnTo>
+                <a:close/>
+                <a:lnTo>
+                  <a:pt x="303876" y="173835"/>
+                </a:lnTo>
+                <a:close/>
+                <a:lnTo>
+                  <a:pt x="297411" y="175949"/>
+                </a:lnTo>
+                <a:close/>
+                <a:lnTo>
+                  <a:pt x="290945" y="177950"/>
+                </a:lnTo>
+                <a:close/>
+                <a:lnTo>
+                  <a:pt x="284480" y="179876"/>
+                </a:lnTo>
+                <a:close/>
+                <a:lnTo>
+                  <a:pt x="278015" y="181781"/>
+                </a:lnTo>
+                <a:close/>
+                <a:lnTo>
+                  <a:pt x="271549" y="183717"/>
+                </a:lnTo>
+                <a:close/>
+                <a:lnTo>
+                  <a:pt x="265084" y="185690"/>
+                </a:lnTo>
+                <a:close/>
+                <a:lnTo>
+                  <a:pt x="258618" y="187650"/>
+                </a:lnTo>
+                <a:close/>
+                <a:lnTo>
+                  <a:pt x="252153" y="189542"/>
+                </a:lnTo>
+                <a:close/>
+                <a:lnTo>
+                  <a:pt x="245687" y="191323"/>
+                </a:lnTo>
+                <a:close/>
+                <a:lnTo>
+                  <a:pt x="239222" y="193010"/>
+                </a:lnTo>
+                <a:close/>
+                <a:lnTo>
+                  <a:pt x="232756" y="194643"/>
+                </a:lnTo>
+                <a:close/>
+                <a:lnTo>
+                  <a:pt x="226291" y="196260"/>
+                </a:lnTo>
+                <a:close/>
+                <a:lnTo>
+                  <a:pt x="219825" y="197868"/>
+                </a:lnTo>
+                <a:close/>
+                <a:lnTo>
+                  <a:pt x="213360" y="199433"/>
+                </a:lnTo>
+                <a:close/>
+                <a:lnTo>
+                  <a:pt x="206895" y="200915"/>
+                </a:lnTo>
+                <a:close/>
+                <a:lnTo>
+                  <a:pt x="200429" y="202285"/>
+                </a:lnTo>
+                <a:close/>
+                <a:lnTo>
+                  <a:pt x="193964" y="203572"/>
+                </a:lnTo>
+                <a:close/>
+                <a:lnTo>
+                  <a:pt x="187498" y="204830"/>
+                </a:lnTo>
+                <a:close/>
+                <a:lnTo>
+                  <a:pt x="181033" y="206112"/>
+                </a:lnTo>
+                <a:close/>
+                <a:lnTo>
+                  <a:pt x="174567" y="207437"/>
+                </a:lnTo>
+                <a:close/>
+                <a:lnTo>
+                  <a:pt x="168102" y="208755"/>
+                </a:lnTo>
+                <a:close/>
+                <a:lnTo>
+                  <a:pt x="161636" y="210014"/>
+                </a:lnTo>
+                <a:close/>
+                <a:lnTo>
+                  <a:pt x="155171" y="211164"/>
+                </a:lnTo>
+                <a:close/>
+                <a:lnTo>
+                  <a:pt x="148705" y="212216"/>
+                </a:lnTo>
+                <a:close/>
+                <a:lnTo>
+                  <a:pt x="142240" y="213208"/>
+                </a:lnTo>
+                <a:close/>
+                <a:lnTo>
+                  <a:pt x="135775" y="214178"/>
+                </a:lnTo>
+                <a:close/>
+                <a:lnTo>
+                  <a:pt x="129309" y="215143"/>
+                </a:lnTo>
+                <a:close/>
+                <a:lnTo>
+                  <a:pt x="122844" y="216069"/>
+                </a:lnTo>
+                <a:close/>
+                <a:lnTo>
+                  <a:pt x="116378" y="216920"/>
+                </a:lnTo>
+                <a:close/>
+                <a:lnTo>
+                  <a:pt x="109913" y="217660"/>
+                </a:lnTo>
+                <a:close/>
+                <a:lnTo>
+                  <a:pt x="103447" y="218309"/>
+                </a:lnTo>
+                <a:close/>
+                <a:lnTo>
+                  <a:pt x="96982" y="218921"/>
+                </a:lnTo>
+                <a:close/>
+                <a:lnTo>
+                  <a:pt x="90516" y="219549"/>
+                </a:lnTo>
+                <a:close/>
+                <a:lnTo>
+                  <a:pt x="84051" y="220221"/>
+                </a:lnTo>
+                <a:close/>
+                <a:lnTo>
+                  <a:pt x="77585" y="220896"/>
+                </a:lnTo>
+                <a:close/>
+                <a:lnTo>
+                  <a:pt x="71120" y="221521"/>
+                </a:lnTo>
+                <a:close/>
+                <a:lnTo>
+                  <a:pt x="64655" y="222049"/>
+                </a:lnTo>
+                <a:close/>
+                <a:lnTo>
+                  <a:pt x="58189" y="222474"/>
+                </a:lnTo>
+                <a:close/>
+                <a:lnTo>
+                  <a:pt x="51724" y="222826"/>
+                </a:lnTo>
+                <a:close/>
+                <a:lnTo>
+                  <a:pt x="45258" y="223135"/>
+                </a:lnTo>
+                <a:close/>
+                <a:lnTo>
+                  <a:pt x="38793" y="223424"/>
+                </a:lnTo>
+                <a:close/>
+                <a:lnTo>
+                  <a:pt x="32327" y="223690"/>
+                </a:lnTo>
+                <a:close/>
+                <a:lnTo>
+                  <a:pt x="25862" y="223929"/>
+                </a:lnTo>
+                <a:close/>
+                <a:lnTo>
+                  <a:pt x="19396" y="224134"/>
+                </a:lnTo>
+                <a:close/>
+                <a:lnTo>
+                  <a:pt x="12931" y="224299"/>
+                </a:lnTo>
+                <a:close/>
+                <a:lnTo>
+                  <a:pt x="6465" y="224418"/>
+                </a:lnTo>
+                <a:close/>
+                <a:lnTo>
+                  <a:pt x="0" y="224486"/>
                 </a:lnTo>
                 <a:close/>
               </a:path>
@@ -6696,7 +6696,7 @@
         </p:nvSpPr>
         <p:spPr>
           <a:xfrm>
-            <a:off x="4180840" y="2391410"/>
+            <a:off x="5895340" y="2208530"/>
             <a:ext cx="1524000" cy="508000"/>
           </a:xfrm>
           <a:prstGeom prst="rect">
@@ -6719,115 +6719,7 @@
               </a:defRPr>
             </a:pPr>
             <a:r>
-              <a:t>O</a:t>
-            </a:r>
-          </a:p>
-        </p:txBody>
-      </p:sp>
-      <p:sp>
-        <p:nvSpPr>
-          <p:cNvPr id="12" name="TextBox 11"/>
-          <p:cNvSpPr txBox="1"/>
-          <p:nvPr/>
-        </p:nvSpPr>
-        <p:spPr>
-          <a:xfrm>
-            <a:off x="5415280" y="2391410"/>
-            <a:ext cx="1524000" cy="508000"/>
-          </a:xfrm>
-          <a:prstGeom prst="rect">
-            <a:avLst/>
-          </a:prstGeom>
-          <a:noFill/>
-        </p:spPr>
-        <p:txBody>
-          <a:bodyPr wrap="none">
-            <a:spAutoFit/>
-          </a:bodyPr>
-          <a:lstStyle/>
-          <a:p>
-            <a:pPr>
-              <a:defRPr sz="1400" b="1">
-                <a:solidFill>
-                  <a:srgbClr val="FFFFFF"/>
-                </a:solidFill>
-                <a:latin typeface="Inter"/>
-              </a:defRPr>
-            </a:pPr>
-            <a:r>
               <a:t>a</a:t>
-            </a:r>
-          </a:p>
-        </p:txBody>
-      </p:sp>
-      <p:sp>
-        <p:nvSpPr>
-          <p:cNvPr id="13" name="TextBox 12"/>
-          <p:cNvSpPr txBox="1"/>
-          <p:nvPr/>
-        </p:nvSpPr>
-        <p:spPr>
-          <a:xfrm>
-            <a:off x="6649720" y="2345690"/>
-            <a:ext cx="1524000" cy="508000"/>
-          </a:xfrm>
-          <a:prstGeom prst="rect">
-            <a:avLst/>
-          </a:prstGeom>
-          <a:noFill/>
-        </p:spPr>
-        <p:txBody>
-          <a:bodyPr wrap="none">
-            <a:spAutoFit/>
-          </a:bodyPr>
-          <a:lstStyle/>
-          <a:p>
-            <a:pPr>
-              <a:defRPr sz="1400" b="1">
-                <a:solidFill>
-                  <a:srgbClr val="FFFFFF"/>
-                </a:solidFill>
-                <a:latin typeface="Inter"/>
-              </a:defRPr>
-            </a:pPr>
-            <a:r>
-              <a:t>x</a:t>
-            </a:r>
-          </a:p>
-        </p:txBody>
-      </p:sp>
-      <p:sp>
-        <p:nvSpPr>
-          <p:cNvPr id="14" name="TextBox 13"/>
-          <p:cNvSpPr txBox="1"/>
-          <p:nvPr/>
-        </p:nvSpPr>
-        <p:spPr>
-          <a:xfrm>
-            <a:off x="4226560" y="379730"/>
-            <a:ext cx="1524000" cy="508000"/>
-          </a:xfrm>
-          <a:prstGeom prst="rect">
-            <a:avLst/>
-          </a:prstGeom>
-          <a:noFill/>
-        </p:spPr>
-        <p:txBody>
-          <a:bodyPr wrap="none">
-            <a:spAutoFit/>
-          </a:bodyPr>
-          <a:lstStyle/>
-          <a:p>
-            <a:pPr>
-              <a:defRPr sz="1400" b="1">
-                <a:solidFill>
-                  <a:srgbClr val="FFFFFF"/>
-                </a:solidFill>
-                <a:latin typeface="Inter"/>
-              </a:defRPr>
-            </a:pPr>
-            <a:r>
-              <a:t>y</a:t>
             </a:r>
           </a:p>
         </p:txBody>

--- a/output/5.pptx
+++ b/output/5.pptx
@@ -3104,8 +3104,8 @@
         </p:nvCxnSpPr>
         <p:spPr>
           <a:xfrm>
-            <a:off x="4572000.0" y="2571750.0"/>
-            <a:ext cx="2743200.0" cy="0.0"/>
+            <a:off x="4114800.0" y="2571750.0"/>
+            <a:ext cx="3200400.0" cy="0.0"/>
           </a:xfrm>
           <a:prstGeom prst="line">
             <a:avLst/>
@@ -3140,7 +3140,7 @@
         <p:spPr>
           <a:xfrm flipV="1">
             <a:off x="4572000.0" y="285750.0"/>
-            <a:ext cx="0.0" cy="2286000.0"/>
+            <a:ext cx="0.0" cy="2743200.0"/>
           </a:xfrm>
           <a:prstGeom prst="line">
             <a:avLst/>
@@ -3174,8 +3174,8 @@
         </p:nvSpPr>
         <p:spPr>
           <a:xfrm>
-            <a:off x="4663440" y="717347"/>
-            <a:ext cx="1508760" cy="1400861"/>
+            <a:off x="4343400" y="1004468"/>
+            <a:ext cx="1600200" cy="1149401"/>
           </a:xfrm>
           <a:custGeom>
             <a:avLst/>
@@ -3184,1204 +3184,1204 @@
             <a:cxnLst/>
             <a:rect l="l" t="t" r="r" b="b"/>
             <a:pathLst>
-              <a:path w="1508760" h="1400861">
+              <a:path w="1600200" h="1149401">
                 <a:moveTo>
-                  <a:pt x="0" y="1400861"/>
+                  <a:pt x="0" y="1149401"/>
                 </a:moveTo>
                 <a:lnTo>
-                  <a:pt x="5046" y="1387863"/>
-                </a:lnTo>
-                <a:close/>
-                <a:lnTo>
-                  <a:pt x="10092" y="1375400"/>
-                </a:lnTo>
-                <a:close/>
-                <a:lnTo>
-                  <a:pt x="15138" y="1363434"/>
-                </a:lnTo>
-                <a:close/>
-                <a:lnTo>
-                  <a:pt x="20184" y="1351926"/>
-                </a:lnTo>
-                <a:close/>
-                <a:lnTo>
-                  <a:pt x="25230" y="1340839"/>
-                </a:lnTo>
-                <a:close/>
-                <a:lnTo>
-                  <a:pt x="30276" y="1330136"/>
-                </a:lnTo>
-                <a:close/>
-                <a:lnTo>
-                  <a:pt x="35322" y="1319778"/>
-                </a:lnTo>
-                <a:close/>
-                <a:lnTo>
-                  <a:pt x="40368" y="1309727"/>
-                </a:lnTo>
-                <a:close/>
-                <a:lnTo>
-                  <a:pt x="45414" y="1299947"/>
-                </a:lnTo>
-                <a:close/>
-                <a:lnTo>
-                  <a:pt x="50460" y="1290402"/>
-                </a:lnTo>
-                <a:close/>
-                <a:lnTo>
-                  <a:pt x="55506" y="1281070"/>
-                </a:lnTo>
-                <a:close/>
-                <a:lnTo>
-                  <a:pt x="60552" y="1271934"/>
-                </a:lnTo>
-                <a:close/>
-                <a:lnTo>
-                  <a:pt x="65598" y="1262975"/>
-                </a:lnTo>
-                <a:close/>
-                <a:lnTo>
-                  <a:pt x="70644" y="1254176"/>
-                </a:lnTo>
-                <a:close/>
-                <a:lnTo>
-                  <a:pt x="75690" y="1245522"/>
-                </a:lnTo>
-                <a:close/>
-                <a:lnTo>
-                  <a:pt x="80736" y="1237005"/>
-                </a:lnTo>
-                <a:close/>
-                <a:lnTo>
-                  <a:pt x="85782" y="1228617"/>
-                </a:lnTo>
-                <a:close/>
-                <a:lnTo>
-                  <a:pt x="90828" y="1220347"/>
-                </a:lnTo>
-                <a:close/>
-                <a:lnTo>
-                  <a:pt x="95874" y="1212188"/>
-                </a:lnTo>
-                <a:close/>
-                <a:lnTo>
-                  <a:pt x="100920" y="1204133"/>
-                </a:lnTo>
-                <a:close/>
-                <a:lnTo>
-                  <a:pt x="105966" y="1196176"/>
-                </a:lnTo>
-                <a:close/>
-                <a:lnTo>
-                  <a:pt x="111012" y="1188311"/>
-                </a:lnTo>
-                <a:close/>
-                <a:lnTo>
-                  <a:pt x="116058" y="1180532"/>
-                </a:lnTo>
-                <a:close/>
-                <a:lnTo>
-                  <a:pt x="121104" y="1172837"/>
-                </a:lnTo>
-                <a:close/>
-                <a:lnTo>
-                  <a:pt x="126151" y="1165228"/>
-                </a:lnTo>
-                <a:close/>
-                <a:lnTo>
-                  <a:pt x="131197" y="1157709"/>
-                </a:lnTo>
-                <a:close/>
-                <a:lnTo>
-                  <a:pt x="136243" y="1150283"/>
-                </a:lnTo>
-                <a:close/>
-                <a:lnTo>
-                  <a:pt x="141289" y="1142953"/>
-                </a:lnTo>
-                <a:close/>
-                <a:lnTo>
-                  <a:pt x="146335" y="1135713"/>
-                </a:lnTo>
-                <a:close/>
-                <a:lnTo>
-                  <a:pt x="151381" y="1128557"/>
-                </a:lnTo>
-                <a:close/>
-                <a:lnTo>
-                  <a:pt x="156427" y="1121479"/>
-                </a:lnTo>
-                <a:close/>
-                <a:lnTo>
-                  <a:pt x="161473" y="1114472"/>
-                </a:lnTo>
-                <a:close/>
-                <a:lnTo>
-                  <a:pt x="166519" y="1107528"/>
-                </a:lnTo>
-                <a:close/>
-                <a:lnTo>
-                  <a:pt x="171565" y="1100644"/>
-                </a:lnTo>
-                <a:close/>
-                <a:lnTo>
-                  <a:pt x="176611" y="1093813"/>
-                </a:lnTo>
-                <a:close/>
-                <a:lnTo>
-                  <a:pt x="181657" y="1087030"/>
-                </a:lnTo>
-                <a:close/>
-                <a:lnTo>
-                  <a:pt x="186703" y="1080291"/>
-                </a:lnTo>
-                <a:close/>
-                <a:lnTo>
-                  <a:pt x="191749" y="1073593"/>
-                </a:lnTo>
-                <a:close/>
-                <a:lnTo>
-                  <a:pt x="196795" y="1066933"/>
-                </a:lnTo>
-                <a:close/>
-                <a:lnTo>
-                  <a:pt x="201841" y="1060311"/>
-                </a:lnTo>
-                <a:close/>
-                <a:lnTo>
-                  <a:pt x="206887" y="1053723"/>
-                </a:lnTo>
-                <a:close/>
-                <a:lnTo>
-                  <a:pt x="211933" y="1047174"/>
-                </a:lnTo>
-                <a:close/>
-                <a:lnTo>
-                  <a:pt x="216979" y="1040673"/>
-                </a:lnTo>
-                <a:close/>
-                <a:lnTo>
-                  <a:pt x="222025" y="1034234"/>
-                </a:lnTo>
-                <a:close/>
-                <a:lnTo>
-                  <a:pt x="227071" y="1027869"/>
-                </a:lnTo>
-                <a:close/>
-                <a:lnTo>
-                  <a:pt x="232117" y="1021588"/>
-                </a:lnTo>
-                <a:close/>
-                <a:lnTo>
-                  <a:pt x="237163" y="1015385"/>
-                </a:lnTo>
-                <a:close/>
-                <a:lnTo>
-                  <a:pt x="242209" y="1009240"/>
-                </a:lnTo>
-                <a:close/>
-                <a:lnTo>
-                  <a:pt x="247255" y="1003136"/>
-                </a:lnTo>
-                <a:close/>
-                <a:lnTo>
-                  <a:pt x="252301" y="997055"/>
-                </a:lnTo>
-                <a:close/>
-                <a:lnTo>
-                  <a:pt x="257347" y="990982"/>
-                </a:lnTo>
-                <a:close/>
-                <a:lnTo>
-                  <a:pt x="262393" y="984918"/>
-                </a:lnTo>
-                <a:close/>
-                <a:lnTo>
-                  <a:pt x="267439" y="978866"/>
-                </a:lnTo>
-                <a:close/>
-                <a:lnTo>
-                  <a:pt x="272485" y="972828"/>
-                </a:lnTo>
-                <a:close/>
-                <a:lnTo>
-                  <a:pt x="277531" y="966805"/>
-                </a:lnTo>
-                <a:close/>
-                <a:lnTo>
-                  <a:pt x="282577" y="960804"/>
-                </a:lnTo>
-                <a:close/>
-                <a:lnTo>
-                  <a:pt x="287623" y="954837"/>
-                </a:lnTo>
-                <a:close/>
-                <a:lnTo>
-                  <a:pt x="292669" y="948912"/>
-                </a:lnTo>
-                <a:close/>
-                <a:lnTo>
-                  <a:pt x="297715" y="943041"/>
-                </a:lnTo>
-                <a:close/>
-                <a:lnTo>
-                  <a:pt x="302761" y="937227"/>
-                </a:lnTo>
-                <a:close/>
-                <a:lnTo>
-                  <a:pt x="307807" y="931462"/>
-                </a:lnTo>
-                <a:close/>
-                <a:lnTo>
-                  <a:pt x="312853" y="925730"/>
-                </a:lnTo>
-                <a:close/>
-                <a:lnTo>
-                  <a:pt x="317899" y="920020"/>
-                </a:lnTo>
-                <a:close/>
-                <a:lnTo>
-                  <a:pt x="322945" y="914318"/>
-                </a:lnTo>
-                <a:close/>
-                <a:lnTo>
-                  <a:pt x="327991" y="908626"/>
-                </a:lnTo>
-                <a:close/>
-                <a:lnTo>
-                  <a:pt x="333037" y="902957"/>
-                </a:lnTo>
-                <a:close/>
-                <a:lnTo>
-                  <a:pt x="338083" y="897326"/>
-                </a:lnTo>
-                <a:close/>
-                <a:lnTo>
-                  <a:pt x="343129" y="891745"/>
-                </a:lnTo>
-                <a:close/>
-                <a:lnTo>
-                  <a:pt x="348175" y="886223"/>
-                </a:lnTo>
-                <a:close/>
-                <a:lnTo>
-                  <a:pt x="353221" y="880753"/>
-                </a:lnTo>
-                <a:close/>
-                <a:lnTo>
-                  <a:pt x="358267" y="875322"/>
-                </a:lnTo>
-                <a:close/>
-                <a:lnTo>
-                  <a:pt x="363313" y="869921"/>
-                </a:lnTo>
-                <a:close/>
-                <a:lnTo>
-                  <a:pt x="368359" y="864536"/>
-                </a:lnTo>
-                <a:close/>
-                <a:lnTo>
-                  <a:pt x="373405" y="859164"/>
-                </a:lnTo>
-                <a:close/>
-                <a:lnTo>
-                  <a:pt x="378452" y="853808"/>
-                </a:lnTo>
-                <a:close/>
-                <a:lnTo>
-                  <a:pt x="383498" y="848472"/>
-                </a:lnTo>
-                <a:close/>
-                <a:lnTo>
-                  <a:pt x="388544" y="843157"/>
-                </a:lnTo>
-                <a:close/>
-                <a:lnTo>
-                  <a:pt x="393590" y="837867"/>
-                </a:lnTo>
-                <a:close/>
-                <a:lnTo>
-                  <a:pt x="398636" y="832601"/>
-                </a:lnTo>
-                <a:close/>
-                <a:lnTo>
-                  <a:pt x="403682" y="827359"/>
-                </a:lnTo>
-                <a:close/>
-                <a:lnTo>
-                  <a:pt x="408728" y="822140"/>
-                </a:lnTo>
-                <a:close/>
-                <a:lnTo>
-                  <a:pt x="413774" y="816942"/>
-                </a:lnTo>
-                <a:close/>
-                <a:lnTo>
-                  <a:pt x="418820" y="811767"/>
-                </a:lnTo>
-                <a:close/>
-                <a:lnTo>
-                  <a:pt x="423866" y="806613"/>
-                </a:lnTo>
-                <a:close/>
-                <a:lnTo>
-                  <a:pt x="428912" y="801481"/>
-                </a:lnTo>
-                <a:close/>
-                <a:lnTo>
-                  <a:pt x="433958" y="796371"/>
-                </a:lnTo>
-                <a:close/>
-                <a:lnTo>
-                  <a:pt x="439004" y="791284"/>
-                </a:lnTo>
-                <a:close/>
-                <a:lnTo>
-                  <a:pt x="444050" y="786219"/>
-                </a:lnTo>
-                <a:close/>
-                <a:lnTo>
-                  <a:pt x="449096" y="781177"/>
-                </a:lnTo>
-                <a:close/>
-                <a:lnTo>
-                  <a:pt x="454142" y="776157"/>
-                </a:lnTo>
-                <a:close/>
-                <a:lnTo>
-                  <a:pt x="459188" y="771159"/>
-                </a:lnTo>
-                <a:close/>
-                <a:lnTo>
-                  <a:pt x="464234" y="766183"/>
-                </a:lnTo>
-                <a:close/>
-                <a:lnTo>
-                  <a:pt x="469280" y="761229"/>
-                </a:lnTo>
-                <a:close/>
-                <a:lnTo>
-                  <a:pt x="474326" y="756298"/>
-                </a:lnTo>
-                <a:close/>
-                <a:lnTo>
-                  <a:pt x="479372" y="751390"/>
-                </a:lnTo>
-                <a:close/>
-                <a:lnTo>
-                  <a:pt x="484418" y="746504"/>
-                </a:lnTo>
-                <a:close/>
-                <a:lnTo>
-                  <a:pt x="489464" y="741641"/>
-                </a:lnTo>
-                <a:close/>
-                <a:lnTo>
-                  <a:pt x="494510" y="736800"/>
-                </a:lnTo>
-                <a:close/>
-                <a:lnTo>
-                  <a:pt x="499556" y="731979"/>
-                </a:lnTo>
-                <a:close/>
-                <a:lnTo>
-                  <a:pt x="504602" y="727179"/>
-                </a:lnTo>
-                <a:close/>
-                <a:lnTo>
-                  <a:pt x="509648" y="722399"/>
-                </a:lnTo>
-                <a:close/>
-                <a:lnTo>
-                  <a:pt x="514694" y="717642"/>
-                </a:lnTo>
-                <a:close/>
-                <a:lnTo>
-                  <a:pt x="519740" y="712912"/>
-                </a:lnTo>
-                <a:close/>
-                <a:lnTo>
-                  <a:pt x="524786" y="708211"/>
-                </a:lnTo>
-                <a:close/>
-                <a:lnTo>
-                  <a:pt x="529832" y="703540"/>
-                </a:lnTo>
-                <a:close/>
-                <a:lnTo>
-                  <a:pt x="534878" y="698893"/>
-                </a:lnTo>
-                <a:close/>
-                <a:lnTo>
-                  <a:pt x="539924" y="694260"/>
-                </a:lnTo>
-                <a:close/>
-                <a:lnTo>
-                  <a:pt x="544970" y="689629"/>
-                </a:lnTo>
-                <a:close/>
-                <a:lnTo>
-                  <a:pt x="550016" y="684991"/>
-                </a:lnTo>
-                <a:close/>
-                <a:lnTo>
-                  <a:pt x="555062" y="680341"/>
-                </a:lnTo>
-                <a:close/>
-                <a:lnTo>
-                  <a:pt x="560108" y="675688"/>
-                </a:lnTo>
-                <a:close/>
-                <a:lnTo>
-                  <a:pt x="565154" y="671042"/>
-                </a:lnTo>
-                <a:close/>
-                <a:lnTo>
-                  <a:pt x="570200" y="666414"/>
-                </a:lnTo>
-                <a:close/>
-                <a:lnTo>
-                  <a:pt x="575246" y="661812"/>
-                </a:lnTo>
-                <a:close/>
-                <a:lnTo>
-                  <a:pt x="580292" y="657240"/>
-                </a:lnTo>
-                <a:close/>
-                <a:lnTo>
-                  <a:pt x="585338" y="652698"/>
-                </a:lnTo>
-                <a:close/>
-                <a:lnTo>
-                  <a:pt x="590384" y="648186"/>
-                </a:lnTo>
-                <a:close/>
-                <a:lnTo>
-                  <a:pt x="595430" y="643703"/>
-                </a:lnTo>
-                <a:close/>
-                <a:lnTo>
-                  <a:pt x="600476" y="639248"/>
-                </a:lnTo>
-                <a:close/>
-                <a:lnTo>
-                  <a:pt x="605522" y="634810"/>
-                </a:lnTo>
-                <a:close/>
-                <a:lnTo>
-                  <a:pt x="610568" y="630380"/>
-                </a:lnTo>
-                <a:close/>
-                <a:lnTo>
-                  <a:pt x="615614" y="625947"/>
-                </a:lnTo>
-                <a:close/>
-                <a:lnTo>
-                  <a:pt x="620660" y="621504"/>
-                </a:lnTo>
-                <a:close/>
-                <a:lnTo>
-                  <a:pt x="625706" y="617053"/>
-                </a:lnTo>
-                <a:close/>
-                <a:lnTo>
-                  <a:pt x="630753" y="612604"/>
-                </a:lnTo>
-                <a:close/>
-                <a:lnTo>
-                  <a:pt x="635799" y="608166"/>
-                </a:lnTo>
-                <a:close/>
-                <a:lnTo>
-                  <a:pt x="640845" y="603751"/>
-                </a:lnTo>
-                <a:close/>
-                <a:lnTo>
-                  <a:pt x="645891" y="599365"/>
-                </a:lnTo>
-                <a:close/>
-                <a:lnTo>
-                  <a:pt x="650937" y="595009"/>
-                </a:lnTo>
-                <a:close/>
-                <a:lnTo>
-                  <a:pt x="655983" y="590681"/>
-                </a:lnTo>
-                <a:close/>
-                <a:lnTo>
-                  <a:pt x="661029" y="586380"/>
-                </a:lnTo>
-                <a:close/>
-                <a:lnTo>
-                  <a:pt x="666075" y="582107"/>
-                </a:lnTo>
-                <a:close/>
-                <a:lnTo>
-                  <a:pt x="671121" y="577855"/>
-                </a:lnTo>
-                <a:close/>
-                <a:lnTo>
-                  <a:pt x="676167" y="573620"/>
-                </a:lnTo>
-                <a:close/>
-                <a:lnTo>
-                  <a:pt x="681213" y="569394"/>
-                </a:lnTo>
-                <a:close/>
-                <a:lnTo>
-                  <a:pt x="686259" y="565172"/>
-                </a:lnTo>
-                <a:close/>
-                <a:lnTo>
-                  <a:pt x="691305" y="560949"/>
-                </a:lnTo>
-                <a:close/>
-                <a:lnTo>
-                  <a:pt x="696351" y="556719"/>
-                </a:lnTo>
-                <a:close/>
-                <a:lnTo>
-                  <a:pt x="701397" y="552480"/>
-                </a:lnTo>
-                <a:close/>
-                <a:lnTo>
-                  <a:pt x="706443" y="548227"/>
-                </a:lnTo>
-                <a:close/>
-                <a:lnTo>
-                  <a:pt x="711489" y="543959"/>
-                </a:lnTo>
-                <a:close/>
-                <a:lnTo>
-                  <a:pt x="716535" y="539684"/>
-                </a:lnTo>
-                <a:close/>
-                <a:lnTo>
-                  <a:pt x="721581" y="535423"/>
-                </a:lnTo>
-                <a:close/>
-                <a:lnTo>
-                  <a:pt x="726627" y="531197"/>
-                </a:lnTo>
-                <a:close/>
-                <a:lnTo>
-                  <a:pt x="731673" y="527026"/>
-                </a:lnTo>
-                <a:close/>
-                <a:lnTo>
-                  <a:pt x="736719" y="522924"/>
-                </a:lnTo>
-                <a:close/>
-                <a:lnTo>
-                  <a:pt x="741765" y="518877"/>
-                </a:lnTo>
-                <a:close/>
-                <a:lnTo>
-                  <a:pt x="746811" y="514864"/>
-                </a:lnTo>
-                <a:close/>
-                <a:lnTo>
-                  <a:pt x="751857" y="510865"/>
-                </a:lnTo>
-                <a:close/>
-                <a:lnTo>
-                  <a:pt x="756903" y="506858"/>
-                </a:lnTo>
-                <a:close/>
-                <a:lnTo>
-                  <a:pt x="761949" y="502836"/>
-                </a:lnTo>
-                <a:close/>
-                <a:lnTo>
-                  <a:pt x="766995" y="498800"/>
-                </a:lnTo>
-                <a:close/>
-                <a:lnTo>
-                  <a:pt x="772041" y="494753"/>
-                </a:lnTo>
-                <a:close/>
-                <a:lnTo>
-                  <a:pt x="777087" y="490698"/>
-                </a:lnTo>
-                <a:close/>
-                <a:lnTo>
-                  <a:pt x="782133" y="486639"/>
-                </a:lnTo>
-                <a:close/>
-                <a:lnTo>
-                  <a:pt x="787179" y="482583"/>
-                </a:lnTo>
-                <a:close/>
-                <a:lnTo>
-                  <a:pt x="792225" y="478542"/>
-                </a:lnTo>
-                <a:close/>
-                <a:lnTo>
-                  <a:pt x="797271" y="474525"/>
-                </a:lnTo>
-                <a:close/>
-                <a:lnTo>
-                  <a:pt x="802317" y="470542"/>
-                </a:lnTo>
-                <a:close/>
-                <a:lnTo>
-                  <a:pt x="807363" y="466593"/>
-                </a:lnTo>
-                <a:close/>
-                <a:lnTo>
-                  <a:pt x="812409" y="462664"/>
-                </a:lnTo>
-                <a:close/>
-                <a:lnTo>
-                  <a:pt x="817455" y="458742"/>
-                </a:lnTo>
-                <a:close/>
-                <a:lnTo>
-                  <a:pt x="822501" y="454814"/>
-                </a:lnTo>
-                <a:close/>
-                <a:lnTo>
-                  <a:pt x="827547" y="450870"/>
-                </a:lnTo>
-                <a:close/>
-                <a:lnTo>
-                  <a:pt x="832593" y="446918"/>
-                </a:lnTo>
-                <a:close/>
-                <a:lnTo>
-                  <a:pt x="837639" y="442972"/>
-                </a:lnTo>
-                <a:close/>
-                <a:lnTo>
-                  <a:pt x="842685" y="439047"/>
-                </a:lnTo>
-                <a:close/>
-                <a:lnTo>
-                  <a:pt x="847731" y="435157"/>
-                </a:lnTo>
-                <a:close/>
-                <a:lnTo>
-                  <a:pt x="852777" y="431304"/>
-                </a:lnTo>
-                <a:close/>
-                <a:lnTo>
-                  <a:pt x="857823" y="427476"/>
-                </a:lnTo>
-                <a:close/>
-                <a:lnTo>
-                  <a:pt x="862869" y="423657"/>
-                </a:lnTo>
-                <a:close/>
-                <a:lnTo>
-                  <a:pt x="867915" y="419833"/>
-                </a:lnTo>
-                <a:close/>
-                <a:lnTo>
-                  <a:pt x="872961" y="415993"/>
-                </a:lnTo>
-                <a:close/>
-                <a:lnTo>
-                  <a:pt x="878007" y="412143"/>
-                </a:lnTo>
-                <a:close/>
-                <a:lnTo>
-                  <a:pt x="883054" y="408298"/>
-                </a:lnTo>
-                <a:close/>
-                <a:lnTo>
-                  <a:pt x="888100" y="404471"/>
-                </a:lnTo>
-                <a:close/>
-                <a:lnTo>
-                  <a:pt x="893146" y="400675"/>
-                </a:lnTo>
-                <a:close/>
-                <a:lnTo>
-                  <a:pt x="898192" y="396915"/>
-                </a:lnTo>
-                <a:close/>
-                <a:lnTo>
-                  <a:pt x="903238" y="393182"/>
-                </a:lnTo>
-                <a:close/>
-                <a:lnTo>
-                  <a:pt x="908284" y="389464"/>
-                </a:lnTo>
-                <a:close/>
-                <a:lnTo>
-                  <a:pt x="913330" y="385751"/>
-                </a:lnTo>
-                <a:close/>
-                <a:lnTo>
-                  <a:pt x="918376" y="382031"/>
-                </a:lnTo>
-                <a:close/>
-                <a:lnTo>
-                  <a:pt x="923422" y="378302"/>
-                </a:lnTo>
-                <a:close/>
-                <a:lnTo>
-                  <a:pt x="928468" y="374567"/>
-                </a:lnTo>
-                <a:close/>
-                <a:lnTo>
-                  <a:pt x="933514" y="370826"/>
-                </a:lnTo>
-                <a:close/>
-                <a:lnTo>
-                  <a:pt x="938560" y="367081"/>
-                </a:lnTo>
-                <a:close/>
-                <a:lnTo>
-                  <a:pt x="943606" y="363334"/>
-                </a:lnTo>
-                <a:close/>
-                <a:lnTo>
-                  <a:pt x="948652" y="359591"/>
-                </a:lnTo>
-                <a:close/>
-                <a:lnTo>
-                  <a:pt x="953698" y="355858"/>
-                </a:lnTo>
-                <a:close/>
-                <a:lnTo>
-                  <a:pt x="958744" y="352140"/>
-                </a:lnTo>
-                <a:close/>
-                <a:lnTo>
-                  <a:pt x="963790" y="348443"/>
-                </a:lnTo>
-                <a:close/>
-                <a:lnTo>
-                  <a:pt x="968836" y="344774"/>
-                </a:lnTo>
-                <a:close/>
-                <a:lnTo>
-                  <a:pt x="973882" y="341135"/>
-                </a:lnTo>
-                <a:close/>
-                <a:lnTo>
-                  <a:pt x="978928" y="337533"/>
-                </a:lnTo>
-                <a:close/>
-                <a:lnTo>
-                  <a:pt x="983974" y="333972"/>
-                </a:lnTo>
-                <a:close/>
-                <a:lnTo>
-                  <a:pt x="989020" y="330449"/>
-                </a:lnTo>
-                <a:close/>
-                <a:lnTo>
-                  <a:pt x="994066" y="326941"/>
-                </a:lnTo>
-                <a:close/>
-                <a:lnTo>
-                  <a:pt x="999112" y="323422"/>
-                </a:lnTo>
-                <a:close/>
-                <a:lnTo>
-                  <a:pt x="1004158" y="319866"/>
-                </a:lnTo>
-                <a:close/>
-                <a:lnTo>
-                  <a:pt x="1009204" y="316251"/>
-                </a:lnTo>
-                <a:close/>
-                <a:lnTo>
-                  <a:pt x="1014250" y="312593"/>
-                </a:lnTo>
-                <a:close/>
-                <a:lnTo>
-                  <a:pt x="1019296" y="308927"/>
-                </a:lnTo>
-                <a:close/>
-                <a:lnTo>
-                  <a:pt x="1024342" y="305293"/>
-                </a:lnTo>
-                <a:close/>
-                <a:lnTo>
-                  <a:pt x="1029388" y="301728"/>
-                </a:lnTo>
-                <a:close/>
-                <a:lnTo>
-                  <a:pt x="1034434" y="298253"/>
-                </a:lnTo>
-                <a:close/>
-                <a:lnTo>
-                  <a:pt x="1039480" y="294837"/>
-                </a:lnTo>
-                <a:close/>
-                <a:lnTo>
-                  <a:pt x="1044526" y="291440"/>
-                </a:lnTo>
-                <a:close/>
-                <a:lnTo>
-                  <a:pt x="1049572" y="288024"/>
-                </a:lnTo>
-                <a:close/>
-                <a:lnTo>
-                  <a:pt x="1054618" y="284552"/>
-                </a:lnTo>
-                <a:close/>
-                <a:lnTo>
-                  <a:pt x="1059664" y="281025"/>
-                </a:lnTo>
-                <a:close/>
-                <a:lnTo>
-                  <a:pt x="1064710" y="277470"/>
-                </a:lnTo>
-                <a:close/>
-                <a:lnTo>
-                  <a:pt x="1069756" y="273918"/>
-                </a:lnTo>
-                <a:close/>
-                <a:lnTo>
-                  <a:pt x="1074802" y="270397"/>
-                </a:lnTo>
-                <a:close/>
-                <a:lnTo>
-                  <a:pt x="1079848" y="266927"/>
-                </a:lnTo>
-                <a:close/>
-                <a:lnTo>
-                  <a:pt x="1084894" y="263495"/>
-                </a:lnTo>
-                <a:close/>
-                <a:lnTo>
-                  <a:pt x="1089940" y="260082"/>
-                </a:lnTo>
-                <a:close/>
-                <a:lnTo>
-                  <a:pt x="1094986" y="256672"/>
-                </a:lnTo>
-                <a:close/>
-                <a:lnTo>
-                  <a:pt x="1100032" y="253246"/>
-                </a:lnTo>
-                <a:close/>
-                <a:lnTo>
-                  <a:pt x="1105078" y="249803"/>
-                </a:lnTo>
-                <a:close/>
-                <a:lnTo>
-                  <a:pt x="1110124" y="246358"/>
-                </a:lnTo>
-                <a:close/>
-                <a:lnTo>
-                  <a:pt x="1115170" y="242926"/>
-                </a:lnTo>
-                <a:close/>
-                <a:lnTo>
-                  <a:pt x="1120216" y="239521"/>
-                </a:lnTo>
-                <a:close/>
-                <a:lnTo>
-                  <a:pt x="1125262" y="236154"/>
-                </a:lnTo>
-                <a:close/>
-                <a:lnTo>
-                  <a:pt x="1130308" y="232817"/>
-                </a:lnTo>
-                <a:close/>
-                <a:lnTo>
-                  <a:pt x="1135355" y="229500"/>
-                </a:lnTo>
-                <a:close/>
-                <a:lnTo>
-                  <a:pt x="1140401" y="226190"/>
-                </a:lnTo>
-                <a:close/>
-                <a:lnTo>
-                  <a:pt x="1145447" y="222878"/>
-                </a:lnTo>
-                <a:close/>
-                <a:lnTo>
-                  <a:pt x="1150493" y="219558"/>
-                </a:lnTo>
-                <a:close/>
-                <a:lnTo>
-                  <a:pt x="1155539" y="216230"/>
-                </a:lnTo>
-                <a:close/>
-                <a:lnTo>
-                  <a:pt x="1160585" y="212893"/>
-                </a:lnTo>
-                <a:close/>
-                <a:lnTo>
-                  <a:pt x="1165631" y="209550"/>
-                </a:lnTo>
-                <a:close/>
-                <a:lnTo>
-                  <a:pt x="1170677" y="206200"/>
-                </a:lnTo>
-                <a:close/>
-                <a:lnTo>
-                  <a:pt x="1175723" y="202853"/>
-                </a:lnTo>
-                <a:close/>
-                <a:lnTo>
-                  <a:pt x="1180769" y="199518"/>
-                </a:lnTo>
-                <a:close/>
-                <a:lnTo>
-                  <a:pt x="1185815" y="196204"/>
-                </a:lnTo>
-                <a:close/>
-                <a:lnTo>
-                  <a:pt x="1190861" y="192922"/>
-                </a:lnTo>
-                <a:close/>
-                <a:lnTo>
-                  <a:pt x="1195907" y="189671"/>
-                </a:lnTo>
-                <a:close/>
-                <a:lnTo>
-                  <a:pt x="1200953" y="186444"/>
-                </a:lnTo>
-                <a:close/>
-                <a:lnTo>
-                  <a:pt x="1205999" y="183230"/>
-                </a:lnTo>
-                <a:close/>
-                <a:lnTo>
-                  <a:pt x="1211045" y="180020"/>
-                </a:lnTo>
-                <a:close/>
-                <a:lnTo>
-                  <a:pt x="1216091" y="176805"/>
-                </a:lnTo>
-                <a:close/>
-                <a:lnTo>
-                  <a:pt x="1221137" y="173582"/>
-                </a:lnTo>
-                <a:close/>
-                <a:lnTo>
-                  <a:pt x="1226183" y="170351"/>
-                </a:lnTo>
-                <a:close/>
-                <a:lnTo>
-                  <a:pt x="1231229" y="167113"/>
-                </a:lnTo>
-                <a:close/>
-                <a:lnTo>
-                  <a:pt x="1236275" y="163868"/>
-                </a:lnTo>
-                <a:close/>
-                <a:lnTo>
-                  <a:pt x="1241321" y="160620"/>
-                </a:lnTo>
-                <a:close/>
-                <a:lnTo>
-                  <a:pt x="1246367" y="157377"/>
-                </a:lnTo>
-                <a:close/>
-                <a:lnTo>
-                  <a:pt x="1251413" y="154150"/>
-                </a:lnTo>
-                <a:close/>
-                <a:lnTo>
-                  <a:pt x="1256459" y="150949"/>
-                </a:lnTo>
-                <a:close/>
-                <a:lnTo>
-                  <a:pt x="1261505" y="147781"/>
-                </a:lnTo>
-                <a:close/>
-                <a:lnTo>
-                  <a:pt x="1266551" y="144643"/>
-                </a:lnTo>
-                <a:close/>
-                <a:lnTo>
-                  <a:pt x="1271597" y="141523"/>
-                </a:lnTo>
-                <a:close/>
-                <a:lnTo>
-                  <a:pt x="1276643" y="138413"/>
-                </a:lnTo>
-                <a:close/>
-                <a:lnTo>
-                  <a:pt x="1281689" y="135302"/>
-                </a:lnTo>
-                <a:close/>
-                <a:lnTo>
-                  <a:pt x="1286735" y="132185"/>
-                </a:lnTo>
-                <a:close/>
-                <a:lnTo>
-                  <a:pt x="1291781" y="129060"/>
-                </a:lnTo>
-                <a:close/>
-                <a:lnTo>
-                  <a:pt x="1296827" y="125927"/>
-                </a:lnTo>
-                <a:close/>
-                <a:lnTo>
-                  <a:pt x="1301873" y="122787"/>
-                </a:lnTo>
-                <a:close/>
-                <a:lnTo>
-                  <a:pt x="1306919" y="119640"/>
-                </a:lnTo>
-                <a:close/>
-                <a:lnTo>
-                  <a:pt x="1311965" y="116493"/>
-                </a:lnTo>
-                <a:close/>
-                <a:lnTo>
-                  <a:pt x="1317011" y="113356"/>
-                </a:lnTo>
-                <a:close/>
-                <a:lnTo>
-                  <a:pt x="1322057" y="110240"/>
-                </a:lnTo>
-                <a:close/>
-                <a:lnTo>
-                  <a:pt x="1327103" y="107154"/>
-                </a:lnTo>
-                <a:close/>
-                <a:lnTo>
-                  <a:pt x="1332149" y="104102"/>
-                </a:lnTo>
-                <a:close/>
-                <a:lnTo>
-                  <a:pt x="1337195" y="101075"/>
-                </a:lnTo>
-                <a:close/>
-                <a:lnTo>
-                  <a:pt x="1342241" y="98061"/>
-                </a:lnTo>
-                <a:close/>
-                <a:lnTo>
-                  <a:pt x="1347287" y="95051"/>
-                </a:lnTo>
-                <a:close/>
-                <a:lnTo>
-                  <a:pt x="1352333" y="92033"/>
-                </a:lnTo>
-                <a:close/>
-                <a:lnTo>
-                  <a:pt x="1357379" y="89007"/>
-                </a:lnTo>
-                <a:close/>
-                <a:lnTo>
-                  <a:pt x="1362425" y="85977"/>
-                </a:lnTo>
-                <a:close/>
-                <a:lnTo>
-                  <a:pt x="1367471" y="82946"/>
-                </a:lnTo>
-                <a:close/>
-                <a:lnTo>
-                  <a:pt x="1372517" y="79917"/>
-                </a:lnTo>
-                <a:close/>
-                <a:lnTo>
-                  <a:pt x="1377563" y="76892"/>
-                </a:lnTo>
-                <a:close/>
-                <a:lnTo>
-                  <a:pt x="1382609" y="73868"/>
-                </a:lnTo>
-                <a:close/>
-                <a:lnTo>
-                  <a:pt x="1387656" y="70842"/>
-                </a:lnTo>
-                <a:close/>
-                <a:lnTo>
-                  <a:pt x="1392702" y="67810"/>
-                </a:lnTo>
-                <a:close/>
-                <a:lnTo>
-                  <a:pt x="1397748" y="64768"/>
-                </a:lnTo>
-                <a:close/>
-                <a:lnTo>
-                  <a:pt x="1402794" y="61723"/>
-                </a:lnTo>
-                <a:close/>
-                <a:lnTo>
-                  <a:pt x="1407840" y="58685"/>
-                </a:lnTo>
-                <a:close/>
-                <a:lnTo>
-                  <a:pt x="1412886" y="55665"/>
-                </a:lnTo>
-                <a:close/>
-                <a:lnTo>
-                  <a:pt x="1417932" y="52674"/>
-                </a:lnTo>
-                <a:close/>
-                <a:lnTo>
-                  <a:pt x="1422978" y="49718"/>
-                </a:lnTo>
-                <a:close/>
-                <a:lnTo>
-                  <a:pt x="1428024" y="46789"/>
-                </a:lnTo>
-                <a:close/>
-                <a:lnTo>
-                  <a:pt x="1433070" y="43876"/>
-                </a:lnTo>
-                <a:close/>
-                <a:lnTo>
-                  <a:pt x="1438116" y="40967"/>
-                </a:lnTo>
-                <a:close/>
-                <a:lnTo>
-                  <a:pt x="1443162" y="38053"/>
-                </a:lnTo>
-                <a:close/>
-                <a:lnTo>
-                  <a:pt x="1448208" y="35131"/>
-                </a:lnTo>
-                <a:close/>
-                <a:lnTo>
-                  <a:pt x="1453254" y="32202"/>
-                </a:lnTo>
-                <a:close/>
-                <a:lnTo>
-                  <a:pt x="1458300" y="29271"/>
-                </a:lnTo>
-                <a:close/>
-                <a:lnTo>
-                  <a:pt x="1463346" y="26340"/>
-                </a:lnTo>
-                <a:close/>
-                <a:lnTo>
-                  <a:pt x="1468392" y="23411"/>
-                </a:lnTo>
-                <a:close/>
-                <a:lnTo>
-                  <a:pt x="1473438" y="20483"/>
-                </a:lnTo>
-                <a:close/>
-                <a:lnTo>
-                  <a:pt x="1478484" y="17557"/>
-                </a:lnTo>
-                <a:close/>
-                <a:lnTo>
-                  <a:pt x="1483530" y="14632"/>
-                </a:lnTo>
-                <a:close/>
-                <a:lnTo>
-                  <a:pt x="1488576" y="11708"/>
-                </a:lnTo>
-                <a:close/>
-                <a:lnTo>
-                  <a:pt x="1493622" y="8783"/>
-                </a:lnTo>
-                <a:close/>
-                <a:lnTo>
-                  <a:pt x="1498668" y="5857"/>
-                </a:lnTo>
-                <a:close/>
-                <a:lnTo>
-                  <a:pt x="1503714" y="2929"/>
-                </a:lnTo>
-                <a:close/>
-                <a:lnTo>
-                  <a:pt x="1508760" y="0"/>
+                  <a:pt x="5364" y="1141441"/>
+                </a:lnTo>
+                <a:close/>
+                <a:lnTo>
+                  <a:pt x="10726" y="1133568"/>
+                </a:lnTo>
+                <a:close/>
+                <a:lnTo>
+                  <a:pt x="16087" y="1125782"/>
+                </a:lnTo>
+                <a:close/>
+                <a:lnTo>
+                  <a:pt x="21447" y="1118081"/>
+                </a:lnTo>
+                <a:close/>
+                <a:lnTo>
+                  <a:pt x="26806" y="1110464"/>
+                </a:lnTo>
+                <a:close/>
+                <a:lnTo>
+                  <a:pt x="32163" y="1102928"/>
+                </a:lnTo>
+                <a:close/>
+                <a:lnTo>
+                  <a:pt x="37520" y="1095473"/>
+                </a:lnTo>
+                <a:close/>
+                <a:lnTo>
+                  <a:pt x="42877" y="1088097"/>
+                </a:lnTo>
+                <a:close/>
+                <a:lnTo>
+                  <a:pt x="48232" y="1080798"/>
+                </a:lnTo>
+                <a:close/>
+                <a:lnTo>
+                  <a:pt x="53587" y="1073575"/>
+                </a:lnTo>
+                <a:close/>
+                <a:lnTo>
+                  <a:pt x="58942" y="1066427"/>
+                </a:lnTo>
+                <a:close/>
+                <a:lnTo>
+                  <a:pt x="64297" y="1059351"/>
+                </a:lnTo>
+                <a:close/>
+                <a:lnTo>
+                  <a:pt x="69652" y="1052347"/>
+                </a:lnTo>
+                <a:close/>
+                <a:lnTo>
+                  <a:pt x="75006" y="1045413"/>
+                </a:lnTo>
+                <a:close/>
+                <a:lnTo>
+                  <a:pt x="80361" y="1038547"/>
+                </a:lnTo>
+                <a:close/>
+                <a:lnTo>
+                  <a:pt x="85716" y="1031748"/>
+                </a:lnTo>
+                <a:close/>
+                <a:lnTo>
+                  <a:pt x="91072" y="1025015"/>
+                </a:lnTo>
+                <a:close/>
+                <a:lnTo>
+                  <a:pt x="96428" y="1018345"/>
+                </a:lnTo>
+                <a:close/>
+                <a:lnTo>
+                  <a:pt x="101785" y="1011737"/>
+                </a:lnTo>
+                <a:close/>
+                <a:lnTo>
+                  <a:pt x="107143" y="1005190"/>
+                </a:lnTo>
+                <a:close/>
+                <a:lnTo>
+                  <a:pt x="112502" y="998703"/>
+                </a:lnTo>
+                <a:close/>
+                <a:lnTo>
+                  <a:pt x="117862" y="992273"/>
+                </a:lnTo>
+                <a:close/>
+                <a:lnTo>
+                  <a:pt x="123223" y="985900"/>
+                </a:lnTo>
+                <a:close/>
+                <a:lnTo>
+                  <a:pt x="128585" y="979582"/>
+                </a:lnTo>
+                <a:close/>
+                <a:lnTo>
+                  <a:pt x="133949" y="973316"/>
+                </a:lnTo>
+                <a:close/>
+                <a:lnTo>
+                  <a:pt x="139315" y="967103"/>
+                </a:lnTo>
+                <a:close/>
+                <a:lnTo>
+                  <a:pt x="144681" y="960940"/>
+                </a:lnTo>
+                <a:close/>
+                <a:lnTo>
+                  <a:pt x="150048" y="954827"/>
+                </a:lnTo>
+                <a:close/>
+                <a:lnTo>
+                  <a:pt x="155414" y="948764"/>
+                </a:lnTo>
+                <a:close/>
+                <a:lnTo>
+                  <a:pt x="160779" y="942748"/>
+                </a:lnTo>
+                <a:close/>
+                <a:lnTo>
+                  <a:pt x="166143" y="936779"/>
+                </a:lnTo>
+                <a:close/>
+                <a:lnTo>
+                  <a:pt x="171504" y="930856"/>
+                </a:lnTo>
+                <a:close/>
+                <a:lnTo>
+                  <a:pt x="176862" y="924979"/>
+                </a:lnTo>
+                <a:close/>
+                <a:lnTo>
+                  <a:pt x="182217" y="919145"/>
+                </a:lnTo>
+                <a:close/>
+                <a:lnTo>
+                  <a:pt x="187567" y="913355"/>
+                </a:lnTo>
+                <a:close/>
+                <a:lnTo>
+                  <a:pt x="192913" y="907606"/>
+                </a:lnTo>
+                <a:close/>
+                <a:lnTo>
+                  <a:pt x="198253" y="901900"/>
+                </a:lnTo>
+                <a:close/>
+                <a:lnTo>
+                  <a:pt x="203587" y="896233"/>
+                </a:lnTo>
+                <a:close/>
+                <a:lnTo>
+                  <a:pt x="208915" y="890606"/>
+                </a:lnTo>
+                <a:close/>
+                <a:lnTo>
+                  <a:pt x="214238" y="885019"/>
+                </a:lnTo>
+                <a:close/>
+                <a:lnTo>
+                  <a:pt x="219557" y="879471"/>
+                </a:lnTo>
+                <a:close/>
+                <a:lnTo>
+                  <a:pt x="224874" y="873961"/>
+                </a:lnTo>
+                <a:close/>
+                <a:lnTo>
+                  <a:pt x="230190" y="868490"/>
+                </a:lnTo>
+                <a:close/>
+                <a:lnTo>
+                  <a:pt x="235504" y="863057"/>
+                </a:lnTo>
+                <a:close/>
+                <a:lnTo>
+                  <a:pt x="240819" y="857661"/>
+                </a:lnTo>
+                <a:close/>
+                <a:lnTo>
+                  <a:pt x="246136" y="852303"/>
+                </a:lnTo>
+                <a:close/>
+                <a:lnTo>
+                  <a:pt x="251455" y="846982"/>
+                </a:lnTo>
+                <a:close/>
+                <a:lnTo>
+                  <a:pt x="256777" y="841698"/>
+                </a:lnTo>
+                <a:close/>
+                <a:lnTo>
+                  <a:pt x="262104" y="836450"/>
+                </a:lnTo>
+                <a:close/>
+                <a:lnTo>
+                  <a:pt x="267437" y="831238"/>
+                </a:lnTo>
+                <a:close/>
+                <a:lnTo>
+                  <a:pt x="272776" y="826062"/>
+                </a:lnTo>
+                <a:close/>
+                <a:lnTo>
+                  <a:pt x="278120" y="820921"/>
+                </a:lnTo>
+                <a:close/>
+                <a:lnTo>
+                  <a:pt x="283469" y="815814"/>
+                </a:lnTo>
+                <a:close/>
+                <a:lnTo>
+                  <a:pt x="288823" y="810742"/>
+                </a:lnTo>
+                <a:close/>
+                <a:lnTo>
+                  <a:pt x="294181" y="805703"/>
+                </a:lnTo>
+                <a:close/>
+                <a:lnTo>
+                  <a:pt x="299541" y="800697"/>
+                </a:lnTo>
+                <a:close/>
+                <a:lnTo>
+                  <a:pt x="304904" y="795723"/>
+                </a:lnTo>
+                <a:close/>
+                <a:lnTo>
+                  <a:pt x="310269" y="790782"/>
+                </a:lnTo>
+                <a:close/>
+                <a:lnTo>
+                  <a:pt x="315635" y="785872"/>
+                </a:lnTo>
+                <a:close/>
+                <a:lnTo>
+                  <a:pt x="321002" y="780993"/>
+                </a:lnTo>
+                <a:close/>
+                <a:lnTo>
+                  <a:pt x="326368" y="776144"/>
+                </a:lnTo>
+                <a:close/>
+                <a:lnTo>
+                  <a:pt x="331734" y="771325"/>
+                </a:lnTo>
+                <a:close/>
+                <a:lnTo>
+                  <a:pt x="337098" y="766536"/>
+                </a:lnTo>
+                <a:close/>
+                <a:lnTo>
+                  <a:pt x="342461" y="761775"/>
+                </a:lnTo>
+                <a:close/>
+                <a:lnTo>
+                  <a:pt x="347823" y="757043"/>
+                </a:lnTo>
+                <a:close/>
+                <a:lnTo>
+                  <a:pt x="353183" y="752339"/>
+                </a:lnTo>
+                <a:close/>
+                <a:lnTo>
+                  <a:pt x="358542" y="747663"/>
+                </a:lnTo>
+                <a:close/>
+                <a:lnTo>
+                  <a:pt x="363900" y="743014"/>
+                </a:lnTo>
+                <a:close/>
+                <a:lnTo>
+                  <a:pt x="369257" y="738392"/>
+                </a:lnTo>
+                <a:close/>
+                <a:lnTo>
+                  <a:pt x="374613" y="733797"/>
+                </a:lnTo>
+                <a:close/>
+                <a:lnTo>
+                  <a:pt x="379969" y="729227"/>
+                </a:lnTo>
+                <a:close/>
+                <a:lnTo>
+                  <a:pt x="385324" y="724684"/>
+                </a:lnTo>
+                <a:close/>
+                <a:lnTo>
+                  <a:pt x="390679" y="720165"/>
+                </a:lnTo>
+                <a:close/>
+                <a:lnTo>
+                  <a:pt x="396034" y="715672"/>
+                </a:lnTo>
+                <a:close/>
+                <a:lnTo>
+                  <a:pt x="401389" y="711203"/>
+                </a:lnTo>
+                <a:close/>
+                <a:lnTo>
+                  <a:pt x="406743" y="706758"/>
+                </a:lnTo>
+                <a:close/>
+                <a:lnTo>
+                  <a:pt x="412098" y="702337"/>
+                </a:lnTo>
+                <a:close/>
+                <a:lnTo>
+                  <a:pt x="417453" y="697937"/>
+                </a:lnTo>
+                <a:close/>
+                <a:lnTo>
+                  <a:pt x="422809" y="693560"/>
+                </a:lnTo>
+                <a:close/>
+                <a:lnTo>
+                  <a:pt x="428165" y="689204"/>
+                </a:lnTo>
+                <a:close/>
+                <a:lnTo>
+                  <a:pt x="433522" y="684869"/>
+                </a:lnTo>
+                <a:close/>
+                <a:lnTo>
+                  <a:pt x="438879" y="680553"/>
+                </a:lnTo>
+                <a:close/>
+                <a:lnTo>
+                  <a:pt x="444238" y="676257"/>
+                </a:lnTo>
+                <a:close/>
+                <a:lnTo>
+                  <a:pt x="449597" y="671979"/>
+                </a:lnTo>
+                <a:close/>
+                <a:lnTo>
+                  <a:pt x="454958" y="667718"/>
+                </a:lnTo>
+                <a:close/>
+                <a:lnTo>
+                  <a:pt x="460320" y="663474"/>
+                </a:lnTo>
+                <a:close/>
+                <a:lnTo>
+                  <a:pt x="465684" y="659247"/>
+                </a:lnTo>
+                <a:close/>
+                <a:lnTo>
+                  <a:pt x="471049" y="655035"/>
+                </a:lnTo>
+                <a:close/>
+                <a:lnTo>
+                  <a:pt x="476415" y="650839"/>
+                </a:lnTo>
+                <a:close/>
+                <a:lnTo>
+                  <a:pt x="481781" y="646659"/>
+                </a:lnTo>
+                <a:close/>
+                <a:lnTo>
+                  <a:pt x="487148" y="642496"/>
+                </a:lnTo>
+                <a:close/>
+                <a:lnTo>
+                  <a:pt x="492513" y="638349"/>
+                </a:lnTo>
+                <a:close/>
+                <a:lnTo>
+                  <a:pt x="497877" y="634220"/>
+                </a:lnTo>
+                <a:close/>
+                <a:lnTo>
+                  <a:pt x="503239" y="630108"/>
+                </a:lnTo>
+                <a:close/>
+                <a:lnTo>
+                  <a:pt x="508599" y="626015"/>
+                </a:lnTo>
+                <a:close/>
+                <a:lnTo>
+                  <a:pt x="513954" y="621940"/>
+                </a:lnTo>
+                <a:close/>
+                <a:lnTo>
+                  <a:pt x="519306" y="617883"/>
+                </a:lnTo>
+                <a:close/>
+                <a:lnTo>
+                  <a:pt x="524653" y="613846"/>
+                </a:lnTo>
+                <a:close/>
+                <a:lnTo>
+                  <a:pt x="529995" y="609829"/>
+                </a:lnTo>
+                <a:close/>
+                <a:lnTo>
+                  <a:pt x="535330" y="605832"/>
+                </a:lnTo>
+                <a:close/>
+                <a:lnTo>
+                  <a:pt x="540660" y="601854"/>
+                </a:lnTo>
+                <a:close/>
+                <a:lnTo>
+                  <a:pt x="545984" y="597896"/>
+                </a:lnTo>
+                <a:close/>
+                <a:lnTo>
+                  <a:pt x="551305" y="593956"/>
+                </a:lnTo>
+                <a:close/>
+                <a:lnTo>
+                  <a:pt x="556622" y="590034"/>
+                </a:lnTo>
+                <a:close/>
+                <a:lnTo>
+                  <a:pt x="561938" y="586128"/>
+                </a:lnTo>
+                <a:close/>
+                <a:lnTo>
+                  <a:pt x="567253" y="582237"/>
+                </a:lnTo>
+                <a:close/>
+                <a:lnTo>
+                  <a:pt x="572568" y="578362"/>
+                </a:lnTo>
+                <a:close/>
+                <a:lnTo>
+                  <a:pt x="577884" y="574500"/>
+                </a:lnTo>
+                <a:close/>
+                <a:lnTo>
+                  <a:pt x="583202" y="570651"/>
+                </a:lnTo>
+                <a:close/>
+                <a:lnTo>
+                  <a:pt x="588523" y="566815"/>
+                </a:lnTo>
+                <a:close/>
+                <a:lnTo>
+                  <a:pt x="593849" y="562990"/>
+                </a:lnTo>
+                <a:close/>
+                <a:lnTo>
+                  <a:pt x="599180" y="559175"/>
+                </a:lnTo>
+                <a:close/>
+                <a:lnTo>
+                  <a:pt x="604517" y="555370"/>
+                </a:lnTo>
+                <a:close/>
+                <a:lnTo>
+                  <a:pt x="609860" y="551575"/>
+                </a:lnTo>
+                <a:close/>
+                <a:lnTo>
+                  <a:pt x="615208" y="547789"/>
+                </a:lnTo>
+                <a:close/>
+                <a:lnTo>
+                  <a:pt x="620561" y="544014"/>
+                </a:lnTo>
+                <a:close/>
+                <a:lnTo>
+                  <a:pt x="625917" y="540249"/>
+                </a:lnTo>
+                <a:close/>
+                <a:lnTo>
+                  <a:pt x="631277" y="536495"/>
+                </a:lnTo>
+                <a:close/>
+                <a:lnTo>
+                  <a:pt x="636640" y="532751"/>
+                </a:lnTo>
+                <a:close/>
+                <a:lnTo>
+                  <a:pt x="642004" y="529019"/>
+                </a:lnTo>
+                <a:close/>
+                <a:lnTo>
+                  <a:pt x="647370" y="525299"/>
+                </a:lnTo>
+                <a:close/>
+                <a:lnTo>
+                  <a:pt x="652736" y="521590"/>
+                </a:lnTo>
+                <a:close/>
+                <a:lnTo>
+                  <a:pt x="658103" y="517893"/>
+                </a:lnTo>
+                <a:close/>
+                <a:lnTo>
+                  <a:pt x="663468" y="514208"/>
+                </a:lnTo>
+                <a:close/>
+                <a:lnTo>
+                  <a:pt x="668833" y="510536"/>
+                </a:lnTo>
+                <a:close/>
+                <a:lnTo>
+                  <a:pt x="674195" y="506876"/>
+                </a:lnTo>
+                <a:close/>
+                <a:lnTo>
+                  <a:pt x="679556" y="503229"/>
+                </a:lnTo>
+                <a:close/>
+                <a:lnTo>
+                  <a:pt x="684916" y="499593"/>
+                </a:lnTo>
+                <a:close/>
+                <a:lnTo>
+                  <a:pt x="690275" y="495970"/>
+                </a:lnTo>
+                <a:close/>
+                <a:lnTo>
+                  <a:pt x="695633" y="492359"/>
+                </a:lnTo>
+                <a:close/>
+                <a:lnTo>
+                  <a:pt x="700990" y="488760"/>
+                </a:lnTo>
+                <a:close/>
+                <a:lnTo>
+                  <a:pt x="706347" y="485173"/>
+                </a:lnTo>
+                <a:close/>
+                <a:lnTo>
+                  <a:pt x="711703" y="481597"/>
+                </a:lnTo>
+                <a:close/>
+                <a:lnTo>
+                  <a:pt x="717058" y="478032"/>
+                </a:lnTo>
+                <a:close/>
+                <a:lnTo>
+                  <a:pt x="722414" y="474479"/>
+                </a:lnTo>
+                <a:close/>
+                <a:lnTo>
+                  <a:pt x="727770" y="470937"/>
+                </a:lnTo>
+                <a:close/>
+                <a:lnTo>
+                  <a:pt x="733126" y="467406"/>
+                </a:lnTo>
+                <a:close/>
+                <a:lnTo>
+                  <a:pt x="738482" y="463885"/>
+                </a:lnTo>
+                <a:close/>
+                <a:lnTo>
+                  <a:pt x="743839" y="460376"/>
+                </a:lnTo>
+                <a:close/>
+                <a:lnTo>
+                  <a:pt x="749196" y="456879"/>
+                </a:lnTo>
+                <a:close/>
+                <a:lnTo>
+                  <a:pt x="754553" y="453393"/>
+                </a:lnTo>
+                <a:close/>
+                <a:lnTo>
+                  <a:pt x="759911" y="449919"/>
+                </a:lnTo>
+                <a:close/>
+                <a:lnTo>
+                  <a:pt x="765269" y="446458"/>
+                </a:lnTo>
+                <a:close/>
+                <a:lnTo>
+                  <a:pt x="770627" y="443009"/>
+                </a:lnTo>
+                <a:close/>
+                <a:lnTo>
+                  <a:pt x="775986" y="439573"/>
+                </a:lnTo>
+                <a:close/>
+                <a:lnTo>
+                  <a:pt x="781344" y="436151"/>
+                </a:lnTo>
+                <a:close/>
+                <a:lnTo>
+                  <a:pt x="786703" y="432742"/>
+                </a:lnTo>
+                <a:close/>
+                <a:lnTo>
+                  <a:pt x="792062" y="429347"/>
+                </a:lnTo>
+                <a:close/>
+                <a:lnTo>
+                  <a:pt x="797421" y="425967"/>
+                </a:lnTo>
+                <a:close/>
+                <a:lnTo>
+                  <a:pt x="802779" y="422601"/>
+                </a:lnTo>
+                <a:close/>
+                <a:lnTo>
+                  <a:pt x="808138" y="419249"/>
+                </a:lnTo>
+                <a:close/>
+                <a:lnTo>
+                  <a:pt x="813497" y="415910"/>
+                </a:lnTo>
+                <a:close/>
+                <a:lnTo>
+                  <a:pt x="818856" y="412583"/>
+                </a:lnTo>
+                <a:close/>
+                <a:lnTo>
+                  <a:pt x="824214" y="409267"/>
+                </a:lnTo>
+                <a:close/>
+                <a:lnTo>
+                  <a:pt x="829573" y="405961"/>
+                </a:lnTo>
+                <a:close/>
+                <a:lnTo>
+                  <a:pt x="834931" y="402663"/>
+                </a:lnTo>
+                <a:close/>
+                <a:lnTo>
+                  <a:pt x="840289" y="399373"/>
+                </a:lnTo>
+                <a:close/>
+                <a:lnTo>
+                  <a:pt x="845647" y="396090"/>
+                </a:lnTo>
+                <a:close/>
+                <a:lnTo>
+                  <a:pt x="851004" y="392812"/>
+                </a:lnTo>
+                <a:close/>
+                <a:lnTo>
+                  <a:pt x="856361" y="389538"/>
+                </a:lnTo>
+                <a:close/>
+                <a:lnTo>
+                  <a:pt x="861718" y="386267"/>
+                </a:lnTo>
+                <a:close/>
+                <a:lnTo>
+                  <a:pt x="867074" y="382998"/>
+                </a:lnTo>
+                <a:close/>
+                <a:lnTo>
+                  <a:pt x="872430" y="379730"/>
+                </a:lnTo>
+                <a:close/>
+                <a:lnTo>
+                  <a:pt x="877786" y="376465"/>
+                </a:lnTo>
+                <a:close/>
+                <a:lnTo>
+                  <a:pt x="883142" y="373203"/>
+                </a:lnTo>
+                <a:close/>
+                <a:lnTo>
+                  <a:pt x="888497" y="369947"/>
+                </a:lnTo>
+                <a:close/>
+                <a:lnTo>
+                  <a:pt x="893853" y="366696"/>
+                </a:lnTo>
+                <a:close/>
+                <a:lnTo>
+                  <a:pt x="899210" y="363453"/>
+                </a:lnTo>
+                <a:close/>
+                <a:lnTo>
+                  <a:pt x="904567" y="360218"/>
+                </a:lnTo>
+                <a:close/>
+                <a:lnTo>
+                  <a:pt x="909925" y="356993"/>
+                </a:lnTo>
+                <a:close/>
+                <a:lnTo>
+                  <a:pt x="915284" y="353779"/>
+                </a:lnTo>
+                <a:close/>
+                <a:lnTo>
+                  <a:pt x="920644" y="350578"/>
+                </a:lnTo>
+                <a:close/>
+                <a:lnTo>
+                  <a:pt x="926005" y="347390"/>
+                </a:lnTo>
+                <a:close/>
+                <a:lnTo>
+                  <a:pt x="931367" y="344218"/>
+                </a:lnTo>
+                <a:close/>
+                <a:lnTo>
+                  <a:pt x="936732" y="341061"/>
+                </a:lnTo>
+                <a:close/>
+                <a:lnTo>
+                  <a:pt x="942097" y="337921"/>
+                </a:lnTo>
+                <a:close/>
+                <a:lnTo>
+                  <a:pt x="947464" y="334795"/>
+                </a:lnTo>
+                <a:close/>
+                <a:lnTo>
+                  <a:pt x="952830" y="331683"/>
+                </a:lnTo>
+                <a:close/>
+                <a:lnTo>
+                  <a:pt x="958196" y="328585"/>
+                </a:lnTo>
+                <a:close/>
+                <a:lnTo>
+                  <a:pt x="963560" y="325497"/>
+                </a:lnTo>
+                <a:close/>
+                <a:lnTo>
+                  <a:pt x="968923" y="322420"/>
+                </a:lnTo>
+                <a:close/>
+                <a:lnTo>
+                  <a:pt x="974283" y="319353"/>
+                </a:lnTo>
+                <a:close/>
+                <a:lnTo>
+                  <a:pt x="979639" y="316293"/>
+                </a:lnTo>
+                <a:close/>
+                <a:lnTo>
+                  <a:pt x="984992" y="313241"/>
+                </a:lnTo>
+                <a:close/>
+                <a:lnTo>
+                  <a:pt x="990340" y="310195"/>
+                </a:lnTo>
+                <a:close/>
+                <a:lnTo>
+                  <a:pt x="995683" y="307154"/>
+                </a:lnTo>
+                <a:close/>
+                <a:lnTo>
+                  <a:pt x="1001020" y="304116"/>
+                </a:lnTo>
+                <a:close/>
+                <a:lnTo>
+                  <a:pt x="1006351" y="301081"/>
+                </a:lnTo>
+                <a:close/>
+                <a:lnTo>
+                  <a:pt x="1011677" y="298050"/>
+                </a:lnTo>
+                <a:close/>
+                <a:lnTo>
+                  <a:pt x="1016998" y="295022"/>
+                </a:lnTo>
+                <a:close/>
+                <a:lnTo>
+                  <a:pt x="1022316" y="291998"/>
+                </a:lnTo>
+                <a:close/>
+                <a:lnTo>
+                  <a:pt x="1027632" y="288979"/>
+                </a:lnTo>
+                <a:close/>
+                <a:lnTo>
+                  <a:pt x="1032947" y="285964"/>
+                </a:lnTo>
+                <a:close/>
+                <a:lnTo>
+                  <a:pt x="1038262" y="282954"/>
+                </a:lnTo>
+                <a:close/>
+                <a:lnTo>
+                  <a:pt x="1043578" y="279950"/>
+                </a:lnTo>
+                <a:close/>
+                <a:lnTo>
+                  <a:pt x="1048895" y="276952"/>
+                </a:lnTo>
+                <a:close/>
+                <a:lnTo>
+                  <a:pt x="1054216" y="273960"/>
+                </a:lnTo>
+                <a:close/>
+                <a:lnTo>
+                  <a:pt x="1059540" y="270974"/>
+                </a:lnTo>
+                <a:close/>
+                <a:lnTo>
+                  <a:pt x="1064870" y="267996"/>
+                </a:lnTo>
+                <a:close/>
+                <a:lnTo>
+                  <a:pt x="1070205" y="265026"/>
+                </a:lnTo>
+                <a:close/>
+                <a:lnTo>
+                  <a:pt x="1075547" y="262062"/>
+                </a:lnTo>
+                <a:close/>
+                <a:lnTo>
+                  <a:pt x="1080894" y="259105"/>
+                </a:lnTo>
+                <a:close/>
+                <a:lnTo>
+                  <a:pt x="1086246" y="256155"/>
+                </a:lnTo>
+                <a:close/>
+                <a:lnTo>
+                  <a:pt x="1091601" y="253211"/>
+                </a:lnTo>
+                <a:close/>
+                <a:lnTo>
+                  <a:pt x="1096961" y="250273"/>
+                </a:lnTo>
+                <a:close/>
+                <a:lnTo>
+                  <a:pt x="1102323" y="247339"/>
+                </a:lnTo>
+                <a:close/>
+                <a:lnTo>
+                  <a:pt x="1107687" y="244411"/>
+                </a:lnTo>
+                <a:close/>
+                <a:lnTo>
+                  <a:pt x="1113052" y="241486"/>
+                </a:lnTo>
+                <a:close/>
+                <a:lnTo>
+                  <a:pt x="1118419" y="238566"/>
+                </a:lnTo>
+                <a:close/>
+                <a:lnTo>
+                  <a:pt x="1123785" y="235649"/>
+                </a:lnTo>
+                <a:close/>
+                <a:lnTo>
+                  <a:pt x="1129151" y="232734"/>
+                </a:lnTo>
+                <a:close/>
+                <a:lnTo>
+                  <a:pt x="1134516" y="229823"/>
+                </a:lnTo>
+                <a:close/>
+                <a:lnTo>
+                  <a:pt x="1139880" y="226914"/>
+                </a:lnTo>
+                <a:close/>
+                <a:lnTo>
+                  <a:pt x="1145242" y="224009"/>
+                </a:lnTo>
+                <a:close/>
+                <a:lnTo>
+                  <a:pt x="1150603" y="221109"/>
+                </a:lnTo>
+                <a:close/>
+                <a:lnTo>
+                  <a:pt x="1155962" y="218215"/>
+                </a:lnTo>
+                <a:close/>
+                <a:lnTo>
+                  <a:pt x="1161321" y="215330"/>
+                </a:lnTo>
+                <a:close/>
+                <a:lnTo>
+                  <a:pt x="1166678" y="212453"/>
+                </a:lnTo>
+                <a:close/>
+                <a:lnTo>
+                  <a:pt x="1172035" y="209588"/>
+                </a:lnTo>
+                <a:close/>
+                <a:lnTo>
+                  <a:pt x="1177391" y="206734"/>
+                </a:lnTo>
+                <a:close/>
+                <a:lnTo>
+                  <a:pt x="1182747" y="203893"/>
+                </a:lnTo>
+                <a:close/>
+                <a:lnTo>
+                  <a:pt x="1188102" y="201067"/>
+                </a:lnTo>
+                <a:close/>
+                <a:lnTo>
+                  <a:pt x="1193457" y="198256"/>
+                </a:lnTo>
+                <a:close/>
+                <a:lnTo>
+                  <a:pt x="1198811" y="195463"/>
+                </a:lnTo>
+                <a:close/>
+                <a:lnTo>
+                  <a:pt x="1204166" y="192688"/>
+                </a:lnTo>
+                <a:close/>
+                <a:lnTo>
+                  <a:pt x="1209521" y="189931"/>
+                </a:lnTo>
+                <a:close/>
+                <a:lnTo>
+                  <a:pt x="1214876" y="187188"/>
+                </a:lnTo>
+                <a:close/>
+                <a:lnTo>
+                  <a:pt x="1220231" y="184459"/>
+                </a:lnTo>
+                <a:close/>
+                <a:lnTo>
+                  <a:pt x="1225587" y="181741"/>
+                </a:lnTo>
+                <a:close/>
+                <a:lnTo>
+                  <a:pt x="1230943" y="179032"/>
+                </a:lnTo>
+                <a:close/>
+                <a:lnTo>
+                  <a:pt x="1236300" y="176330"/>
+                </a:lnTo>
+                <a:close/>
+                <a:lnTo>
+                  <a:pt x="1241658" y="173633"/>
+                </a:lnTo>
+                <a:close/>
+                <a:lnTo>
+                  <a:pt x="1247017" y="170938"/>
+                </a:lnTo>
+                <a:close/>
+                <a:lnTo>
+                  <a:pt x="1252377" y="168244"/>
+                </a:lnTo>
+                <a:close/>
+                <a:lnTo>
+                  <a:pt x="1257739" y="165549"/>
+                </a:lnTo>
+                <a:close/>
+                <a:lnTo>
+                  <a:pt x="1263102" y="162850"/>
+                </a:lnTo>
+                <a:close/>
+                <a:lnTo>
+                  <a:pt x="1268466" y="160145"/>
+                </a:lnTo>
+                <a:close/>
+                <a:lnTo>
+                  <a:pt x="1273832" y="157434"/>
+                </a:lnTo>
+                <a:close/>
+                <a:lnTo>
+                  <a:pt x="1279198" y="154718"/>
+                </a:lnTo>
+                <a:close/>
+                <a:lnTo>
+                  <a:pt x="1284565" y="151997"/>
+                </a:lnTo>
+                <a:close/>
+                <a:lnTo>
+                  <a:pt x="1289931" y="149274"/>
+                </a:lnTo>
+                <a:close/>
+                <a:lnTo>
+                  <a:pt x="1295296" y="146550"/>
+                </a:lnTo>
+                <a:close/>
+                <a:lnTo>
+                  <a:pt x="1300659" y="143825"/>
+                </a:lnTo>
+                <a:close/>
+                <a:lnTo>
+                  <a:pt x="1306019" y="141102"/>
+                </a:lnTo>
+                <a:close/>
+                <a:lnTo>
+                  <a:pt x="1311377" y="138381"/>
+                </a:lnTo>
+                <a:close/>
+                <a:lnTo>
+                  <a:pt x="1316731" y="135664"/>
+                </a:lnTo>
+                <a:close/>
+                <a:lnTo>
+                  <a:pt x="1322080" y="132953"/>
+                </a:lnTo>
+                <a:close/>
+                <a:lnTo>
+                  <a:pt x="1327424" y="130248"/>
+                </a:lnTo>
+                <a:close/>
+                <a:lnTo>
+                  <a:pt x="1332763" y="127551"/>
+                </a:lnTo>
+                <a:close/>
+                <a:lnTo>
+                  <a:pt x="1338096" y="124863"/>
+                </a:lnTo>
+                <a:close/>
+                <a:lnTo>
+                  <a:pt x="1343423" y="122184"/>
+                </a:lnTo>
+                <a:close/>
+                <a:lnTo>
+                  <a:pt x="1348745" y="119514"/>
+                </a:lnTo>
+                <a:close/>
+                <a:lnTo>
+                  <a:pt x="1354064" y="116852"/>
+                </a:lnTo>
+                <a:close/>
+                <a:lnTo>
+                  <a:pt x="1359381" y="114198"/>
+                </a:lnTo>
+                <a:close/>
+                <a:lnTo>
+                  <a:pt x="1364696" y="111552"/>
+                </a:lnTo>
+                <a:close/>
+                <a:lnTo>
+                  <a:pt x="1370010" y="108913"/>
+                </a:lnTo>
+                <a:close/>
+                <a:lnTo>
+                  <a:pt x="1375326" y="106281"/>
+                </a:lnTo>
+                <a:close/>
+                <a:lnTo>
+                  <a:pt x="1380643" y="103655"/>
+                </a:lnTo>
+                <a:close/>
+                <a:lnTo>
+                  <a:pt x="1385962" y="101035"/>
+                </a:lnTo>
+                <a:close/>
+                <a:lnTo>
+                  <a:pt x="1391285" y="98421"/>
+                </a:lnTo>
+                <a:close/>
+                <a:lnTo>
+                  <a:pt x="1396613" y="95812"/>
+                </a:lnTo>
+                <a:close/>
+                <a:lnTo>
+                  <a:pt x="1401947" y="93208"/>
+                </a:lnTo>
+                <a:close/>
+                <a:lnTo>
+                  <a:pt x="1407287" y="90608"/>
+                </a:lnTo>
+                <a:close/>
+                <a:lnTo>
+                  <a:pt x="1412633" y="88013"/>
+                </a:lnTo>
+                <a:close/>
+                <a:lnTo>
+                  <a:pt x="1417983" y="85423"/>
+                </a:lnTo>
+                <a:close/>
+                <a:lnTo>
+                  <a:pt x="1423338" y="82839"/>
+                </a:lnTo>
+                <a:close/>
+                <a:lnTo>
+                  <a:pt x="1428696" y="80261"/>
+                </a:lnTo>
+                <a:close/>
+                <a:lnTo>
+                  <a:pt x="1434057" y="77688"/>
+                </a:lnTo>
+                <a:close/>
+                <a:lnTo>
+                  <a:pt x="1439421" y="75122"/>
+                </a:lnTo>
+                <a:close/>
+                <a:lnTo>
+                  <a:pt x="1444786" y="72561"/>
+                </a:lnTo>
+                <a:close/>
+                <a:lnTo>
+                  <a:pt x="1450152" y="70008"/>
+                </a:lnTo>
+                <a:close/>
+                <a:lnTo>
+                  <a:pt x="1455519" y="67461"/>
+                </a:lnTo>
+                <a:close/>
+                <a:lnTo>
+                  <a:pt x="1460885" y="64922"/>
+                </a:lnTo>
+                <a:close/>
+                <a:lnTo>
+                  <a:pt x="1466251" y="62390"/>
+                </a:lnTo>
+                <a:close/>
+                <a:lnTo>
+                  <a:pt x="1471615" y="59866"/>
+                </a:lnTo>
+                <a:close/>
+                <a:lnTo>
+                  <a:pt x="1476977" y="57349"/>
+                </a:lnTo>
+                <a:close/>
+                <a:lnTo>
+                  <a:pt x="1482338" y="54838"/>
+                </a:lnTo>
+                <a:close/>
+                <a:lnTo>
+                  <a:pt x="1487698" y="52333"/>
+                </a:lnTo>
+                <a:close/>
+                <a:lnTo>
+                  <a:pt x="1493057" y="49834"/>
+                </a:lnTo>
+                <a:close/>
+                <a:lnTo>
+                  <a:pt x="1498415" y="47339"/>
+                </a:lnTo>
+                <a:close/>
+                <a:lnTo>
+                  <a:pt x="1503772" y="44848"/>
+                </a:lnTo>
+                <a:close/>
+                <a:lnTo>
+                  <a:pt x="1509128" y="42361"/>
+                </a:lnTo>
+                <a:close/>
+                <a:lnTo>
+                  <a:pt x="1514484" y="39876"/>
+                </a:lnTo>
+                <a:close/>
+                <a:lnTo>
+                  <a:pt x="1519839" y="37394"/>
+                </a:lnTo>
+                <a:close/>
+                <a:lnTo>
+                  <a:pt x="1525194" y="34913"/>
+                </a:lnTo>
+                <a:close/>
+                <a:lnTo>
+                  <a:pt x="1530548" y="32433"/>
+                </a:lnTo>
+                <a:close/>
+                <a:lnTo>
+                  <a:pt x="1535903" y="29954"/>
+                </a:lnTo>
+                <a:close/>
+                <a:lnTo>
+                  <a:pt x="1541258" y="27474"/>
+                </a:lnTo>
+                <a:close/>
+                <a:lnTo>
+                  <a:pt x="1546613" y="24993"/>
+                </a:lnTo>
+                <a:close/>
+                <a:lnTo>
+                  <a:pt x="1551968" y="22511"/>
+                </a:lnTo>
+                <a:close/>
+                <a:lnTo>
+                  <a:pt x="1557323" y="20026"/>
+                </a:lnTo>
+                <a:close/>
+                <a:lnTo>
+                  <a:pt x="1562680" y="17539"/>
+                </a:lnTo>
+                <a:close/>
+                <a:lnTo>
+                  <a:pt x="1568037" y="15049"/>
+                </a:lnTo>
+                <a:close/>
+                <a:lnTo>
+                  <a:pt x="1573394" y="12554"/>
+                </a:lnTo>
+                <a:close/>
+                <a:lnTo>
+                  <a:pt x="1578753" y="10055"/>
+                </a:lnTo>
+                <a:close/>
+                <a:lnTo>
+                  <a:pt x="1584113" y="7551"/>
+                </a:lnTo>
+                <a:close/>
+                <a:lnTo>
+                  <a:pt x="1589474" y="5041"/>
+                </a:lnTo>
+                <a:close/>
+                <a:lnTo>
+                  <a:pt x="1594836" y="2524"/>
+                </a:lnTo>
+                <a:close/>
+                <a:lnTo>
+                  <a:pt x="1600200" y="0"/>
                 </a:lnTo>
                 <a:close/>
               </a:path>
@@ -4389,7 +4389,7 @@
           </a:custGeom>
           <a:ln w="31750">
             <a:solidFill>
-              <a:srgbClr val="FFFFFF"/>
+              <a:srgbClr val="000000"/>
             </a:solidFill>
           </a:ln>
         </p:spPr>
@@ -4423,8 +4423,8 @@
         </p:nvSpPr>
         <p:spPr>
           <a:xfrm>
-            <a:off x="6172200" y="877824"/>
-            <a:ext cx="914400" cy="413766"/>
+            <a:off x="5943600" y="655625"/>
+            <a:ext cx="1143000" cy="1001730"/>
           </a:xfrm>
           <a:custGeom>
             <a:avLst/>
@@ -4433,1204 +4433,1204 @@
             <a:cxnLst/>
             <a:rect l="l" t="t" r="r" b="b"/>
             <a:pathLst>
-              <a:path w="914400" h="413766">
+              <a:path w="1143000" h="1001730">
                 <a:moveTo>
-                  <a:pt x="0" y="413766"/>
+                  <a:pt x="0" y="1001725"/>
                 </a:moveTo>
                 <a:lnTo>
-                  <a:pt x="3058" y="413711"/>
-                </a:lnTo>
-                <a:close/>
-                <a:lnTo>
-                  <a:pt x="6116" y="413654"/>
-                </a:lnTo>
-                <a:close/>
-                <a:lnTo>
-                  <a:pt x="9175" y="413594"/>
-                </a:lnTo>
-                <a:close/>
-                <a:lnTo>
-                  <a:pt x="12233" y="413532"/>
-                </a:lnTo>
-                <a:close/>
-                <a:lnTo>
-                  <a:pt x="15291" y="413469"/>
-                </a:lnTo>
-                <a:close/>
-                <a:lnTo>
-                  <a:pt x="18349" y="413405"/>
-                </a:lnTo>
-                <a:close/>
-                <a:lnTo>
-                  <a:pt x="21407" y="413340"/>
-                </a:lnTo>
-                <a:close/>
-                <a:lnTo>
-                  <a:pt x="24466" y="413275"/>
-                </a:lnTo>
-                <a:close/>
-                <a:lnTo>
-                  <a:pt x="27524" y="413210"/>
-                </a:lnTo>
-                <a:close/>
-                <a:lnTo>
-                  <a:pt x="30582" y="413146"/>
-                </a:lnTo>
-                <a:close/>
-                <a:lnTo>
-                  <a:pt x="33640" y="413083"/>
-                </a:lnTo>
-                <a:close/>
-                <a:lnTo>
-                  <a:pt x="36698" y="413021"/>
-                </a:lnTo>
-                <a:close/>
-                <a:lnTo>
-                  <a:pt x="39757" y="412961"/>
-                </a:lnTo>
-                <a:close/>
-                <a:lnTo>
-                  <a:pt x="42815" y="412904"/>
-                </a:lnTo>
-                <a:close/>
-                <a:lnTo>
-                  <a:pt x="45873" y="412849"/>
-                </a:lnTo>
-                <a:close/>
-                <a:lnTo>
-                  <a:pt x="48931" y="412797"/>
-                </a:lnTo>
-                <a:close/>
-                <a:lnTo>
-                  <a:pt x="51989" y="412746"/>
-                </a:lnTo>
-                <a:close/>
-                <a:lnTo>
-                  <a:pt x="55047" y="412693"/>
-                </a:lnTo>
-                <a:close/>
-                <a:lnTo>
-                  <a:pt x="58106" y="412638"/>
-                </a:lnTo>
-                <a:close/>
-                <a:lnTo>
-                  <a:pt x="61164" y="412577"/>
-                </a:lnTo>
-                <a:close/>
-                <a:lnTo>
-                  <a:pt x="64222" y="412509"/>
-                </a:lnTo>
-                <a:close/>
-                <a:lnTo>
-                  <a:pt x="67280" y="412431"/>
-                </a:lnTo>
-                <a:close/>
-                <a:lnTo>
-                  <a:pt x="70338" y="412342"/>
-                </a:lnTo>
-                <a:close/>
-                <a:lnTo>
-                  <a:pt x="73397" y="412241"/>
-                </a:lnTo>
-                <a:close/>
-                <a:lnTo>
-                  <a:pt x="76455" y="412129"/>
-                </a:lnTo>
-                <a:close/>
-                <a:lnTo>
-                  <a:pt x="79513" y="412009"/>
-                </a:lnTo>
-                <a:close/>
-                <a:lnTo>
-                  <a:pt x="82571" y="411881"/>
-                </a:lnTo>
-                <a:close/>
-                <a:lnTo>
-                  <a:pt x="85629" y="411747"/>
-                </a:lnTo>
-                <a:close/>
-                <a:lnTo>
-                  <a:pt x="88688" y="411608"/>
-                </a:lnTo>
-                <a:close/>
-                <a:lnTo>
-                  <a:pt x="91746" y="411466"/>
-                </a:lnTo>
-                <a:close/>
-                <a:lnTo>
-                  <a:pt x="94804" y="411320"/>
-                </a:lnTo>
-                <a:close/>
-                <a:lnTo>
-                  <a:pt x="97862" y="411168"/>
-                </a:lnTo>
-                <a:close/>
-                <a:lnTo>
-                  <a:pt x="100920" y="411007"/>
-                </a:lnTo>
-                <a:close/>
-                <a:lnTo>
-                  <a:pt x="103979" y="410833"/>
-                </a:lnTo>
-                <a:close/>
-                <a:lnTo>
-                  <a:pt x="107037" y="410644"/>
-                </a:lnTo>
-                <a:close/>
-                <a:lnTo>
-                  <a:pt x="110095" y="410434"/>
-                </a:lnTo>
-                <a:close/>
-                <a:lnTo>
-                  <a:pt x="113153" y="410202"/>
-                </a:lnTo>
-                <a:close/>
-                <a:lnTo>
-                  <a:pt x="116211" y="409944"/>
-                </a:lnTo>
-                <a:close/>
-                <a:lnTo>
-                  <a:pt x="119270" y="409662"/>
-                </a:lnTo>
-                <a:close/>
-                <a:lnTo>
-                  <a:pt x="122328" y="409362"/>
-                </a:lnTo>
-                <a:close/>
-                <a:lnTo>
-                  <a:pt x="125386" y="409048"/>
-                </a:lnTo>
-                <a:close/>
-                <a:lnTo>
-                  <a:pt x="128444" y="408728"/>
-                </a:lnTo>
-                <a:close/>
-                <a:lnTo>
-                  <a:pt x="131502" y="408405"/>
-                </a:lnTo>
-                <a:close/>
-                <a:lnTo>
-                  <a:pt x="134561" y="408086"/>
-                </a:lnTo>
-                <a:close/>
-                <a:lnTo>
-                  <a:pt x="137619" y="407777"/>
-                </a:lnTo>
-                <a:close/>
-                <a:lnTo>
-                  <a:pt x="140677" y="407479"/>
-                </a:lnTo>
-                <a:close/>
-                <a:lnTo>
-                  <a:pt x="143735" y="407189"/>
-                </a:lnTo>
-                <a:close/>
-                <a:lnTo>
-                  <a:pt x="146793" y="406901"/>
-                </a:lnTo>
-                <a:close/>
-                <a:lnTo>
-                  <a:pt x="149852" y="406609"/>
-                </a:lnTo>
-                <a:close/>
-                <a:lnTo>
-                  <a:pt x="152910" y="406307"/>
-                </a:lnTo>
-                <a:close/>
-                <a:lnTo>
-                  <a:pt x="155968" y="405990"/>
-                </a:lnTo>
-                <a:close/>
-                <a:lnTo>
-                  <a:pt x="159026" y="405652"/>
-                </a:lnTo>
-                <a:close/>
-                <a:lnTo>
-                  <a:pt x="162084" y="405287"/>
-                </a:lnTo>
-                <a:close/>
-                <a:lnTo>
-                  <a:pt x="165142" y="404897"/>
-                </a:lnTo>
-                <a:close/>
-                <a:lnTo>
-                  <a:pt x="168201" y="404486"/>
-                </a:lnTo>
-                <a:close/>
-                <a:lnTo>
-                  <a:pt x="171259" y="404056"/>
-                </a:lnTo>
-                <a:close/>
-                <a:lnTo>
-                  <a:pt x="174317" y="403613"/>
-                </a:lnTo>
-                <a:close/>
-                <a:lnTo>
-                  <a:pt x="177375" y="403161"/>
-                </a:lnTo>
-                <a:close/>
-                <a:lnTo>
-                  <a:pt x="180433" y="402703"/>
-                </a:lnTo>
-                <a:close/>
-                <a:lnTo>
-                  <a:pt x="183492" y="402244"/>
-                </a:lnTo>
-                <a:close/>
-                <a:lnTo>
-                  <a:pt x="186550" y="401786"/>
-                </a:lnTo>
-                <a:close/>
-                <a:lnTo>
-                  <a:pt x="189608" y="401325"/>
-                </a:lnTo>
-                <a:close/>
-                <a:lnTo>
-                  <a:pt x="192666" y="400856"/>
-                </a:lnTo>
-                <a:close/>
-                <a:lnTo>
-                  <a:pt x="195724" y="400377"/>
-                </a:lnTo>
-                <a:close/>
-                <a:lnTo>
-                  <a:pt x="198783" y="399882"/>
-                </a:lnTo>
-                <a:close/>
-                <a:lnTo>
-                  <a:pt x="201841" y="399368"/>
-                </a:lnTo>
-                <a:close/>
-                <a:lnTo>
-                  <a:pt x="204899" y="398831"/>
-                </a:lnTo>
-                <a:close/>
-                <a:lnTo>
-                  <a:pt x="207957" y="398267"/>
-                </a:lnTo>
-                <a:close/>
-                <a:lnTo>
-                  <a:pt x="211015" y="397678"/>
-                </a:lnTo>
-                <a:close/>
-                <a:lnTo>
-                  <a:pt x="214074" y="397071"/>
-                </a:lnTo>
-                <a:close/>
-                <a:lnTo>
-                  <a:pt x="217132" y="396450"/>
-                </a:lnTo>
-                <a:close/>
-                <a:lnTo>
-                  <a:pt x="220190" y="395823"/>
-                </a:lnTo>
-                <a:close/>
-                <a:lnTo>
-                  <a:pt x="223248" y="395194"/>
-                </a:lnTo>
-                <a:close/>
-                <a:lnTo>
-                  <a:pt x="226306" y="394569"/>
-                </a:lnTo>
-                <a:close/>
-                <a:lnTo>
-                  <a:pt x="229365" y="393954"/>
-                </a:lnTo>
-                <a:close/>
-                <a:lnTo>
-                  <a:pt x="232423" y="393351"/>
-                </a:lnTo>
-                <a:close/>
-                <a:lnTo>
-                  <a:pt x="235481" y="392756"/>
-                </a:lnTo>
-                <a:close/>
-                <a:lnTo>
-                  <a:pt x="238539" y="392161"/>
-                </a:lnTo>
-                <a:close/>
-                <a:lnTo>
-                  <a:pt x="241597" y="391563"/>
-                </a:lnTo>
-                <a:close/>
-                <a:lnTo>
-                  <a:pt x="244656" y="390954"/>
-                </a:lnTo>
-                <a:close/>
-                <a:lnTo>
-                  <a:pt x="247714" y="390329"/>
-                </a:lnTo>
-                <a:close/>
-                <a:lnTo>
-                  <a:pt x="250772" y="389683"/>
-                </a:lnTo>
-                <a:close/>
-                <a:lnTo>
-                  <a:pt x="253830" y="389011"/>
-                </a:lnTo>
-                <a:close/>
-                <a:lnTo>
-                  <a:pt x="256888" y="388312"/>
-                </a:lnTo>
-                <a:close/>
-                <a:lnTo>
-                  <a:pt x="259946" y="387593"/>
-                </a:lnTo>
-                <a:close/>
-                <a:lnTo>
-                  <a:pt x="263005" y="386856"/>
-                </a:lnTo>
-                <a:close/>
-                <a:lnTo>
-                  <a:pt x="266063" y="386106"/>
-                </a:lnTo>
-                <a:close/>
-                <a:lnTo>
-                  <a:pt x="269121" y="385347"/>
-                </a:lnTo>
-                <a:close/>
-                <a:lnTo>
-                  <a:pt x="272179" y="384583"/>
-                </a:lnTo>
-                <a:close/>
-                <a:lnTo>
-                  <a:pt x="275237" y="383819"/>
-                </a:lnTo>
-                <a:close/>
-                <a:lnTo>
-                  <a:pt x="278296" y="383054"/>
-                </a:lnTo>
-                <a:close/>
-                <a:lnTo>
-                  <a:pt x="281354" y="382287"/>
-                </a:lnTo>
-                <a:close/>
-                <a:lnTo>
-                  <a:pt x="284412" y="381512"/>
-                </a:lnTo>
-                <a:close/>
-                <a:lnTo>
-                  <a:pt x="287470" y="380725"/>
-                </a:lnTo>
-                <a:close/>
-                <a:lnTo>
-                  <a:pt x="290528" y="379923"/>
-                </a:lnTo>
-                <a:close/>
-                <a:lnTo>
-                  <a:pt x="293587" y="379101"/>
-                </a:lnTo>
-                <a:close/>
-                <a:lnTo>
-                  <a:pt x="296645" y="378255"/>
-                </a:lnTo>
-                <a:close/>
-                <a:lnTo>
-                  <a:pt x="299703" y="377382"/>
-                </a:lnTo>
-                <a:close/>
-                <a:lnTo>
-                  <a:pt x="302761" y="376486"/>
-                </a:lnTo>
-                <a:close/>
-                <a:lnTo>
-                  <a:pt x="305819" y="375571"/>
-                </a:lnTo>
-                <a:close/>
-                <a:lnTo>
-                  <a:pt x="308878" y="374644"/>
-                </a:lnTo>
-                <a:close/>
-                <a:lnTo>
-                  <a:pt x="311936" y="373710"/>
-                </a:lnTo>
-                <a:close/>
-                <a:lnTo>
-                  <a:pt x="314994" y="372775"/>
-                </a:lnTo>
-                <a:close/>
-                <a:lnTo>
-                  <a:pt x="318052" y="371846"/>
-                </a:lnTo>
-                <a:close/>
-                <a:lnTo>
-                  <a:pt x="321110" y="370926"/>
-                </a:lnTo>
-                <a:close/>
-                <a:lnTo>
-                  <a:pt x="324169" y="370019"/>
-                </a:lnTo>
-                <a:close/>
-                <a:lnTo>
-                  <a:pt x="327227" y="369117"/>
-                </a:lnTo>
-                <a:close/>
-                <a:lnTo>
-                  <a:pt x="330285" y="368217"/>
-                </a:lnTo>
-                <a:close/>
-                <a:lnTo>
-                  <a:pt x="333343" y="367312"/>
-                </a:lnTo>
-                <a:close/>
-                <a:lnTo>
-                  <a:pt x="336401" y="366396"/>
-                </a:lnTo>
-                <a:close/>
-                <a:lnTo>
-                  <a:pt x="339460" y="365464"/>
-                </a:lnTo>
-                <a:close/>
-                <a:lnTo>
-                  <a:pt x="342518" y="364510"/>
-                </a:lnTo>
-                <a:close/>
-                <a:lnTo>
-                  <a:pt x="345576" y="363528"/>
-                </a:lnTo>
-                <a:close/>
-                <a:lnTo>
-                  <a:pt x="348634" y="362522"/>
-                </a:lnTo>
-                <a:close/>
-                <a:lnTo>
-                  <a:pt x="351692" y="361495"/>
-                </a:lnTo>
-                <a:close/>
-                <a:lnTo>
-                  <a:pt x="354751" y="360451"/>
-                </a:lnTo>
-                <a:close/>
-                <a:lnTo>
-                  <a:pt x="357809" y="359394"/>
-                </a:lnTo>
-                <a:close/>
-                <a:lnTo>
-                  <a:pt x="360867" y="358328"/>
-                </a:lnTo>
-                <a:close/>
-                <a:lnTo>
-                  <a:pt x="363925" y="357258"/>
-                </a:lnTo>
-                <a:close/>
-                <a:lnTo>
-                  <a:pt x="366983" y="356188"/>
-                </a:lnTo>
-                <a:close/>
-                <a:lnTo>
-                  <a:pt x="370041" y="355118"/>
-                </a:lnTo>
-                <a:close/>
-                <a:lnTo>
-                  <a:pt x="373100" y="354044"/>
-                </a:lnTo>
-                <a:close/>
-                <a:lnTo>
-                  <a:pt x="376158" y="352962"/>
-                </a:lnTo>
-                <a:close/>
-                <a:lnTo>
-                  <a:pt x="379216" y="351868"/>
-                </a:lnTo>
-                <a:close/>
-                <a:lnTo>
-                  <a:pt x="382274" y="350758"/>
-                </a:lnTo>
-                <a:close/>
-                <a:lnTo>
-                  <a:pt x="385332" y="349628"/>
-                </a:lnTo>
-                <a:close/>
-                <a:lnTo>
-                  <a:pt x="388391" y="348474"/>
-                </a:lnTo>
-                <a:close/>
-                <a:lnTo>
-                  <a:pt x="391449" y="347293"/>
-                </a:lnTo>
-                <a:close/>
-                <a:lnTo>
-                  <a:pt x="394507" y="346088"/>
-                </a:lnTo>
-                <a:close/>
-                <a:lnTo>
-                  <a:pt x="397565" y="344866"/>
-                </a:lnTo>
-                <a:close/>
-                <a:lnTo>
-                  <a:pt x="400623" y="343632"/>
-                </a:lnTo>
-                <a:close/>
-                <a:lnTo>
-                  <a:pt x="403682" y="342392"/>
-                </a:lnTo>
-                <a:close/>
-                <a:lnTo>
-                  <a:pt x="406740" y="341152"/>
-                </a:lnTo>
-                <a:close/>
-                <a:lnTo>
-                  <a:pt x="409798" y="339917"/>
-                </a:lnTo>
-                <a:close/>
-                <a:lnTo>
-                  <a:pt x="412856" y="338693"/>
-                </a:lnTo>
-                <a:close/>
-                <a:lnTo>
-                  <a:pt x="415914" y="337481"/>
-                </a:lnTo>
-                <a:close/>
-                <a:lnTo>
-                  <a:pt x="418973" y="336274"/>
-                </a:lnTo>
-                <a:close/>
-                <a:lnTo>
-                  <a:pt x="422031" y="335068"/>
-                </a:lnTo>
-                <a:close/>
-                <a:lnTo>
-                  <a:pt x="425089" y="333856"/>
-                </a:lnTo>
-                <a:close/>
-                <a:lnTo>
-                  <a:pt x="428147" y="332633"/>
-                </a:lnTo>
-                <a:close/>
-                <a:lnTo>
-                  <a:pt x="431205" y="331393"/>
-                </a:lnTo>
-                <a:close/>
-                <a:lnTo>
-                  <a:pt x="434264" y="330130"/>
-                </a:lnTo>
-                <a:close/>
-                <a:lnTo>
-                  <a:pt x="437322" y="328841"/>
-                </a:lnTo>
-                <a:close/>
-                <a:lnTo>
-                  <a:pt x="440380" y="327526"/>
-                </a:lnTo>
-                <a:close/>
-                <a:lnTo>
-                  <a:pt x="443438" y="326191"/>
-                </a:lnTo>
-                <a:close/>
-                <a:lnTo>
-                  <a:pt x="446496" y="324840"/>
-                </a:lnTo>
-                <a:close/>
-                <a:lnTo>
-                  <a:pt x="449555" y="323476"/>
-                </a:lnTo>
-                <a:close/>
-                <a:lnTo>
-                  <a:pt x="452613" y="322104"/>
-                </a:lnTo>
-                <a:close/>
-                <a:lnTo>
-                  <a:pt x="455671" y="320728"/>
-                </a:lnTo>
-                <a:close/>
-                <a:lnTo>
-                  <a:pt x="458729" y="319352"/>
-                </a:lnTo>
-                <a:close/>
-                <a:lnTo>
-                  <a:pt x="461787" y="317976"/>
-                </a:lnTo>
-                <a:close/>
-                <a:lnTo>
-                  <a:pt x="464845" y="316595"/>
-                </a:lnTo>
-                <a:close/>
-                <a:lnTo>
-                  <a:pt x="467904" y="315207"/>
-                </a:lnTo>
-                <a:close/>
-                <a:lnTo>
-                  <a:pt x="470962" y="313806"/>
-                </a:lnTo>
-                <a:close/>
-                <a:lnTo>
-                  <a:pt x="474020" y="312388"/>
-                </a:lnTo>
-                <a:close/>
-                <a:lnTo>
-                  <a:pt x="477078" y="310950"/>
-                </a:lnTo>
-                <a:close/>
-                <a:lnTo>
-                  <a:pt x="480136" y="309488"/>
-                </a:lnTo>
-                <a:close/>
-                <a:lnTo>
-                  <a:pt x="483195" y="307998"/>
-                </a:lnTo>
-                <a:close/>
-                <a:lnTo>
-                  <a:pt x="486253" y="306486"/>
-                </a:lnTo>
-                <a:close/>
-                <a:lnTo>
-                  <a:pt x="489311" y="304956"/>
-                </a:lnTo>
-                <a:close/>
-                <a:lnTo>
-                  <a:pt x="492369" y="303416"/>
-                </a:lnTo>
-                <a:close/>
-                <a:lnTo>
-                  <a:pt x="495427" y="301870"/>
-                </a:lnTo>
-                <a:close/>
-                <a:lnTo>
-                  <a:pt x="498486" y="300324"/>
-                </a:lnTo>
-                <a:close/>
-                <a:lnTo>
-                  <a:pt x="501544" y="298784"/>
-                </a:lnTo>
-                <a:close/>
-                <a:lnTo>
-                  <a:pt x="504602" y="297255"/>
-                </a:lnTo>
-                <a:close/>
-                <a:lnTo>
-                  <a:pt x="507660" y="295738"/>
-                </a:lnTo>
-                <a:close/>
-                <a:lnTo>
-                  <a:pt x="510718" y="294226"/>
-                </a:lnTo>
-                <a:close/>
-                <a:lnTo>
-                  <a:pt x="513777" y="292713"/>
-                </a:lnTo>
-                <a:close/>
-                <a:lnTo>
-                  <a:pt x="516835" y="291195"/>
-                </a:lnTo>
-                <a:close/>
-                <a:lnTo>
-                  <a:pt x="519893" y="289665"/>
-                </a:lnTo>
-                <a:close/>
-                <a:lnTo>
-                  <a:pt x="522951" y="288117"/>
-                </a:lnTo>
-                <a:close/>
-                <a:lnTo>
-                  <a:pt x="526009" y="286546"/>
-                </a:lnTo>
-                <a:close/>
-                <a:lnTo>
-                  <a:pt x="529068" y="284947"/>
-                </a:lnTo>
-                <a:close/>
-                <a:lnTo>
-                  <a:pt x="532126" y="283325"/>
-                </a:lnTo>
-                <a:close/>
-                <a:lnTo>
-                  <a:pt x="535184" y="281682"/>
-                </a:lnTo>
-                <a:close/>
-                <a:lnTo>
-                  <a:pt x="538242" y="280024"/>
-                </a:lnTo>
-                <a:close/>
-                <a:lnTo>
-                  <a:pt x="541300" y="278353"/>
-                </a:lnTo>
-                <a:close/>
-                <a:lnTo>
-                  <a:pt x="544359" y="276675"/>
-                </a:lnTo>
-                <a:close/>
-                <a:lnTo>
-                  <a:pt x="547417" y="274993"/>
-                </a:lnTo>
-                <a:close/>
-                <a:lnTo>
-                  <a:pt x="550475" y="273311"/>
-                </a:lnTo>
-                <a:close/>
-                <a:lnTo>
-                  <a:pt x="553533" y="271629"/>
-                </a:lnTo>
-                <a:close/>
-                <a:lnTo>
-                  <a:pt x="556591" y="269942"/>
-                </a:lnTo>
-                <a:close/>
-                <a:lnTo>
-                  <a:pt x="559649" y="268246"/>
-                </a:lnTo>
-                <a:close/>
-                <a:lnTo>
-                  <a:pt x="562708" y="266538"/>
-                </a:lnTo>
-                <a:close/>
-                <a:lnTo>
-                  <a:pt x="565766" y="264813"/>
-                </a:lnTo>
-                <a:close/>
-                <a:lnTo>
-                  <a:pt x="568824" y="263067"/>
-                </a:lnTo>
-                <a:close/>
-                <a:lnTo>
-                  <a:pt x="571882" y="261296"/>
-                </a:lnTo>
-                <a:close/>
-                <a:lnTo>
-                  <a:pt x="574940" y="259498"/>
-                </a:lnTo>
-                <a:close/>
-                <a:lnTo>
-                  <a:pt x="577999" y="257677"/>
-                </a:lnTo>
-                <a:close/>
-                <a:lnTo>
-                  <a:pt x="581057" y="255841"/>
-                </a:lnTo>
-                <a:close/>
-                <a:lnTo>
-                  <a:pt x="584115" y="253994"/>
-                </a:lnTo>
-                <a:close/>
-                <a:lnTo>
-                  <a:pt x="587173" y="252142"/>
-                </a:lnTo>
-                <a:close/>
-                <a:lnTo>
-                  <a:pt x="590231" y="250290"/>
-                </a:lnTo>
-                <a:close/>
-                <a:lnTo>
-                  <a:pt x="593290" y="248445"/>
-                </a:lnTo>
-                <a:close/>
-                <a:lnTo>
-                  <a:pt x="596348" y="246612"/>
-                </a:lnTo>
-                <a:close/>
-                <a:lnTo>
-                  <a:pt x="599406" y="244790"/>
-                </a:lnTo>
-                <a:close/>
-                <a:lnTo>
-                  <a:pt x="602464" y="242972"/>
-                </a:lnTo>
-                <a:close/>
-                <a:lnTo>
-                  <a:pt x="605522" y="241154"/>
-                </a:lnTo>
-                <a:close/>
-                <a:lnTo>
-                  <a:pt x="608581" y="239329"/>
-                </a:lnTo>
-                <a:close/>
-                <a:lnTo>
-                  <a:pt x="611639" y="237491"/>
-                </a:lnTo>
-                <a:close/>
-                <a:lnTo>
-                  <a:pt x="614697" y="235635"/>
-                </a:lnTo>
-                <a:close/>
-                <a:lnTo>
-                  <a:pt x="617755" y="233755"/>
-                </a:lnTo>
-                <a:close/>
-                <a:lnTo>
-                  <a:pt x="620813" y="231849"/>
-                </a:lnTo>
-                <a:close/>
-                <a:lnTo>
-                  <a:pt x="623872" y="229918"/>
-                </a:lnTo>
-                <a:close/>
-                <a:lnTo>
-                  <a:pt x="626930" y="227968"/>
-                </a:lnTo>
-                <a:close/>
-                <a:lnTo>
-                  <a:pt x="629988" y="226002"/>
-                </a:lnTo>
-                <a:close/>
-                <a:lnTo>
-                  <a:pt x="633046" y="224025"/>
-                </a:lnTo>
-                <a:close/>
-                <a:lnTo>
-                  <a:pt x="636104" y="222040"/>
-                </a:lnTo>
-                <a:close/>
-                <a:lnTo>
-                  <a:pt x="639163" y="220052"/>
-                </a:lnTo>
-                <a:close/>
-                <a:lnTo>
-                  <a:pt x="642221" y="218065"/>
-                </a:lnTo>
-                <a:close/>
-                <a:lnTo>
-                  <a:pt x="645279" y="216076"/>
-                </a:lnTo>
-                <a:close/>
-                <a:lnTo>
-                  <a:pt x="648337" y="214083"/>
-                </a:lnTo>
-                <a:close/>
-                <a:lnTo>
-                  <a:pt x="651395" y="212080"/>
-                </a:lnTo>
-                <a:close/>
-                <a:lnTo>
-                  <a:pt x="654454" y="210065"/>
-                </a:lnTo>
-                <a:close/>
-                <a:lnTo>
-                  <a:pt x="657512" y="208032"/>
-                </a:lnTo>
-                <a:close/>
-                <a:lnTo>
-                  <a:pt x="660570" y="205978"/>
-                </a:lnTo>
-                <a:close/>
-                <a:lnTo>
-                  <a:pt x="663628" y="203898"/>
-                </a:lnTo>
-                <a:close/>
-                <a:lnTo>
-                  <a:pt x="666686" y="201792"/>
-                </a:lnTo>
-                <a:close/>
-                <a:lnTo>
-                  <a:pt x="669744" y="199664"/>
-                </a:lnTo>
-                <a:close/>
-                <a:lnTo>
-                  <a:pt x="672803" y="197520"/>
-                </a:lnTo>
-                <a:close/>
-                <a:lnTo>
-                  <a:pt x="675861" y="195367"/>
-                </a:lnTo>
-                <a:close/>
-                <a:lnTo>
-                  <a:pt x="678919" y="193208"/>
-                </a:lnTo>
-                <a:close/>
-                <a:lnTo>
-                  <a:pt x="681977" y="191052"/>
-                </a:lnTo>
-                <a:close/>
-                <a:lnTo>
-                  <a:pt x="685035" y="188902"/>
-                </a:lnTo>
-                <a:close/>
-                <a:lnTo>
-                  <a:pt x="688094" y="186764"/>
-                </a:lnTo>
-                <a:close/>
-                <a:lnTo>
-                  <a:pt x="691152" y="184637"/>
-                </a:lnTo>
-                <a:close/>
-                <a:lnTo>
-                  <a:pt x="694210" y="182514"/>
-                </a:lnTo>
-                <a:close/>
-                <a:lnTo>
-                  <a:pt x="697268" y="180389"/>
-                </a:lnTo>
-                <a:close/>
-                <a:lnTo>
-                  <a:pt x="700326" y="178257"/>
-                </a:lnTo>
-                <a:close/>
-                <a:lnTo>
-                  <a:pt x="703385" y="176112"/>
-                </a:lnTo>
-                <a:close/>
-                <a:lnTo>
-                  <a:pt x="706443" y="173948"/>
-                </a:lnTo>
-                <a:close/>
-                <a:lnTo>
-                  <a:pt x="709501" y="171760"/>
-                </a:lnTo>
-                <a:close/>
-                <a:lnTo>
-                  <a:pt x="712559" y="169545"/>
-                </a:lnTo>
-                <a:close/>
-                <a:lnTo>
-                  <a:pt x="715617" y="167306"/>
-                </a:lnTo>
-                <a:close/>
-                <a:lnTo>
-                  <a:pt x="718676" y="165049"/>
-                </a:lnTo>
-                <a:close/>
-                <a:lnTo>
-                  <a:pt x="721734" y="162776"/>
-                </a:lnTo>
-                <a:close/>
-                <a:lnTo>
-                  <a:pt x="724792" y="160492"/>
-                </a:lnTo>
-                <a:close/>
-                <a:lnTo>
-                  <a:pt x="727850" y="158201"/>
-                </a:lnTo>
-                <a:close/>
-                <a:lnTo>
-                  <a:pt x="730908" y="155907"/>
-                </a:lnTo>
-                <a:close/>
-                <a:lnTo>
-                  <a:pt x="733967" y="153613"/>
-                </a:lnTo>
-                <a:close/>
-                <a:lnTo>
-                  <a:pt x="737025" y="151319"/>
-                </a:lnTo>
-                <a:close/>
-                <a:lnTo>
-                  <a:pt x="740083" y="149019"/>
-                </a:lnTo>
-                <a:close/>
-                <a:lnTo>
-                  <a:pt x="743141" y="146709"/>
-                </a:lnTo>
-                <a:close/>
-                <a:lnTo>
-                  <a:pt x="746199" y="144386"/>
-                </a:lnTo>
-                <a:close/>
-                <a:lnTo>
-                  <a:pt x="749258" y="142046"/>
-                </a:lnTo>
-                <a:close/>
-                <a:lnTo>
-                  <a:pt x="752316" y="139683"/>
-                </a:lnTo>
-                <a:close/>
-                <a:lnTo>
-                  <a:pt x="755374" y="137295"/>
-                </a:lnTo>
-                <a:close/>
-                <a:lnTo>
-                  <a:pt x="758432" y="134881"/>
-                </a:lnTo>
-                <a:close/>
-                <a:lnTo>
-                  <a:pt x="761490" y="132445"/>
-                </a:lnTo>
-                <a:close/>
-                <a:lnTo>
-                  <a:pt x="764548" y="129994"/>
-                </a:lnTo>
-                <a:close/>
-                <a:lnTo>
-                  <a:pt x="767607" y="127534"/>
-                </a:lnTo>
-                <a:close/>
-                <a:lnTo>
-                  <a:pt x="770665" y="125070"/>
-                </a:lnTo>
-                <a:close/>
-                <a:lnTo>
-                  <a:pt x="773723" y="122608"/>
-                </a:lnTo>
-                <a:close/>
-                <a:lnTo>
-                  <a:pt x="776781" y="120154"/>
-                </a:lnTo>
-                <a:close/>
-                <a:lnTo>
-                  <a:pt x="779839" y="117711"/>
-                </a:lnTo>
-                <a:close/>
-                <a:lnTo>
-                  <a:pt x="782898" y="115279"/>
-                </a:lnTo>
-                <a:close/>
-                <a:lnTo>
-                  <a:pt x="785956" y="112850"/>
-                </a:lnTo>
-                <a:close/>
-                <a:lnTo>
-                  <a:pt x="789014" y="110418"/>
-                </a:lnTo>
-                <a:close/>
-                <a:lnTo>
-                  <a:pt x="792072" y="107980"/>
-                </a:lnTo>
-                <a:close/>
-                <a:lnTo>
-                  <a:pt x="795130" y="105527"/>
-                </a:lnTo>
-                <a:close/>
-                <a:lnTo>
-                  <a:pt x="798189" y="103056"/>
-                </a:lnTo>
-                <a:close/>
-                <a:lnTo>
-                  <a:pt x="801247" y="100559"/>
-                </a:lnTo>
-                <a:close/>
-                <a:lnTo>
-                  <a:pt x="804305" y="98036"/>
-                </a:lnTo>
-                <a:close/>
-                <a:lnTo>
-                  <a:pt x="807363" y="95490"/>
-                </a:lnTo>
-                <a:close/>
-                <a:lnTo>
-                  <a:pt x="810421" y="92924"/>
-                </a:lnTo>
-                <a:close/>
-                <a:lnTo>
-                  <a:pt x="813480" y="90344"/>
-                </a:lnTo>
-                <a:close/>
-                <a:lnTo>
-                  <a:pt x="816538" y="87754"/>
-                </a:lnTo>
-                <a:close/>
-                <a:lnTo>
-                  <a:pt x="819596" y="85156"/>
-                </a:lnTo>
-                <a:close/>
-                <a:lnTo>
-                  <a:pt x="822654" y="82556"/>
-                </a:lnTo>
-                <a:close/>
-                <a:lnTo>
-                  <a:pt x="825712" y="79956"/>
-                </a:lnTo>
-                <a:close/>
-                <a:lnTo>
-                  <a:pt x="828771" y="77355"/>
-                </a:lnTo>
-                <a:close/>
-                <a:lnTo>
-                  <a:pt x="831829" y="74748"/>
-                </a:lnTo>
-                <a:close/>
-                <a:lnTo>
-                  <a:pt x="834887" y="72131"/>
-                </a:lnTo>
-                <a:close/>
-                <a:lnTo>
-                  <a:pt x="837945" y="69500"/>
-                </a:lnTo>
-                <a:close/>
-                <a:lnTo>
-                  <a:pt x="841003" y="66852"/>
-                </a:lnTo>
-                <a:close/>
-                <a:lnTo>
-                  <a:pt x="844062" y="64183"/>
-                </a:lnTo>
-                <a:close/>
-                <a:lnTo>
-                  <a:pt x="847120" y="61488"/>
-                </a:lnTo>
-                <a:close/>
-                <a:lnTo>
-                  <a:pt x="850178" y="58768"/>
-                </a:lnTo>
-                <a:close/>
-                <a:lnTo>
-                  <a:pt x="853236" y="56027"/>
-                </a:lnTo>
-                <a:close/>
-                <a:lnTo>
-                  <a:pt x="856294" y="53271"/>
-                </a:lnTo>
-                <a:close/>
-                <a:lnTo>
-                  <a:pt x="859353" y="50506"/>
-                </a:lnTo>
-                <a:close/>
-                <a:lnTo>
-                  <a:pt x="862411" y="47735"/>
-                </a:lnTo>
-                <a:close/>
-                <a:lnTo>
-                  <a:pt x="865469" y="44965"/>
-                </a:lnTo>
-                <a:close/>
-                <a:lnTo>
-                  <a:pt x="868527" y="42200"/>
-                </a:lnTo>
-                <a:close/>
-                <a:lnTo>
-                  <a:pt x="871585" y="39445"/>
-                </a:lnTo>
-                <a:close/>
-                <a:lnTo>
-                  <a:pt x="874643" y="36698"/>
-                </a:lnTo>
-                <a:close/>
-                <a:lnTo>
-                  <a:pt x="877702" y="33954"/>
-                </a:lnTo>
-                <a:close/>
-                <a:lnTo>
-                  <a:pt x="880760" y="31211"/>
-                </a:lnTo>
-                <a:close/>
-                <a:lnTo>
-                  <a:pt x="883818" y="28464"/>
-                </a:lnTo>
-                <a:close/>
-                <a:lnTo>
-                  <a:pt x="886876" y="25710"/>
-                </a:lnTo>
-                <a:close/>
-                <a:lnTo>
-                  <a:pt x="889934" y="22945"/>
-                </a:lnTo>
-                <a:close/>
-                <a:lnTo>
-                  <a:pt x="892993" y="20166"/>
-                </a:lnTo>
-                <a:close/>
-                <a:lnTo>
-                  <a:pt x="896051" y="17369"/>
-                </a:lnTo>
-                <a:close/>
-                <a:lnTo>
-                  <a:pt x="899109" y="14550"/>
-                </a:lnTo>
-                <a:close/>
-                <a:lnTo>
-                  <a:pt x="902167" y="11706"/>
-                </a:lnTo>
-                <a:close/>
-                <a:lnTo>
-                  <a:pt x="905225" y="8832"/>
-                </a:lnTo>
-                <a:close/>
-                <a:lnTo>
-                  <a:pt x="908284" y="5926"/>
-                </a:lnTo>
-                <a:close/>
-                <a:lnTo>
-                  <a:pt x="911342" y="2983"/>
-                </a:lnTo>
-                <a:close/>
-                <a:lnTo>
-                  <a:pt x="914400" y="0"/>
+                  <a:pt x="3811" y="1001730"/>
+                </a:lnTo>
+                <a:close/>
+                <a:lnTo>
+                  <a:pt x="7623" y="1001708"/>
+                </a:lnTo>
+                <a:close/>
+                <a:lnTo>
+                  <a:pt x="11437" y="1001658"/>
+                </a:lnTo>
+                <a:close/>
+                <a:lnTo>
+                  <a:pt x="15251" y="1001580"/>
+                </a:lnTo>
+                <a:close/>
+                <a:lnTo>
+                  <a:pt x="19067" y="1001477"/>
+                </a:lnTo>
+                <a:close/>
+                <a:lnTo>
+                  <a:pt x="22884" y="1001346"/>
+                </a:lnTo>
+                <a:close/>
+                <a:lnTo>
+                  <a:pt x="26702" y="1001190"/>
+                </a:lnTo>
+                <a:close/>
+                <a:lnTo>
+                  <a:pt x="30520" y="1001008"/>
+                </a:lnTo>
+                <a:close/>
+                <a:lnTo>
+                  <a:pt x="34339" y="1000801"/>
+                </a:lnTo>
+                <a:close/>
+                <a:lnTo>
+                  <a:pt x="38158" y="1000569"/>
+                </a:lnTo>
+                <a:close/>
+                <a:lnTo>
+                  <a:pt x="41978" y="1000313"/>
+                </a:lnTo>
+                <a:close/>
+                <a:lnTo>
+                  <a:pt x="45798" y="1000033"/>
+                </a:lnTo>
+                <a:close/>
+                <a:lnTo>
+                  <a:pt x="49618" y="999729"/>
+                </a:lnTo>
+                <a:close/>
+                <a:lnTo>
+                  <a:pt x="53438" y="999401"/>
+                </a:lnTo>
+                <a:close/>
+                <a:lnTo>
+                  <a:pt x="57258" y="999050"/>
+                </a:lnTo>
+                <a:close/>
+                <a:lnTo>
+                  <a:pt x="61077" y="998677"/>
+                </a:lnTo>
+                <a:close/>
+                <a:lnTo>
+                  <a:pt x="64896" y="998282"/>
+                </a:lnTo>
+                <a:close/>
+                <a:lnTo>
+                  <a:pt x="68714" y="997865"/>
+                </a:lnTo>
+                <a:close/>
+                <a:lnTo>
+                  <a:pt x="72532" y="997426"/>
+                </a:lnTo>
+                <a:close/>
+                <a:lnTo>
+                  <a:pt x="76348" y="996966"/>
+                </a:lnTo>
+                <a:close/>
+                <a:lnTo>
+                  <a:pt x="80164" y="996485"/>
+                </a:lnTo>
+                <a:close/>
+                <a:lnTo>
+                  <a:pt x="83979" y="995984"/>
+                </a:lnTo>
+                <a:close/>
+                <a:lnTo>
+                  <a:pt x="87792" y="995463"/>
+                </a:lnTo>
+                <a:close/>
+                <a:lnTo>
+                  <a:pt x="91604" y="994922"/>
+                </a:lnTo>
+                <a:close/>
+                <a:lnTo>
+                  <a:pt x="95415" y="994362"/>
+                </a:lnTo>
+                <a:close/>
+                <a:lnTo>
+                  <a:pt x="99224" y="993783"/>
+                </a:lnTo>
+                <a:close/>
+                <a:lnTo>
+                  <a:pt x="103032" y="993185"/>
+                </a:lnTo>
+                <a:close/>
+                <a:lnTo>
+                  <a:pt x="106840" y="992567"/>
+                </a:lnTo>
+                <a:close/>
+                <a:lnTo>
+                  <a:pt x="110649" y="991928"/>
+                </a:lnTo>
+                <a:close/>
+                <a:lnTo>
+                  <a:pt x="114458" y="991269"/>
+                </a:lnTo>
+                <a:close/>
+                <a:lnTo>
+                  <a:pt x="118269" y="990588"/>
+                </a:lnTo>
+                <a:close/>
+                <a:lnTo>
+                  <a:pt x="122083" y="989886"/>
+                </a:lnTo>
+                <a:close/>
+                <a:lnTo>
+                  <a:pt x="125899" y="989162"/>
+                </a:lnTo>
+                <a:close/>
+                <a:lnTo>
+                  <a:pt x="129719" y="988415"/>
+                </a:lnTo>
+                <a:close/>
+                <a:lnTo>
+                  <a:pt x="133543" y="987645"/>
+                </a:lnTo>
+                <a:close/>
+                <a:lnTo>
+                  <a:pt x="137372" y="986852"/>
+                </a:lnTo>
+                <a:close/>
+                <a:lnTo>
+                  <a:pt x="141207" y="986036"/>
+                </a:lnTo>
+                <a:close/>
+                <a:lnTo>
+                  <a:pt x="145048" y="985194"/>
+                </a:lnTo>
+                <a:close/>
+                <a:lnTo>
+                  <a:pt x="148894" y="984329"/>
+                </a:lnTo>
+                <a:close/>
+                <a:lnTo>
+                  <a:pt x="152745" y="983439"/>
+                </a:lnTo>
+                <a:close/>
+                <a:lnTo>
+                  <a:pt x="156600" y="982524"/>
+                </a:lnTo>
+                <a:close/>
+                <a:lnTo>
+                  <a:pt x="160458" y="981585"/>
+                </a:lnTo>
+                <a:close/>
+                <a:lnTo>
+                  <a:pt x="164317" y="980622"/>
+                </a:lnTo>
+                <a:close/>
+                <a:lnTo>
+                  <a:pt x="168177" y="979633"/>
+                </a:lnTo>
+                <a:close/>
+                <a:lnTo>
+                  <a:pt x="172037" y="978621"/>
+                </a:lnTo>
+                <a:close/>
+                <a:lnTo>
+                  <a:pt x="175895" y="977583"/>
+                </a:lnTo>
+                <a:close/>
+                <a:lnTo>
+                  <a:pt x="179751" y="976521"/>
+                </a:lnTo>
+                <a:close/>
+                <a:lnTo>
+                  <a:pt x="183603" y="975435"/>
+                </a:lnTo>
+                <a:close/>
+                <a:lnTo>
+                  <a:pt x="187450" y="974323"/>
+                </a:lnTo>
+                <a:close/>
+                <a:lnTo>
+                  <a:pt x="191292" y="973188"/>
+                </a:lnTo>
+                <a:close/>
+                <a:lnTo>
+                  <a:pt x="195128" y="972027"/>
+                </a:lnTo>
+                <a:close/>
+                <a:lnTo>
+                  <a:pt x="198958" y="970842"/>
+                </a:lnTo>
+                <a:close/>
+                <a:lnTo>
+                  <a:pt x="202784" y="969634"/>
+                </a:lnTo>
+                <a:close/>
+                <a:lnTo>
+                  <a:pt x="206604" y="968403"/>
+                </a:lnTo>
+                <a:close/>
+                <a:lnTo>
+                  <a:pt x="210421" y="967149"/>
+                </a:lnTo>
+                <a:close/>
+                <a:lnTo>
+                  <a:pt x="214235" y="965874"/>
+                </a:lnTo>
+                <a:close/>
+                <a:lnTo>
+                  <a:pt x="218047" y="964577"/>
+                </a:lnTo>
+                <a:close/>
+                <a:lnTo>
+                  <a:pt x="221856" y="963259"/>
+                </a:lnTo>
+                <a:close/>
+                <a:lnTo>
+                  <a:pt x="225665" y="961920"/>
+                </a:lnTo>
+                <a:close/>
+                <a:lnTo>
+                  <a:pt x="229473" y="960562"/>
+                </a:lnTo>
+                <a:close/>
+                <a:lnTo>
+                  <a:pt x="233281" y="959184"/>
+                </a:lnTo>
+                <a:close/>
+                <a:lnTo>
+                  <a:pt x="237090" y="957787"/>
+                </a:lnTo>
+                <a:close/>
+                <a:lnTo>
+                  <a:pt x="240900" y="956372"/>
+                </a:lnTo>
+                <a:close/>
+                <a:lnTo>
+                  <a:pt x="244712" y="954939"/>
+                </a:lnTo>
+                <a:close/>
+                <a:lnTo>
+                  <a:pt x="248525" y="953486"/>
+                </a:lnTo>
+                <a:close/>
+                <a:lnTo>
+                  <a:pt x="252340" y="952013"/>
+                </a:lnTo>
+                <a:close/>
+                <a:lnTo>
+                  <a:pt x="256155" y="950520"/>
+                </a:lnTo>
+                <a:close/>
+                <a:lnTo>
+                  <a:pt x="259972" y="949005"/>
+                </a:lnTo>
+                <a:close/>
+                <a:lnTo>
+                  <a:pt x="263789" y="947468"/>
+                </a:lnTo>
+                <a:close/>
+                <a:lnTo>
+                  <a:pt x="267607" y="945909"/>
+                </a:lnTo>
+                <a:close/>
+                <a:lnTo>
+                  <a:pt x="271426" y="944327"/>
+                </a:lnTo>
+                <a:close/>
+                <a:lnTo>
+                  <a:pt x="275246" y="942720"/>
+                </a:lnTo>
+                <a:close/>
+                <a:lnTo>
+                  <a:pt x="279065" y="941089"/>
+                </a:lnTo>
+                <a:close/>
+                <a:lnTo>
+                  <a:pt x="282885" y="939433"/>
+                </a:lnTo>
+                <a:close/>
+                <a:lnTo>
+                  <a:pt x="286705" y="937751"/>
+                </a:lnTo>
+                <a:close/>
+                <a:lnTo>
+                  <a:pt x="290525" y="936043"/>
+                </a:lnTo>
+                <a:close/>
+                <a:lnTo>
+                  <a:pt x="294345" y="934310"/>
+                </a:lnTo>
+                <a:close/>
+                <a:lnTo>
+                  <a:pt x="298164" y="932551"/>
+                </a:lnTo>
+                <a:close/>
+                <a:lnTo>
+                  <a:pt x="301983" y="930769"/>
+                </a:lnTo>
+                <a:close/>
+                <a:lnTo>
+                  <a:pt x="305802" y="928963"/>
+                </a:lnTo>
+                <a:close/>
+                <a:lnTo>
+                  <a:pt x="309620" y="927134"/>
+                </a:lnTo>
+                <a:close/>
+                <a:lnTo>
+                  <a:pt x="313437" y="925283"/>
+                </a:lnTo>
+                <a:close/>
+                <a:lnTo>
+                  <a:pt x="317253" y="923411"/>
+                </a:lnTo>
+                <a:close/>
+                <a:lnTo>
+                  <a:pt x="321068" y="921518"/>
+                </a:lnTo>
+                <a:close/>
+                <a:lnTo>
+                  <a:pt x="324881" y="919605"/>
+                </a:lnTo>
+                <a:close/>
+                <a:lnTo>
+                  <a:pt x="328694" y="917673"/>
+                </a:lnTo>
+                <a:close/>
+                <a:lnTo>
+                  <a:pt x="332505" y="915723"/>
+                </a:lnTo>
+                <a:close/>
+                <a:lnTo>
+                  <a:pt x="336315" y="913754"/>
+                </a:lnTo>
+                <a:close/>
+                <a:lnTo>
+                  <a:pt x="340123" y="911767"/>
+                </a:lnTo>
+                <a:close/>
+                <a:lnTo>
+                  <a:pt x="343931" y="909762"/>
+                </a:lnTo>
+                <a:close/>
+                <a:lnTo>
+                  <a:pt x="347739" y="907736"/>
+                </a:lnTo>
+                <a:close/>
+                <a:lnTo>
+                  <a:pt x="351548" y="905690"/>
+                </a:lnTo>
+                <a:close/>
+                <a:lnTo>
+                  <a:pt x="355359" y="903623"/>
+                </a:lnTo>
+                <a:close/>
+                <a:lnTo>
+                  <a:pt x="359171" y="901534"/>
+                </a:lnTo>
+                <a:close/>
+                <a:lnTo>
+                  <a:pt x="362987" y="899423"/>
+                </a:lnTo>
+                <a:close/>
+                <a:lnTo>
+                  <a:pt x="366806" y="897289"/>
+                </a:lnTo>
+                <a:close/>
+                <a:lnTo>
+                  <a:pt x="370628" y="895131"/>
+                </a:lnTo>
+                <a:close/>
+                <a:lnTo>
+                  <a:pt x="374456" y="892948"/>
+                </a:lnTo>
+                <a:close/>
+                <a:lnTo>
+                  <a:pt x="378289" y="890740"/>
+                </a:lnTo>
+                <a:close/>
+                <a:lnTo>
+                  <a:pt x="382128" y="888506"/>
+                </a:lnTo>
+                <a:close/>
+                <a:lnTo>
+                  <a:pt x="385973" y="886246"/>
+                </a:lnTo>
+                <a:close/>
+                <a:lnTo>
+                  <a:pt x="389823" y="883961"/>
+                </a:lnTo>
+                <a:close/>
+                <a:lnTo>
+                  <a:pt x="393677" y="881651"/>
+                </a:lnTo>
+                <a:close/>
+                <a:lnTo>
+                  <a:pt x="397534" y="879316"/>
+                </a:lnTo>
+                <a:close/>
+                <a:lnTo>
+                  <a:pt x="401393" y="876958"/>
+                </a:lnTo>
+                <a:close/>
+                <a:lnTo>
+                  <a:pt x="405253" y="874578"/>
+                </a:lnTo>
+                <a:close/>
+                <a:lnTo>
+                  <a:pt x="409113" y="872175"/>
+                </a:lnTo>
+                <a:close/>
+                <a:lnTo>
+                  <a:pt x="412971" y="869750"/>
+                </a:lnTo>
+                <a:close/>
+                <a:lnTo>
+                  <a:pt x="416828" y="867305"/>
+                </a:lnTo>
+                <a:close/>
+                <a:lnTo>
+                  <a:pt x="420681" y="864839"/>
+                </a:lnTo>
+                <a:close/>
+                <a:lnTo>
+                  <a:pt x="424530" y="862354"/>
+                </a:lnTo>
+                <a:close/>
+                <a:lnTo>
+                  <a:pt x="428374" y="859850"/>
+                </a:lnTo>
+                <a:close/>
+                <a:lnTo>
+                  <a:pt x="432211" y="857328"/>
+                </a:lnTo>
+                <a:close/>
+                <a:lnTo>
+                  <a:pt x="436043" y="854787"/>
+                </a:lnTo>
+                <a:close/>
+                <a:lnTo>
+                  <a:pt x="439869" y="852227"/>
+                </a:lnTo>
+                <a:close/>
+                <a:lnTo>
+                  <a:pt x="443691" y="849647"/>
+                </a:lnTo>
+                <a:close/>
+                <a:lnTo>
+                  <a:pt x="447509" y="847047"/>
+                </a:lnTo>
+                <a:close/>
+                <a:lnTo>
+                  <a:pt x="451324" y="844426"/>
+                </a:lnTo>
+                <a:close/>
+                <a:lnTo>
+                  <a:pt x="455136" y="841784"/>
+                </a:lnTo>
+                <a:close/>
+                <a:lnTo>
+                  <a:pt x="458946" y="839121"/>
+                </a:lnTo>
+                <a:close/>
+                <a:lnTo>
+                  <a:pt x="462755" y="836434"/>
+                </a:lnTo>
+                <a:close/>
+                <a:lnTo>
+                  <a:pt x="466563" y="833725"/>
+                </a:lnTo>
+                <a:close/>
+                <a:lnTo>
+                  <a:pt x="470371" y="830993"/>
+                </a:lnTo>
+                <a:close/>
+                <a:lnTo>
+                  <a:pt x="474180" y="828237"/>
+                </a:lnTo>
+                <a:close/>
+                <a:lnTo>
+                  <a:pt x="477990" y="825456"/>
+                </a:lnTo>
+                <a:close/>
+                <a:lnTo>
+                  <a:pt x="481802" y="822650"/>
+                </a:lnTo>
+                <a:close/>
+                <a:lnTo>
+                  <a:pt x="485615" y="819820"/>
+                </a:lnTo>
+                <a:close/>
+                <a:lnTo>
+                  <a:pt x="489430" y="816965"/>
+                </a:lnTo>
+                <a:close/>
+                <a:lnTo>
+                  <a:pt x="493246" y="814085"/>
+                </a:lnTo>
+                <a:close/>
+                <a:lnTo>
+                  <a:pt x="497063" y="811181"/>
+                </a:lnTo>
+                <a:close/>
+                <a:lnTo>
+                  <a:pt x="500880" y="808252"/>
+                </a:lnTo>
+                <a:close/>
+                <a:lnTo>
+                  <a:pt x="504698" y="805299"/>
+                </a:lnTo>
+                <a:close/>
+                <a:lnTo>
+                  <a:pt x="508517" y="802322"/>
+                </a:lnTo>
+                <a:close/>
+                <a:lnTo>
+                  <a:pt x="512336" y="799320"/>
+                </a:lnTo>
+                <a:close/>
+                <a:lnTo>
+                  <a:pt x="516155" y="796294"/>
+                </a:lnTo>
+                <a:close/>
+                <a:lnTo>
+                  <a:pt x="519973" y="793244"/>
+                </a:lnTo>
+                <a:close/>
+                <a:lnTo>
+                  <a:pt x="523792" y="790170"/>
+                </a:lnTo>
+                <a:close/>
+                <a:lnTo>
+                  <a:pt x="527610" y="787072"/>
+                </a:lnTo>
+                <a:close/>
+                <a:lnTo>
+                  <a:pt x="531428" y="783950"/>
+                </a:lnTo>
+                <a:close/>
+                <a:lnTo>
+                  <a:pt x="535246" y="780805"/>
+                </a:lnTo>
+                <a:close/>
+                <a:lnTo>
+                  <a:pt x="539063" y="777636"/>
+                </a:lnTo>
+                <a:close/>
+                <a:lnTo>
+                  <a:pt x="542880" y="774445"/>
+                </a:lnTo>
+                <a:close/>
+                <a:lnTo>
+                  <a:pt x="546696" y="771231"/>
+                </a:lnTo>
+                <a:close/>
+                <a:lnTo>
+                  <a:pt x="550513" y="767994"/>
+                </a:lnTo>
+                <a:close/>
+                <a:lnTo>
+                  <a:pt x="554329" y="764736"/>
+                </a:lnTo>
+                <a:close/>
+                <a:lnTo>
+                  <a:pt x="558145" y="761456"/>
+                </a:lnTo>
+                <a:close/>
+                <a:lnTo>
+                  <a:pt x="561961" y="758154"/>
+                </a:lnTo>
+                <a:close/>
+                <a:lnTo>
+                  <a:pt x="565776" y="754831"/>
+                </a:lnTo>
+                <a:close/>
+                <a:lnTo>
+                  <a:pt x="569592" y="751487"/>
+                </a:lnTo>
+                <a:close/>
+                <a:lnTo>
+                  <a:pt x="573408" y="748123"/>
+                </a:lnTo>
+                <a:close/>
+                <a:lnTo>
+                  <a:pt x="577224" y="744738"/>
+                </a:lnTo>
+                <a:close/>
+                <a:lnTo>
+                  <a:pt x="581039" y="741333"/>
+                </a:lnTo>
+                <a:close/>
+                <a:lnTo>
+                  <a:pt x="584855" y="737908"/>
+                </a:lnTo>
+                <a:close/>
+                <a:lnTo>
+                  <a:pt x="588671" y="734464"/>
+                </a:lnTo>
+                <a:close/>
+                <a:lnTo>
+                  <a:pt x="592487" y="730999"/>
+                </a:lnTo>
+                <a:close/>
+                <a:lnTo>
+                  <a:pt x="596304" y="727516"/>
+                </a:lnTo>
+                <a:close/>
+                <a:lnTo>
+                  <a:pt x="600120" y="724014"/>
+                </a:lnTo>
+                <a:close/>
+                <a:lnTo>
+                  <a:pt x="603937" y="720492"/>
+                </a:lnTo>
+                <a:close/>
+                <a:lnTo>
+                  <a:pt x="607754" y="716953"/>
+                </a:lnTo>
+                <a:close/>
+                <a:lnTo>
+                  <a:pt x="611572" y="713394"/>
+                </a:lnTo>
+                <a:close/>
+                <a:lnTo>
+                  <a:pt x="615390" y="709818"/>
+                </a:lnTo>
+                <a:close/>
+                <a:lnTo>
+                  <a:pt x="619208" y="706224"/>
+                </a:lnTo>
+                <a:close/>
+                <a:lnTo>
+                  <a:pt x="623027" y="702611"/>
+                </a:lnTo>
+                <a:close/>
+                <a:lnTo>
+                  <a:pt x="626845" y="698980"/>
+                </a:lnTo>
+                <a:close/>
+                <a:lnTo>
+                  <a:pt x="630664" y="695329"/>
+                </a:lnTo>
+                <a:close/>
+                <a:lnTo>
+                  <a:pt x="634483" y="691656"/>
+                </a:lnTo>
+                <a:close/>
+                <a:lnTo>
+                  <a:pt x="638302" y="687961"/>
+                </a:lnTo>
+                <a:close/>
+                <a:lnTo>
+                  <a:pt x="642120" y="684243"/>
+                </a:lnTo>
+                <a:close/>
+                <a:lnTo>
+                  <a:pt x="645937" y="680499"/>
+                </a:lnTo>
+                <a:close/>
+                <a:lnTo>
+                  <a:pt x="649754" y="676730"/>
+                </a:lnTo>
+                <a:close/>
+                <a:lnTo>
+                  <a:pt x="653570" y="672933"/>
+                </a:lnTo>
+                <a:close/>
+                <a:lnTo>
+                  <a:pt x="657385" y="669108"/>
+                </a:lnTo>
+                <a:close/>
+                <a:lnTo>
+                  <a:pt x="661198" y="665253"/>
+                </a:lnTo>
+                <a:close/>
+                <a:lnTo>
+                  <a:pt x="665010" y="661368"/>
+                </a:lnTo>
+                <a:close/>
+                <a:lnTo>
+                  <a:pt x="668820" y="657450"/>
+                </a:lnTo>
+                <a:close/>
+                <a:lnTo>
+                  <a:pt x="672629" y="653502"/>
+                </a:lnTo>
+                <a:close/>
+                <a:lnTo>
+                  <a:pt x="676437" y="649523"/>
+                </a:lnTo>
+                <a:close/>
+                <a:lnTo>
+                  <a:pt x="680245" y="645517"/>
+                </a:lnTo>
+                <a:close/>
+                <a:lnTo>
+                  <a:pt x="684054" y="641484"/>
+                </a:lnTo>
+                <a:close/>
+                <a:lnTo>
+                  <a:pt x="687864" y="637426"/>
+                </a:lnTo>
+                <a:close/>
+                <a:lnTo>
+                  <a:pt x="691676" y="633345"/>
+                </a:lnTo>
+                <a:close/>
+                <a:lnTo>
+                  <a:pt x="695491" y="629242"/>
+                </a:lnTo>
+                <a:close/>
+                <a:lnTo>
+                  <a:pt x="699309" y="625120"/>
+                </a:lnTo>
+                <a:close/>
+                <a:lnTo>
+                  <a:pt x="703131" y="620980"/>
+                </a:lnTo>
+                <a:close/>
+                <a:lnTo>
+                  <a:pt x="706957" y="616823"/>
+                </a:lnTo>
+                <a:close/>
+                <a:lnTo>
+                  <a:pt x="710789" y="612651"/>
+                </a:lnTo>
+                <a:close/>
+                <a:lnTo>
+                  <a:pt x="714626" y="608466"/>
+                </a:lnTo>
+                <a:close/>
+                <a:lnTo>
+                  <a:pt x="718470" y="604269"/>
+                </a:lnTo>
+                <a:close/>
+                <a:lnTo>
+                  <a:pt x="722319" y="600059"/>
+                </a:lnTo>
+                <a:close/>
+                <a:lnTo>
+                  <a:pt x="726172" y="595835"/>
+                </a:lnTo>
+                <a:close/>
+                <a:lnTo>
+                  <a:pt x="730029" y="591595"/>
+                </a:lnTo>
+                <a:close/>
+                <a:lnTo>
+                  <a:pt x="733887" y="587339"/>
+                </a:lnTo>
+                <a:close/>
+                <a:lnTo>
+                  <a:pt x="737747" y="583064"/>
+                </a:lnTo>
+                <a:close/>
+                <a:lnTo>
+                  <a:pt x="741607" y="578771"/>
+                </a:lnTo>
+                <a:close/>
+                <a:lnTo>
+                  <a:pt x="745466" y="574457"/>
+                </a:lnTo>
+                <a:close/>
+                <a:lnTo>
+                  <a:pt x="749323" y="570121"/>
+                </a:lnTo>
+                <a:close/>
+                <a:lnTo>
+                  <a:pt x="753177" y="565763"/>
+                </a:lnTo>
+                <a:close/>
+                <a:lnTo>
+                  <a:pt x="757027" y="561380"/>
+                </a:lnTo>
+                <a:close/>
+                <a:lnTo>
+                  <a:pt x="760872" y="556973"/>
+                </a:lnTo>
+                <a:close/>
+                <a:lnTo>
+                  <a:pt x="764711" y="552539"/>
+                </a:lnTo>
+                <a:close/>
+                <a:lnTo>
+                  <a:pt x="768544" y="548078"/>
+                </a:lnTo>
+                <a:close/>
+                <a:lnTo>
+                  <a:pt x="772372" y="543592"/>
+                </a:lnTo>
+                <a:close/>
+                <a:lnTo>
+                  <a:pt x="776194" y="539079"/>
+                </a:lnTo>
+                <a:close/>
+                <a:lnTo>
+                  <a:pt x="780013" y="534541"/>
+                </a:lnTo>
+                <a:close/>
+                <a:lnTo>
+                  <a:pt x="783829" y="529978"/>
+                </a:lnTo>
+                <a:close/>
+                <a:lnTo>
+                  <a:pt x="787641" y="525389"/>
+                </a:lnTo>
+                <a:close/>
+                <a:lnTo>
+                  <a:pt x="791452" y="520777"/>
+                </a:lnTo>
+                <a:close/>
+                <a:lnTo>
+                  <a:pt x="795261" y="516140"/>
+                </a:lnTo>
+                <a:close/>
+                <a:lnTo>
+                  <a:pt x="799069" y="511480"/>
+                </a:lnTo>
+                <a:close/>
+                <a:lnTo>
+                  <a:pt x="802877" y="506796"/>
+                </a:lnTo>
+                <a:close/>
+                <a:lnTo>
+                  <a:pt x="806685" y="502090"/>
+                </a:lnTo>
+                <a:close/>
+                <a:lnTo>
+                  <a:pt x="810495" y="497361"/>
+                </a:lnTo>
+                <a:close/>
+                <a:lnTo>
+                  <a:pt x="814306" y="492609"/>
+                </a:lnTo>
+                <a:close/>
+                <a:lnTo>
+                  <a:pt x="818119" y="487835"/>
+                </a:lnTo>
+                <a:close/>
+                <a:lnTo>
+                  <a:pt x="821932" y="483038"/>
+                </a:lnTo>
+                <a:close/>
+                <a:lnTo>
+                  <a:pt x="825747" y="478218"/>
+                </a:lnTo>
+                <a:close/>
+                <a:lnTo>
+                  <a:pt x="829563" y="473374"/>
+                </a:lnTo>
+                <a:close/>
+                <a:lnTo>
+                  <a:pt x="833380" y="468507"/>
+                </a:lnTo>
+                <a:close/>
+                <a:lnTo>
+                  <a:pt x="837198" y="463616"/>
+                </a:lnTo>
+                <a:close/>
+                <a:lnTo>
+                  <a:pt x="841017" y="458702"/>
+                </a:lnTo>
+                <a:close/>
+                <a:lnTo>
+                  <a:pt x="844836" y="453763"/>
+                </a:lnTo>
+                <a:close/>
+                <a:lnTo>
+                  <a:pt x="848655" y="448799"/>
+                </a:lnTo>
+                <a:close/>
+                <a:lnTo>
+                  <a:pt x="852475" y="443811"/>
+                </a:lnTo>
+                <a:close/>
+                <a:lnTo>
+                  <a:pt x="856295" y="438797"/>
+                </a:lnTo>
+                <a:close/>
+                <a:lnTo>
+                  <a:pt x="860115" y="433759"/>
+                </a:lnTo>
+                <a:close/>
+                <a:lnTo>
+                  <a:pt x="863935" y="428696"/>
+                </a:lnTo>
+                <a:close/>
+                <a:lnTo>
+                  <a:pt x="867754" y="423608"/>
+                </a:lnTo>
+                <a:close/>
+                <a:lnTo>
+                  <a:pt x="871574" y="418497"/>
+                </a:lnTo>
+                <a:close/>
+                <a:lnTo>
+                  <a:pt x="875393" y="413363"/>
+                </a:lnTo>
+                <a:close/>
+                <a:lnTo>
+                  <a:pt x="879211" y="408206"/>
+                </a:lnTo>
+                <a:close/>
+                <a:lnTo>
+                  <a:pt x="883028" y="403028"/>
+                </a:lnTo>
+                <a:close/>
+                <a:lnTo>
+                  <a:pt x="886845" y="397828"/>
+                </a:lnTo>
+                <a:close/>
+                <a:lnTo>
+                  <a:pt x="890660" y="392607"/>
+                </a:lnTo>
+                <a:close/>
+                <a:lnTo>
+                  <a:pt x="894475" y="387366"/>
+                </a:lnTo>
+                <a:close/>
+                <a:lnTo>
+                  <a:pt x="898288" y="382105"/>
+                </a:lnTo>
+                <a:close/>
+                <a:lnTo>
+                  <a:pt x="902100" y="376826"/>
+                </a:lnTo>
+                <a:close/>
+                <a:lnTo>
+                  <a:pt x="905910" y="371528"/>
+                </a:lnTo>
+                <a:close/>
+                <a:lnTo>
+                  <a:pt x="909719" y="366212"/>
+                </a:lnTo>
+                <a:close/>
+                <a:lnTo>
+                  <a:pt x="913527" y="360876"/>
+                </a:lnTo>
+                <a:close/>
+                <a:lnTo>
+                  <a:pt x="917335" y="355522"/>
+                </a:lnTo>
+                <a:close/>
+                <a:lnTo>
+                  <a:pt x="921144" y="350147"/>
+                </a:lnTo>
+                <a:close/>
+                <a:lnTo>
+                  <a:pt x="924953" y="344751"/>
+                </a:lnTo>
+                <a:close/>
+                <a:lnTo>
+                  <a:pt x="928765" y="339334"/>
+                </a:lnTo>
+                <a:close/>
+                <a:lnTo>
+                  <a:pt x="932579" y="333894"/>
+                </a:lnTo>
+                <a:close/>
+                <a:lnTo>
+                  <a:pt x="936396" y="328431"/>
+                </a:lnTo>
+                <a:close/>
+                <a:lnTo>
+                  <a:pt x="940216" y="322945"/>
+                </a:lnTo>
+                <a:close/>
+                <a:lnTo>
+                  <a:pt x="944042" y="317435"/>
+                </a:lnTo>
+                <a:close/>
+                <a:lnTo>
+                  <a:pt x="947872" y="311900"/>
+                </a:lnTo>
+                <a:close/>
+                <a:lnTo>
+                  <a:pt x="951708" y="306339"/>
+                </a:lnTo>
+                <a:close/>
+                <a:lnTo>
+                  <a:pt x="955550" y="300752"/>
+                </a:lnTo>
+                <a:close/>
+                <a:lnTo>
+                  <a:pt x="959397" y="295139"/>
+                </a:lnTo>
+                <a:close/>
+                <a:lnTo>
+                  <a:pt x="963249" y="289501"/>
+                </a:lnTo>
+                <a:close/>
+                <a:lnTo>
+                  <a:pt x="967105" y="283839"/>
+                </a:lnTo>
+                <a:close/>
+                <a:lnTo>
+                  <a:pt x="970963" y="278153"/>
+                </a:lnTo>
+                <a:close/>
+                <a:lnTo>
+                  <a:pt x="974823" y="272443"/>
+                </a:lnTo>
+                <a:close/>
+                <a:lnTo>
+                  <a:pt x="978683" y="266712"/>
+                </a:lnTo>
+                <a:close/>
+                <a:lnTo>
+                  <a:pt x="982542" y="260958"/>
+                </a:lnTo>
+                <a:close/>
+                <a:lnTo>
+                  <a:pt x="986400" y="255184"/>
+                </a:lnTo>
+                <a:close/>
+                <a:lnTo>
+                  <a:pt x="990255" y="249389"/>
+                </a:lnTo>
+                <a:close/>
+                <a:lnTo>
+                  <a:pt x="994106" y="243575"/>
+                </a:lnTo>
+                <a:close/>
+                <a:lnTo>
+                  <a:pt x="997952" y="237741"/>
+                </a:lnTo>
+                <a:close/>
+                <a:lnTo>
+                  <a:pt x="1001793" y="231890"/>
+                </a:lnTo>
+                <a:close/>
+                <a:lnTo>
+                  <a:pt x="1005628" y="226020"/>
+                </a:lnTo>
+                <a:close/>
+                <a:lnTo>
+                  <a:pt x="1009457" y="220131"/>
+                </a:lnTo>
+                <a:close/>
+                <a:lnTo>
+                  <a:pt x="1013281" y="214223"/>
+                </a:lnTo>
+                <a:close/>
+                <a:lnTo>
+                  <a:pt x="1017101" y="208295"/>
+                </a:lnTo>
+                <a:close/>
+                <a:lnTo>
+                  <a:pt x="1020917" y="202346"/>
+                </a:lnTo>
+                <a:close/>
+                <a:lnTo>
+                  <a:pt x="1024731" y="196376"/>
+                </a:lnTo>
+                <a:close/>
+                <a:lnTo>
+                  <a:pt x="1028542" y="190384"/>
+                </a:lnTo>
+                <a:close/>
+                <a:lnTo>
+                  <a:pt x="1032351" y="184369"/>
+                </a:lnTo>
+                <a:close/>
+                <a:lnTo>
+                  <a:pt x="1036160" y="178331"/>
+                </a:lnTo>
+                <a:close/>
+                <a:lnTo>
+                  <a:pt x="1039968" y="172270"/>
+                </a:lnTo>
+                <a:close/>
+                <a:lnTo>
+                  <a:pt x="1043776" y="166184"/>
+                </a:lnTo>
+                <a:close/>
+                <a:lnTo>
+                  <a:pt x="1047585" y="160073"/>
+                </a:lnTo>
+                <a:close/>
+                <a:lnTo>
+                  <a:pt x="1051396" y="153937"/>
+                </a:lnTo>
+                <a:close/>
+                <a:lnTo>
+                  <a:pt x="1055208" y="147775"/>
+                </a:lnTo>
+                <a:close/>
+                <a:lnTo>
+                  <a:pt x="1059021" y="141588"/>
+                </a:lnTo>
+                <a:close/>
+                <a:lnTo>
+                  <a:pt x="1062836" y="135377"/>
+                </a:lnTo>
+                <a:close/>
+                <a:lnTo>
+                  <a:pt x="1066652" y="129141"/>
+                </a:lnTo>
+                <a:close/>
+                <a:lnTo>
+                  <a:pt x="1070468" y="122882"/>
+                </a:lnTo>
+                <a:close/>
+                <a:lnTo>
+                  <a:pt x="1074286" y="116600"/>
+                </a:lnTo>
+                <a:close/>
+                <a:lnTo>
+                  <a:pt x="1078104" y="110295"/>
+                </a:lnTo>
+                <a:close/>
+                <a:lnTo>
+                  <a:pt x="1081923" y="103967"/>
+                </a:lnTo>
+                <a:close/>
+                <a:lnTo>
+                  <a:pt x="1085742" y="97617"/>
+                </a:lnTo>
+                <a:close/>
+                <a:lnTo>
+                  <a:pt x="1089562" y="91246"/>
+                </a:lnTo>
+                <a:close/>
+                <a:lnTo>
+                  <a:pt x="1093382" y="84853"/>
+                </a:lnTo>
+                <a:close/>
+                <a:lnTo>
+                  <a:pt x="1097202" y="78439"/>
+                </a:lnTo>
+                <a:close/>
+                <a:lnTo>
+                  <a:pt x="1101022" y="72005"/>
+                </a:lnTo>
+                <a:close/>
+                <a:lnTo>
+                  <a:pt x="1104842" y="65551"/>
+                </a:lnTo>
+                <a:close/>
+                <a:lnTo>
+                  <a:pt x="1108661" y="59078"/>
+                </a:lnTo>
+                <a:close/>
+                <a:lnTo>
+                  <a:pt x="1112480" y="52585"/>
+                </a:lnTo>
+                <a:close/>
+                <a:lnTo>
+                  <a:pt x="1116298" y="46073"/>
+                </a:lnTo>
+                <a:close/>
+                <a:lnTo>
+                  <a:pt x="1120116" y="39543"/>
+                </a:lnTo>
+                <a:close/>
+                <a:lnTo>
+                  <a:pt x="1123933" y="32995"/>
+                </a:lnTo>
+                <a:close/>
+                <a:lnTo>
+                  <a:pt x="1127749" y="26430"/>
+                </a:lnTo>
+                <a:close/>
+                <a:lnTo>
+                  <a:pt x="1131563" y="19847"/>
+                </a:lnTo>
+                <a:close/>
+                <a:lnTo>
+                  <a:pt x="1135377" y="13247"/>
+                </a:lnTo>
+                <a:close/>
+                <a:lnTo>
+                  <a:pt x="1139189" y="6632"/>
+                </a:lnTo>
+                <a:close/>
+                <a:lnTo>
+                  <a:pt x="1143000" y="0"/>
                 </a:lnTo>
                 <a:close/>
               </a:path>
@@ -5638,7 +5638,7 @@
           </a:custGeom>
           <a:ln w="31750">
             <a:solidFill>
-              <a:srgbClr val="FFFFFF"/>
+              <a:srgbClr val="000000"/>
             </a:solidFill>
           </a:ln>
         </p:spPr>
@@ -5672,8 +5672,8 @@
         </p:nvCxnSpPr>
         <p:spPr>
           <a:xfrm flipV="1">
-            <a:off x="6172200.0" y="742950.0"/>
-            <a:ext cx="0.0" cy="1828800.0"/>
+            <a:off x="5943600.0" y="1004468.4000000001"/>
+            <a:ext cx="0.0" cy="652881.5999999999"/>
           </a:xfrm>
           <a:prstGeom prst="line">
             <a:avLst/>
@@ -5708,8 +5708,8 @@
         </p:nvSpPr>
         <p:spPr>
           <a:xfrm>
-            <a:off x="6121400" y="692150"/>
-            <a:ext cx="101600" cy="101600"/>
+            <a:off x="5867400" y="928268"/>
+            <a:ext cx="152400" cy="152400"/>
           </a:xfrm>
           <a:prstGeom prst="ellipse">
             <a:avLst/>
@@ -5753,8 +5753,8 @@
         </p:nvSpPr>
         <p:spPr>
           <a:xfrm>
-            <a:off x="6121400" y="1240790"/>
-            <a:ext cx="101600" cy="101600"/>
+            <a:off x="5867400" y="1581150"/>
+            <a:ext cx="152400" cy="152400"/>
           </a:xfrm>
           <a:prstGeom prst="ellipse">
             <a:avLst/>
@@ -5798,8 +5798,8 @@
         </p:nvSpPr>
         <p:spPr>
           <a:xfrm>
-            <a:off x="5486400" y="743864"/>
-            <a:ext cx="640080" cy="427940"/>
+            <a:off x="5257800" y="1025042"/>
+            <a:ext cx="594360" cy="341529"/>
           </a:xfrm>
           <a:custGeom>
             <a:avLst/>
@@ -5808,404 +5808,404 @@
             <a:cxnLst/>
             <a:rect l="l" t="t" r="r" b="b"/>
             <a:pathLst>
-              <a:path w="640080" h="427940">
+              <a:path w="594360" h="341529">
                 <a:moveTo>
-                  <a:pt x="0" y="427940"/>
+                  <a:pt x="0" y="341529"/>
                 </a:moveTo>
                 <a:lnTo>
-                  <a:pt x="6465" y="422805"/>
-                </a:lnTo>
-                <a:close/>
-                <a:lnTo>
-                  <a:pt x="12931" y="417752"/>
-                </a:lnTo>
-                <a:close/>
-                <a:lnTo>
-                  <a:pt x="19396" y="412762"/>
-                </a:lnTo>
-                <a:close/>
-                <a:lnTo>
-                  <a:pt x="25862" y="407818"/>
-                </a:lnTo>
-                <a:close/>
-                <a:lnTo>
-                  <a:pt x="32327" y="402902"/>
-                </a:lnTo>
-                <a:close/>
-                <a:lnTo>
-                  <a:pt x="38793" y="397998"/>
-                </a:lnTo>
-                <a:close/>
-                <a:lnTo>
-                  <a:pt x="45258" y="393087"/>
-                </a:lnTo>
-                <a:close/>
-                <a:lnTo>
-                  <a:pt x="51724" y="388157"/>
-                </a:lnTo>
-                <a:close/>
-                <a:lnTo>
-                  <a:pt x="58189" y="383226"/>
-                </a:lnTo>
-                <a:close/>
-                <a:lnTo>
-                  <a:pt x="64655" y="378319"/>
-                </a:lnTo>
-                <a:close/>
-                <a:lnTo>
-                  <a:pt x="71120" y="373460"/>
-                </a:lnTo>
-                <a:close/>
-                <a:lnTo>
-                  <a:pt x="77585" y="368656"/>
-                </a:lnTo>
-                <a:close/>
-                <a:lnTo>
-                  <a:pt x="84051" y="363885"/>
-                </a:lnTo>
-                <a:close/>
-                <a:lnTo>
-                  <a:pt x="90516" y="359126"/>
-                </a:lnTo>
-                <a:close/>
-                <a:lnTo>
-                  <a:pt x="96982" y="354357"/>
-                </a:lnTo>
-                <a:close/>
-                <a:lnTo>
-                  <a:pt x="103447" y="349576"/>
-                </a:lnTo>
-                <a:close/>
-                <a:lnTo>
-                  <a:pt x="109913" y="344784"/>
-                </a:lnTo>
-                <a:close/>
-                <a:lnTo>
-                  <a:pt x="116378" y="339986"/>
-                </a:lnTo>
-                <a:close/>
-                <a:lnTo>
-                  <a:pt x="122844" y="335186"/>
-                </a:lnTo>
-                <a:close/>
-                <a:lnTo>
-                  <a:pt x="129309" y="330396"/>
-                </a:lnTo>
-                <a:close/>
-                <a:lnTo>
-                  <a:pt x="135775" y="325630"/>
-                </a:lnTo>
-                <a:close/>
-                <a:lnTo>
-                  <a:pt x="142240" y="320898"/>
-                </a:lnTo>
-                <a:close/>
-                <a:lnTo>
-                  <a:pt x="148705" y="316212"/>
-                </a:lnTo>
-                <a:close/>
-                <a:lnTo>
-                  <a:pt x="155171" y="311582"/>
-                </a:lnTo>
-                <a:close/>
-                <a:lnTo>
-                  <a:pt x="161636" y="307019"/>
-                </a:lnTo>
-                <a:close/>
-                <a:lnTo>
-                  <a:pt x="168102" y="302512"/>
-                </a:lnTo>
-                <a:close/>
-                <a:lnTo>
-                  <a:pt x="174567" y="298012"/>
-                </a:lnTo>
-                <a:close/>
-                <a:lnTo>
-                  <a:pt x="181033" y="293466"/>
-                </a:lnTo>
-                <a:close/>
-                <a:lnTo>
-                  <a:pt x="187498" y="288828"/>
-                </a:lnTo>
-                <a:close/>
-                <a:lnTo>
-                  <a:pt x="193964" y="284132"/>
-                </a:lnTo>
-                <a:close/>
-                <a:lnTo>
-                  <a:pt x="200429" y="279458"/>
-                </a:lnTo>
-                <a:close/>
-                <a:lnTo>
-                  <a:pt x="206895" y="274887"/>
-                </a:lnTo>
-                <a:close/>
-                <a:lnTo>
-                  <a:pt x="213360" y="270455"/>
-                </a:lnTo>
-                <a:close/>
-                <a:lnTo>
-                  <a:pt x="219825" y="266095"/>
-                </a:lnTo>
-                <a:close/>
-                <a:lnTo>
-                  <a:pt x="226291" y="261726"/>
-                </a:lnTo>
-                <a:close/>
-                <a:lnTo>
-                  <a:pt x="232756" y="257271"/>
-                </a:lnTo>
-                <a:close/>
-                <a:lnTo>
-                  <a:pt x="239222" y="252736"/>
-                </a:lnTo>
-                <a:close/>
-                <a:lnTo>
-                  <a:pt x="245687" y="248180"/>
-                </a:lnTo>
-                <a:close/>
-                <a:lnTo>
-                  <a:pt x="252153" y="243665"/>
-                </a:lnTo>
-                <a:close/>
-                <a:lnTo>
-                  <a:pt x="258618" y="239230"/>
-                </a:lnTo>
-                <a:close/>
-                <a:lnTo>
-                  <a:pt x="265084" y="234847"/>
-                </a:lnTo>
-                <a:close/>
-                <a:lnTo>
-                  <a:pt x="271549" y="230478"/>
-                </a:lnTo>
-                <a:close/>
-                <a:lnTo>
-                  <a:pt x="278015" y="226087"/>
-                </a:lnTo>
-                <a:close/>
-                <a:lnTo>
-                  <a:pt x="284480" y="221673"/>
-                </a:lnTo>
-                <a:close/>
-                <a:lnTo>
-                  <a:pt x="290945" y="217268"/>
-                </a:lnTo>
-                <a:close/>
-                <a:lnTo>
-                  <a:pt x="297411" y="212901"/>
-                </a:lnTo>
-                <a:close/>
-                <a:lnTo>
-                  <a:pt x="303876" y="208593"/>
-                </a:lnTo>
-                <a:close/>
-                <a:lnTo>
-                  <a:pt x="310342" y="204330"/>
-                </a:lnTo>
-                <a:close/>
-                <a:lnTo>
-                  <a:pt x="316807" y="200088"/>
-                </a:lnTo>
-                <a:close/>
-                <a:lnTo>
-                  <a:pt x="323273" y="195844"/>
-                </a:lnTo>
-                <a:close/>
-                <a:lnTo>
-                  <a:pt x="329738" y="191587"/>
-                </a:lnTo>
-                <a:close/>
-                <a:lnTo>
-                  <a:pt x="336204" y="187317"/>
-                </a:lnTo>
-                <a:close/>
-                <a:lnTo>
-                  <a:pt x="342669" y="183034"/>
-                </a:lnTo>
-                <a:close/>
-                <a:lnTo>
-                  <a:pt x="349135" y="178742"/>
-                </a:lnTo>
-                <a:close/>
-                <a:lnTo>
-                  <a:pt x="355600" y="174458"/>
-                </a:lnTo>
-                <a:close/>
-                <a:lnTo>
-                  <a:pt x="362065" y="170203"/>
-                </a:lnTo>
-                <a:close/>
-                <a:lnTo>
-                  <a:pt x="368531" y="165997"/>
-                </a:lnTo>
-                <a:close/>
-                <a:lnTo>
-                  <a:pt x="374996" y="161841"/>
-                </a:lnTo>
-                <a:close/>
-                <a:lnTo>
-                  <a:pt x="381462" y="157717"/>
-                </a:lnTo>
-                <a:close/>
-                <a:lnTo>
-                  <a:pt x="387927" y="153603"/>
-                </a:lnTo>
-                <a:close/>
-                <a:lnTo>
-                  <a:pt x="394393" y="149482"/>
-                </a:lnTo>
-                <a:close/>
-                <a:lnTo>
-                  <a:pt x="400858" y="145349"/>
-                </a:lnTo>
-                <a:close/>
-                <a:lnTo>
-                  <a:pt x="407324" y="141203"/>
-                </a:lnTo>
-                <a:close/>
-                <a:lnTo>
-                  <a:pt x="413789" y="137046"/>
-                </a:lnTo>
-                <a:close/>
-                <a:lnTo>
-                  <a:pt x="420255" y="132884"/>
-                </a:lnTo>
-                <a:close/>
-                <a:lnTo>
-                  <a:pt x="426720" y="128739"/>
-                </a:lnTo>
-                <a:close/>
-                <a:lnTo>
-                  <a:pt x="433185" y="124630"/>
-                </a:lnTo>
-                <a:close/>
-                <a:lnTo>
-                  <a:pt x="439651" y="120574"/>
-                </a:lnTo>
-                <a:close/>
-                <a:lnTo>
-                  <a:pt x="446116" y="116563"/>
-                </a:lnTo>
-                <a:close/>
-                <a:lnTo>
-                  <a:pt x="452582" y="112574"/>
-                </a:lnTo>
-                <a:close/>
-                <a:lnTo>
-                  <a:pt x="459047" y="108589"/>
-                </a:lnTo>
-                <a:close/>
-                <a:lnTo>
-                  <a:pt x="465513" y="104592"/>
-                </a:lnTo>
-                <a:close/>
-                <a:lnTo>
-                  <a:pt x="471978" y="100584"/>
-                </a:lnTo>
-                <a:close/>
-                <a:lnTo>
-                  <a:pt x="478444" y="96562"/>
-                </a:lnTo>
-                <a:close/>
-                <a:lnTo>
-                  <a:pt x="484909" y="92530"/>
-                </a:lnTo>
-                <a:close/>
-                <a:lnTo>
-                  <a:pt x="491375" y="88501"/>
-                </a:lnTo>
-                <a:close/>
-                <a:lnTo>
-                  <a:pt x="497840" y="84497"/>
-                </a:lnTo>
-                <a:close/>
-                <a:lnTo>
-                  <a:pt x="504305" y="80539"/>
-                </a:lnTo>
-                <a:close/>
-                <a:lnTo>
-                  <a:pt x="510771" y="76634"/>
-                </a:lnTo>
-                <a:close/>
-                <a:lnTo>
-                  <a:pt x="517236" y="72764"/>
-                </a:lnTo>
-                <a:close/>
-                <a:lnTo>
-                  <a:pt x="523702" y="68907"/>
-                </a:lnTo>
-                <a:close/>
-                <a:lnTo>
-                  <a:pt x="530167" y="65041"/>
-                </a:lnTo>
-                <a:close/>
-                <a:lnTo>
-                  <a:pt x="536633" y="61162"/>
-                </a:lnTo>
-                <a:close/>
-                <a:lnTo>
-                  <a:pt x="543098" y="57278"/>
-                </a:lnTo>
-                <a:close/>
-                <a:lnTo>
-                  <a:pt x="549564" y="53396"/>
-                </a:lnTo>
-                <a:close/>
-                <a:lnTo>
-                  <a:pt x="556029" y="49520"/>
-                </a:lnTo>
-                <a:close/>
-                <a:lnTo>
-                  <a:pt x="562495" y="45645"/>
-                </a:lnTo>
-                <a:close/>
-                <a:lnTo>
-                  <a:pt x="568960" y="41763"/>
-                </a:lnTo>
-                <a:close/>
-                <a:lnTo>
-                  <a:pt x="575425" y="37867"/>
-                </a:lnTo>
-                <a:close/>
-                <a:lnTo>
-                  <a:pt x="581891" y="33969"/>
-                </a:lnTo>
-                <a:close/>
-                <a:lnTo>
-                  <a:pt x="588356" y="30087"/>
-                </a:lnTo>
-                <a:close/>
-                <a:lnTo>
-                  <a:pt x="594822" y="26245"/>
-                </a:lnTo>
-                <a:close/>
-                <a:lnTo>
-                  <a:pt x="601287" y="22456"/>
-                </a:lnTo>
-                <a:close/>
-                <a:lnTo>
-                  <a:pt x="607753" y="18708"/>
-                </a:lnTo>
-                <a:close/>
-                <a:lnTo>
-                  <a:pt x="614218" y="14984"/>
-                </a:lnTo>
-                <a:close/>
-                <a:lnTo>
-                  <a:pt x="620684" y="11269"/>
-                </a:lnTo>
-                <a:close/>
-                <a:lnTo>
-                  <a:pt x="627149" y="7544"/>
-                </a:lnTo>
-                <a:close/>
-                <a:lnTo>
-                  <a:pt x="633615" y="3793"/>
-                </a:lnTo>
-                <a:close/>
-                <a:lnTo>
-                  <a:pt x="640080" y="0"/>
+                  <a:pt x="5925" y="337391"/>
+                </a:lnTo>
+                <a:close/>
+                <a:lnTo>
+                  <a:pt x="11865" y="333276"/>
+                </a:lnTo>
+                <a:close/>
+                <a:lnTo>
+                  <a:pt x="17820" y="329183"/>
+                </a:lnTo>
+                <a:close/>
+                <a:lnTo>
+                  <a:pt x="23788" y="325111"/>
+                </a:lnTo>
+                <a:close/>
+                <a:lnTo>
+                  <a:pt x="29768" y="321060"/>
+                </a:lnTo>
+                <a:close/>
+                <a:lnTo>
+                  <a:pt x="35759" y="317030"/>
+                </a:lnTo>
+                <a:close/>
+                <a:lnTo>
+                  <a:pt x="41760" y="313020"/>
+                </a:lnTo>
+                <a:close/>
+                <a:lnTo>
+                  <a:pt x="47769" y="309031"/>
+                </a:lnTo>
+                <a:close/>
+                <a:lnTo>
+                  <a:pt x="53786" y="305061"/>
+                </a:lnTo>
+                <a:close/>
+                <a:lnTo>
+                  <a:pt x="59809" y="301111"/>
+                </a:lnTo>
+                <a:close/>
+                <a:lnTo>
+                  <a:pt x="65837" y="297180"/>
+                </a:lnTo>
+                <a:close/>
+                <a:lnTo>
+                  <a:pt x="71868" y="293269"/>
+                </a:lnTo>
+                <a:close/>
+                <a:lnTo>
+                  <a:pt x="77903" y="289375"/>
+                </a:lnTo>
+                <a:close/>
+                <a:lnTo>
+                  <a:pt x="83938" y="285500"/>
+                </a:lnTo>
+                <a:close/>
+                <a:lnTo>
+                  <a:pt x="89974" y="281643"/>
+                </a:lnTo>
+                <a:close/>
+                <a:lnTo>
+                  <a:pt x="96009" y="277803"/>
+                </a:lnTo>
+                <a:close/>
+                <a:lnTo>
+                  <a:pt x="102042" y="273981"/>
+                </a:lnTo>
+                <a:close/>
+                <a:lnTo>
+                  <a:pt x="108071" y="270176"/>
+                </a:lnTo>
+                <a:close/>
+                <a:lnTo>
+                  <a:pt x="114096" y="266387"/>
+                </a:lnTo>
+                <a:close/>
+                <a:lnTo>
+                  <a:pt x="120115" y="262615"/>
+                </a:lnTo>
+                <a:close/>
+                <a:lnTo>
+                  <a:pt x="126127" y="258859"/>
+                </a:lnTo>
+                <a:close/>
+                <a:lnTo>
+                  <a:pt x="132131" y="255118"/>
+                </a:lnTo>
+                <a:close/>
+                <a:lnTo>
+                  <a:pt x="138126" y="251393"/>
+                </a:lnTo>
+                <a:close/>
+                <a:lnTo>
+                  <a:pt x="144114" y="247682"/>
+                </a:lnTo>
+                <a:close/>
+                <a:lnTo>
+                  <a:pt x="150096" y="243986"/>
+                </a:lnTo>
+                <a:close/>
+                <a:lnTo>
+                  <a:pt x="156074" y="240304"/>
+                </a:lnTo>
+                <a:close/>
+                <a:lnTo>
+                  <a:pt x="162050" y="236636"/>
+                </a:lnTo>
+                <a:close/>
+                <a:lnTo>
+                  <a:pt x="168026" y="232981"/>
+                </a:lnTo>
+                <a:close/>
+                <a:lnTo>
+                  <a:pt x="174004" y="229338"/>
+                </a:lnTo>
+                <a:close/>
+                <a:lnTo>
+                  <a:pt x="179985" y="225708"/>
+                </a:lnTo>
+                <a:close/>
+                <a:lnTo>
+                  <a:pt x="185971" y="222089"/>
+                </a:lnTo>
+                <a:close/>
+                <a:lnTo>
+                  <a:pt x="191965" y="218481"/>
+                </a:lnTo>
+                <a:close/>
+                <a:lnTo>
+                  <a:pt x="197968" y="214884"/>
+                </a:lnTo>
+                <a:close/>
+                <a:lnTo>
+                  <a:pt x="203980" y="211298"/>
+                </a:lnTo>
+                <a:close/>
+                <a:lnTo>
+                  <a:pt x="210002" y="207722"/>
+                </a:lnTo>
+                <a:close/>
+                <a:lnTo>
+                  <a:pt x="216030" y="204157"/>
+                </a:lnTo>
+                <a:close/>
+                <a:lnTo>
+                  <a:pt x="222063" y="200602"/>
+                </a:lnTo>
+                <a:close/>
+                <a:lnTo>
+                  <a:pt x="228099" y="197058"/>
+                </a:lnTo>
+                <a:close/>
+                <a:lnTo>
+                  <a:pt x="234136" y="193525"/>
+                </a:lnTo>
+                <a:close/>
+                <a:lnTo>
+                  <a:pt x="240171" y="190002"/>
+                </a:lnTo>
+                <a:close/>
+                <a:lnTo>
+                  <a:pt x="246204" y="186491"/>
+                </a:lnTo>
+                <a:close/>
+                <a:lnTo>
+                  <a:pt x="252231" y="182990"/>
+                </a:lnTo>
+                <a:close/>
+                <a:lnTo>
+                  <a:pt x="258251" y="179501"/>
+                </a:lnTo>
+                <a:close/>
+                <a:lnTo>
+                  <a:pt x="264262" y="176022"/>
+                </a:lnTo>
+                <a:close/>
+                <a:lnTo>
+                  <a:pt x="270262" y="172555"/>
+                </a:lnTo>
+                <a:close/>
+                <a:lnTo>
+                  <a:pt x="276253" y="169100"/>
+                </a:lnTo>
+                <a:close/>
+                <a:lnTo>
+                  <a:pt x="282237" y="165656"/>
+                </a:lnTo>
+                <a:close/>
+                <a:lnTo>
+                  <a:pt x="288216" y="162223"/>
+                </a:lnTo>
+                <a:close/>
+                <a:lnTo>
+                  <a:pt x="294192" y="158803"/>
+                </a:lnTo>
+                <a:close/>
+                <a:lnTo>
+                  <a:pt x="300168" y="155394"/>
+                </a:lnTo>
+                <a:close/>
+                <a:lnTo>
+                  <a:pt x="306144" y="151997"/>
+                </a:lnTo>
+                <a:close/>
+                <a:lnTo>
+                  <a:pt x="312123" y="148612"/>
+                </a:lnTo>
+                <a:close/>
+                <a:lnTo>
+                  <a:pt x="318107" y="145240"/>
+                </a:lnTo>
+                <a:close/>
+                <a:lnTo>
+                  <a:pt x="324098" y="141880"/>
+                </a:lnTo>
+                <a:close/>
+                <a:lnTo>
+                  <a:pt x="330098" y="138532"/>
+                </a:lnTo>
+                <a:close/>
+                <a:lnTo>
+                  <a:pt x="336109" y="135197"/>
+                </a:lnTo>
+                <a:close/>
+                <a:lnTo>
+                  <a:pt x="342129" y="131873"/>
+                </a:lnTo>
+                <a:close/>
+                <a:lnTo>
+                  <a:pt x="348156" y="128562"/>
+                </a:lnTo>
+                <a:close/>
+                <a:lnTo>
+                  <a:pt x="354189" y="125261"/>
+                </a:lnTo>
+                <a:close/>
+                <a:lnTo>
+                  <a:pt x="360224" y="121970"/>
+                </a:lnTo>
+                <a:close/>
+                <a:lnTo>
+                  <a:pt x="366261" y="118689"/>
+                </a:lnTo>
+                <a:close/>
+                <a:lnTo>
+                  <a:pt x="372297" y="115418"/>
+                </a:lnTo>
+                <a:close/>
+                <a:lnTo>
+                  <a:pt x="378330" y="112155"/>
+                </a:lnTo>
+                <a:close/>
+                <a:lnTo>
+                  <a:pt x="384358" y="108900"/>
+                </a:lnTo>
+                <a:close/>
+                <a:lnTo>
+                  <a:pt x="390380" y="105653"/>
+                </a:lnTo>
+                <a:close/>
+                <a:lnTo>
+                  <a:pt x="396392" y="102413"/>
+                </a:lnTo>
+                <a:close/>
+                <a:lnTo>
+                  <a:pt x="402395" y="99180"/>
+                </a:lnTo>
+                <a:close/>
+                <a:lnTo>
+                  <a:pt x="408389" y="95953"/>
+                </a:lnTo>
+                <a:close/>
+                <a:lnTo>
+                  <a:pt x="414375" y="92732"/>
+                </a:lnTo>
+                <a:close/>
+                <a:lnTo>
+                  <a:pt x="420356" y="89518"/>
+                </a:lnTo>
+                <a:close/>
+                <a:lnTo>
+                  <a:pt x="426334" y="86311"/>
+                </a:lnTo>
+                <a:close/>
+                <a:lnTo>
+                  <a:pt x="432310" y="83111"/>
+                </a:lnTo>
+                <a:close/>
+                <a:lnTo>
+                  <a:pt x="438286" y="79917"/>
+                </a:lnTo>
+                <a:close/>
+                <a:lnTo>
+                  <a:pt x="444264" y="76729"/>
+                </a:lnTo>
+                <a:close/>
+                <a:lnTo>
+                  <a:pt x="450246" y="73549"/>
+                </a:lnTo>
+                <a:close/>
+                <a:lnTo>
+                  <a:pt x="456234" y="70376"/>
+                </a:lnTo>
+                <a:close/>
+                <a:lnTo>
+                  <a:pt x="462229" y="67209"/>
+                </a:lnTo>
+                <a:close/>
+                <a:lnTo>
+                  <a:pt x="468233" y="64049"/>
+                </a:lnTo>
+                <a:close/>
+                <a:lnTo>
+                  <a:pt x="474245" y="60897"/>
+                </a:lnTo>
+                <a:close/>
+                <a:lnTo>
+                  <a:pt x="480264" y="57752"/>
+                </a:lnTo>
+                <a:close/>
+                <a:lnTo>
+                  <a:pt x="486289" y="54615"/>
+                </a:lnTo>
+                <a:close/>
+                <a:lnTo>
+                  <a:pt x="492318" y="51487"/>
+                </a:lnTo>
+                <a:close/>
+                <a:lnTo>
+                  <a:pt x="498351" y="48368"/>
+                </a:lnTo>
+                <a:close/>
+                <a:lnTo>
+                  <a:pt x="504386" y="45258"/>
+                </a:lnTo>
+                <a:close/>
+                <a:lnTo>
+                  <a:pt x="510422" y="42157"/>
+                </a:lnTo>
+                <a:close/>
+                <a:lnTo>
+                  <a:pt x="516457" y="39067"/>
+                </a:lnTo>
+                <a:close/>
+                <a:lnTo>
+                  <a:pt x="522492" y="35987"/>
+                </a:lnTo>
+                <a:close/>
+                <a:lnTo>
+                  <a:pt x="528523" y="32919"/>
+                </a:lnTo>
+                <a:close/>
+                <a:lnTo>
+                  <a:pt x="534551" y="29861"/>
+                </a:lnTo>
+                <a:close/>
+                <a:lnTo>
+                  <a:pt x="540574" y="26816"/>
+                </a:lnTo>
+                <a:close/>
+                <a:lnTo>
+                  <a:pt x="546591" y="23782"/>
+                </a:lnTo>
+                <a:close/>
+                <a:lnTo>
+                  <a:pt x="552600" y="20761"/>
+                </a:lnTo>
+                <a:close/>
+                <a:lnTo>
+                  <a:pt x="558601" y="17753"/>
+                </a:lnTo>
+                <a:close/>
+                <a:lnTo>
+                  <a:pt x="564592" y="14759"/>
+                </a:lnTo>
+                <a:close/>
+                <a:lnTo>
+                  <a:pt x="570572" y="11778"/>
+                </a:lnTo>
+                <a:close/>
+                <a:lnTo>
+                  <a:pt x="576540" y="8811"/>
+                </a:lnTo>
+                <a:close/>
+                <a:lnTo>
+                  <a:pt x="582495" y="5859"/>
+                </a:lnTo>
+                <a:close/>
+                <a:lnTo>
+                  <a:pt x="588435" y="2922"/>
+                </a:lnTo>
+                <a:close/>
+                <a:lnTo>
+                  <a:pt x="594360" y="0"/>
                 </a:lnTo>
                 <a:close/>
               </a:path>
@@ -6213,7 +6213,7 @@
           </a:custGeom>
           <a:ln w="19050">
             <a:solidFill>
-              <a:srgbClr val="B4B4B4"/>
+              <a:srgbClr val="FFFFFF"/>
             </a:solidFill>
           </a:ln>
         </p:spPr>
@@ -6247,8 +6247,8 @@
         </p:nvSpPr>
         <p:spPr>
           <a:xfrm>
-            <a:off x="6217920" y="1066190"/>
-            <a:ext cx="640080" cy="224486"/>
+            <a:off x="6035040" y="1271473"/>
+            <a:ext cx="594360" cy="274320"/>
           </a:xfrm>
           <a:custGeom>
             <a:avLst/>
@@ -6257,404 +6257,404 @@
             <a:cxnLst/>
             <a:rect l="l" t="t" r="r" b="b"/>
             <a:pathLst>
-              <a:path w="640080" h="224486">
+              <a:path w="594360" h="274320">
                 <a:moveTo>
-                  <a:pt x="640080" y="0"/>
+                  <a:pt x="594360" y="0"/>
                 </a:moveTo>
                 <a:lnTo>
-                  <a:pt x="633615" y="4668"/>
-                </a:lnTo>
-                <a:close/>
-                <a:lnTo>
-                  <a:pt x="627149" y="9214"/>
-                </a:lnTo>
-                <a:close/>
-                <a:lnTo>
-                  <a:pt x="620684" y="13657"/>
-                </a:lnTo>
-                <a:close/>
-                <a:lnTo>
-                  <a:pt x="614218" y="18018"/>
-                </a:lnTo>
-                <a:close/>
-                <a:lnTo>
-                  <a:pt x="607753" y="22313"/>
-                </a:lnTo>
-                <a:close/>
-                <a:lnTo>
-                  <a:pt x="601287" y="26564"/>
-                </a:lnTo>
-                <a:close/>
-                <a:lnTo>
-                  <a:pt x="594822" y="30789"/>
-                </a:lnTo>
-                <a:close/>
-                <a:lnTo>
-                  <a:pt x="588356" y="34999"/>
-                </a:lnTo>
-                <a:close/>
-                <a:lnTo>
-                  <a:pt x="581891" y="39173"/>
-                </a:lnTo>
-                <a:close/>
-                <a:lnTo>
-                  <a:pt x="575425" y="43277"/>
-                </a:lnTo>
-                <a:close/>
-                <a:lnTo>
-                  <a:pt x="568960" y="47278"/>
-                </a:lnTo>
-                <a:close/>
-                <a:lnTo>
-                  <a:pt x="562495" y="51179"/>
-                </a:lnTo>
-                <a:close/>
-                <a:lnTo>
-                  <a:pt x="556029" y="55030"/>
-                </a:lnTo>
-                <a:close/>
-                <a:lnTo>
-                  <a:pt x="549564" y="58883"/>
-                </a:lnTo>
-                <a:close/>
-                <a:lnTo>
-                  <a:pt x="543098" y="62780"/>
-                </a:lnTo>
-                <a:close/>
-                <a:lnTo>
-                  <a:pt x="536633" y="66694"/>
-                </a:lnTo>
-                <a:close/>
-                <a:lnTo>
-                  <a:pt x="530167" y="70570"/>
-                </a:lnTo>
-                <a:close/>
-                <a:lnTo>
-                  <a:pt x="523702" y="74356"/>
-                </a:lnTo>
-                <a:close/>
-                <a:lnTo>
-                  <a:pt x="517236" y="78032"/>
-                </a:lnTo>
-                <a:close/>
-                <a:lnTo>
-                  <a:pt x="510771" y="81631"/>
-                </a:lnTo>
-                <a:close/>
-                <a:lnTo>
-                  <a:pt x="504305" y="85192"/>
-                </a:lnTo>
-                <a:close/>
-                <a:lnTo>
-                  <a:pt x="497840" y="88748"/>
-                </a:lnTo>
-                <a:close/>
-                <a:lnTo>
-                  <a:pt x="491375" y="92282"/>
-                </a:lnTo>
-                <a:close/>
-                <a:lnTo>
-                  <a:pt x="484909" y="95756"/>
-                </a:lnTo>
-                <a:close/>
-                <a:lnTo>
-                  <a:pt x="478444" y="99131"/>
-                </a:lnTo>
-                <a:close/>
-                <a:lnTo>
-                  <a:pt x="471978" y="102398"/>
-                </a:lnTo>
-                <a:close/>
-                <a:lnTo>
-                  <a:pt x="465513" y="105606"/>
-                </a:lnTo>
-                <a:close/>
-                <a:lnTo>
-                  <a:pt x="459047" y="108807"/>
-                </a:lnTo>
-                <a:close/>
-                <a:lnTo>
-                  <a:pt x="452582" y="112051"/>
-                </a:lnTo>
-                <a:close/>
-                <a:lnTo>
-                  <a:pt x="446116" y="115319"/>
-                </a:lnTo>
-                <a:close/>
-                <a:lnTo>
-                  <a:pt x="439651" y="118558"/>
-                </a:lnTo>
-                <a:close/>
-                <a:lnTo>
-                  <a:pt x="433185" y="121713"/>
-                </a:lnTo>
-                <a:close/>
-                <a:lnTo>
-                  <a:pt x="426720" y="124757"/>
-                </a:lnTo>
-                <a:close/>
-                <a:lnTo>
-                  <a:pt x="420255" y="127718"/>
-                </a:lnTo>
-                <a:close/>
-                <a:lnTo>
-                  <a:pt x="413789" y="130635"/>
-                </a:lnTo>
-                <a:close/>
-                <a:lnTo>
-                  <a:pt x="407324" y="133545"/>
-                </a:lnTo>
-                <a:close/>
-                <a:lnTo>
-                  <a:pt x="400858" y="136437"/>
-                </a:lnTo>
-                <a:close/>
-                <a:lnTo>
-                  <a:pt x="394393" y="139276"/>
-                </a:lnTo>
-                <a:close/>
-                <a:lnTo>
-                  <a:pt x="387927" y="142021"/>
-                </a:lnTo>
-                <a:close/>
-                <a:lnTo>
-                  <a:pt x="381462" y="144655"/>
-                </a:lnTo>
-                <a:close/>
-                <a:lnTo>
-                  <a:pt x="374996" y="147221"/>
-                </a:lnTo>
-                <a:close/>
-                <a:lnTo>
-                  <a:pt x="368531" y="149773"/>
-                </a:lnTo>
-                <a:close/>
-                <a:lnTo>
-                  <a:pt x="362065" y="152363"/>
-                </a:lnTo>
-                <a:close/>
-                <a:lnTo>
-                  <a:pt x="355600" y="154984"/>
-                </a:lnTo>
-                <a:close/>
-                <a:lnTo>
-                  <a:pt x="349135" y="157584"/>
-                </a:lnTo>
-                <a:close/>
-                <a:lnTo>
-                  <a:pt x="342669" y="160109"/>
-                </a:lnTo>
-                <a:close/>
-                <a:lnTo>
-                  <a:pt x="336204" y="162520"/>
-                </a:lnTo>
-                <a:close/>
-                <a:lnTo>
-                  <a:pt x="329738" y="164844"/>
-                </a:lnTo>
-                <a:close/>
-                <a:lnTo>
-                  <a:pt x="323273" y="167119"/>
-                </a:lnTo>
-                <a:close/>
-                <a:lnTo>
-                  <a:pt x="316807" y="169382"/>
-                </a:lnTo>
-                <a:close/>
-                <a:lnTo>
-                  <a:pt x="310342" y="171633"/>
-                </a:lnTo>
-                <a:close/>
-                <a:lnTo>
-                  <a:pt x="303876" y="173835"/>
-                </a:lnTo>
-                <a:close/>
-                <a:lnTo>
-                  <a:pt x="297411" y="175949"/>
-                </a:lnTo>
-                <a:close/>
-                <a:lnTo>
-                  <a:pt x="290945" y="177950"/>
-                </a:lnTo>
-                <a:close/>
-                <a:lnTo>
-                  <a:pt x="284480" y="179876"/>
-                </a:lnTo>
-                <a:close/>
-                <a:lnTo>
-                  <a:pt x="278015" y="181781"/>
-                </a:lnTo>
-                <a:close/>
-                <a:lnTo>
-                  <a:pt x="271549" y="183717"/>
-                </a:lnTo>
-                <a:close/>
-                <a:lnTo>
-                  <a:pt x="265084" y="185690"/>
-                </a:lnTo>
-                <a:close/>
-                <a:lnTo>
-                  <a:pt x="258618" y="187650"/>
-                </a:lnTo>
-                <a:close/>
-                <a:lnTo>
-                  <a:pt x="252153" y="189542"/>
-                </a:lnTo>
-                <a:close/>
-                <a:lnTo>
-                  <a:pt x="245687" y="191323"/>
-                </a:lnTo>
-                <a:close/>
-                <a:lnTo>
-                  <a:pt x="239222" y="193010"/>
-                </a:lnTo>
-                <a:close/>
-                <a:lnTo>
-                  <a:pt x="232756" y="194643"/>
-                </a:lnTo>
-                <a:close/>
-                <a:lnTo>
-                  <a:pt x="226291" y="196260"/>
-                </a:lnTo>
-                <a:close/>
-                <a:lnTo>
-                  <a:pt x="219825" y="197868"/>
-                </a:lnTo>
-                <a:close/>
-                <a:lnTo>
-                  <a:pt x="213360" y="199433"/>
-                </a:lnTo>
-                <a:close/>
-                <a:lnTo>
-                  <a:pt x="206895" y="200915"/>
-                </a:lnTo>
-                <a:close/>
-                <a:lnTo>
-                  <a:pt x="200429" y="202285"/>
-                </a:lnTo>
-                <a:close/>
-                <a:lnTo>
-                  <a:pt x="193964" y="203572"/>
-                </a:lnTo>
-                <a:close/>
-                <a:lnTo>
-                  <a:pt x="187498" y="204830"/>
-                </a:lnTo>
-                <a:close/>
-                <a:lnTo>
-                  <a:pt x="181033" y="206112"/>
-                </a:lnTo>
-                <a:close/>
-                <a:lnTo>
-                  <a:pt x="174567" y="207437"/>
-                </a:lnTo>
-                <a:close/>
-                <a:lnTo>
-                  <a:pt x="168102" y="208755"/>
-                </a:lnTo>
-                <a:close/>
-                <a:lnTo>
-                  <a:pt x="161636" y="210014"/>
-                </a:lnTo>
-                <a:close/>
-                <a:lnTo>
-                  <a:pt x="155171" y="211164"/>
-                </a:lnTo>
-                <a:close/>
-                <a:lnTo>
-                  <a:pt x="148705" y="212216"/>
-                </a:lnTo>
-                <a:close/>
-                <a:lnTo>
-                  <a:pt x="142240" y="213208"/>
-                </a:lnTo>
-                <a:close/>
-                <a:lnTo>
-                  <a:pt x="135775" y="214178"/>
-                </a:lnTo>
-                <a:close/>
-                <a:lnTo>
-                  <a:pt x="129309" y="215143"/>
-                </a:lnTo>
-                <a:close/>
-                <a:lnTo>
-                  <a:pt x="122844" y="216069"/>
-                </a:lnTo>
-                <a:close/>
-                <a:lnTo>
-                  <a:pt x="116378" y="216920"/>
-                </a:lnTo>
-                <a:close/>
-                <a:lnTo>
-                  <a:pt x="109913" y="217660"/>
-                </a:lnTo>
-                <a:close/>
-                <a:lnTo>
-                  <a:pt x="103447" y="218309"/>
-                </a:lnTo>
-                <a:close/>
-                <a:lnTo>
-                  <a:pt x="96982" y="218921"/>
-                </a:lnTo>
-                <a:close/>
-                <a:lnTo>
-                  <a:pt x="90516" y="219549"/>
-                </a:lnTo>
-                <a:close/>
-                <a:lnTo>
-                  <a:pt x="84051" y="220221"/>
-                </a:lnTo>
-                <a:close/>
-                <a:lnTo>
-                  <a:pt x="77585" y="220896"/>
-                </a:lnTo>
-                <a:close/>
-                <a:lnTo>
-                  <a:pt x="71120" y="221521"/>
-                </a:lnTo>
-                <a:close/>
-                <a:lnTo>
-                  <a:pt x="64655" y="222049"/>
-                </a:lnTo>
-                <a:close/>
-                <a:lnTo>
-                  <a:pt x="58189" y="222474"/>
-                </a:lnTo>
-                <a:close/>
-                <a:lnTo>
-                  <a:pt x="51724" y="222826"/>
-                </a:lnTo>
-                <a:close/>
-                <a:lnTo>
-                  <a:pt x="45258" y="223135"/>
-                </a:lnTo>
-                <a:close/>
-                <a:lnTo>
-                  <a:pt x="38793" y="223424"/>
-                </a:lnTo>
-                <a:close/>
-                <a:lnTo>
-                  <a:pt x="32327" y="223690"/>
-                </a:lnTo>
-                <a:close/>
-                <a:lnTo>
-                  <a:pt x="25862" y="223929"/>
-                </a:lnTo>
-                <a:close/>
-                <a:lnTo>
-                  <a:pt x="19396" y="224134"/>
-                </a:lnTo>
-                <a:close/>
-                <a:lnTo>
-                  <a:pt x="12931" y="224299"/>
-                </a:lnTo>
-                <a:close/>
-                <a:lnTo>
-                  <a:pt x="6465" y="224418"/>
-                </a:lnTo>
-                <a:close/>
-                <a:lnTo>
-                  <a:pt x="0" y="224486"/>
+                  <a:pt x="588435" y="5290"/>
+                </a:lnTo>
+                <a:close/>
+                <a:lnTo>
+                  <a:pt x="582495" y="10528"/>
+                </a:lnTo>
+                <a:close/>
+                <a:lnTo>
+                  <a:pt x="576540" y="15715"/>
+                </a:lnTo>
+                <a:close/>
+                <a:lnTo>
+                  <a:pt x="570572" y="20849"/>
+                </a:lnTo>
+                <a:close/>
+                <a:lnTo>
+                  <a:pt x="564592" y="25931"/>
+                </a:lnTo>
+                <a:close/>
+                <a:lnTo>
+                  <a:pt x="558601" y="30960"/>
+                </a:lnTo>
+                <a:close/>
+                <a:lnTo>
+                  <a:pt x="552600" y="35938"/>
+                </a:lnTo>
+                <a:close/>
+                <a:lnTo>
+                  <a:pt x="546591" y="40863"/>
+                </a:lnTo>
+                <a:close/>
+                <a:lnTo>
+                  <a:pt x="540574" y="45735"/>
+                </a:lnTo>
+                <a:close/>
+                <a:lnTo>
+                  <a:pt x="534551" y="50555"/>
+                </a:lnTo>
+                <a:close/>
+                <a:lnTo>
+                  <a:pt x="528523" y="55321"/>
+                </a:lnTo>
+                <a:close/>
+                <a:lnTo>
+                  <a:pt x="522492" y="60035"/>
+                </a:lnTo>
+                <a:close/>
+                <a:lnTo>
+                  <a:pt x="516457" y="64696"/>
+                </a:lnTo>
+                <a:close/>
+                <a:lnTo>
+                  <a:pt x="510422" y="69304"/>
+                </a:lnTo>
+                <a:close/>
+                <a:lnTo>
+                  <a:pt x="504386" y="73859"/>
+                </a:lnTo>
+                <a:close/>
+                <a:lnTo>
+                  <a:pt x="498351" y="78360"/>
+                </a:lnTo>
+                <a:close/>
+                <a:lnTo>
+                  <a:pt x="492318" y="82808"/>
+                </a:lnTo>
+                <a:close/>
+                <a:lnTo>
+                  <a:pt x="486289" y="87202"/>
+                </a:lnTo>
+                <a:close/>
+                <a:lnTo>
+                  <a:pt x="480264" y="91543"/>
+                </a:lnTo>
+                <a:close/>
+                <a:lnTo>
+                  <a:pt x="474245" y="95830"/>
+                </a:lnTo>
+                <a:close/>
+                <a:lnTo>
+                  <a:pt x="468233" y="100063"/>
+                </a:lnTo>
+                <a:close/>
+                <a:lnTo>
+                  <a:pt x="462229" y="104242"/>
+                </a:lnTo>
+                <a:close/>
+                <a:lnTo>
+                  <a:pt x="456234" y="108367"/>
+                </a:lnTo>
+                <a:close/>
+                <a:lnTo>
+                  <a:pt x="450246" y="112439"/>
+                </a:lnTo>
+                <a:close/>
+                <a:lnTo>
+                  <a:pt x="444264" y="116457"/>
+                </a:lnTo>
+                <a:close/>
+                <a:lnTo>
+                  <a:pt x="438286" y="120423"/>
+                </a:lnTo>
+                <a:close/>
+                <a:lnTo>
+                  <a:pt x="432310" y="124338"/>
+                </a:lnTo>
+                <a:close/>
+                <a:lnTo>
+                  <a:pt x="426334" y="128200"/>
+                </a:lnTo>
+                <a:close/>
+                <a:lnTo>
+                  <a:pt x="420356" y="132012"/>
+                </a:lnTo>
+                <a:close/>
+                <a:lnTo>
+                  <a:pt x="414375" y="135774"/>
+                </a:lnTo>
+                <a:close/>
+                <a:lnTo>
+                  <a:pt x="408389" y="139485"/>
+                </a:lnTo>
+                <a:close/>
+                <a:lnTo>
+                  <a:pt x="402395" y="143148"/>
+                </a:lnTo>
+                <a:close/>
+                <a:lnTo>
+                  <a:pt x="396392" y="146761"/>
+                </a:lnTo>
+                <a:close/>
+                <a:lnTo>
+                  <a:pt x="390380" y="150327"/>
+                </a:lnTo>
+                <a:close/>
+                <a:lnTo>
+                  <a:pt x="384358" y="153844"/>
+                </a:lnTo>
+                <a:close/>
+                <a:lnTo>
+                  <a:pt x="378330" y="157313"/>
+                </a:lnTo>
+                <a:close/>
+                <a:lnTo>
+                  <a:pt x="372297" y="160733"/>
+                </a:lnTo>
+                <a:close/>
+                <a:lnTo>
+                  <a:pt x="366261" y="164106"/>
+                </a:lnTo>
+                <a:close/>
+                <a:lnTo>
+                  <a:pt x="360224" y="167431"/>
+                </a:lnTo>
+                <a:close/>
+                <a:lnTo>
+                  <a:pt x="354189" y="170708"/>
+                </a:lnTo>
+                <a:close/>
+                <a:lnTo>
+                  <a:pt x="348156" y="173937"/>
+                </a:lnTo>
+                <a:close/>
+                <a:lnTo>
+                  <a:pt x="342129" y="177118"/>
+                </a:lnTo>
+                <a:close/>
+                <a:lnTo>
+                  <a:pt x="336109" y="180252"/>
+                </a:lnTo>
+                <a:close/>
+                <a:lnTo>
+                  <a:pt x="330098" y="183337"/>
+                </a:lnTo>
+                <a:close/>
+                <a:lnTo>
+                  <a:pt x="324098" y="186375"/>
+                </a:lnTo>
+                <a:close/>
+                <a:lnTo>
+                  <a:pt x="318107" y="189365"/>
+                </a:lnTo>
+                <a:close/>
+                <a:lnTo>
+                  <a:pt x="312123" y="192306"/>
+                </a:lnTo>
+                <a:close/>
+                <a:lnTo>
+                  <a:pt x="306144" y="195196"/>
+                </a:lnTo>
+                <a:close/>
+                <a:lnTo>
+                  <a:pt x="300168" y="198036"/>
+                </a:lnTo>
+                <a:close/>
+                <a:lnTo>
+                  <a:pt x="294192" y="200825"/>
+                </a:lnTo>
+                <a:close/>
+                <a:lnTo>
+                  <a:pt x="288216" y="203561"/>
+                </a:lnTo>
+                <a:close/>
+                <a:lnTo>
+                  <a:pt x="282237" y="206245"/>
+                </a:lnTo>
+                <a:close/>
+                <a:lnTo>
+                  <a:pt x="276253" y="208875"/>
+                </a:lnTo>
+                <a:close/>
+                <a:lnTo>
+                  <a:pt x="270262" y="211450"/>
+                </a:lnTo>
+                <a:close/>
+                <a:lnTo>
+                  <a:pt x="264262" y="213970"/>
+                </a:lnTo>
+                <a:close/>
+                <a:lnTo>
+                  <a:pt x="258251" y="216434"/>
+                </a:lnTo>
+                <a:close/>
+                <a:lnTo>
+                  <a:pt x="252231" y="218843"/>
+                </a:lnTo>
+                <a:close/>
+                <a:lnTo>
+                  <a:pt x="246204" y="221198"/>
+                </a:lnTo>
+                <a:close/>
+                <a:lnTo>
+                  <a:pt x="240171" y="223500"/>
+                </a:lnTo>
+                <a:close/>
+                <a:lnTo>
+                  <a:pt x="234136" y="225750"/>
+                </a:lnTo>
+                <a:close/>
+                <a:lnTo>
+                  <a:pt x="228099" y="227948"/>
+                </a:lnTo>
+                <a:close/>
+                <a:lnTo>
+                  <a:pt x="222063" y="230096"/>
+                </a:lnTo>
+                <a:close/>
+                <a:lnTo>
+                  <a:pt x="216030" y="232194"/>
+                </a:lnTo>
+                <a:close/>
+                <a:lnTo>
+                  <a:pt x="210002" y="234244"/>
+                </a:lnTo>
+                <a:close/>
+                <a:lnTo>
+                  <a:pt x="203980" y="236246"/>
+                </a:lnTo>
+                <a:close/>
+                <a:lnTo>
+                  <a:pt x="197968" y="238201"/>
+                </a:lnTo>
+                <a:close/>
+                <a:lnTo>
+                  <a:pt x="191965" y="240111"/>
+                </a:lnTo>
+                <a:close/>
+                <a:lnTo>
+                  <a:pt x="185971" y="241973"/>
+                </a:lnTo>
+                <a:close/>
+                <a:lnTo>
+                  <a:pt x="179985" y="243788"/>
+                </a:lnTo>
+                <a:close/>
+                <a:lnTo>
+                  <a:pt x="174004" y="245555"/>
+                </a:lnTo>
+                <a:close/>
+                <a:lnTo>
+                  <a:pt x="168026" y="247272"/>
+                </a:lnTo>
+                <a:close/>
+                <a:lnTo>
+                  <a:pt x="162050" y="248939"/>
+                </a:lnTo>
+                <a:close/>
+                <a:lnTo>
+                  <a:pt x="156074" y="250555"/>
+                </a:lnTo>
+                <a:close/>
+                <a:lnTo>
+                  <a:pt x="150096" y="252119"/>
+                </a:lnTo>
+                <a:close/>
+                <a:lnTo>
+                  <a:pt x="144114" y="253630"/>
+                </a:lnTo>
+                <a:close/>
+                <a:lnTo>
+                  <a:pt x="138126" y="255087"/>
+                </a:lnTo>
+                <a:close/>
+                <a:lnTo>
+                  <a:pt x="132131" y="256489"/>
+                </a:lnTo>
+                <a:close/>
+                <a:lnTo>
+                  <a:pt x="126127" y="257836"/>
+                </a:lnTo>
+                <a:close/>
+                <a:lnTo>
+                  <a:pt x="120115" y="259128"/>
+                </a:lnTo>
+                <a:close/>
+                <a:lnTo>
+                  <a:pt x="114096" y="260366"/>
+                </a:lnTo>
+                <a:close/>
+                <a:lnTo>
+                  <a:pt x="108071" y="261549"/>
+                </a:lnTo>
+                <a:close/>
+                <a:lnTo>
+                  <a:pt x="102042" y="262680"/>
+                </a:lnTo>
+                <a:close/>
+                <a:lnTo>
+                  <a:pt x="96009" y="263757"/>
+                </a:lnTo>
+                <a:close/>
+                <a:lnTo>
+                  <a:pt x="89974" y="264783"/>
+                </a:lnTo>
+                <a:close/>
+                <a:lnTo>
+                  <a:pt x="83938" y="265757"/>
+                </a:lnTo>
+                <a:close/>
+                <a:lnTo>
+                  <a:pt x="77903" y="266680"/>
+                </a:lnTo>
+                <a:close/>
+                <a:lnTo>
+                  <a:pt x="71868" y="267553"/>
+                </a:lnTo>
+                <a:close/>
+                <a:lnTo>
+                  <a:pt x="65837" y="268377"/>
+                </a:lnTo>
+                <a:close/>
+                <a:lnTo>
+                  <a:pt x="59809" y="269151"/>
+                </a:lnTo>
+                <a:close/>
+                <a:lnTo>
+                  <a:pt x="53786" y="269876"/>
+                </a:lnTo>
+                <a:close/>
+                <a:lnTo>
+                  <a:pt x="47769" y="270554"/>
+                </a:lnTo>
+                <a:close/>
+                <a:lnTo>
+                  <a:pt x="41760" y="271184"/>
+                </a:lnTo>
+                <a:close/>
+                <a:lnTo>
+                  <a:pt x="35759" y="271768"/>
+                </a:lnTo>
+                <a:close/>
+                <a:lnTo>
+                  <a:pt x="29768" y="272305"/>
+                </a:lnTo>
+                <a:close/>
+                <a:lnTo>
+                  <a:pt x="23788" y="272797"/>
+                </a:lnTo>
+                <a:close/>
+                <a:lnTo>
+                  <a:pt x="17820" y="273244"/>
+                </a:lnTo>
+                <a:close/>
+                <a:lnTo>
+                  <a:pt x="11865" y="273646"/>
+                </a:lnTo>
+                <a:close/>
+                <a:lnTo>
+                  <a:pt x="5925" y="274005"/>
+                </a:lnTo>
+                <a:close/>
+                <a:lnTo>
+                  <a:pt x="0" y="274320"/>
                 </a:lnTo>
                 <a:close/>
               </a:path>
@@ -6662,7 +6662,7 @@
           </a:custGeom>
           <a:ln w="19050">
             <a:solidFill>
-              <a:srgbClr val="B4B4B4"/>
+              <a:srgbClr val="FFFFFF"/>
             </a:solidFill>
           </a:ln>
         </p:spPr>
@@ -6696,7 +6696,7 @@
         </p:nvSpPr>
         <p:spPr>
           <a:xfrm>
-            <a:off x="5895340" y="2208530"/>
+            <a:off x="5689600" y="2391410"/>
             <a:ext cx="1524000" cy="508000"/>
           </a:xfrm>
           <a:prstGeom prst="rect">
@@ -6711,7 +6711,7 @@
           <a:lstStyle/>
           <a:p>
             <a:pPr>
-              <a:defRPr sz="1400" b="1">
+              <a:defRPr sz="1800" b="1">
                 <a:solidFill>
                   <a:srgbClr val="FFFFFF"/>
                 </a:solidFill>

--- a/output/5.pptx
+++ b/output/5.pptx
@@ -3105,7 +3105,7 @@
         <p:spPr>
           <a:xfrm>
             <a:off x="4114800.0" y="2571750.0"/>
-            <a:ext cx="3200400.0" cy="0.0"/>
+            <a:ext cx="4114800.0" cy="0.0"/>
           </a:xfrm>
           <a:prstGeom prst="line">
             <a:avLst/>
@@ -3139,8 +3139,8 @@
         </p:nvCxnSpPr>
         <p:spPr>
           <a:xfrm flipV="1">
-            <a:off x="4572000.0" y="285750.0"/>
-            <a:ext cx="0.0" cy="2743200.0"/>
+            <a:off x="4572000.0" y="-628650.0"/>
+            <a:ext cx="0.0" cy="3657600.0"/>
           </a:xfrm>
           <a:prstGeom prst="line">
             <a:avLst/>
@@ -3174,8 +3174,8 @@
         </p:nvSpPr>
         <p:spPr>
           <a:xfrm>
-            <a:off x="4343400" y="1004468"/>
-            <a:ext cx="1600200" cy="1149401"/>
+            <a:off x="4800600" y="286207"/>
+            <a:ext cx="1600200" cy="1033449"/>
           </a:xfrm>
           <a:custGeom>
             <a:avLst/>
@@ -3184,1200 +3184,2400 @@
             <a:cxnLst/>
             <a:rect l="l" t="t" r="r" b="b"/>
             <a:pathLst>
-              <a:path w="1600200" h="1149401">
+              <a:path w="1600200" h="1033449">
                 <a:moveTo>
-                  <a:pt x="0" y="1149401"/>
+                  <a:pt x="0" y="1033449"/>
                 </a:moveTo>
                 <a:lnTo>
-                  <a:pt x="5364" y="1141441"/>
-                </a:lnTo>
-                <a:close/>
-                <a:lnTo>
-                  <a:pt x="10726" y="1133568"/>
-                </a:lnTo>
-                <a:close/>
-                <a:lnTo>
-                  <a:pt x="16087" y="1125782"/>
-                </a:lnTo>
-                <a:close/>
-                <a:lnTo>
-                  <a:pt x="21447" y="1118081"/>
-                </a:lnTo>
-                <a:close/>
-                <a:lnTo>
-                  <a:pt x="26806" y="1110464"/>
-                </a:lnTo>
-                <a:close/>
-                <a:lnTo>
-                  <a:pt x="32163" y="1102928"/>
-                </a:lnTo>
-                <a:close/>
-                <a:lnTo>
-                  <a:pt x="37520" y="1095473"/>
-                </a:lnTo>
-                <a:close/>
-                <a:lnTo>
-                  <a:pt x="42877" y="1088097"/>
-                </a:lnTo>
-                <a:close/>
-                <a:lnTo>
-                  <a:pt x="48232" y="1080798"/>
-                </a:lnTo>
-                <a:close/>
-                <a:lnTo>
-                  <a:pt x="53587" y="1073575"/>
-                </a:lnTo>
-                <a:close/>
-                <a:lnTo>
-                  <a:pt x="58942" y="1066427"/>
-                </a:lnTo>
-                <a:close/>
-                <a:lnTo>
-                  <a:pt x="64297" y="1059351"/>
-                </a:lnTo>
-                <a:close/>
-                <a:lnTo>
-                  <a:pt x="69652" y="1052347"/>
-                </a:lnTo>
-                <a:close/>
-                <a:lnTo>
-                  <a:pt x="75006" y="1045413"/>
-                </a:lnTo>
-                <a:close/>
-                <a:lnTo>
-                  <a:pt x="80361" y="1038547"/>
-                </a:lnTo>
-                <a:close/>
-                <a:lnTo>
-                  <a:pt x="85716" y="1031748"/>
-                </a:lnTo>
-                <a:close/>
-                <a:lnTo>
-                  <a:pt x="91072" y="1025015"/>
-                </a:lnTo>
-                <a:close/>
-                <a:lnTo>
-                  <a:pt x="96428" y="1018345"/>
-                </a:lnTo>
-                <a:close/>
-                <a:lnTo>
-                  <a:pt x="101785" y="1011737"/>
-                </a:lnTo>
-                <a:close/>
-                <a:lnTo>
-                  <a:pt x="107143" y="1005190"/>
-                </a:lnTo>
-                <a:close/>
-                <a:lnTo>
-                  <a:pt x="112502" y="998703"/>
-                </a:lnTo>
-                <a:close/>
-                <a:lnTo>
-                  <a:pt x="117862" y="992273"/>
-                </a:lnTo>
-                <a:close/>
-                <a:lnTo>
-                  <a:pt x="123223" y="985900"/>
-                </a:lnTo>
-                <a:close/>
-                <a:lnTo>
-                  <a:pt x="128585" y="979582"/>
-                </a:lnTo>
-                <a:close/>
-                <a:lnTo>
-                  <a:pt x="133949" y="973316"/>
-                </a:lnTo>
-                <a:close/>
-                <a:lnTo>
-                  <a:pt x="139315" y="967103"/>
-                </a:lnTo>
-                <a:close/>
-                <a:lnTo>
-                  <a:pt x="144681" y="960940"/>
-                </a:lnTo>
-                <a:close/>
-                <a:lnTo>
-                  <a:pt x="150048" y="954827"/>
-                </a:lnTo>
-                <a:close/>
-                <a:lnTo>
-                  <a:pt x="155414" y="948764"/>
-                </a:lnTo>
-                <a:close/>
-                <a:lnTo>
-                  <a:pt x="160779" y="942748"/>
-                </a:lnTo>
-                <a:close/>
-                <a:lnTo>
-                  <a:pt x="166143" y="936779"/>
-                </a:lnTo>
-                <a:close/>
-                <a:lnTo>
-                  <a:pt x="171504" y="930856"/>
-                </a:lnTo>
-                <a:close/>
-                <a:lnTo>
-                  <a:pt x="176862" y="924979"/>
-                </a:lnTo>
-                <a:close/>
-                <a:lnTo>
-                  <a:pt x="182217" y="919145"/>
-                </a:lnTo>
-                <a:close/>
-                <a:lnTo>
-                  <a:pt x="187567" y="913355"/>
-                </a:lnTo>
-                <a:close/>
-                <a:lnTo>
-                  <a:pt x="192913" y="907606"/>
-                </a:lnTo>
-                <a:close/>
-                <a:lnTo>
-                  <a:pt x="198253" y="901900"/>
-                </a:lnTo>
-                <a:close/>
-                <a:lnTo>
-                  <a:pt x="203587" y="896233"/>
-                </a:lnTo>
-                <a:close/>
-                <a:lnTo>
-                  <a:pt x="208915" y="890606"/>
-                </a:lnTo>
-                <a:close/>
-                <a:lnTo>
-                  <a:pt x="214238" y="885019"/>
-                </a:lnTo>
-                <a:close/>
-                <a:lnTo>
-                  <a:pt x="219557" y="879471"/>
-                </a:lnTo>
-                <a:close/>
-                <a:lnTo>
-                  <a:pt x="224874" y="873961"/>
-                </a:lnTo>
-                <a:close/>
-                <a:lnTo>
-                  <a:pt x="230190" y="868490"/>
-                </a:lnTo>
-                <a:close/>
-                <a:lnTo>
-                  <a:pt x="235504" y="863057"/>
-                </a:lnTo>
-                <a:close/>
-                <a:lnTo>
-                  <a:pt x="240819" y="857661"/>
-                </a:lnTo>
-                <a:close/>
-                <a:lnTo>
-                  <a:pt x="246136" y="852303"/>
-                </a:lnTo>
-                <a:close/>
-                <a:lnTo>
-                  <a:pt x="251455" y="846982"/>
-                </a:lnTo>
-                <a:close/>
-                <a:lnTo>
-                  <a:pt x="256777" y="841698"/>
-                </a:lnTo>
-                <a:close/>
-                <a:lnTo>
-                  <a:pt x="262104" y="836450"/>
-                </a:lnTo>
-                <a:close/>
-                <a:lnTo>
-                  <a:pt x="267437" y="831238"/>
-                </a:lnTo>
-                <a:close/>
-                <a:lnTo>
-                  <a:pt x="272776" y="826062"/>
-                </a:lnTo>
-                <a:close/>
-                <a:lnTo>
-                  <a:pt x="278120" y="820921"/>
-                </a:lnTo>
-                <a:close/>
-                <a:lnTo>
-                  <a:pt x="283469" y="815814"/>
-                </a:lnTo>
-                <a:close/>
-                <a:lnTo>
-                  <a:pt x="288823" y="810742"/>
-                </a:lnTo>
-                <a:close/>
-                <a:lnTo>
-                  <a:pt x="294181" y="805703"/>
-                </a:lnTo>
-                <a:close/>
-                <a:lnTo>
-                  <a:pt x="299541" y="800697"/>
-                </a:lnTo>
-                <a:close/>
-                <a:lnTo>
-                  <a:pt x="304904" y="795723"/>
-                </a:lnTo>
-                <a:close/>
-                <a:lnTo>
-                  <a:pt x="310269" y="790782"/>
-                </a:lnTo>
-                <a:close/>
-                <a:lnTo>
-                  <a:pt x="315635" y="785872"/>
-                </a:lnTo>
-                <a:close/>
-                <a:lnTo>
-                  <a:pt x="321002" y="780993"/>
-                </a:lnTo>
-                <a:close/>
-                <a:lnTo>
-                  <a:pt x="326368" y="776144"/>
-                </a:lnTo>
-                <a:close/>
-                <a:lnTo>
-                  <a:pt x="331734" y="771325"/>
-                </a:lnTo>
-                <a:close/>
-                <a:lnTo>
-                  <a:pt x="337098" y="766536"/>
-                </a:lnTo>
-                <a:close/>
-                <a:lnTo>
-                  <a:pt x="342461" y="761775"/>
-                </a:lnTo>
-                <a:close/>
-                <a:lnTo>
-                  <a:pt x="347823" y="757043"/>
-                </a:lnTo>
-                <a:close/>
-                <a:lnTo>
-                  <a:pt x="353183" y="752339"/>
-                </a:lnTo>
-                <a:close/>
-                <a:lnTo>
-                  <a:pt x="358542" y="747663"/>
-                </a:lnTo>
-                <a:close/>
-                <a:lnTo>
-                  <a:pt x="363900" y="743014"/>
-                </a:lnTo>
-                <a:close/>
-                <a:lnTo>
-                  <a:pt x="369257" y="738392"/>
-                </a:lnTo>
-                <a:close/>
-                <a:lnTo>
-                  <a:pt x="374613" y="733797"/>
-                </a:lnTo>
-                <a:close/>
-                <a:lnTo>
-                  <a:pt x="379969" y="729227"/>
-                </a:lnTo>
-                <a:close/>
-                <a:lnTo>
-                  <a:pt x="385324" y="724684"/>
-                </a:lnTo>
-                <a:close/>
-                <a:lnTo>
-                  <a:pt x="390679" y="720165"/>
-                </a:lnTo>
-                <a:close/>
-                <a:lnTo>
-                  <a:pt x="396034" y="715672"/>
-                </a:lnTo>
-                <a:close/>
-                <a:lnTo>
-                  <a:pt x="401389" y="711203"/>
-                </a:lnTo>
-                <a:close/>
-                <a:lnTo>
-                  <a:pt x="406743" y="706758"/>
-                </a:lnTo>
-                <a:close/>
-                <a:lnTo>
-                  <a:pt x="412098" y="702337"/>
-                </a:lnTo>
-                <a:close/>
-                <a:lnTo>
-                  <a:pt x="417453" y="697937"/>
-                </a:lnTo>
-                <a:close/>
-                <a:lnTo>
-                  <a:pt x="422809" y="693560"/>
-                </a:lnTo>
-                <a:close/>
-                <a:lnTo>
-                  <a:pt x="428165" y="689204"/>
-                </a:lnTo>
-                <a:close/>
-                <a:lnTo>
-                  <a:pt x="433522" y="684869"/>
-                </a:lnTo>
-                <a:close/>
-                <a:lnTo>
-                  <a:pt x="438879" y="680553"/>
-                </a:lnTo>
-                <a:close/>
-                <a:lnTo>
-                  <a:pt x="444238" y="676257"/>
-                </a:lnTo>
-                <a:close/>
-                <a:lnTo>
-                  <a:pt x="449597" y="671979"/>
-                </a:lnTo>
-                <a:close/>
-                <a:lnTo>
-                  <a:pt x="454958" y="667718"/>
-                </a:lnTo>
-                <a:close/>
-                <a:lnTo>
-                  <a:pt x="460320" y="663474"/>
-                </a:lnTo>
-                <a:close/>
-                <a:lnTo>
-                  <a:pt x="465684" y="659247"/>
-                </a:lnTo>
-                <a:close/>
-                <a:lnTo>
-                  <a:pt x="471049" y="655035"/>
-                </a:lnTo>
-                <a:close/>
-                <a:lnTo>
-                  <a:pt x="476415" y="650839"/>
-                </a:lnTo>
-                <a:close/>
-                <a:lnTo>
-                  <a:pt x="481781" y="646659"/>
-                </a:lnTo>
-                <a:close/>
-                <a:lnTo>
-                  <a:pt x="487148" y="642496"/>
-                </a:lnTo>
-                <a:close/>
-                <a:lnTo>
-                  <a:pt x="492513" y="638349"/>
-                </a:lnTo>
-                <a:close/>
-                <a:lnTo>
-                  <a:pt x="497877" y="634220"/>
-                </a:lnTo>
-                <a:close/>
-                <a:lnTo>
-                  <a:pt x="503239" y="630108"/>
-                </a:lnTo>
-                <a:close/>
-                <a:lnTo>
-                  <a:pt x="508599" y="626015"/>
-                </a:lnTo>
-                <a:close/>
-                <a:lnTo>
-                  <a:pt x="513954" y="621940"/>
-                </a:lnTo>
-                <a:close/>
-                <a:lnTo>
-                  <a:pt x="519306" y="617883"/>
-                </a:lnTo>
-                <a:close/>
-                <a:lnTo>
-                  <a:pt x="524653" y="613846"/>
-                </a:lnTo>
-                <a:close/>
-                <a:lnTo>
-                  <a:pt x="529995" y="609829"/>
-                </a:lnTo>
-                <a:close/>
-                <a:lnTo>
-                  <a:pt x="535330" y="605832"/>
-                </a:lnTo>
-                <a:close/>
-                <a:lnTo>
-                  <a:pt x="540660" y="601854"/>
-                </a:lnTo>
-                <a:close/>
-                <a:lnTo>
-                  <a:pt x="545984" y="597896"/>
-                </a:lnTo>
-                <a:close/>
-                <a:lnTo>
-                  <a:pt x="551305" y="593956"/>
-                </a:lnTo>
-                <a:close/>
-                <a:lnTo>
-                  <a:pt x="556622" y="590034"/>
-                </a:lnTo>
-                <a:close/>
-                <a:lnTo>
-                  <a:pt x="561938" y="586128"/>
-                </a:lnTo>
-                <a:close/>
-                <a:lnTo>
-                  <a:pt x="567253" y="582237"/>
-                </a:lnTo>
-                <a:close/>
-                <a:lnTo>
-                  <a:pt x="572568" y="578362"/>
-                </a:lnTo>
-                <a:close/>
-                <a:lnTo>
-                  <a:pt x="577884" y="574500"/>
-                </a:lnTo>
-                <a:close/>
-                <a:lnTo>
-                  <a:pt x="583202" y="570651"/>
-                </a:lnTo>
-                <a:close/>
-                <a:lnTo>
-                  <a:pt x="588523" y="566815"/>
-                </a:lnTo>
-                <a:close/>
-                <a:lnTo>
-                  <a:pt x="593849" y="562990"/>
-                </a:lnTo>
-                <a:close/>
-                <a:lnTo>
-                  <a:pt x="599180" y="559175"/>
-                </a:lnTo>
-                <a:close/>
-                <a:lnTo>
-                  <a:pt x="604517" y="555370"/>
-                </a:lnTo>
-                <a:close/>
-                <a:lnTo>
-                  <a:pt x="609860" y="551575"/>
-                </a:lnTo>
-                <a:close/>
-                <a:lnTo>
-                  <a:pt x="615208" y="547789"/>
-                </a:lnTo>
-                <a:close/>
-                <a:lnTo>
-                  <a:pt x="620561" y="544014"/>
-                </a:lnTo>
-                <a:close/>
-                <a:lnTo>
-                  <a:pt x="625917" y="540249"/>
-                </a:lnTo>
-                <a:close/>
-                <a:lnTo>
-                  <a:pt x="631277" y="536495"/>
-                </a:lnTo>
-                <a:close/>
-                <a:lnTo>
-                  <a:pt x="636640" y="532751"/>
-                </a:lnTo>
-                <a:close/>
-                <a:lnTo>
-                  <a:pt x="642004" y="529019"/>
-                </a:lnTo>
-                <a:close/>
-                <a:lnTo>
-                  <a:pt x="647370" y="525299"/>
-                </a:lnTo>
-                <a:close/>
-                <a:lnTo>
-                  <a:pt x="652736" y="521590"/>
-                </a:lnTo>
-                <a:close/>
-                <a:lnTo>
-                  <a:pt x="658103" y="517893"/>
-                </a:lnTo>
-                <a:close/>
-                <a:lnTo>
-                  <a:pt x="663468" y="514208"/>
-                </a:lnTo>
-                <a:close/>
-                <a:lnTo>
-                  <a:pt x="668833" y="510536"/>
-                </a:lnTo>
-                <a:close/>
-                <a:lnTo>
-                  <a:pt x="674195" y="506876"/>
-                </a:lnTo>
-                <a:close/>
-                <a:lnTo>
-                  <a:pt x="679556" y="503229"/>
-                </a:lnTo>
-                <a:close/>
-                <a:lnTo>
-                  <a:pt x="684916" y="499593"/>
-                </a:lnTo>
-                <a:close/>
-                <a:lnTo>
-                  <a:pt x="690275" y="495970"/>
-                </a:lnTo>
-                <a:close/>
-                <a:lnTo>
-                  <a:pt x="695633" y="492359"/>
-                </a:lnTo>
-                <a:close/>
-                <a:lnTo>
-                  <a:pt x="700990" y="488760"/>
-                </a:lnTo>
-                <a:close/>
-                <a:lnTo>
-                  <a:pt x="706347" y="485173"/>
-                </a:lnTo>
-                <a:close/>
-                <a:lnTo>
-                  <a:pt x="711703" y="481597"/>
-                </a:lnTo>
-                <a:close/>
-                <a:lnTo>
-                  <a:pt x="717058" y="478032"/>
-                </a:lnTo>
-                <a:close/>
-                <a:lnTo>
-                  <a:pt x="722414" y="474479"/>
-                </a:lnTo>
-                <a:close/>
-                <a:lnTo>
-                  <a:pt x="727770" y="470937"/>
-                </a:lnTo>
-                <a:close/>
-                <a:lnTo>
-                  <a:pt x="733126" y="467406"/>
-                </a:lnTo>
-                <a:close/>
-                <a:lnTo>
-                  <a:pt x="738482" y="463885"/>
-                </a:lnTo>
-                <a:close/>
-                <a:lnTo>
-                  <a:pt x="743839" y="460376"/>
-                </a:lnTo>
-                <a:close/>
-                <a:lnTo>
-                  <a:pt x="749196" y="456879"/>
-                </a:lnTo>
-                <a:close/>
-                <a:lnTo>
-                  <a:pt x="754553" y="453393"/>
-                </a:lnTo>
-                <a:close/>
-                <a:lnTo>
-                  <a:pt x="759911" y="449919"/>
-                </a:lnTo>
-                <a:close/>
-                <a:lnTo>
-                  <a:pt x="765269" y="446458"/>
-                </a:lnTo>
-                <a:close/>
-                <a:lnTo>
-                  <a:pt x="770627" y="443009"/>
-                </a:lnTo>
-                <a:close/>
-                <a:lnTo>
-                  <a:pt x="775986" y="439573"/>
-                </a:lnTo>
-                <a:close/>
-                <a:lnTo>
-                  <a:pt x="781344" y="436151"/>
-                </a:lnTo>
-                <a:close/>
-                <a:lnTo>
-                  <a:pt x="786703" y="432742"/>
-                </a:lnTo>
-                <a:close/>
-                <a:lnTo>
-                  <a:pt x="792062" y="429347"/>
-                </a:lnTo>
-                <a:close/>
-                <a:lnTo>
-                  <a:pt x="797421" y="425967"/>
-                </a:lnTo>
-                <a:close/>
-                <a:lnTo>
-                  <a:pt x="802779" y="422601"/>
-                </a:lnTo>
-                <a:close/>
-                <a:lnTo>
-                  <a:pt x="808138" y="419249"/>
-                </a:lnTo>
-                <a:close/>
-                <a:lnTo>
-                  <a:pt x="813497" y="415910"/>
-                </a:lnTo>
-                <a:close/>
-                <a:lnTo>
-                  <a:pt x="818856" y="412583"/>
-                </a:lnTo>
-                <a:close/>
-                <a:lnTo>
-                  <a:pt x="824214" y="409267"/>
-                </a:lnTo>
-                <a:close/>
-                <a:lnTo>
-                  <a:pt x="829573" y="405961"/>
-                </a:lnTo>
-                <a:close/>
-                <a:lnTo>
-                  <a:pt x="834931" y="402663"/>
-                </a:lnTo>
-                <a:close/>
-                <a:lnTo>
-                  <a:pt x="840289" y="399373"/>
-                </a:lnTo>
-                <a:close/>
-                <a:lnTo>
-                  <a:pt x="845647" y="396090"/>
-                </a:lnTo>
-                <a:close/>
-                <a:lnTo>
-                  <a:pt x="851004" y="392812"/>
-                </a:lnTo>
-                <a:close/>
-                <a:lnTo>
-                  <a:pt x="856361" y="389538"/>
-                </a:lnTo>
-                <a:close/>
-                <a:lnTo>
-                  <a:pt x="861718" y="386267"/>
-                </a:lnTo>
-                <a:close/>
-                <a:lnTo>
-                  <a:pt x="867074" y="382998"/>
-                </a:lnTo>
-                <a:close/>
-                <a:lnTo>
-                  <a:pt x="872430" y="379730"/>
-                </a:lnTo>
-                <a:close/>
-                <a:lnTo>
-                  <a:pt x="877786" y="376465"/>
-                </a:lnTo>
-                <a:close/>
-                <a:lnTo>
-                  <a:pt x="883142" y="373203"/>
-                </a:lnTo>
-                <a:close/>
-                <a:lnTo>
-                  <a:pt x="888497" y="369947"/>
-                </a:lnTo>
-                <a:close/>
-                <a:lnTo>
-                  <a:pt x="893853" y="366696"/>
-                </a:lnTo>
-                <a:close/>
-                <a:lnTo>
-                  <a:pt x="899210" y="363453"/>
-                </a:lnTo>
-                <a:close/>
-                <a:lnTo>
-                  <a:pt x="904567" y="360218"/>
-                </a:lnTo>
-                <a:close/>
-                <a:lnTo>
-                  <a:pt x="909925" y="356993"/>
-                </a:lnTo>
-                <a:close/>
-                <a:lnTo>
-                  <a:pt x="915284" y="353779"/>
-                </a:lnTo>
-                <a:close/>
-                <a:lnTo>
-                  <a:pt x="920644" y="350578"/>
-                </a:lnTo>
-                <a:close/>
-                <a:lnTo>
-                  <a:pt x="926005" y="347390"/>
-                </a:lnTo>
-                <a:close/>
-                <a:lnTo>
-                  <a:pt x="931367" y="344218"/>
-                </a:lnTo>
-                <a:close/>
-                <a:lnTo>
-                  <a:pt x="936732" y="341061"/>
-                </a:lnTo>
-                <a:close/>
-                <a:lnTo>
-                  <a:pt x="942097" y="337921"/>
-                </a:lnTo>
-                <a:close/>
-                <a:lnTo>
-                  <a:pt x="947464" y="334795"/>
-                </a:lnTo>
-                <a:close/>
-                <a:lnTo>
-                  <a:pt x="952830" y="331683"/>
-                </a:lnTo>
-                <a:close/>
-                <a:lnTo>
-                  <a:pt x="958196" y="328585"/>
-                </a:lnTo>
-                <a:close/>
-                <a:lnTo>
-                  <a:pt x="963560" y="325497"/>
-                </a:lnTo>
-                <a:close/>
-                <a:lnTo>
-                  <a:pt x="968923" y="322420"/>
-                </a:lnTo>
-                <a:close/>
-                <a:lnTo>
-                  <a:pt x="974283" y="319353"/>
-                </a:lnTo>
-                <a:close/>
-                <a:lnTo>
-                  <a:pt x="979639" y="316293"/>
-                </a:lnTo>
-                <a:close/>
-                <a:lnTo>
-                  <a:pt x="984992" y="313241"/>
-                </a:lnTo>
-                <a:close/>
-                <a:lnTo>
-                  <a:pt x="990340" y="310195"/>
-                </a:lnTo>
-                <a:close/>
-                <a:lnTo>
-                  <a:pt x="995683" y="307154"/>
-                </a:lnTo>
-                <a:close/>
-                <a:lnTo>
-                  <a:pt x="1001020" y="304116"/>
-                </a:lnTo>
-                <a:close/>
-                <a:lnTo>
-                  <a:pt x="1006351" y="301081"/>
-                </a:lnTo>
-                <a:close/>
-                <a:lnTo>
-                  <a:pt x="1011677" y="298050"/>
-                </a:lnTo>
-                <a:close/>
-                <a:lnTo>
-                  <a:pt x="1016998" y="295022"/>
-                </a:lnTo>
-                <a:close/>
-                <a:lnTo>
-                  <a:pt x="1022316" y="291998"/>
-                </a:lnTo>
-                <a:close/>
-                <a:lnTo>
-                  <a:pt x="1027632" y="288979"/>
-                </a:lnTo>
-                <a:close/>
-                <a:lnTo>
-                  <a:pt x="1032947" y="285964"/>
-                </a:lnTo>
-                <a:close/>
-                <a:lnTo>
-                  <a:pt x="1038262" y="282954"/>
-                </a:lnTo>
-                <a:close/>
-                <a:lnTo>
-                  <a:pt x="1043578" y="279950"/>
-                </a:lnTo>
-                <a:close/>
-                <a:lnTo>
-                  <a:pt x="1048895" y="276952"/>
-                </a:lnTo>
-                <a:close/>
-                <a:lnTo>
-                  <a:pt x="1054216" y="273960"/>
-                </a:lnTo>
-                <a:close/>
-                <a:lnTo>
-                  <a:pt x="1059540" y="270974"/>
-                </a:lnTo>
-                <a:close/>
-                <a:lnTo>
-                  <a:pt x="1064870" y="267996"/>
-                </a:lnTo>
-                <a:close/>
-                <a:lnTo>
-                  <a:pt x="1070205" y="265026"/>
-                </a:lnTo>
-                <a:close/>
-                <a:lnTo>
-                  <a:pt x="1075547" y="262062"/>
-                </a:lnTo>
-                <a:close/>
-                <a:lnTo>
-                  <a:pt x="1080894" y="259105"/>
-                </a:lnTo>
-                <a:close/>
-                <a:lnTo>
-                  <a:pt x="1086246" y="256155"/>
-                </a:lnTo>
-                <a:close/>
-                <a:lnTo>
-                  <a:pt x="1091601" y="253211"/>
-                </a:lnTo>
-                <a:close/>
-                <a:lnTo>
-                  <a:pt x="1096961" y="250273"/>
-                </a:lnTo>
-                <a:close/>
-                <a:lnTo>
-                  <a:pt x="1102323" y="247339"/>
-                </a:lnTo>
-                <a:close/>
-                <a:lnTo>
-                  <a:pt x="1107687" y="244411"/>
-                </a:lnTo>
-                <a:close/>
-                <a:lnTo>
-                  <a:pt x="1113052" y="241486"/>
-                </a:lnTo>
-                <a:close/>
-                <a:lnTo>
-                  <a:pt x="1118419" y="238566"/>
-                </a:lnTo>
-                <a:close/>
-                <a:lnTo>
-                  <a:pt x="1123785" y="235649"/>
-                </a:lnTo>
-                <a:close/>
-                <a:lnTo>
-                  <a:pt x="1129151" y="232734"/>
-                </a:lnTo>
-                <a:close/>
-                <a:lnTo>
-                  <a:pt x="1134516" y="229823"/>
-                </a:lnTo>
-                <a:close/>
-                <a:lnTo>
-                  <a:pt x="1139880" y="226914"/>
-                </a:lnTo>
-                <a:close/>
-                <a:lnTo>
-                  <a:pt x="1145242" y="224009"/>
-                </a:lnTo>
-                <a:close/>
-                <a:lnTo>
-                  <a:pt x="1150603" y="221109"/>
-                </a:lnTo>
-                <a:close/>
-                <a:lnTo>
-                  <a:pt x="1155962" y="218215"/>
-                </a:lnTo>
-                <a:close/>
-                <a:lnTo>
-                  <a:pt x="1161321" y="215330"/>
-                </a:lnTo>
-                <a:close/>
-                <a:lnTo>
-                  <a:pt x="1166678" y="212453"/>
-                </a:lnTo>
-                <a:close/>
-                <a:lnTo>
-                  <a:pt x="1172035" y="209588"/>
-                </a:lnTo>
-                <a:close/>
-                <a:lnTo>
-                  <a:pt x="1177391" y="206734"/>
-                </a:lnTo>
-                <a:close/>
-                <a:lnTo>
-                  <a:pt x="1182747" y="203893"/>
-                </a:lnTo>
-                <a:close/>
-                <a:lnTo>
-                  <a:pt x="1188102" y="201067"/>
-                </a:lnTo>
-                <a:close/>
-                <a:lnTo>
-                  <a:pt x="1193457" y="198256"/>
-                </a:lnTo>
-                <a:close/>
-                <a:lnTo>
-                  <a:pt x="1198811" y="195463"/>
-                </a:lnTo>
-                <a:close/>
-                <a:lnTo>
-                  <a:pt x="1204166" y="192688"/>
-                </a:lnTo>
-                <a:close/>
-                <a:lnTo>
-                  <a:pt x="1209521" y="189931"/>
-                </a:lnTo>
-                <a:close/>
-                <a:lnTo>
-                  <a:pt x="1214876" y="187188"/>
-                </a:lnTo>
-                <a:close/>
-                <a:lnTo>
-                  <a:pt x="1220231" y="184459"/>
-                </a:lnTo>
-                <a:close/>
-                <a:lnTo>
-                  <a:pt x="1225587" y="181741"/>
-                </a:lnTo>
-                <a:close/>
-                <a:lnTo>
-                  <a:pt x="1230943" y="179032"/>
-                </a:lnTo>
-                <a:close/>
-                <a:lnTo>
-                  <a:pt x="1236300" y="176330"/>
-                </a:lnTo>
-                <a:close/>
-                <a:lnTo>
-                  <a:pt x="1241658" y="173633"/>
-                </a:lnTo>
-                <a:close/>
-                <a:lnTo>
-                  <a:pt x="1247017" y="170938"/>
-                </a:lnTo>
-                <a:close/>
-                <a:lnTo>
-                  <a:pt x="1252377" y="168244"/>
-                </a:lnTo>
-                <a:close/>
-                <a:lnTo>
-                  <a:pt x="1257739" y="165549"/>
-                </a:lnTo>
-                <a:close/>
-                <a:lnTo>
-                  <a:pt x="1263102" y="162850"/>
-                </a:lnTo>
-                <a:close/>
-                <a:lnTo>
-                  <a:pt x="1268466" y="160145"/>
-                </a:lnTo>
-                <a:close/>
-                <a:lnTo>
-                  <a:pt x="1273832" y="157434"/>
-                </a:lnTo>
-                <a:close/>
-                <a:lnTo>
-                  <a:pt x="1279198" y="154718"/>
-                </a:lnTo>
-                <a:close/>
-                <a:lnTo>
-                  <a:pt x="1284565" y="151997"/>
-                </a:lnTo>
-                <a:close/>
-                <a:lnTo>
-                  <a:pt x="1289931" y="149274"/>
-                </a:lnTo>
-                <a:close/>
-                <a:lnTo>
-                  <a:pt x="1295296" y="146550"/>
-                </a:lnTo>
-                <a:close/>
-                <a:lnTo>
-                  <a:pt x="1300659" y="143825"/>
-                </a:lnTo>
-                <a:close/>
-                <a:lnTo>
-                  <a:pt x="1306019" y="141102"/>
-                </a:lnTo>
-                <a:close/>
-                <a:lnTo>
-                  <a:pt x="1311377" y="138381"/>
-                </a:lnTo>
-                <a:close/>
-                <a:lnTo>
-                  <a:pt x="1316731" y="135664"/>
-                </a:lnTo>
-                <a:close/>
-                <a:lnTo>
-                  <a:pt x="1322080" y="132953"/>
-                </a:lnTo>
-                <a:close/>
-                <a:lnTo>
-                  <a:pt x="1327424" y="130248"/>
-                </a:lnTo>
-                <a:close/>
-                <a:lnTo>
-                  <a:pt x="1332763" y="127551"/>
-                </a:lnTo>
-                <a:close/>
-                <a:lnTo>
-                  <a:pt x="1338096" y="124863"/>
-                </a:lnTo>
-                <a:close/>
-                <a:lnTo>
-                  <a:pt x="1343423" y="122184"/>
-                </a:lnTo>
-                <a:close/>
-                <a:lnTo>
-                  <a:pt x="1348745" y="119514"/>
-                </a:lnTo>
-                <a:close/>
-                <a:lnTo>
-                  <a:pt x="1354064" y="116852"/>
-                </a:lnTo>
-                <a:close/>
-                <a:lnTo>
-                  <a:pt x="1359381" y="114198"/>
-                </a:lnTo>
-                <a:close/>
-                <a:lnTo>
-                  <a:pt x="1364696" y="111552"/>
-                </a:lnTo>
-                <a:close/>
-                <a:lnTo>
-                  <a:pt x="1370010" y="108913"/>
-                </a:lnTo>
-                <a:close/>
-                <a:lnTo>
-                  <a:pt x="1375326" y="106281"/>
-                </a:lnTo>
-                <a:close/>
-                <a:lnTo>
-                  <a:pt x="1380643" y="103655"/>
-                </a:lnTo>
-                <a:close/>
-                <a:lnTo>
-                  <a:pt x="1385962" y="101035"/>
-                </a:lnTo>
-                <a:close/>
-                <a:lnTo>
-                  <a:pt x="1391285" y="98421"/>
-                </a:lnTo>
-                <a:close/>
-                <a:lnTo>
-                  <a:pt x="1396613" y="95812"/>
-                </a:lnTo>
-                <a:close/>
-                <a:lnTo>
-                  <a:pt x="1401947" y="93208"/>
-                </a:lnTo>
-                <a:close/>
-                <a:lnTo>
-                  <a:pt x="1407287" y="90608"/>
-                </a:lnTo>
-                <a:close/>
-                <a:lnTo>
-                  <a:pt x="1412633" y="88013"/>
-                </a:lnTo>
-                <a:close/>
-                <a:lnTo>
-                  <a:pt x="1417983" y="85423"/>
-                </a:lnTo>
-                <a:close/>
-                <a:lnTo>
-                  <a:pt x="1423338" y="82839"/>
-                </a:lnTo>
-                <a:close/>
-                <a:lnTo>
-                  <a:pt x="1428696" y="80261"/>
-                </a:lnTo>
-                <a:close/>
-                <a:lnTo>
-                  <a:pt x="1434057" y="77688"/>
-                </a:lnTo>
-                <a:close/>
-                <a:lnTo>
-                  <a:pt x="1439421" y="75122"/>
-                </a:lnTo>
-                <a:close/>
-                <a:lnTo>
-                  <a:pt x="1444786" y="72561"/>
-                </a:lnTo>
-                <a:close/>
-                <a:lnTo>
-                  <a:pt x="1450152" y="70008"/>
-                </a:lnTo>
-                <a:close/>
-                <a:lnTo>
-                  <a:pt x="1455519" y="67461"/>
-                </a:lnTo>
-                <a:close/>
-                <a:lnTo>
-                  <a:pt x="1460885" y="64922"/>
-                </a:lnTo>
-                <a:close/>
-                <a:lnTo>
-                  <a:pt x="1466251" y="62390"/>
-                </a:lnTo>
-                <a:close/>
-                <a:lnTo>
-                  <a:pt x="1471615" y="59866"/>
-                </a:lnTo>
-                <a:close/>
-                <a:lnTo>
-                  <a:pt x="1476977" y="57349"/>
-                </a:lnTo>
-                <a:close/>
-                <a:lnTo>
-                  <a:pt x="1482338" y="54838"/>
-                </a:lnTo>
-                <a:close/>
-                <a:lnTo>
-                  <a:pt x="1487698" y="52333"/>
-                </a:lnTo>
-                <a:close/>
-                <a:lnTo>
-                  <a:pt x="1493057" y="49834"/>
-                </a:lnTo>
-                <a:close/>
-                <a:lnTo>
-                  <a:pt x="1498415" y="47339"/>
-                </a:lnTo>
-                <a:close/>
-                <a:lnTo>
-                  <a:pt x="1503772" y="44848"/>
-                </a:lnTo>
-                <a:close/>
-                <a:lnTo>
-                  <a:pt x="1509128" y="42361"/>
-                </a:lnTo>
-                <a:close/>
-                <a:lnTo>
-                  <a:pt x="1514484" y="39876"/>
-                </a:lnTo>
-                <a:close/>
-                <a:lnTo>
-                  <a:pt x="1519839" y="37394"/>
-                </a:lnTo>
-                <a:close/>
-                <a:lnTo>
-                  <a:pt x="1525194" y="34913"/>
-                </a:lnTo>
-                <a:close/>
-                <a:lnTo>
-                  <a:pt x="1530548" y="32433"/>
-                </a:lnTo>
-                <a:close/>
-                <a:lnTo>
-                  <a:pt x="1535903" y="29954"/>
-                </a:lnTo>
-                <a:close/>
-                <a:lnTo>
-                  <a:pt x="1541258" y="27474"/>
-                </a:lnTo>
-                <a:close/>
-                <a:lnTo>
-                  <a:pt x="1546613" y="24993"/>
-                </a:lnTo>
-                <a:close/>
-                <a:lnTo>
-                  <a:pt x="1551968" y="22511"/>
-                </a:lnTo>
-                <a:close/>
-                <a:lnTo>
-                  <a:pt x="1557323" y="20026"/>
-                </a:lnTo>
-                <a:close/>
-                <a:lnTo>
-                  <a:pt x="1562680" y="17539"/>
-                </a:lnTo>
-                <a:close/>
-                <a:lnTo>
-                  <a:pt x="1568037" y="15049"/>
-                </a:lnTo>
-                <a:close/>
-                <a:lnTo>
-                  <a:pt x="1573394" y="12554"/>
-                </a:lnTo>
-                <a:close/>
-                <a:lnTo>
-                  <a:pt x="1578753" y="10055"/>
-                </a:lnTo>
-                <a:close/>
-                <a:lnTo>
-                  <a:pt x="1584113" y="7551"/>
-                </a:lnTo>
-                <a:close/>
-                <a:lnTo>
-                  <a:pt x="1589474" y="5041"/>
-                </a:lnTo>
-                <a:close/>
-                <a:lnTo>
-                  <a:pt x="1594836" y="2524"/>
+                  <a:pt x="2671" y="1031027"/>
+                </a:lnTo>
+                <a:close/>
+                <a:lnTo>
+                  <a:pt x="5343" y="1028612"/>
+                </a:lnTo>
+                <a:close/>
+                <a:lnTo>
+                  <a:pt x="8014" y="1026203"/>
+                </a:lnTo>
+                <a:close/>
+                <a:lnTo>
+                  <a:pt x="10686" y="1023800"/>
+                </a:lnTo>
+                <a:close/>
+                <a:lnTo>
+                  <a:pt x="13357" y="1021404"/>
+                </a:lnTo>
+                <a:close/>
+                <a:lnTo>
+                  <a:pt x="16029" y="1019014"/>
+                </a:lnTo>
+                <a:close/>
+                <a:lnTo>
+                  <a:pt x="18700" y="1016630"/>
+                </a:lnTo>
+                <a:close/>
+                <a:lnTo>
+                  <a:pt x="21372" y="1014253"/>
+                </a:lnTo>
+                <a:close/>
+                <a:lnTo>
+                  <a:pt x="24043" y="1011882"/>
+                </a:lnTo>
+                <a:close/>
+                <a:lnTo>
+                  <a:pt x="26715" y="1009517"/>
+                </a:lnTo>
+                <a:close/>
+                <a:lnTo>
+                  <a:pt x="29386" y="1007158"/>
+                </a:lnTo>
+                <a:close/>
+                <a:lnTo>
+                  <a:pt x="32057" y="1004805"/>
+                </a:lnTo>
+                <a:close/>
+                <a:lnTo>
+                  <a:pt x="34729" y="1002458"/>
+                </a:lnTo>
+                <a:close/>
+                <a:lnTo>
+                  <a:pt x="37400" y="1000117"/>
+                </a:lnTo>
+                <a:close/>
+                <a:lnTo>
+                  <a:pt x="40072" y="997782"/>
+                </a:lnTo>
+                <a:close/>
+                <a:lnTo>
+                  <a:pt x="42743" y="995452"/>
+                </a:lnTo>
+                <a:close/>
+                <a:lnTo>
+                  <a:pt x="45415" y="993129"/>
+                </a:lnTo>
+                <a:close/>
+                <a:lnTo>
+                  <a:pt x="48086" y="990811"/>
+                </a:lnTo>
+                <a:close/>
+                <a:lnTo>
+                  <a:pt x="50758" y="988498"/>
+                </a:lnTo>
+                <a:close/>
+                <a:lnTo>
+                  <a:pt x="53429" y="986192"/>
+                </a:lnTo>
+                <a:close/>
+                <a:lnTo>
+                  <a:pt x="56101" y="983890"/>
+                </a:lnTo>
+                <a:close/>
+                <a:lnTo>
+                  <a:pt x="58772" y="981595"/>
+                </a:lnTo>
+                <a:close/>
+                <a:lnTo>
+                  <a:pt x="61443" y="979304"/>
+                </a:lnTo>
+                <a:close/>
+                <a:lnTo>
+                  <a:pt x="64115" y="977019"/>
+                </a:lnTo>
+                <a:close/>
+                <a:lnTo>
+                  <a:pt x="66786" y="974739"/>
+                </a:lnTo>
+                <a:close/>
+                <a:lnTo>
+                  <a:pt x="69458" y="972465"/>
+                </a:lnTo>
+                <a:close/>
+                <a:lnTo>
+                  <a:pt x="72129" y="970196"/>
+                </a:lnTo>
+                <a:close/>
+                <a:lnTo>
+                  <a:pt x="74801" y="967932"/>
+                </a:lnTo>
+                <a:close/>
+                <a:lnTo>
+                  <a:pt x="77472" y="965673"/>
+                </a:lnTo>
+                <a:close/>
+                <a:lnTo>
+                  <a:pt x="80144" y="963419"/>
+                </a:lnTo>
+                <a:close/>
+                <a:lnTo>
+                  <a:pt x="82815" y="961170"/>
+                </a:lnTo>
+                <a:close/>
+                <a:lnTo>
+                  <a:pt x="85486" y="958925"/>
+                </a:lnTo>
+                <a:close/>
+                <a:lnTo>
+                  <a:pt x="88158" y="956686"/>
+                </a:lnTo>
+                <a:close/>
+                <a:lnTo>
+                  <a:pt x="90829" y="954452"/>
+                </a:lnTo>
+                <a:close/>
+                <a:lnTo>
+                  <a:pt x="93501" y="952222"/>
+                </a:lnTo>
+                <a:close/>
+                <a:lnTo>
+                  <a:pt x="96172" y="949997"/>
+                </a:lnTo>
+                <a:close/>
+                <a:lnTo>
+                  <a:pt x="98844" y="947777"/>
+                </a:lnTo>
+                <a:close/>
+                <a:lnTo>
+                  <a:pt x="101515" y="945562"/>
+                </a:lnTo>
+                <a:close/>
+                <a:lnTo>
+                  <a:pt x="104187" y="943351"/>
+                </a:lnTo>
+                <a:close/>
+                <a:lnTo>
+                  <a:pt x="106858" y="941145"/>
+                </a:lnTo>
+                <a:close/>
+                <a:lnTo>
+                  <a:pt x="109530" y="938943"/>
+                </a:lnTo>
+                <a:close/>
+                <a:lnTo>
+                  <a:pt x="112201" y="936746"/>
+                </a:lnTo>
+                <a:close/>
+                <a:lnTo>
+                  <a:pt x="114872" y="934554"/>
+                </a:lnTo>
+                <a:close/>
+                <a:lnTo>
+                  <a:pt x="117544" y="932366"/>
+                </a:lnTo>
+                <a:close/>
+                <a:lnTo>
+                  <a:pt x="120215" y="930182"/>
+                </a:lnTo>
+                <a:close/>
+                <a:lnTo>
+                  <a:pt x="122887" y="928003"/>
+                </a:lnTo>
+                <a:close/>
+                <a:lnTo>
+                  <a:pt x="125558" y="925828"/>
+                </a:lnTo>
+                <a:close/>
+                <a:lnTo>
+                  <a:pt x="128230" y="923657"/>
+                </a:lnTo>
+                <a:close/>
+                <a:lnTo>
+                  <a:pt x="130901" y="921491"/>
+                </a:lnTo>
+                <a:close/>
+                <a:lnTo>
+                  <a:pt x="133573" y="919329"/>
+                </a:lnTo>
+                <a:close/>
+                <a:lnTo>
+                  <a:pt x="136244" y="917171"/>
+                </a:lnTo>
+                <a:close/>
+                <a:lnTo>
+                  <a:pt x="138916" y="915017"/>
+                </a:lnTo>
+                <a:close/>
+                <a:lnTo>
+                  <a:pt x="141587" y="912867"/>
+                </a:lnTo>
+                <a:close/>
+                <a:lnTo>
+                  <a:pt x="144258" y="910722"/>
+                </a:lnTo>
+                <a:close/>
+                <a:lnTo>
+                  <a:pt x="146930" y="908581"/>
+                </a:lnTo>
+                <a:close/>
+                <a:lnTo>
+                  <a:pt x="149601" y="906443"/>
+                </a:lnTo>
+                <a:close/>
+                <a:lnTo>
+                  <a:pt x="152273" y="904310"/>
+                </a:lnTo>
+                <a:close/>
+                <a:lnTo>
+                  <a:pt x="154944" y="902181"/>
+                </a:lnTo>
+                <a:close/>
+                <a:lnTo>
+                  <a:pt x="157616" y="900055"/>
+                </a:lnTo>
+                <a:close/>
+                <a:lnTo>
+                  <a:pt x="160287" y="897934"/>
+                </a:lnTo>
+                <a:close/>
+                <a:lnTo>
+                  <a:pt x="162959" y="895816"/>
+                </a:lnTo>
+                <a:close/>
+                <a:lnTo>
+                  <a:pt x="165630" y="893703"/>
+                </a:lnTo>
+                <a:close/>
+                <a:lnTo>
+                  <a:pt x="168302" y="891593"/>
+                </a:lnTo>
+                <a:close/>
+                <a:lnTo>
+                  <a:pt x="170973" y="889487"/>
+                </a:lnTo>
+                <a:close/>
+                <a:lnTo>
+                  <a:pt x="173644" y="887385"/>
+                </a:lnTo>
+                <a:close/>
+                <a:lnTo>
+                  <a:pt x="176316" y="885286"/>
+                </a:lnTo>
+                <a:close/>
+                <a:lnTo>
+                  <a:pt x="178987" y="883192"/>
+                </a:lnTo>
+                <a:close/>
+                <a:lnTo>
+                  <a:pt x="181659" y="881101"/>
+                </a:lnTo>
+                <a:close/>
+                <a:lnTo>
+                  <a:pt x="184330" y="879013"/>
+                </a:lnTo>
+                <a:close/>
+                <a:lnTo>
+                  <a:pt x="187002" y="876930"/>
+                </a:lnTo>
+                <a:close/>
+                <a:lnTo>
+                  <a:pt x="189673" y="874850"/>
+                </a:lnTo>
+                <a:close/>
+                <a:lnTo>
+                  <a:pt x="192345" y="872773"/>
+                </a:lnTo>
+                <a:close/>
+                <a:lnTo>
+                  <a:pt x="195016" y="870700"/>
+                </a:lnTo>
+                <a:close/>
+                <a:lnTo>
+                  <a:pt x="197687" y="868631"/>
+                </a:lnTo>
+                <a:close/>
+                <a:lnTo>
+                  <a:pt x="200359" y="866565"/>
+                </a:lnTo>
+                <a:close/>
+                <a:lnTo>
+                  <a:pt x="203030" y="864502"/>
+                </a:lnTo>
+                <a:close/>
+                <a:lnTo>
+                  <a:pt x="205702" y="862443"/>
+                </a:lnTo>
+                <a:close/>
+                <a:lnTo>
+                  <a:pt x="208373" y="860387"/>
+                </a:lnTo>
+                <a:close/>
+                <a:lnTo>
+                  <a:pt x="211045" y="858335"/>
+                </a:lnTo>
+                <a:close/>
+                <a:lnTo>
+                  <a:pt x="213716" y="856286"/>
+                </a:lnTo>
+                <a:close/>
+                <a:lnTo>
+                  <a:pt x="216388" y="854241"/>
+                </a:lnTo>
+                <a:close/>
+                <a:lnTo>
+                  <a:pt x="219059" y="852198"/>
+                </a:lnTo>
+                <a:close/>
+                <a:lnTo>
+                  <a:pt x="221731" y="850159"/>
+                </a:lnTo>
+                <a:close/>
+                <a:lnTo>
+                  <a:pt x="224402" y="848124"/>
+                </a:lnTo>
+                <a:close/>
+                <a:lnTo>
+                  <a:pt x="227073" y="846091"/>
+                </a:lnTo>
+                <a:close/>
+                <a:lnTo>
+                  <a:pt x="229745" y="844062"/>
+                </a:lnTo>
+                <a:close/>
+                <a:lnTo>
+                  <a:pt x="232416" y="842036"/>
+                </a:lnTo>
+                <a:close/>
+                <a:lnTo>
+                  <a:pt x="235088" y="840013"/>
+                </a:lnTo>
+                <a:close/>
+                <a:lnTo>
+                  <a:pt x="237759" y="837994"/>
+                </a:lnTo>
+                <a:close/>
+                <a:lnTo>
+                  <a:pt x="240431" y="835977"/>
+                </a:lnTo>
+                <a:close/>
+                <a:lnTo>
+                  <a:pt x="243102" y="833964"/>
+                </a:lnTo>
+                <a:close/>
+                <a:lnTo>
+                  <a:pt x="245774" y="831954"/>
+                </a:lnTo>
+                <a:close/>
+                <a:lnTo>
+                  <a:pt x="248445" y="829947"/>
+                </a:lnTo>
+                <a:close/>
+                <a:lnTo>
+                  <a:pt x="251117" y="827943"/>
+                </a:lnTo>
+                <a:close/>
+                <a:lnTo>
+                  <a:pt x="253788" y="825942"/>
+                </a:lnTo>
+                <a:close/>
+                <a:lnTo>
+                  <a:pt x="256459" y="823944"/>
+                </a:lnTo>
+                <a:close/>
+                <a:lnTo>
+                  <a:pt x="259131" y="821949"/>
+                </a:lnTo>
+                <a:close/>
+                <a:lnTo>
+                  <a:pt x="261802" y="819957"/>
+                </a:lnTo>
+                <a:close/>
+                <a:lnTo>
+                  <a:pt x="264474" y="817967"/>
+                </a:lnTo>
+                <a:close/>
+                <a:lnTo>
+                  <a:pt x="267145" y="815981"/>
+                </a:lnTo>
+                <a:close/>
+                <a:lnTo>
+                  <a:pt x="269817" y="813998"/>
+                </a:lnTo>
+                <a:close/>
+                <a:lnTo>
+                  <a:pt x="272488" y="812018"/>
+                </a:lnTo>
+                <a:close/>
+                <a:lnTo>
+                  <a:pt x="275160" y="810041"/>
+                </a:lnTo>
+                <a:close/>
+                <a:lnTo>
+                  <a:pt x="277831" y="808066"/>
+                </a:lnTo>
+                <a:close/>
+                <a:lnTo>
+                  <a:pt x="280503" y="806094"/>
+                </a:lnTo>
+                <a:close/>
+                <a:lnTo>
+                  <a:pt x="283174" y="804125"/>
+                </a:lnTo>
+                <a:close/>
+                <a:lnTo>
+                  <a:pt x="285845" y="802159"/>
+                </a:lnTo>
+                <a:close/>
+                <a:lnTo>
+                  <a:pt x="288517" y="800196"/>
+                </a:lnTo>
+                <a:close/>
+                <a:lnTo>
+                  <a:pt x="291188" y="798236"/>
+                </a:lnTo>
+                <a:close/>
+                <a:lnTo>
+                  <a:pt x="293860" y="796278"/>
+                </a:lnTo>
+                <a:close/>
+                <a:lnTo>
+                  <a:pt x="296531" y="794323"/>
+                </a:lnTo>
+                <a:close/>
+                <a:lnTo>
+                  <a:pt x="299203" y="792370"/>
+                </a:lnTo>
+                <a:close/>
+                <a:lnTo>
+                  <a:pt x="301874" y="790421"/>
+                </a:lnTo>
+                <a:close/>
+                <a:lnTo>
+                  <a:pt x="304546" y="788474"/>
+                </a:lnTo>
+                <a:close/>
+                <a:lnTo>
+                  <a:pt x="307217" y="786530"/>
+                </a:lnTo>
+                <a:close/>
+                <a:lnTo>
+                  <a:pt x="309888" y="784588"/>
+                </a:lnTo>
+                <a:close/>
+                <a:lnTo>
+                  <a:pt x="312560" y="782649"/>
+                </a:lnTo>
+                <a:close/>
+                <a:lnTo>
+                  <a:pt x="315231" y="780713"/>
+                </a:lnTo>
+                <a:close/>
+                <a:lnTo>
+                  <a:pt x="317903" y="778779"/>
+                </a:lnTo>
+                <a:close/>
+                <a:lnTo>
+                  <a:pt x="320574" y="776848"/>
+                </a:lnTo>
+                <a:close/>
+                <a:lnTo>
+                  <a:pt x="323246" y="774920"/>
+                </a:lnTo>
+                <a:close/>
+                <a:lnTo>
+                  <a:pt x="325917" y="772994"/>
+                </a:lnTo>
+                <a:close/>
+                <a:lnTo>
+                  <a:pt x="328589" y="771070"/>
+                </a:lnTo>
+                <a:close/>
+                <a:lnTo>
+                  <a:pt x="331260" y="769149"/>
+                </a:lnTo>
+                <a:close/>
+                <a:lnTo>
+                  <a:pt x="333932" y="767231"/>
+                </a:lnTo>
+                <a:close/>
+                <a:lnTo>
+                  <a:pt x="336603" y="765315"/>
+                </a:lnTo>
+                <a:close/>
+                <a:lnTo>
+                  <a:pt x="339274" y="763402"/>
+                </a:lnTo>
+                <a:close/>
+                <a:lnTo>
+                  <a:pt x="341946" y="761491"/>
+                </a:lnTo>
+                <a:close/>
+                <a:lnTo>
+                  <a:pt x="344617" y="759583"/>
+                </a:lnTo>
+                <a:close/>
+                <a:lnTo>
+                  <a:pt x="347289" y="757677"/>
+                </a:lnTo>
+                <a:close/>
+                <a:lnTo>
+                  <a:pt x="349960" y="755773"/>
+                </a:lnTo>
+                <a:close/>
+                <a:lnTo>
+                  <a:pt x="352632" y="753872"/>
+                </a:lnTo>
+                <a:close/>
+                <a:lnTo>
+                  <a:pt x="355303" y="751974"/>
+                </a:lnTo>
+                <a:close/>
+                <a:lnTo>
+                  <a:pt x="357975" y="750078"/>
+                </a:lnTo>
+                <a:close/>
+                <a:lnTo>
+                  <a:pt x="360646" y="748184"/>
+                </a:lnTo>
+                <a:close/>
+                <a:lnTo>
+                  <a:pt x="363318" y="746292"/>
+                </a:lnTo>
+                <a:close/>
+                <a:lnTo>
+                  <a:pt x="365989" y="744403"/>
+                </a:lnTo>
+                <a:close/>
+                <a:lnTo>
+                  <a:pt x="368660" y="742517"/>
+                </a:lnTo>
+                <a:close/>
+                <a:lnTo>
+                  <a:pt x="371332" y="740632"/>
+                </a:lnTo>
+                <a:close/>
+                <a:lnTo>
+                  <a:pt x="374003" y="738750"/>
+                </a:lnTo>
+                <a:close/>
+                <a:lnTo>
+                  <a:pt x="376675" y="736870"/>
+                </a:lnTo>
+                <a:close/>
+                <a:lnTo>
+                  <a:pt x="379346" y="734993"/>
+                </a:lnTo>
+                <a:close/>
+                <a:lnTo>
+                  <a:pt x="382018" y="733118"/>
+                </a:lnTo>
+                <a:close/>
+                <a:lnTo>
+                  <a:pt x="384689" y="731245"/>
+                </a:lnTo>
+                <a:close/>
+                <a:lnTo>
+                  <a:pt x="387361" y="729374"/>
+                </a:lnTo>
+                <a:close/>
+                <a:lnTo>
+                  <a:pt x="390032" y="727506"/>
+                </a:lnTo>
+                <a:close/>
+                <a:lnTo>
+                  <a:pt x="392704" y="725639"/>
+                </a:lnTo>
+                <a:close/>
+                <a:lnTo>
+                  <a:pt x="395375" y="723775"/>
+                </a:lnTo>
+                <a:close/>
+                <a:lnTo>
+                  <a:pt x="398046" y="721914"/>
+                </a:lnTo>
+                <a:close/>
+                <a:lnTo>
+                  <a:pt x="400718" y="720054"/>
+                </a:lnTo>
+                <a:close/>
+                <a:lnTo>
+                  <a:pt x="403389" y="718197"/>
+                </a:lnTo>
+                <a:close/>
+                <a:lnTo>
+                  <a:pt x="406061" y="716342"/>
+                </a:lnTo>
+                <a:close/>
+                <a:lnTo>
+                  <a:pt x="408732" y="714488"/>
+                </a:lnTo>
+                <a:close/>
+                <a:lnTo>
+                  <a:pt x="411404" y="712638"/>
+                </a:lnTo>
+                <a:close/>
+                <a:lnTo>
+                  <a:pt x="414075" y="710789"/>
+                </a:lnTo>
+                <a:close/>
+                <a:lnTo>
+                  <a:pt x="416747" y="708942"/>
+                </a:lnTo>
+                <a:close/>
+                <a:lnTo>
+                  <a:pt x="419418" y="707098"/>
+                </a:lnTo>
+                <a:close/>
+                <a:lnTo>
+                  <a:pt x="422089" y="705255"/>
+                </a:lnTo>
+                <a:close/>
+                <a:lnTo>
+                  <a:pt x="424761" y="703415"/>
+                </a:lnTo>
+                <a:close/>
+                <a:lnTo>
+                  <a:pt x="427432" y="701576"/>
+                </a:lnTo>
+                <a:close/>
+                <a:lnTo>
+                  <a:pt x="430104" y="699740"/>
+                </a:lnTo>
+                <a:close/>
+                <a:lnTo>
+                  <a:pt x="432775" y="697906"/>
+                </a:lnTo>
+                <a:close/>
+                <a:lnTo>
+                  <a:pt x="435447" y="696074"/>
+                </a:lnTo>
+                <a:close/>
+                <a:lnTo>
+                  <a:pt x="438118" y="694244"/>
+                </a:lnTo>
+                <a:close/>
+                <a:lnTo>
+                  <a:pt x="440790" y="692416"/>
+                </a:lnTo>
+                <a:close/>
+                <a:lnTo>
+                  <a:pt x="443461" y="690590"/>
+                </a:lnTo>
+                <a:close/>
+                <a:lnTo>
+                  <a:pt x="446133" y="688766"/>
+                </a:lnTo>
+                <a:close/>
+                <a:lnTo>
+                  <a:pt x="448804" y="686944"/>
+                </a:lnTo>
+                <a:close/>
+                <a:lnTo>
+                  <a:pt x="451475" y="685124"/>
+                </a:lnTo>
+                <a:close/>
+                <a:lnTo>
+                  <a:pt x="454147" y="683306"/>
+                </a:lnTo>
+                <a:close/>
+                <a:lnTo>
+                  <a:pt x="456818" y="681490"/>
+                </a:lnTo>
+                <a:close/>
+                <a:lnTo>
+                  <a:pt x="459490" y="679676"/>
+                </a:lnTo>
+                <a:close/>
+                <a:lnTo>
+                  <a:pt x="462161" y="677863"/>
+                </a:lnTo>
+                <a:close/>
+                <a:lnTo>
+                  <a:pt x="464833" y="676053"/>
+                </a:lnTo>
+                <a:close/>
+                <a:lnTo>
+                  <a:pt x="467504" y="674245"/>
+                </a:lnTo>
+                <a:close/>
+                <a:lnTo>
+                  <a:pt x="470176" y="672438"/>
+                </a:lnTo>
+                <a:close/>
+                <a:lnTo>
+                  <a:pt x="472847" y="670634"/>
+                </a:lnTo>
+                <a:close/>
+                <a:lnTo>
+                  <a:pt x="475519" y="668831"/>
+                </a:lnTo>
+                <a:close/>
+                <a:lnTo>
+                  <a:pt x="478190" y="667031"/>
+                </a:lnTo>
+                <a:close/>
+                <a:lnTo>
+                  <a:pt x="480861" y="665232"/>
+                </a:lnTo>
+                <a:close/>
+                <a:lnTo>
+                  <a:pt x="483533" y="663435"/>
+                </a:lnTo>
+                <a:close/>
+                <a:lnTo>
+                  <a:pt x="486204" y="661640"/>
+                </a:lnTo>
+                <a:close/>
+                <a:lnTo>
+                  <a:pt x="488876" y="659846"/>
+                </a:lnTo>
+                <a:close/>
+                <a:lnTo>
+                  <a:pt x="491547" y="658055"/>
+                </a:lnTo>
+                <a:close/>
+                <a:lnTo>
+                  <a:pt x="494219" y="656265"/>
+                </a:lnTo>
+                <a:close/>
+                <a:lnTo>
+                  <a:pt x="496890" y="654477"/>
+                </a:lnTo>
+                <a:close/>
+                <a:lnTo>
+                  <a:pt x="499562" y="652691"/>
+                </a:lnTo>
+                <a:close/>
+                <a:lnTo>
+                  <a:pt x="502233" y="650907"/>
+                </a:lnTo>
+                <a:close/>
+                <a:lnTo>
+                  <a:pt x="504905" y="649125"/>
+                </a:lnTo>
+                <a:close/>
+                <a:lnTo>
+                  <a:pt x="507576" y="647344"/>
+                </a:lnTo>
+                <a:close/>
+                <a:lnTo>
+                  <a:pt x="510247" y="645566"/>
+                </a:lnTo>
+                <a:close/>
+                <a:lnTo>
+                  <a:pt x="512919" y="643789"/>
+                </a:lnTo>
+                <a:close/>
+                <a:lnTo>
+                  <a:pt x="515590" y="642013"/>
+                </a:lnTo>
+                <a:close/>
+                <a:lnTo>
+                  <a:pt x="518262" y="640240"/>
+                </a:lnTo>
+                <a:close/>
+                <a:lnTo>
+                  <a:pt x="520933" y="638468"/>
+                </a:lnTo>
+                <a:close/>
+                <a:lnTo>
+                  <a:pt x="523605" y="636698"/>
+                </a:lnTo>
+                <a:close/>
+                <a:lnTo>
+                  <a:pt x="526276" y="634930"/>
+                </a:lnTo>
+                <a:close/>
+                <a:lnTo>
+                  <a:pt x="528948" y="633163"/>
+                </a:lnTo>
+                <a:close/>
+                <a:lnTo>
+                  <a:pt x="531619" y="631398"/>
+                </a:lnTo>
+                <a:close/>
+                <a:lnTo>
+                  <a:pt x="534290" y="629635"/>
+                </a:lnTo>
+                <a:close/>
+                <a:lnTo>
+                  <a:pt x="536962" y="627874"/>
+                </a:lnTo>
+                <a:close/>
+                <a:lnTo>
+                  <a:pt x="539633" y="626114"/>
+                </a:lnTo>
+                <a:close/>
+                <a:lnTo>
+                  <a:pt x="542305" y="624356"/>
+                </a:lnTo>
+                <a:close/>
+                <a:lnTo>
+                  <a:pt x="544976" y="622599"/>
+                </a:lnTo>
+                <a:close/>
+                <a:lnTo>
+                  <a:pt x="547648" y="620845"/>
+                </a:lnTo>
+                <a:close/>
+                <a:lnTo>
+                  <a:pt x="550319" y="619091"/>
+                </a:lnTo>
+                <a:close/>
+                <a:lnTo>
+                  <a:pt x="552991" y="617340"/>
+                </a:lnTo>
+                <a:close/>
+                <a:lnTo>
+                  <a:pt x="555662" y="615590"/>
+                </a:lnTo>
+                <a:close/>
+                <a:lnTo>
+                  <a:pt x="558334" y="613842"/>
+                </a:lnTo>
+                <a:close/>
+                <a:lnTo>
+                  <a:pt x="561005" y="612096"/>
+                </a:lnTo>
+                <a:close/>
+                <a:lnTo>
+                  <a:pt x="563676" y="610351"/>
+                </a:lnTo>
+                <a:close/>
+                <a:lnTo>
+                  <a:pt x="566348" y="608607"/>
+                </a:lnTo>
+                <a:close/>
+                <a:lnTo>
+                  <a:pt x="569019" y="606866"/>
+                </a:lnTo>
+                <a:close/>
+                <a:lnTo>
+                  <a:pt x="571691" y="605126"/>
+                </a:lnTo>
+                <a:close/>
+                <a:lnTo>
+                  <a:pt x="574362" y="603387"/>
+                </a:lnTo>
+                <a:close/>
+                <a:lnTo>
+                  <a:pt x="577034" y="601651"/>
+                </a:lnTo>
+                <a:close/>
+                <a:lnTo>
+                  <a:pt x="579705" y="599915"/>
+                </a:lnTo>
+                <a:close/>
+                <a:lnTo>
+                  <a:pt x="582377" y="598182"/>
+                </a:lnTo>
+                <a:close/>
+                <a:lnTo>
+                  <a:pt x="585048" y="596450"/>
+                </a:lnTo>
+                <a:close/>
+                <a:lnTo>
+                  <a:pt x="587720" y="594719"/>
+                </a:lnTo>
+                <a:close/>
+                <a:lnTo>
+                  <a:pt x="590391" y="592990"/>
+                </a:lnTo>
+                <a:close/>
+                <a:lnTo>
+                  <a:pt x="593062" y="591263"/>
+                </a:lnTo>
+                <a:close/>
+                <a:lnTo>
+                  <a:pt x="595734" y="589537"/>
+                </a:lnTo>
+                <a:close/>
+                <a:lnTo>
+                  <a:pt x="598405" y="587813"/>
+                </a:lnTo>
+                <a:close/>
+                <a:lnTo>
+                  <a:pt x="601077" y="586090"/>
+                </a:lnTo>
+                <a:close/>
+                <a:lnTo>
+                  <a:pt x="603748" y="584369"/>
+                </a:lnTo>
+                <a:close/>
+                <a:lnTo>
+                  <a:pt x="606420" y="582649"/>
+                </a:lnTo>
+                <a:close/>
+                <a:lnTo>
+                  <a:pt x="609091" y="580931"/>
+                </a:lnTo>
+                <a:close/>
+                <a:lnTo>
+                  <a:pt x="611763" y="579214"/>
+                </a:lnTo>
+                <a:close/>
+                <a:lnTo>
+                  <a:pt x="614434" y="577499"/>
+                </a:lnTo>
+                <a:close/>
+                <a:lnTo>
+                  <a:pt x="617106" y="575785"/>
+                </a:lnTo>
+                <a:close/>
+                <a:lnTo>
+                  <a:pt x="619777" y="574073"/>
+                </a:lnTo>
+                <a:close/>
+                <a:lnTo>
+                  <a:pt x="622448" y="572363"/>
+                </a:lnTo>
+                <a:close/>
+                <a:lnTo>
+                  <a:pt x="625120" y="570654"/>
+                </a:lnTo>
+                <a:close/>
+                <a:lnTo>
+                  <a:pt x="627791" y="568946"/>
+                </a:lnTo>
+                <a:close/>
+                <a:lnTo>
+                  <a:pt x="630463" y="567240"/>
+                </a:lnTo>
+                <a:close/>
+                <a:lnTo>
+                  <a:pt x="633134" y="565535"/>
+                </a:lnTo>
+                <a:close/>
+                <a:lnTo>
+                  <a:pt x="635806" y="563832"/>
+                </a:lnTo>
+                <a:close/>
+                <a:lnTo>
+                  <a:pt x="638477" y="562130"/>
+                </a:lnTo>
+                <a:close/>
+                <a:lnTo>
+                  <a:pt x="641149" y="560430"/>
+                </a:lnTo>
+                <a:close/>
+                <a:lnTo>
+                  <a:pt x="643820" y="558731"/>
+                </a:lnTo>
+                <a:close/>
+                <a:lnTo>
+                  <a:pt x="646491" y="557034"/>
+                </a:lnTo>
+                <a:close/>
+                <a:lnTo>
+                  <a:pt x="649163" y="555338"/>
+                </a:lnTo>
+                <a:close/>
+                <a:lnTo>
+                  <a:pt x="651834" y="553643"/>
+                </a:lnTo>
+                <a:close/>
+                <a:lnTo>
+                  <a:pt x="654506" y="551950"/>
+                </a:lnTo>
+                <a:close/>
+                <a:lnTo>
+                  <a:pt x="657177" y="550259"/>
+                </a:lnTo>
+                <a:close/>
+                <a:lnTo>
+                  <a:pt x="659849" y="548569"/>
+                </a:lnTo>
+                <a:close/>
+                <a:lnTo>
+                  <a:pt x="662520" y="546880"/>
+                </a:lnTo>
+                <a:close/>
+                <a:lnTo>
+                  <a:pt x="665192" y="545193"/>
+                </a:lnTo>
+                <a:close/>
+                <a:lnTo>
+                  <a:pt x="667863" y="543507"/>
+                </a:lnTo>
+                <a:close/>
+                <a:lnTo>
+                  <a:pt x="670535" y="541822"/>
+                </a:lnTo>
+                <a:close/>
+                <a:lnTo>
+                  <a:pt x="673206" y="540139"/>
+                </a:lnTo>
+                <a:close/>
+                <a:lnTo>
+                  <a:pt x="675877" y="538458"/>
+                </a:lnTo>
+                <a:close/>
+                <a:lnTo>
+                  <a:pt x="678549" y="536777"/>
+                </a:lnTo>
+                <a:close/>
+                <a:lnTo>
+                  <a:pt x="681220" y="535098"/>
+                </a:lnTo>
+                <a:close/>
+                <a:lnTo>
+                  <a:pt x="683892" y="533421"/>
+                </a:lnTo>
+                <a:close/>
+                <a:lnTo>
+                  <a:pt x="686563" y="531745"/>
+                </a:lnTo>
+                <a:close/>
+                <a:lnTo>
+                  <a:pt x="689235" y="530070"/>
+                </a:lnTo>
+                <a:close/>
+                <a:lnTo>
+                  <a:pt x="691906" y="528397"/>
+                </a:lnTo>
+                <a:close/>
+                <a:lnTo>
+                  <a:pt x="694578" y="526725"/>
+                </a:lnTo>
+                <a:close/>
+                <a:lnTo>
+                  <a:pt x="697249" y="525054"/>
+                </a:lnTo>
+                <a:close/>
+                <a:lnTo>
+                  <a:pt x="699921" y="523385"/>
+                </a:lnTo>
+                <a:close/>
+                <a:lnTo>
+                  <a:pt x="702592" y="521717"/>
+                </a:lnTo>
+                <a:close/>
+                <a:lnTo>
+                  <a:pt x="705263" y="520051"/>
+                </a:lnTo>
+                <a:close/>
+                <a:lnTo>
+                  <a:pt x="707935" y="518386"/>
+                </a:lnTo>
+                <a:close/>
+                <a:lnTo>
+                  <a:pt x="710606" y="516722"/>
+                </a:lnTo>
+                <a:close/>
+                <a:lnTo>
+                  <a:pt x="713278" y="515059"/>
+                </a:lnTo>
+                <a:close/>
+                <a:lnTo>
+                  <a:pt x="715949" y="513398"/>
+                </a:lnTo>
+                <a:close/>
+                <a:lnTo>
+                  <a:pt x="718621" y="511738"/>
+                </a:lnTo>
+                <a:close/>
+                <a:lnTo>
+                  <a:pt x="721292" y="510080"/>
+                </a:lnTo>
+                <a:close/>
+                <a:lnTo>
+                  <a:pt x="723964" y="508423"/>
+                </a:lnTo>
+                <a:close/>
+                <a:lnTo>
+                  <a:pt x="726635" y="506767"/>
+                </a:lnTo>
+                <a:close/>
+                <a:lnTo>
+                  <a:pt x="729307" y="505113"/>
+                </a:lnTo>
+                <a:close/>
+                <a:lnTo>
+                  <a:pt x="731978" y="503459"/>
+                </a:lnTo>
+                <a:close/>
+                <a:lnTo>
+                  <a:pt x="734649" y="501808"/>
+                </a:lnTo>
+                <a:close/>
+                <a:lnTo>
+                  <a:pt x="737321" y="500157"/>
+                </a:lnTo>
+                <a:close/>
+                <a:lnTo>
+                  <a:pt x="739992" y="498508"/>
+                </a:lnTo>
+                <a:close/>
+                <a:lnTo>
+                  <a:pt x="742664" y="496860"/>
+                </a:lnTo>
+                <a:close/>
+                <a:lnTo>
+                  <a:pt x="745335" y="495213"/>
+                </a:lnTo>
+                <a:close/>
+                <a:lnTo>
+                  <a:pt x="748007" y="493568"/>
+                </a:lnTo>
+                <a:close/>
+                <a:lnTo>
+                  <a:pt x="750678" y="491924"/>
+                </a:lnTo>
+                <a:close/>
+                <a:lnTo>
+                  <a:pt x="753350" y="490281"/>
+                </a:lnTo>
+                <a:close/>
+                <a:lnTo>
+                  <a:pt x="756021" y="488640"/>
+                </a:lnTo>
+                <a:close/>
+                <a:lnTo>
+                  <a:pt x="758692" y="487000"/>
+                </a:lnTo>
+                <a:close/>
+                <a:lnTo>
+                  <a:pt x="761364" y="485361"/>
+                </a:lnTo>
+                <a:close/>
+                <a:lnTo>
+                  <a:pt x="764035" y="483723"/>
+                </a:lnTo>
+                <a:close/>
+                <a:lnTo>
+                  <a:pt x="766707" y="482087"/>
+                </a:lnTo>
+                <a:close/>
+                <a:lnTo>
+                  <a:pt x="769378" y="480452"/>
+                </a:lnTo>
+                <a:close/>
+                <a:lnTo>
+                  <a:pt x="772050" y="478818"/>
+                </a:lnTo>
+                <a:close/>
+                <a:lnTo>
+                  <a:pt x="774721" y="477186"/>
+                </a:lnTo>
+                <a:close/>
+                <a:lnTo>
+                  <a:pt x="777393" y="475554"/>
+                </a:lnTo>
+                <a:close/>
+                <a:lnTo>
+                  <a:pt x="780064" y="473924"/>
+                </a:lnTo>
+                <a:close/>
+                <a:lnTo>
+                  <a:pt x="782736" y="472296"/>
+                </a:lnTo>
+                <a:close/>
+                <a:lnTo>
+                  <a:pt x="785407" y="470668"/>
+                </a:lnTo>
+                <a:close/>
+                <a:lnTo>
+                  <a:pt x="788078" y="469042"/>
+                </a:lnTo>
+                <a:close/>
+                <a:lnTo>
+                  <a:pt x="790750" y="467417"/>
+                </a:lnTo>
+                <a:close/>
+                <a:lnTo>
+                  <a:pt x="793421" y="465793"/>
+                </a:lnTo>
+                <a:close/>
+                <a:lnTo>
+                  <a:pt x="796093" y="464170"/>
+                </a:lnTo>
+                <a:close/>
+                <a:lnTo>
+                  <a:pt x="798764" y="462549"/>
+                </a:lnTo>
+                <a:close/>
+                <a:lnTo>
+                  <a:pt x="801436" y="460929"/>
+                </a:lnTo>
+                <a:close/>
+                <a:lnTo>
+                  <a:pt x="804107" y="459310"/>
+                </a:lnTo>
+                <a:close/>
+                <a:lnTo>
+                  <a:pt x="806779" y="457692"/>
+                </a:lnTo>
+                <a:close/>
+                <a:lnTo>
+                  <a:pt x="809450" y="456076"/>
+                </a:lnTo>
+                <a:close/>
+                <a:lnTo>
+                  <a:pt x="812122" y="454461"/>
+                </a:lnTo>
+                <a:close/>
+                <a:lnTo>
+                  <a:pt x="814793" y="452847"/>
+                </a:lnTo>
+                <a:close/>
+                <a:lnTo>
+                  <a:pt x="817464" y="451234"/>
+                </a:lnTo>
+                <a:close/>
+                <a:lnTo>
+                  <a:pt x="820136" y="449622"/>
+                </a:lnTo>
+                <a:close/>
+                <a:lnTo>
+                  <a:pt x="822807" y="448012"/>
+                </a:lnTo>
+                <a:close/>
+                <a:lnTo>
+                  <a:pt x="825479" y="446403"/>
+                </a:lnTo>
+                <a:close/>
+                <a:lnTo>
+                  <a:pt x="828150" y="444795"/>
+                </a:lnTo>
+                <a:close/>
+                <a:lnTo>
+                  <a:pt x="830822" y="443188"/>
+                </a:lnTo>
+                <a:close/>
+                <a:lnTo>
+                  <a:pt x="833493" y="441582"/>
+                </a:lnTo>
+                <a:close/>
+                <a:lnTo>
+                  <a:pt x="836165" y="439978"/>
+                </a:lnTo>
+                <a:close/>
+                <a:lnTo>
+                  <a:pt x="838836" y="438375"/>
+                </a:lnTo>
+                <a:close/>
+                <a:lnTo>
+                  <a:pt x="841508" y="436772"/>
+                </a:lnTo>
+                <a:close/>
+                <a:lnTo>
+                  <a:pt x="844179" y="435172"/>
+                </a:lnTo>
+                <a:close/>
+                <a:lnTo>
+                  <a:pt x="846850" y="433572"/>
+                </a:lnTo>
+                <a:close/>
+                <a:lnTo>
+                  <a:pt x="849522" y="431973"/>
+                </a:lnTo>
+                <a:close/>
+                <a:lnTo>
+                  <a:pt x="852193" y="430376"/>
+                </a:lnTo>
+                <a:close/>
+                <a:lnTo>
+                  <a:pt x="854865" y="428780"/>
+                </a:lnTo>
+                <a:close/>
+                <a:lnTo>
+                  <a:pt x="857536" y="427185"/>
+                </a:lnTo>
+                <a:close/>
+                <a:lnTo>
+                  <a:pt x="860208" y="425591"/>
+                </a:lnTo>
+                <a:close/>
+                <a:lnTo>
+                  <a:pt x="862879" y="423998"/>
+                </a:lnTo>
+                <a:close/>
+                <a:lnTo>
+                  <a:pt x="865551" y="422406"/>
+                </a:lnTo>
+                <a:close/>
+                <a:lnTo>
+                  <a:pt x="868222" y="420816"/>
+                </a:lnTo>
+                <a:close/>
+                <a:lnTo>
+                  <a:pt x="870893" y="419227"/>
+                </a:lnTo>
+                <a:close/>
+                <a:lnTo>
+                  <a:pt x="873565" y="417639"/>
+                </a:lnTo>
+                <a:close/>
+                <a:lnTo>
+                  <a:pt x="876236" y="416052"/>
+                </a:lnTo>
+                <a:close/>
+                <a:lnTo>
+                  <a:pt x="878908" y="414466"/>
+                </a:lnTo>
+                <a:close/>
+                <a:lnTo>
+                  <a:pt x="881579" y="412881"/>
+                </a:lnTo>
+                <a:close/>
+                <a:lnTo>
+                  <a:pt x="884251" y="411297"/>
+                </a:lnTo>
+                <a:close/>
+                <a:lnTo>
+                  <a:pt x="886922" y="409715"/>
+                </a:lnTo>
+                <a:close/>
+                <a:lnTo>
+                  <a:pt x="889594" y="408134"/>
+                </a:lnTo>
+                <a:close/>
+                <a:lnTo>
+                  <a:pt x="892265" y="406553"/>
+                </a:lnTo>
+                <a:close/>
+                <a:lnTo>
+                  <a:pt x="894937" y="404974"/>
+                </a:lnTo>
+                <a:close/>
+                <a:lnTo>
+                  <a:pt x="897608" y="403396"/>
+                </a:lnTo>
+                <a:close/>
+                <a:lnTo>
+                  <a:pt x="900279" y="401820"/>
+                </a:lnTo>
+                <a:close/>
+                <a:lnTo>
+                  <a:pt x="902951" y="400244"/>
+                </a:lnTo>
+                <a:close/>
+                <a:lnTo>
+                  <a:pt x="905622" y="398669"/>
+                </a:lnTo>
+                <a:close/>
+                <a:lnTo>
+                  <a:pt x="908294" y="397096"/>
+                </a:lnTo>
+                <a:close/>
+                <a:lnTo>
+                  <a:pt x="910965" y="395523"/>
+                </a:lnTo>
+                <a:close/>
+                <a:lnTo>
+                  <a:pt x="913637" y="393952"/>
+                </a:lnTo>
+                <a:close/>
+                <a:lnTo>
+                  <a:pt x="916308" y="392382"/>
+                </a:lnTo>
+                <a:close/>
+                <a:lnTo>
+                  <a:pt x="918980" y="390813"/>
+                </a:lnTo>
+                <a:close/>
+                <a:lnTo>
+                  <a:pt x="921651" y="389245"/>
+                </a:lnTo>
+                <a:close/>
+                <a:lnTo>
+                  <a:pt x="924323" y="387678"/>
+                </a:lnTo>
+                <a:close/>
+                <a:lnTo>
+                  <a:pt x="926994" y="386112"/>
+                </a:lnTo>
+                <a:close/>
+                <a:lnTo>
+                  <a:pt x="929665" y="384547"/>
+                </a:lnTo>
+                <a:close/>
+                <a:lnTo>
+                  <a:pt x="932337" y="382983"/>
+                </a:lnTo>
+                <a:close/>
+                <a:lnTo>
+                  <a:pt x="935008" y="381421"/>
+                </a:lnTo>
+                <a:close/>
+                <a:lnTo>
+                  <a:pt x="937680" y="379859"/>
+                </a:lnTo>
+                <a:close/>
+                <a:lnTo>
+                  <a:pt x="940351" y="378299"/>
+                </a:lnTo>
+                <a:close/>
+                <a:lnTo>
+                  <a:pt x="943023" y="376739"/>
+                </a:lnTo>
+                <a:close/>
+                <a:lnTo>
+                  <a:pt x="945694" y="375181"/>
+                </a:lnTo>
+                <a:close/>
+                <a:lnTo>
+                  <a:pt x="948366" y="373624"/>
+                </a:lnTo>
+                <a:close/>
+                <a:lnTo>
+                  <a:pt x="951037" y="372068"/>
+                </a:lnTo>
+                <a:close/>
+                <a:lnTo>
+                  <a:pt x="953709" y="370513"/>
+                </a:lnTo>
+                <a:close/>
+                <a:lnTo>
+                  <a:pt x="956380" y="368959"/>
+                </a:lnTo>
+                <a:close/>
+                <a:lnTo>
+                  <a:pt x="959051" y="367406"/>
+                </a:lnTo>
+                <a:close/>
+                <a:lnTo>
+                  <a:pt x="961723" y="365854"/>
+                </a:lnTo>
+                <a:close/>
+                <a:lnTo>
+                  <a:pt x="964394" y="364303"/>
+                </a:lnTo>
+                <a:close/>
+                <a:lnTo>
+                  <a:pt x="967066" y="362753"/>
+                </a:lnTo>
+                <a:close/>
+                <a:lnTo>
+                  <a:pt x="969737" y="361204"/>
+                </a:lnTo>
+                <a:close/>
+                <a:lnTo>
+                  <a:pt x="972409" y="359657"/>
+                </a:lnTo>
+                <a:close/>
+                <a:lnTo>
+                  <a:pt x="975080" y="358110"/>
+                </a:lnTo>
+                <a:close/>
+                <a:lnTo>
+                  <a:pt x="977752" y="356564"/>
+                </a:lnTo>
+                <a:close/>
+                <a:lnTo>
+                  <a:pt x="980423" y="355020"/>
+                </a:lnTo>
+                <a:close/>
+                <a:lnTo>
+                  <a:pt x="983094" y="353476"/>
+                </a:lnTo>
+                <a:close/>
+                <a:lnTo>
+                  <a:pt x="985766" y="351933"/>
+                </a:lnTo>
+                <a:close/>
+                <a:lnTo>
+                  <a:pt x="988437" y="350392"/>
+                </a:lnTo>
+                <a:close/>
+                <a:lnTo>
+                  <a:pt x="991109" y="348851"/>
+                </a:lnTo>
+                <a:close/>
+                <a:lnTo>
+                  <a:pt x="993780" y="347312"/>
+                </a:lnTo>
+                <a:close/>
+                <a:lnTo>
+                  <a:pt x="996452" y="345773"/>
+                </a:lnTo>
+                <a:close/>
+                <a:lnTo>
+                  <a:pt x="999123" y="344236"/>
+                </a:lnTo>
+                <a:close/>
+                <a:lnTo>
+                  <a:pt x="1001795" y="342699"/>
+                </a:lnTo>
+                <a:close/>
+                <a:lnTo>
+                  <a:pt x="1004466" y="341164"/>
+                </a:lnTo>
+                <a:close/>
+                <a:lnTo>
+                  <a:pt x="1007138" y="339629"/>
+                </a:lnTo>
+                <a:close/>
+                <a:lnTo>
+                  <a:pt x="1009809" y="338096"/>
+                </a:lnTo>
+                <a:close/>
+                <a:lnTo>
+                  <a:pt x="1012480" y="336564"/>
+                </a:lnTo>
+                <a:close/>
+                <a:lnTo>
+                  <a:pt x="1015152" y="335032"/>
+                </a:lnTo>
+                <a:close/>
+                <a:lnTo>
+                  <a:pt x="1017823" y="333502"/>
+                </a:lnTo>
+                <a:close/>
+                <a:lnTo>
+                  <a:pt x="1020495" y="331972"/>
+                </a:lnTo>
+                <a:close/>
+                <a:lnTo>
+                  <a:pt x="1023166" y="330444"/>
+                </a:lnTo>
+                <a:close/>
+                <a:lnTo>
+                  <a:pt x="1025838" y="328916"/>
+                </a:lnTo>
+                <a:close/>
+                <a:lnTo>
+                  <a:pt x="1028509" y="327390"/>
+                </a:lnTo>
+                <a:close/>
+                <a:lnTo>
+                  <a:pt x="1031181" y="325864"/>
+                </a:lnTo>
+                <a:close/>
+                <a:lnTo>
+                  <a:pt x="1033852" y="324340"/>
+                </a:lnTo>
+                <a:close/>
+                <a:lnTo>
+                  <a:pt x="1036524" y="322816"/>
+                </a:lnTo>
+                <a:close/>
+                <a:lnTo>
+                  <a:pt x="1039195" y="321294"/>
+                </a:lnTo>
+                <a:close/>
+                <a:lnTo>
+                  <a:pt x="1041866" y="319772"/>
+                </a:lnTo>
+                <a:close/>
+                <a:lnTo>
+                  <a:pt x="1044538" y="318252"/>
+                </a:lnTo>
+                <a:close/>
+                <a:lnTo>
+                  <a:pt x="1047209" y="316732"/>
+                </a:lnTo>
+                <a:close/>
+                <a:lnTo>
+                  <a:pt x="1049881" y="315214"/>
+                </a:lnTo>
+                <a:close/>
+                <a:lnTo>
+                  <a:pt x="1052552" y="313696"/>
+                </a:lnTo>
+                <a:close/>
+                <a:lnTo>
+                  <a:pt x="1055224" y="312179"/>
+                </a:lnTo>
+                <a:close/>
+                <a:lnTo>
+                  <a:pt x="1057895" y="310663"/>
+                </a:lnTo>
+                <a:close/>
+                <a:lnTo>
+                  <a:pt x="1060567" y="309149"/>
+                </a:lnTo>
+                <a:close/>
+                <a:lnTo>
+                  <a:pt x="1063238" y="307635"/>
+                </a:lnTo>
+                <a:close/>
+                <a:lnTo>
+                  <a:pt x="1065910" y="306122"/>
+                </a:lnTo>
+                <a:close/>
+                <a:lnTo>
+                  <a:pt x="1068581" y="304610"/>
+                </a:lnTo>
+                <a:close/>
+                <a:lnTo>
+                  <a:pt x="1071252" y="303099"/>
+                </a:lnTo>
+                <a:close/>
+                <a:lnTo>
+                  <a:pt x="1073924" y="301589"/>
+                </a:lnTo>
+                <a:close/>
+                <a:lnTo>
+                  <a:pt x="1076595" y="300080"/>
+                </a:lnTo>
+                <a:close/>
+                <a:lnTo>
+                  <a:pt x="1079267" y="298572"/>
+                </a:lnTo>
+                <a:close/>
+                <a:lnTo>
+                  <a:pt x="1081938" y="297064"/>
+                </a:lnTo>
+                <a:close/>
+                <a:lnTo>
+                  <a:pt x="1084610" y="295558"/>
+                </a:lnTo>
+                <a:close/>
+                <a:lnTo>
+                  <a:pt x="1087281" y="294053"/>
+                </a:lnTo>
+                <a:close/>
+                <a:lnTo>
+                  <a:pt x="1089953" y="292548"/>
+                </a:lnTo>
+                <a:close/>
+                <a:lnTo>
+                  <a:pt x="1092624" y="291045"/>
+                </a:lnTo>
+                <a:close/>
+                <a:lnTo>
+                  <a:pt x="1095295" y="289542"/>
+                </a:lnTo>
+                <a:close/>
+                <a:lnTo>
+                  <a:pt x="1097967" y="288041"/>
+                </a:lnTo>
+                <a:close/>
+                <a:lnTo>
+                  <a:pt x="1100638" y="286540"/>
+                </a:lnTo>
+                <a:close/>
+                <a:lnTo>
+                  <a:pt x="1103310" y="285040"/>
+                </a:lnTo>
+                <a:close/>
+                <a:lnTo>
+                  <a:pt x="1105981" y="283541"/>
+                </a:lnTo>
+                <a:close/>
+                <a:lnTo>
+                  <a:pt x="1108653" y="282043"/>
+                </a:lnTo>
+                <a:close/>
+                <a:lnTo>
+                  <a:pt x="1111324" y="280546"/>
+                </a:lnTo>
+                <a:close/>
+                <a:lnTo>
+                  <a:pt x="1113996" y="279050"/>
+                </a:lnTo>
+                <a:close/>
+                <a:lnTo>
+                  <a:pt x="1116667" y="277555"/>
+                </a:lnTo>
+                <a:close/>
+                <a:lnTo>
+                  <a:pt x="1119339" y="276061"/>
+                </a:lnTo>
+                <a:close/>
+                <a:lnTo>
+                  <a:pt x="1122010" y="274567"/>
+                </a:lnTo>
+                <a:close/>
+                <a:lnTo>
+                  <a:pt x="1124681" y="273075"/>
+                </a:lnTo>
+                <a:close/>
+                <a:lnTo>
+                  <a:pt x="1127353" y="271583"/>
+                </a:lnTo>
+                <a:close/>
+                <a:lnTo>
+                  <a:pt x="1130024" y="270092"/>
+                </a:lnTo>
+                <a:close/>
+                <a:lnTo>
+                  <a:pt x="1132696" y="268602"/>
+                </a:lnTo>
+                <a:close/>
+                <a:lnTo>
+                  <a:pt x="1135367" y="267114"/>
+                </a:lnTo>
+                <a:close/>
+                <a:lnTo>
+                  <a:pt x="1138039" y="265626"/>
+                </a:lnTo>
+                <a:close/>
+                <a:lnTo>
+                  <a:pt x="1140710" y="264138"/>
+                </a:lnTo>
+                <a:close/>
+                <a:lnTo>
+                  <a:pt x="1143382" y="262652"/>
+                </a:lnTo>
+                <a:close/>
+                <a:lnTo>
+                  <a:pt x="1146053" y="261167"/>
+                </a:lnTo>
+                <a:close/>
+                <a:lnTo>
+                  <a:pt x="1148725" y="259682"/>
+                </a:lnTo>
+                <a:close/>
+                <a:lnTo>
+                  <a:pt x="1151396" y="258198"/>
+                </a:lnTo>
+                <a:close/>
+                <a:lnTo>
+                  <a:pt x="1154067" y="256716"/>
+                </a:lnTo>
+                <a:close/>
+                <a:lnTo>
+                  <a:pt x="1156739" y="255234"/>
+                </a:lnTo>
+                <a:close/>
+                <a:lnTo>
+                  <a:pt x="1159410" y="253753"/>
+                </a:lnTo>
+                <a:close/>
+                <a:lnTo>
+                  <a:pt x="1162082" y="252273"/>
+                </a:lnTo>
+                <a:close/>
+                <a:lnTo>
+                  <a:pt x="1164753" y="250793"/>
+                </a:lnTo>
+                <a:close/>
+                <a:lnTo>
+                  <a:pt x="1167425" y="249315"/>
+                </a:lnTo>
+                <a:close/>
+                <a:lnTo>
+                  <a:pt x="1170096" y="247837"/>
+                </a:lnTo>
+                <a:close/>
+                <a:lnTo>
+                  <a:pt x="1172768" y="246361"/>
+                </a:lnTo>
+                <a:close/>
+                <a:lnTo>
+                  <a:pt x="1175439" y="244885"/>
+                </a:lnTo>
+                <a:close/>
+                <a:lnTo>
+                  <a:pt x="1178111" y="243410"/>
+                </a:lnTo>
+                <a:close/>
+                <a:lnTo>
+                  <a:pt x="1180782" y="241936"/>
+                </a:lnTo>
+                <a:close/>
+                <a:lnTo>
+                  <a:pt x="1183453" y="240463"/>
+                </a:lnTo>
+                <a:close/>
+                <a:lnTo>
+                  <a:pt x="1186125" y="238990"/>
+                </a:lnTo>
+                <a:close/>
+                <a:lnTo>
+                  <a:pt x="1188796" y="237519"/>
+                </a:lnTo>
+                <a:close/>
+                <a:lnTo>
+                  <a:pt x="1191468" y="236048"/>
+                </a:lnTo>
+                <a:close/>
+                <a:lnTo>
+                  <a:pt x="1194139" y="234579"/>
+                </a:lnTo>
+                <a:close/>
+                <a:lnTo>
+                  <a:pt x="1196811" y="233110"/>
+                </a:lnTo>
+                <a:close/>
+                <a:lnTo>
+                  <a:pt x="1199482" y="231642"/>
+                </a:lnTo>
+                <a:close/>
+                <a:lnTo>
+                  <a:pt x="1202154" y="230175"/>
+                </a:lnTo>
+                <a:close/>
+                <a:lnTo>
+                  <a:pt x="1204825" y="228709"/>
+                </a:lnTo>
+                <a:close/>
+                <a:lnTo>
+                  <a:pt x="1207496" y="227243"/>
+                </a:lnTo>
+                <a:close/>
+                <a:lnTo>
+                  <a:pt x="1210168" y="225779"/>
+                </a:lnTo>
+                <a:close/>
+                <a:lnTo>
+                  <a:pt x="1212839" y="224315"/>
+                </a:lnTo>
+                <a:close/>
+                <a:lnTo>
+                  <a:pt x="1215511" y="222852"/>
+                </a:lnTo>
+                <a:close/>
+                <a:lnTo>
+                  <a:pt x="1218182" y="221390"/>
+                </a:lnTo>
+                <a:close/>
+                <a:lnTo>
+                  <a:pt x="1220854" y="219929"/>
+                </a:lnTo>
+                <a:close/>
+                <a:lnTo>
+                  <a:pt x="1223525" y="218469"/>
+                </a:lnTo>
+                <a:close/>
+                <a:lnTo>
+                  <a:pt x="1226197" y="217009"/>
+                </a:lnTo>
+                <a:close/>
+                <a:lnTo>
+                  <a:pt x="1228868" y="215551"/>
+                </a:lnTo>
+                <a:close/>
+                <a:lnTo>
+                  <a:pt x="1231540" y="214093"/>
+                </a:lnTo>
+                <a:close/>
+                <a:lnTo>
+                  <a:pt x="1234211" y="212636"/>
+                </a:lnTo>
+                <a:close/>
+                <a:lnTo>
+                  <a:pt x="1236882" y="211180"/>
+                </a:lnTo>
+                <a:close/>
+                <a:lnTo>
+                  <a:pt x="1239554" y="209724"/>
+                </a:lnTo>
+                <a:close/>
+                <a:lnTo>
+                  <a:pt x="1242225" y="208270"/>
+                </a:lnTo>
+                <a:close/>
+                <a:lnTo>
+                  <a:pt x="1244897" y="206816"/>
+                </a:lnTo>
+                <a:close/>
+                <a:lnTo>
+                  <a:pt x="1247568" y="205363"/>
+                </a:lnTo>
+                <a:close/>
+                <a:lnTo>
+                  <a:pt x="1250240" y="203911"/>
+                </a:lnTo>
+                <a:close/>
+                <a:lnTo>
+                  <a:pt x="1252911" y="202460"/>
+                </a:lnTo>
+                <a:close/>
+                <a:lnTo>
+                  <a:pt x="1255583" y="201010"/>
+                </a:lnTo>
+                <a:close/>
+                <a:lnTo>
+                  <a:pt x="1258254" y="199560"/>
+                </a:lnTo>
+                <a:close/>
+                <a:lnTo>
+                  <a:pt x="1260926" y="198111"/>
+                </a:lnTo>
+                <a:close/>
+                <a:lnTo>
+                  <a:pt x="1263597" y="196663"/>
+                </a:lnTo>
+                <a:close/>
+                <a:lnTo>
+                  <a:pt x="1266268" y="195216"/>
+                </a:lnTo>
+                <a:close/>
+                <a:lnTo>
+                  <a:pt x="1268940" y="193770"/>
+                </a:lnTo>
+                <a:close/>
+                <a:lnTo>
+                  <a:pt x="1271611" y="192325"/>
+                </a:lnTo>
+                <a:close/>
+                <a:lnTo>
+                  <a:pt x="1274283" y="190880"/>
+                </a:lnTo>
+                <a:close/>
+                <a:lnTo>
+                  <a:pt x="1276954" y="189436"/>
+                </a:lnTo>
+                <a:close/>
+                <a:lnTo>
+                  <a:pt x="1279626" y="187993"/>
+                </a:lnTo>
+                <a:close/>
+                <a:lnTo>
+                  <a:pt x="1282297" y="186551"/>
+                </a:lnTo>
+                <a:close/>
+                <a:lnTo>
+                  <a:pt x="1284969" y="185109"/>
+                </a:lnTo>
+                <a:close/>
+                <a:lnTo>
+                  <a:pt x="1287640" y="183668"/>
+                </a:lnTo>
+                <a:close/>
+                <a:lnTo>
+                  <a:pt x="1290312" y="182228"/>
+                </a:lnTo>
+                <a:close/>
+                <a:lnTo>
+                  <a:pt x="1292983" y="180789"/>
+                </a:lnTo>
+                <a:close/>
+                <a:lnTo>
+                  <a:pt x="1295654" y="179351"/>
+                </a:lnTo>
+                <a:close/>
+                <a:lnTo>
+                  <a:pt x="1298326" y="177913"/>
+                </a:lnTo>
+                <a:close/>
+                <a:lnTo>
+                  <a:pt x="1300997" y="176477"/>
+                </a:lnTo>
+                <a:close/>
+                <a:lnTo>
+                  <a:pt x="1303669" y="175041"/>
+                </a:lnTo>
+                <a:close/>
+                <a:lnTo>
+                  <a:pt x="1306340" y="173605"/>
+                </a:lnTo>
+                <a:close/>
+                <a:lnTo>
+                  <a:pt x="1309012" y="172171"/>
+                </a:lnTo>
+                <a:close/>
+                <a:lnTo>
+                  <a:pt x="1311683" y="170737"/>
+                </a:lnTo>
+                <a:close/>
+                <a:lnTo>
+                  <a:pt x="1314355" y="169304"/>
+                </a:lnTo>
+                <a:close/>
+                <a:lnTo>
+                  <a:pt x="1317026" y="167871"/>
+                </a:lnTo>
+                <a:close/>
+                <a:lnTo>
+                  <a:pt x="1319697" y="166440"/>
+                </a:lnTo>
+                <a:close/>
+                <a:lnTo>
+                  <a:pt x="1322369" y="165009"/>
+                </a:lnTo>
+                <a:close/>
+                <a:lnTo>
+                  <a:pt x="1325040" y="163579"/>
+                </a:lnTo>
+                <a:close/>
+                <a:lnTo>
+                  <a:pt x="1327712" y="162150"/>
+                </a:lnTo>
+                <a:close/>
+                <a:lnTo>
+                  <a:pt x="1330383" y="160721"/>
+                </a:lnTo>
+                <a:close/>
+                <a:lnTo>
+                  <a:pt x="1333055" y="159294"/>
+                </a:lnTo>
+                <a:close/>
+                <a:lnTo>
+                  <a:pt x="1335726" y="157867"/>
+                </a:lnTo>
+                <a:close/>
+                <a:lnTo>
+                  <a:pt x="1338398" y="156441"/>
+                </a:lnTo>
+                <a:close/>
+                <a:lnTo>
+                  <a:pt x="1341069" y="155015"/>
+                </a:lnTo>
+                <a:close/>
+                <a:lnTo>
+                  <a:pt x="1343741" y="153591"/>
+                </a:lnTo>
+                <a:close/>
+                <a:lnTo>
+                  <a:pt x="1346412" y="152167"/>
+                </a:lnTo>
+                <a:close/>
+                <a:lnTo>
+                  <a:pt x="1349083" y="150745"/>
+                </a:lnTo>
+                <a:close/>
+                <a:lnTo>
+                  <a:pt x="1351755" y="149323"/>
+                </a:lnTo>
+                <a:close/>
+                <a:lnTo>
+                  <a:pt x="1354426" y="147902"/>
+                </a:lnTo>
+                <a:close/>
+                <a:lnTo>
+                  <a:pt x="1357098" y="146481"/>
+                </a:lnTo>
+                <a:close/>
+                <a:lnTo>
+                  <a:pt x="1359769" y="145062"/>
+                </a:lnTo>
+                <a:close/>
+                <a:lnTo>
+                  <a:pt x="1362441" y="143643"/>
+                </a:lnTo>
+                <a:close/>
+                <a:lnTo>
+                  <a:pt x="1365112" y="142225"/>
+                </a:lnTo>
+                <a:close/>
+                <a:lnTo>
+                  <a:pt x="1367784" y="140808"/>
+                </a:lnTo>
+                <a:close/>
+                <a:lnTo>
+                  <a:pt x="1370455" y="139392"/>
+                </a:lnTo>
+                <a:close/>
+                <a:lnTo>
+                  <a:pt x="1373127" y="137976"/>
+                </a:lnTo>
+                <a:close/>
+                <a:lnTo>
+                  <a:pt x="1375798" y="136561"/>
+                </a:lnTo>
+                <a:close/>
+                <a:lnTo>
+                  <a:pt x="1378469" y="135146"/>
+                </a:lnTo>
+                <a:close/>
+                <a:lnTo>
+                  <a:pt x="1381141" y="133732"/>
+                </a:lnTo>
+                <a:close/>
+                <a:lnTo>
+                  <a:pt x="1383812" y="132318"/>
+                </a:lnTo>
+                <a:close/>
+                <a:lnTo>
+                  <a:pt x="1386484" y="130904"/>
+                </a:lnTo>
+                <a:close/>
+                <a:lnTo>
+                  <a:pt x="1389155" y="129492"/>
+                </a:lnTo>
+                <a:close/>
+                <a:lnTo>
+                  <a:pt x="1391827" y="128079"/>
+                </a:lnTo>
+                <a:close/>
+                <a:lnTo>
+                  <a:pt x="1394498" y="126667"/>
+                </a:lnTo>
+                <a:close/>
+                <a:lnTo>
+                  <a:pt x="1397170" y="125255"/>
+                </a:lnTo>
+                <a:close/>
+                <a:lnTo>
+                  <a:pt x="1399841" y="123843"/>
+                </a:lnTo>
+                <a:close/>
+                <a:lnTo>
+                  <a:pt x="1402513" y="122432"/>
+                </a:lnTo>
+                <a:close/>
+                <a:lnTo>
+                  <a:pt x="1405184" y="121022"/>
+                </a:lnTo>
+                <a:close/>
+                <a:lnTo>
+                  <a:pt x="1407855" y="119612"/>
+                </a:lnTo>
+                <a:close/>
+                <a:lnTo>
+                  <a:pt x="1410527" y="118204"/>
+                </a:lnTo>
+                <a:close/>
+                <a:lnTo>
+                  <a:pt x="1413198" y="116796"/>
+                </a:lnTo>
+                <a:close/>
+                <a:lnTo>
+                  <a:pt x="1415870" y="115389"/>
+                </a:lnTo>
+                <a:close/>
+                <a:lnTo>
+                  <a:pt x="1418541" y="113984"/>
+                </a:lnTo>
+                <a:close/>
+                <a:lnTo>
+                  <a:pt x="1421213" y="112581"/>
+                </a:lnTo>
+                <a:close/>
+                <a:lnTo>
+                  <a:pt x="1423884" y="111179"/>
+                </a:lnTo>
+                <a:close/>
+                <a:lnTo>
+                  <a:pt x="1426556" y="109778"/>
+                </a:lnTo>
+                <a:close/>
+                <a:lnTo>
+                  <a:pt x="1429227" y="108380"/>
+                </a:lnTo>
+                <a:close/>
+                <a:lnTo>
+                  <a:pt x="1431898" y="106983"/>
+                </a:lnTo>
+                <a:close/>
+                <a:lnTo>
+                  <a:pt x="1434570" y="105589"/>
+                </a:lnTo>
+                <a:close/>
+                <a:lnTo>
+                  <a:pt x="1437241" y="104196"/>
+                </a:lnTo>
+                <a:close/>
+                <a:lnTo>
+                  <a:pt x="1439913" y="102806"/>
+                </a:lnTo>
+                <a:close/>
+                <a:lnTo>
+                  <a:pt x="1442584" y="101418"/>
+                </a:lnTo>
+                <a:close/>
+                <a:lnTo>
+                  <a:pt x="1445256" y="100030"/>
+                </a:lnTo>
+                <a:close/>
+                <a:lnTo>
+                  <a:pt x="1447927" y="98644"/>
+                </a:lnTo>
+                <a:close/>
+                <a:lnTo>
+                  <a:pt x="1450599" y="97257"/>
+                </a:lnTo>
+                <a:close/>
+                <a:lnTo>
+                  <a:pt x="1453270" y="95870"/>
+                </a:lnTo>
+                <a:close/>
+                <a:lnTo>
+                  <a:pt x="1455942" y="94482"/>
+                </a:lnTo>
+                <a:close/>
+                <a:lnTo>
+                  <a:pt x="1458613" y="93092"/>
+                </a:lnTo>
+                <a:close/>
+                <a:lnTo>
+                  <a:pt x="1461284" y="91701"/>
+                </a:lnTo>
+                <a:close/>
+                <a:lnTo>
+                  <a:pt x="1463956" y="90307"/>
+                </a:lnTo>
+                <a:close/>
+                <a:lnTo>
+                  <a:pt x="1466627" y="88910"/>
+                </a:lnTo>
+                <a:close/>
+                <a:lnTo>
+                  <a:pt x="1469299" y="87510"/>
+                </a:lnTo>
+                <a:close/>
+                <a:lnTo>
+                  <a:pt x="1471970" y="86105"/>
+                </a:lnTo>
+                <a:close/>
+                <a:lnTo>
+                  <a:pt x="1474642" y="84697"/>
+                </a:lnTo>
+                <a:close/>
+                <a:lnTo>
+                  <a:pt x="1477313" y="83283"/>
+                </a:lnTo>
+                <a:close/>
+                <a:lnTo>
+                  <a:pt x="1479985" y="81864"/>
+                </a:lnTo>
+                <a:close/>
+                <a:lnTo>
+                  <a:pt x="1482656" y="80442"/>
+                </a:lnTo>
+                <a:close/>
+                <a:lnTo>
+                  <a:pt x="1485328" y="79018"/>
+                </a:lnTo>
+                <a:close/>
+                <a:lnTo>
+                  <a:pt x="1487999" y="77595"/>
+                </a:lnTo>
+                <a:close/>
+                <a:lnTo>
+                  <a:pt x="1490670" y="76174"/>
+                </a:lnTo>
+                <a:close/>
+                <a:lnTo>
+                  <a:pt x="1493342" y="74757"/>
+                </a:lnTo>
+                <a:close/>
+                <a:lnTo>
+                  <a:pt x="1496013" y="73346"/>
+                </a:lnTo>
+                <a:close/>
+                <a:lnTo>
+                  <a:pt x="1498685" y="71942"/>
+                </a:lnTo>
+                <a:close/>
+                <a:lnTo>
+                  <a:pt x="1501356" y="70549"/>
+                </a:lnTo>
+                <a:close/>
+                <a:lnTo>
+                  <a:pt x="1504028" y="69167"/>
+                </a:lnTo>
+                <a:close/>
+                <a:lnTo>
+                  <a:pt x="1506699" y="67799"/>
+                </a:lnTo>
+                <a:close/>
+                <a:lnTo>
+                  <a:pt x="1509371" y="66446"/>
+                </a:lnTo>
+                <a:close/>
+                <a:lnTo>
+                  <a:pt x="1512042" y="65110"/>
+                </a:lnTo>
+                <a:close/>
+                <a:lnTo>
+                  <a:pt x="1514714" y="63794"/>
+                </a:lnTo>
+                <a:close/>
+                <a:lnTo>
+                  <a:pt x="1517385" y="62498"/>
+                </a:lnTo>
+                <a:close/>
+                <a:lnTo>
+                  <a:pt x="1520056" y="61225"/>
+                </a:lnTo>
+                <a:close/>
+                <a:lnTo>
+                  <a:pt x="1522728" y="59971"/>
+                </a:lnTo>
+                <a:close/>
+                <a:lnTo>
+                  <a:pt x="1525399" y="58727"/>
+                </a:lnTo>
+                <a:close/>
+                <a:lnTo>
+                  <a:pt x="1528071" y="57488"/>
+                </a:lnTo>
+                <a:close/>
+                <a:lnTo>
+                  <a:pt x="1530742" y="56247"/>
+                </a:lnTo>
+                <a:close/>
+                <a:lnTo>
+                  <a:pt x="1533414" y="54995"/>
+                </a:lnTo>
+                <a:close/>
+                <a:lnTo>
+                  <a:pt x="1536085" y="53727"/>
+                </a:lnTo>
+                <a:close/>
+                <a:lnTo>
+                  <a:pt x="1538757" y="52435"/>
+                </a:lnTo>
+                <a:close/>
+                <a:lnTo>
+                  <a:pt x="1541428" y="51112"/>
+                </a:lnTo>
+                <a:close/>
+                <a:lnTo>
+                  <a:pt x="1544099" y="49752"/>
+                </a:lnTo>
+                <a:close/>
+                <a:lnTo>
+                  <a:pt x="1546771" y="48346"/>
+                </a:lnTo>
+                <a:close/>
+                <a:lnTo>
+                  <a:pt x="1549442" y="46889"/>
+                </a:lnTo>
+                <a:close/>
+                <a:lnTo>
+                  <a:pt x="1552114" y="45373"/>
+                </a:lnTo>
+                <a:close/>
+                <a:lnTo>
+                  <a:pt x="1554785" y="43791"/>
+                </a:lnTo>
+                <a:close/>
+                <a:lnTo>
+                  <a:pt x="1557457" y="42136"/>
+                </a:lnTo>
+                <a:close/>
+                <a:lnTo>
+                  <a:pt x="1560128" y="40401"/>
+                </a:lnTo>
+                <a:close/>
+                <a:lnTo>
+                  <a:pt x="1562800" y="38579"/>
+                </a:lnTo>
+                <a:close/>
+                <a:lnTo>
+                  <a:pt x="1565471" y="36663"/>
+                </a:lnTo>
+                <a:close/>
+                <a:lnTo>
+                  <a:pt x="1568143" y="34646"/>
+                </a:lnTo>
+                <a:close/>
+                <a:lnTo>
+                  <a:pt x="1570814" y="32521"/>
+                </a:lnTo>
+                <a:close/>
+                <a:lnTo>
+                  <a:pt x="1573485" y="30280"/>
+                </a:lnTo>
+                <a:close/>
+                <a:lnTo>
+                  <a:pt x="1576157" y="27918"/>
+                </a:lnTo>
+                <a:close/>
+                <a:lnTo>
+                  <a:pt x="1578828" y="25426"/>
+                </a:lnTo>
+                <a:close/>
+                <a:lnTo>
+                  <a:pt x="1581500" y="22799"/>
+                </a:lnTo>
+                <a:close/>
+                <a:lnTo>
+                  <a:pt x="1584171" y="20028"/>
+                </a:lnTo>
+                <a:close/>
+                <a:lnTo>
+                  <a:pt x="1586843" y="17106"/>
+                </a:lnTo>
+                <a:close/>
+                <a:lnTo>
+                  <a:pt x="1589514" y="14028"/>
+                </a:lnTo>
+                <a:close/>
+                <a:lnTo>
+                  <a:pt x="1592186" y="10785"/>
+                </a:lnTo>
+                <a:close/>
+                <a:lnTo>
+                  <a:pt x="1594857" y="7371"/>
+                </a:lnTo>
+                <a:close/>
+                <a:lnTo>
+                  <a:pt x="1597529" y="3778"/>
                 </a:lnTo>
                 <a:close/>
                 <a:lnTo>
@@ -4387,7 +5587,7 @@
               </a:path>
             </a:pathLst>
           </a:custGeom>
-          <a:ln w="31750">
+          <a:ln w="38100">
             <a:solidFill>
               <a:srgbClr val="000000"/>
             </a:solidFill>
@@ -4423,8 +5623,8 @@
         </p:nvSpPr>
         <p:spPr>
           <a:xfrm>
-            <a:off x="5943600" y="655625"/>
-            <a:ext cx="1143000" cy="1001730"/>
+            <a:off x="6400800" y="285750"/>
+            <a:ext cx="1828800" cy="914400"/>
           </a:xfrm>
           <a:custGeom>
             <a:avLst/>
@@ -4433,1210 +5633,2410 @@
             <a:cxnLst/>
             <a:rect l="l" t="t" r="r" b="b"/>
             <a:pathLst>
-              <a:path w="1143000" h="1001730">
+              <a:path w="1828800" h="914400">
                 <a:moveTo>
-                  <a:pt x="0" y="1001725"/>
+                  <a:pt x="0" y="914400"/>
                 </a:moveTo>
                 <a:lnTo>
-                  <a:pt x="3811" y="1001730"/>
-                </a:lnTo>
-                <a:close/>
-                <a:lnTo>
-                  <a:pt x="7623" y="1001708"/>
-                </a:lnTo>
-                <a:close/>
-                <a:lnTo>
-                  <a:pt x="11437" y="1001658"/>
-                </a:lnTo>
-                <a:close/>
-                <a:lnTo>
-                  <a:pt x="15251" y="1001580"/>
-                </a:lnTo>
-                <a:close/>
-                <a:lnTo>
-                  <a:pt x="19067" y="1001477"/>
-                </a:lnTo>
-                <a:close/>
-                <a:lnTo>
-                  <a:pt x="22884" y="1001346"/>
-                </a:lnTo>
-                <a:close/>
-                <a:lnTo>
-                  <a:pt x="26702" y="1001190"/>
-                </a:lnTo>
-                <a:close/>
-                <a:lnTo>
-                  <a:pt x="30520" y="1001008"/>
-                </a:lnTo>
-                <a:close/>
-                <a:lnTo>
-                  <a:pt x="34339" y="1000801"/>
-                </a:lnTo>
-                <a:close/>
-                <a:lnTo>
-                  <a:pt x="38158" y="1000569"/>
-                </a:lnTo>
-                <a:close/>
-                <a:lnTo>
-                  <a:pt x="41978" y="1000313"/>
-                </a:lnTo>
-                <a:close/>
-                <a:lnTo>
-                  <a:pt x="45798" y="1000033"/>
-                </a:lnTo>
-                <a:close/>
-                <a:lnTo>
-                  <a:pt x="49618" y="999729"/>
-                </a:lnTo>
-                <a:close/>
-                <a:lnTo>
-                  <a:pt x="53438" y="999401"/>
-                </a:lnTo>
-                <a:close/>
-                <a:lnTo>
-                  <a:pt x="57258" y="999050"/>
-                </a:lnTo>
-                <a:close/>
-                <a:lnTo>
-                  <a:pt x="61077" y="998677"/>
-                </a:lnTo>
-                <a:close/>
-                <a:lnTo>
-                  <a:pt x="64896" y="998282"/>
-                </a:lnTo>
-                <a:close/>
-                <a:lnTo>
-                  <a:pt x="68714" y="997865"/>
-                </a:lnTo>
-                <a:close/>
-                <a:lnTo>
-                  <a:pt x="72532" y="997426"/>
-                </a:lnTo>
-                <a:close/>
-                <a:lnTo>
-                  <a:pt x="76348" y="996966"/>
-                </a:lnTo>
-                <a:close/>
-                <a:lnTo>
-                  <a:pt x="80164" y="996485"/>
-                </a:lnTo>
-                <a:close/>
-                <a:lnTo>
-                  <a:pt x="83979" y="995984"/>
-                </a:lnTo>
-                <a:close/>
-                <a:lnTo>
-                  <a:pt x="87792" y="995463"/>
-                </a:lnTo>
-                <a:close/>
-                <a:lnTo>
-                  <a:pt x="91604" y="994922"/>
-                </a:lnTo>
-                <a:close/>
-                <a:lnTo>
-                  <a:pt x="95415" y="994362"/>
-                </a:lnTo>
-                <a:close/>
-                <a:lnTo>
-                  <a:pt x="99224" y="993783"/>
-                </a:lnTo>
-                <a:close/>
-                <a:lnTo>
-                  <a:pt x="103032" y="993185"/>
-                </a:lnTo>
-                <a:close/>
-                <a:lnTo>
-                  <a:pt x="106840" y="992567"/>
-                </a:lnTo>
-                <a:close/>
-                <a:lnTo>
-                  <a:pt x="110649" y="991928"/>
-                </a:lnTo>
-                <a:close/>
-                <a:lnTo>
-                  <a:pt x="114458" y="991269"/>
-                </a:lnTo>
-                <a:close/>
-                <a:lnTo>
-                  <a:pt x="118269" y="990588"/>
-                </a:lnTo>
-                <a:close/>
-                <a:lnTo>
-                  <a:pt x="122083" y="989886"/>
-                </a:lnTo>
-                <a:close/>
-                <a:lnTo>
-                  <a:pt x="125899" y="989162"/>
-                </a:lnTo>
-                <a:close/>
-                <a:lnTo>
-                  <a:pt x="129719" y="988415"/>
-                </a:lnTo>
-                <a:close/>
-                <a:lnTo>
-                  <a:pt x="133543" y="987645"/>
-                </a:lnTo>
-                <a:close/>
-                <a:lnTo>
-                  <a:pt x="137372" y="986852"/>
-                </a:lnTo>
-                <a:close/>
-                <a:lnTo>
-                  <a:pt x="141207" y="986036"/>
-                </a:lnTo>
-                <a:close/>
-                <a:lnTo>
-                  <a:pt x="145048" y="985194"/>
-                </a:lnTo>
-                <a:close/>
-                <a:lnTo>
-                  <a:pt x="148894" y="984329"/>
-                </a:lnTo>
-                <a:close/>
-                <a:lnTo>
-                  <a:pt x="152745" y="983439"/>
-                </a:lnTo>
-                <a:close/>
-                <a:lnTo>
-                  <a:pt x="156600" y="982524"/>
-                </a:lnTo>
-                <a:close/>
-                <a:lnTo>
-                  <a:pt x="160458" y="981585"/>
-                </a:lnTo>
-                <a:close/>
-                <a:lnTo>
-                  <a:pt x="164317" y="980622"/>
-                </a:lnTo>
-                <a:close/>
-                <a:lnTo>
-                  <a:pt x="168177" y="979633"/>
-                </a:lnTo>
-                <a:close/>
-                <a:lnTo>
-                  <a:pt x="172037" y="978621"/>
-                </a:lnTo>
-                <a:close/>
-                <a:lnTo>
-                  <a:pt x="175895" y="977583"/>
-                </a:lnTo>
-                <a:close/>
-                <a:lnTo>
-                  <a:pt x="179751" y="976521"/>
-                </a:lnTo>
-                <a:close/>
-                <a:lnTo>
-                  <a:pt x="183603" y="975435"/>
-                </a:lnTo>
-                <a:close/>
-                <a:lnTo>
-                  <a:pt x="187450" y="974323"/>
-                </a:lnTo>
-                <a:close/>
-                <a:lnTo>
-                  <a:pt x="191292" y="973188"/>
-                </a:lnTo>
-                <a:close/>
-                <a:lnTo>
-                  <a:pt x="195128" y="972027"/>
-                </a:lnTo>
-                <a:close/>
-                <a:lnTo>
-                  <a:pt x="198958" y="970842"/>
-                </a:lnTo>
-                <a:close/>
-                <a:lnTo>
-                  <a:pt x="202784" y="969634"/>
-                </a:lnTo>
-                <a:close/>
-                <a:lnTo>
-                  <a:pt x="206604" y="968403"/>
-                </a:lnTo>
-                <a:close/>
-                <a:lnTo>
-                  <a:pt x="210421" y="967149"/>
-                </a:lnTo>
-                <a:close/>
-                <a:lnTo>
-                  <a:pt x="214235" y="965874"/>
-                </a:lnTo>
-                <a:close/>
-                <a:lnTo>
-                  <a:pt x="218047" y="964577"/>
-                </a:lnTo>
-                <a:close/>
-                <a:lnTo>
-                  <a:pt x="221856" y="963259"/>
-                </a:lnTo>
-                <a:close/>
-                <a:lnTo>
-                  <a:pt x="225665" y="961920"/>
-                </a:lnTo>
-                <a:close/>
-                <a:lnTo>
-                  <a:pt x="229473" y="960562"/>
-                </a:lnTo>
-                <a:close/>
-                <a:lnTo>
-                  <a:pt x="233281" y="959184"/>
-                </a:lnTo>
-                <a:close/>
-                <a:lnTo>
-                  <a:pt x="237090" y="957787"/>
-                </a:lnTo>
-                <a:close/>
-                <a:lnTo>
-                  <a:pt x="240900" y="956372"/>
-                </a:lnTo>
-                <a:close/>
-                <a:lnTo>
-                  <a:pt x="244712" y="954939"/>
-                </a:lnTo>
-                <a:close/>
-                <a:lnTo>
-                  <a:pt x="248525" y="953486"/>
-                </a:lnTo>
-                <a:close/>
-                <a:lnTo>
-                  <a:pt x="252340" y="952013"/>
-                </a:lnTo>
-                <a:close/>
-                <a:lnTo>
-                  <a:pt x="256155" y="950520"/>
-                </a:lnTo>
-                <a:close/>
-                <a:lnTo>
-                  <a:pt x="259972" y="949005"/>
-                </a:lnTo>
-                <a:close/>
-                <a:lnTo>
-                  <a:pt x="263789" y="947468"/>
-                </a:lnTo>
-                <a:close/>
-                <a:lnTo>
-                  <a:pt x="267607" y="945909"/>
-                </a:lnTo>
-                <a:close/>
-                <a:lnTo>
-                  <a:pt x="271426" y="944327"/>
-                </a:lnTo>
-                <a:close/>
-                <a:lnTo>
-                  <a:pt x="275246" y="942720"/>
-                </a:lnTo>
-                <a:close/>
-                <a:lnTo>
-                  <a:pt x="279065" y="941089"/>
-                </a:lnTo>
-                <a:close/>
-                <a:lnTo>
-                  <a:pt x="282885" y="939433"/>
-                </a:lnTo>
-                <a:close/>
-                <a:lnTo>
-                  <a:pt x="286705" y="937751"/>
-                </a:lnTo>
-                <a:close/>
-                <a:lnTo>
-                  <a:pt x="290525" y="936043"/>
-                </a:lnTo>
-                <a:close/>
-                <a:lnTo>
-                  <a:pt x="294345" y="934310"/>
-                </a:lnTo>
-                <a:close/>
-                <a:lnTo>
-                  <a:pt x="298164" y="932551"/>
-                </a:lnTo>
-                <a:close/>
-                <a:lnTo>
-                  <a:pt x="301983" y="930769"/>
-                </a:lnTo>
-                <a:close/>
-                <a:lnTo>
-                  <a:pt x="305802" y="928963"/>
-                </a:lnTo>
-                <a:close/>
-                <a:lnTo>
-                  <a:pt x="309620" y="927134"/>
-                </a:lnTo>
-                <a:close/>
-                <a:lnTo>
-                  <a:pt x="313437" y="925283"/>
-                </a:lnTo>
-                <a:close/>
-                <a:lnTo>
-                  <a:pt x="317253" y="923411"/>
-                </a:lnTo>
-                <a:close/>
-                <a:lnTo>
-                  <a:pt x="321068" y="921518"/>
-                </a:lnTo>
-                <a:close/>
-                <a:lnTo>
-                  <a:pt x="324881" y="919605"/>
-                </a:lnTo>
-                <a:close/>
-                <a:lnTo>
-                  <a:pt x="328694" y="917673"/>
-                </a:lnTo>
-                <a:close/>
-                <a:lnTo>
-                  <a:pt x="332505" y="915723"/>
-                </a:lnTo>
-                <a:close/>
-                <a:lnTo>
-                  <a:pt x="336315" y="913754"/>
-                </a:lnTo>
-                <a:close/>
-                <a:lnTo>
-                  <a:pt x="340123" y="911767"/>
-                </a:lnTo>
-                <a:close/>
-                <a:lnTo>
-                  <a:pt x="343931" y="909762"/>
-                </a:lnTo>
-                <a:close/>
-                <a:lnTo>
-                  <a:pt x="347739" y="907736"/>
-                </a:lnTo>
-                <a:close/>
-                <a:lnTo>
-                  <a:pt x="351548" y="905690"/>
-                </a:lnTo>
-                <a:close/>
-                <a:lnTo>
-                  <a:pt x="355359" y="903623"/>
-                </a:lnTo>
-                <a:close/>
-                <a:lnTo>
-                  <a:pt x="359171" y="901534"/>
-                </a:lnTo>
-                <a:close/>
-                <a:lnTo>
-                  <a:pt x="362987" y="899423"/>
-                </a:lnTo>
-                <a:close/>
-                <a:lnTo>
-                  <a:pt x="366806" y="897289"/>
-                </a:lnTo>
-                <a:close/>
-                <a:lnTo>
-                  <a:pt x="370628" y="895131"/>
-                </a:lnTo>
-                <a:close/>
-                <a:lnTo>
-                  <a:pt x="374456" y="892948"/>
-                </a:lnTo>
-                <a:close/>
-                <a:lnTo>
-                  <a:pt x="378289" y="890740"/>
-                </a:lnTo>
-                <a:close/>
-                <a:lnTo>
-                  <a:pt x="382128" y="888506"/>
-                </a:lnTo>
-                <a:close/>
-                <a:lnTo>
-                  <a:pt x="385973" y="886246"/>
-                </a:lnTo>
-                <a:close/>
-                <a:lnTo>
-                  <a:pt x="389823" y="883961"/>
-                </a:lnTo>
-                <a:close/>
-                <a:lnTo>
-                  <a:pt x="393677" y="881651"/>
-                </a:lnTo>
-                <a:close/>
-                <a:lnTo>
-                  <a:pt x="397534" y="879316"/>
-                </a:lnTo>
-                <a:close/>
-                <a:lnTo>
-                  <a:pt x="401393" y="876958"/>
-                </a:lnTo>
-                <a:close/>
-                <a:lnTo>
-                  <a:pt x="405253" y="874578"/>
-                </a:lnTo>
-                <a:close/>
-                <a:lnTo>
-                  <a:pt x="409113" y="872175"/>
-                </a:lnTo>
-                <a:close/>
-                <a:lnTo>
-                  <a:pt x="412971" y="869750"/>
-                </a:lnTo>
-                <a:close/>
-                <a:lnTo>
-                  <a:pt x="416828" y="867305"/>
-                </a:lnTo>
-                <a:close/>
-                <a:lnTo>
-                  <a:pt x="420681" y="864839"/>
-                </a:lnTo>
-                <a:close/>
-                <a:lnTo>
-                  <a:pt x="424530" y="862354"/>
-                </a:lnTo>
-                <a:close/>
-                <a:lnTo>
-                  <a:pt x="428374" y="859850"/>
-                </a:lnTo>
-                <a:close/>
-                <a:lnTo>
-                  <a:pt x="432211" y="857328"/>
-                </a:lnTo>
-                <a:close/>
-                <a:lnTo>
-                  <a:pt x="436043" y="854787"/>
-                </a:lnTo>
-                <a:close/>
-                <a:lnTo>
-                  <a:pt x="439869" y="852227"/>
-                </a:lnTo>
-                <a:close/>
-                <a:lnTo>
-                  <a:pt x="443691" y="849647"/>
-                </a:lnTo>
-                <a:close/>
-                <a:lnTo>
-                  <a:pt x="447509" y="847047"/>
-                </a:lnTo>
-                <a:close/>
-                <a:lnTo>
-                  <a:pt x="451324" y="844426"/>
-                </a:lnTo>
-                <a:close/>
-                <a:lnTo>
-                  <a:pt x="455136" y="841784"/>
-                </a:lnTo>
-                <a:close/>
-                <a:lnTo>
-                  <a:pt x="458946" y="839121"/>
-                </a:lnTo>
-                <a:close/>
-                <a:lnTo>
-                  <a:pt x="462755" y="836434"/>
-                </a:lnTo>
-                <a:close/>
-                <a:lnTo>
-                  <a:pt x="466563" y="833725"/>
-                </a:lnTo>
-                <a:close/>
-                <a:lnTo>
-                  <a:pt x="470371" y="830993"/>
-                </a:lnTo>
-                <a:close/>
-                <a:lnTo>
-                  <a:pt x="474180" y="828237"/>
-                </a:lnTo>
-                <a:close/>
-                <a:lnTo>
-                  <a:pt x="477990" y="825456"/>
-                </a:lnTo>
-                <a:close/>
-                <a:lnTo>
-                  <a:pt x="481802" y="822650"/>
-                </a:lnTo>
-                <a:close/>
-                <a:lnTo>
-                  <a:pt x="485615" y="819820"/>
-                </a:lnTo>
-                <a:close/>
-                <a:lnTo>
-                  <a:pt x="489430" y="816965"/>
-                </a:lnTo>
-                <a:close/>
-                <a:lnTo>
-                  <a:pt x="493246" y="814085"/>
-                </a:lnTo>
-                <a:close/>
-                <a:lnTo>
-                  <a:pt x="497063" y="811181"/>
-                </a:lnTo>
-                <a:close/>
-                <a:lnTo>
-                  <a:pt x="500880" y="808252"/>
-                </a:lnTo>
-                <a:close/>
-                <a:lnTo>
-                  <a:pt x="504698" y="805299"/>
-                </a:lnTo>
-                <a:close/>
-                <a:lnTo>
-                  <a:pt x="508517" y="802322"/>
-                </a:lnTo>
-                <a:close/>
-                <a:lnTo>
-                  <a:pt x="512336" y="799320"/>
-                </a:lnTo>
-                <a:close/>
-                <a:lnTo>
-                  <a:pt x="516155" y="796294"/>
-                </a:lnTo>
-                <a:close/>
-                <a:lnTo>
-                  <a:pt x="519973" y="793244"/>
-                </a:lnTo>
-                <a:close/>
-                <a:lnTo>
-                  <a:pt x="523792" y="790170"/>
-                </a:lnTo>
-                <a:close/>
-                <a:lnTo>
-                  <a:pt x="527610" y="787072"/>
-                </a:lnTo>
-                <a:close/>
-                <a:lnTo>
-                  <a:pt x="531428" y="783950"/>
-                </a:lnTo>
-                <a:close/>
-                <a:lnTo>
-                  <a:pt x="535246" y="780805"/>
-                </a:lnTo>
-                <a:close/>
-                <a:lnTo>
-                  <a:pt x="539063" y="777636"/>
-                </a:lnTo>
-                <a:close/>
-                <a:lnTo>
-                  <a:pt x="542880" y="774445"/>
-                </a:lnTo>
-                <a:close/>
-                <a:lnTo>
-                  <a:pt x="546696" y="771231"/>
-                </a:lnTo>
-                <a:close/>
-                <a:lnTo>
-                  <a:pt x="550513" y="767994"/>
-                </a:lnTo>
-                <a:close/>
-                <a:lnTo>
-                  <a:pt x="554329" y="764736"/>
-                </a:lnTo>
-                <a:close/>
-                <a:lnTo>
-                  <a:pt x="558145" y="761456"/>
-                </a:lnTo>
-                <a:close/>
-                <a:lnTo>
-                  <a:pt x="561961" y="758154"/>
-                </a:lnTo>
-                <a:close/>
-                <a:lnTo>
-                  <a:pt x="565776" y="754831"/>
-                </a:lnTo>
-                <a:close/>
-                <a:lnTo>
-                  <a:pt x="569592" y="751487"/>
-                </a:lnTo>
-                <a:close/>
-                <a:lnTo>
-                  <a:pt x="573408" y="748123"/>
-                </a:lnTo>
-                <a:close/>
-                <a:lnTo>
-                  <a:pt x="577224" y="744738"/>
-                </a:lnTo>
-                <a:close/>
-                <a:lnTo>
-                  <a:pt x="581039" y="741333"/>
-                </a:lnTo>
-                <a:close/>
-                <a:lnTo>
-                  <a:pt x="584855" y="737908"/>
-                </a:lnTo>
-                <a:close/>
-                <a:lnTo>
-                  <a:pt x="588671" y="734464"/>
-                </a:lnTo>
-                <a:close/>
-                <a:lnTo>
-                  <a:pt x="592487" y="730999"/>
-                </a:lnTo>
-                <a:close/>
-                <a:lnTo>
-                  <a:pt x="596304" y="727516"/>
-                </a:lnTo>
-                <a:close/>
-                <a:lnTo>
-                  <a:pt x="600120" y="724014"/>
-                </a:lnTo>
-                <a:close/>
-                <a:lnTo>
-                  <a:pt x="603937" y="720492"/>
-                </a:lnTo>
-                <a:close/>
-                <a:lnTo>
-                  <a:pt x="607754" y="716953"/>
-                </a:lnTo>
-                <a:close/>
-                <a:lnTo>
-                  <a:pt x="611572" y="713394"/>
-                </a:lnTo>
-                <a:close/>
-                <a:lnTo>
-                  <a:pt x="615390" y="709818"/>
-                </a:lnTo>
-                <a:close/>
-                <a:lnTo>
-                  <a:pt x="619208" y="706224"/>
-                </a:lnTo>
-                <a:close/>
-                <a:lnTo>
-                  <a:pt x="623027" y="702611"/>
-                </a:lnTo>
-                <a:close/>
-                <a:lnTo>
-                  <a:pt x="626845" y="698980"/>
-                </a:lnTo>
-                <a:close/>
-                <a:lnTo>
-                  <a:pt x="630664" y="695329"/>
-                </a:lnTo>
-                <a:close/>
-                <a:lnTo>
-                  <a:pt x="634483" y="691656"/>
-                </a:lnTo>
-                <a:close/>
-                <a:lnTo>
-                  <a:pt x="638302" y="687961"/>
-                </a:lnTo>
-                <a:close/>
-                <a:lnTo>
-                  <a:pt x="642120" y="684243"/>
-                </a:lnTo>
-                <a:close/>
-                <a:lnTo>
-                  <a:pt x="645937" y="680499"/>
-                </a:lnTo>
-                <a:close/>
-                <a:lnTo>
-                  <a:pt x="649754" y="676730"/>
-                </a:lnTo>
-                <a:close/>
-                <a:lnTo>
-                  <a:pt x="653570" y="672933"/>
-                </a:lnTo>
-                <a:close/>
-                <a:lnTo>
-                  <a:pt x="657385" y="669108"/>
-                </a:lnTo>
-                <a:close/>
-                <a:lnTo>
-                  <a:pt x="661198" y="665253"/>
-                </a:lnTo>
-                <a:close/>
-                <a:lnTo>
-                  <a:pt x="665010" y="661368"/>
-                </a:lnTo>
-                <a:close/>
-                <a:lnTo>
-                  <a:pt x="668820" y="657450"/>
-                </a:lnTo>
-                <a:close/>
-                <a:lnTo>
-                  <a:pt x="672629" y="653502"/>
-                </a:lnTo>
-                <a:close/>
-                <a:lnTo>
-                  <a:pt x="676437" y="649523"/>
-                </a:lnTo>
-                <a:close/>
-                <a:lnTo>
-                  <a:pt x="680245" y="645517"/>
-                </a:lnTo>
-                <a:close/>
-                <a:lnTo>
-                  <a:pt x="684054" y="641484"/>
-                </a:lnTo>
-                <a:close/>
-                <a:lnTo>
-                  <a:pt x="687864" y="637426"/>
-                </a:lnTo>
-                <a:close/>
-                <a:lnTo>
-                  <a:pt x="691676" y="633345"/>
-                </a:lnTo>
-                <a:close/>
-                <a:lnTo>
-                  <a:pt x="695491" y="629242"/>
-                </a:lnTo>
-                <a:close/>
-                <a:lnTo>
-                  <a:pt x="699309" y="625120"/>
-                </a:lnTo>
-                <a:close/>
-                <a:lnTo>
-                  <a:pt x="703131" y="620980"/>
-                </a:lnTo>
-                <a:close/>
-                <a:lnTo>
-                  <a:pt x="706957" y="616823"/>
-                </a:lnTo>
-                <a:close/>
-                <a:lnTo>
-                  <a:pt x="710789" y="612651"/>
-                </a:lnTo>
-                <a:close/>
-                <a:lnTo>
-                  <a:pt x="714626" y="608466"/>
-                </a:lnTo>
-                <a:close/>
-                <a:lnTo>
-                  <a:pt x="718470" y="604269"/>
-                </a:lnTo>
-                <a:close/>
-                <a:lnTo>
-                  <a:pt x="722319" y="600059"/>
-                </a:lnTo>
-                <a:close/>
-                <a:lnTo>
-                  <a:pt x="726172" y="595835"/>
-                </a:lnTo>
-                <a:close/>
-                <a:lnTo>
-                  <a:pt x="730029" y="591595"/>
-                </a:lnTo>
-                <a:close/>
-                <a:lnTo>
-                  <a:pt x="733887" y="587339"/>
-                </a:lnTo>
-                <a:close/>
-                <a:lnTo>
-                  <a:pt x="737747" y="583064"/>
-                </a:lnTo>
-                <a:close/>
-                <a:lnTo>
-                  <a:pt x="741607" y="578771"/>
-                </a:lnTo>
-                <a:close/>
-                <a:lnTo>
-                  <a:pt x="745466" y="574457"/>
-                </a:lnTo>
-                <a:close/>
-                <a:lnTo>
-                  <a:pt x="749323" y="570121"/>
-                </a:lnTo>
-                <a:close/>
-                <a:lnTo>
-                  <a:pt x="753177" y="565763"/>
-                </a:lnTo>
-                <a:close/>
-                <a:lnTo>
-                  <a:pt x="757027" y="561380"/>
-                </a:lnTo>
-                <a:close/>
-                <a:lnTo>
-                  <a:pt x="760872" y="556973"/>
-                </a:lnTo>
-                <a:close/>
-                <a:lnTo>
-                  <a:pt x="764711" y="552539"/>
-                </a:lnTo>
-                <a:close/>
-                <a:lnTo>
-                  <a:pt x="768544" y="548078"/>
-                </a:lnTo>
-                <a:close/>
-                <a:lnTo>
-                  <a:pt x="772372" y="543592"/>
-                </a:lnTo>
-                <a:close/>
-                <a:lnTo>
-                  <a:pt x="776194" y="539079"/>
-                </a:lnTo>
-                <a:close/>
-                <a:lnTo>
-                  <a:pt x="780013" y="534541"/>
-                </a:lnTo>
-                <a:close/>
-                <a:lnTo>
-                  <a:pt x="783829" y="529978"/>
-                </a:lnTo>
-                <a:close/>
-                <a:lnTo>
-                  <a:pt x="787641" y="525389"/>
-                </a:lnTo>
-                <a:close/>
-                <a:lnTo>
-                  <a:pt x="791452" y="520777"/>
-                </a:lnTo>
-                <a:close/>
-                <a:lnTo>
-                  <a:pt x="795261" y="516140"/>
-                </a:lnTo>
-                <a:close/>
-                <a:lnTo>
-                  <a:pt x="799069" y="511480"/>
-                </a:lnTo>
-                <a:close/>
-                <a:lnTo>
-                  <a:pt x="802877" y="506796"/>
-                </a:lnTo>
-                <a:close/>
-                <a:lnTo>
-                  <a:pt x="806685" y="502090"/>
-                </a:lnTo>
-                <a:close/>
-                <a:lnTo>
-                  <a:pt x="810495" y="497361"/>
-                </a:lnTo>
-                <a:close/>
-                <a:lnTo>
-                  <a:pt x="814306" y="492609"/>
-                </a:lnTo>
-                <a:close/>
-                <a:lnTo>
-                  <a:pt x="818119" y="487835"/>
-                </a:lnTo>
-                <a:close/>
-                <a:lnTo>
-                  <a:pt x="821932" y="483038"/>
-                </a:lnTo>
-                <a:close/>
-                <a:lnTo>
-                  <a:pt x="825747" y="478218"/>
-                </a:lnTo>
-                <a:close/>
-                <a:lnTo>
-                  <a:pt x="829563" y="473374"/>
-                </a:lnTo>
-                <a:close/>
-                <a:lnTo>
-                  <a:pt x="833380" y="468507"/>
-                </a:lnTo>
-                <a:close/>
-                <a:lnTo>
-                  <a:pt x="837198" y="463616"/>
-                </a:lnTo>
-                <a:close/>
-                <a:lnTo>
-                  <a:pt x="841017" y="458702"/>
-                </a:lnTo>
-                <a:close/>
-                <a:lnTo>
-                  <a:pt x="844836" y="453763"/>
-                </a:lnTo>
-                <a:close/>
-                <a:lnTo>
-                  <a:pt x="848655" y="448799"/>
-                </a:lnTo>
-                <a:close/>
-                <a:lnTo>
-                  <a:pt x="852475" y="443811"/>
-                </a:lnTo>
-                <a:close/>
-                <a:lnTo>
-                  <a:pt x="856295" y="438797"/>
-                </a:lnTo>
-                <a:close/>
-                <a:lnTo>
-                  <a:pt x="860115" y="433759"/>
-                </a:lnTo>
-                <a:close/>
-                <a:lnTo>
-                  <a:pt x="863935" y="428696"/>
-                </a:lnTo>
-                <a:close/>
-                <a:lnTo>
-                  <a:pt x="867754" y="423608"/>
-                </a:lnTo>
-                <a:close/>
-                <a:lnTo>
-                  <a:pt x="871574" y="418497"/>
-                </a:lnTo>
-                <a:close/>
-                <a:lnTo>
-                  <a:pt x="875393" y="413363"/>
-                </a:lnTo>
-                <a:close/>
-                <a:lnTo>
-                  <a:pt x="879211" y="408206"/>
-                </a:lnTo>
-                <a:close/>
-                <a:lnTo>
-                  <a:pt x="883028" y="403028"/>
-                </a:lnTo>
-                <a:close/>
-                <a:lnTo>
-                  <a:pt x="886845" y="397828"/>
-                </a:lnTo>
-                <a:close/>
-                <a:lnTo>
-                  <a:pt x="890660" y="392607"/>
-                </a:lnTo>
-                <a:close/>
-                <a:lnTo>
-                  <a:pt x="894475" y="387366"/>
-                </a:lnTo>
-                <a:close/>
-                <a:lnTo>
-                  <a:pt x="898288" y="382105"/>
-                </a:lnTo>
-                <a:close/>
-                <a:lnTo>
-                  <a:pt x="902100" y="376826"/>
-                </a:lnTo>
-                <a:close/>
-                <a:lnTo>
-                  <a:pt x="905910" y="371528"/>
-                </a:lnTo>
-                <a:close/>
-                <a:lnTo>
-                  <a:pt x="909719" y="366212"/>
-                </a:lnTo>
-                <a:close/>
-                <a:lnTo>
-                  <a:pt x="913527" y="360876"/>
-                </a:lnTo>
-                <a:close/>
-                <a:lnTo>
-                  <a:pt x="917335" y="355522"/>
-                </a:lnTo>
-                <a:close/>
-                <a:lnTo>
-                  <a:pt x="921144" y="350147"/>
-                </a:lnTo>
-                <a:close/>
-                <a:lnTo>
-                  <a:pt x="924953" y="344751"/>
-                </a:lnTo>
-                <a:close/>
-                <a:lnTo>
-                  <a:pt x="928765" y="339334"/>
-                </a:lnTo>
-                <a:close/>
-                <a:lnTo>
-                  <a:pt x="932579" y="333894"/>
-                </a:lnTo>
-                <a:close/>
-                <a:lnTo>
-                  <a:pt x="936396" y="328431"/>
-                </a:lnTo>
-                <a:close/>
-                <a:lnTo>
-                  <a:pt x="940216" y="322945"/>
-                </a:lnTo>
-                <a:close/>
-                <a:lnTo>
-                  <a:pt x="944042" y="317435"/>
-                </a:lnTo>
-                <a:close/>
-                <a:lnTo>
-                  <a:pt x="947872" y="311900"/>
-                </a:lnTo>
-                <a:close/>
-                <a:lnTo>
-                  <a:pt x="951708" y="306339"/>
-                </a:lnTo>
-                <a:close/>
-                <a:lnTo>
-                  <a:pt x="955550" y="300752"/>
-                </a:lnTo>
-                <a:close/>
-                <a:lnTo>
-                  <a:pt x="959397" y="295139"/>
-                </a:lnTo>
-                <a:close/>
-                <a:lnTo>
-                  <a:pt x="963249" y="289501"/>
-                </a:lnTo>
-                <a:close/>
-                <a:lnTo>
-                  <a:pt x="967105" y="283839"/>
-                </a:lnTo>
-                <a:close/>
-                <a:lnTo>
-                  <a:pt x="970963" y="278153"/>
-                </a:lnTo>
-                <a:close/>
-                <a:lnTo>
-                  <a:pt x="974823" y="272443"/>
-                </a:lnTo>
-                <a:close/>
-                <a:lnTo>
-                  <a:pt x="978683" y="266712"/>
-                </a:lnTo>
-                <a:close/>
-                <a:lnTo>
-                  <a:pt x="982542" y="260958"/>
-                </a:lnTo>
-                <a:close/>
-                <a:lnTo>
-                  <a:pt x="986400" y="255184"/>
-                </a:lnTo>
-                <a:close/>
-                <a:lnTo>
-                  <a:pt x="990255" y="249389"/>
-                </a:lnTo>
-                <a:close/>
-                <a:lnTo>
-                  <a:pt x="994106" y="243575"/>
-                </a:lnTo>
-                <a:close/>
-                <a:lnTo>
-                  <a:pt x="997952" y="237741"/>
-                </a:lnTo>
-                <a:close/>
-                <a:lnTo>
-                  <a:pt x="1001793" y="231890"/>
-                </a:lnTo>
-                <a:close/>
-                <a:lnTo>
-                  <a:pt x="1005628" y="226020"/>
-                </a:lnTo>
-                <a:close/>
-                <a:lnTo>
-                  <a:pt x="1009457" y="220131"/>
-                </a:lnTo>
-                <a:close/>
-                <a:lnTo>
-                  <a:pt x="1013281" y="214223"/>
-                </a:lnTo>
-                <a:close/>
-                <a:lnTo>
-                  <a:pt x="1017101" y="208295"/>
-                </a:lnTo>
-                <a:close/>
-                <a:lnTo>
-                  <a:pt x="1020917" y="202346"/>
-                </a:lnTo>
-                <a:close/>
-                <a:lnTo>
-                  <a:pt x="1024731" y="196376"/>
-                </a:lnTo>
-                <a:close/>
-                <a:lnTo>
-                  <a:pt x="1028542" y="190384"/>
-                </a:lnTo>
-                <a:close/>
-                <a:lnTo>
-                  <a:pt x="1032351" y="184369"/>
-                </a:lnTo>
-                <a:close/>
-                <a:lnTo>
-                  <a:pt x="1036160" y="178331"/>
-                </a:lnTo>
-                <a:close/>
-                <a:lnTo>
-                  <a:pt x="1039968" y="172270"/>
-                </a:lnTo>
-                <a:close/>
-                <a:lnTo>
-                  <a:pt x="1043776" y="166184"/>
-                </a:lnTo>
-                <a:close/>
-                <a:lnTo>
-                  <a:pt x="1047585" y="160073"/>
-                </a:lnTo>
-                <a:close/>
-                <a:lnTo>
-                  <a:pt x="1051396" y="153937"/>
-                </a:lnTo>
-                <a:close/>
-                <a:lnTo>
-                  <a:pt x="1055208" y="147775"/>
-                </a:lnTo>
-                <a:close/>
-                <a:lnTo>
-                  <a:pt x="1059021" y="141588"/>
-                </a:lnTo>
-                <a:close/>
-                <a:lnTo>
-                  <a:pt x="1062836" y="135377"/>
-                </a:lnTo>
-                <a:close/>
-                <a:lnTo>
-                  <a:pt x="1066652" y="129141"/>
-                </a:lnTo>
-                <a:close/>
-                <a:lnTo>
-                  <a:pt x="1070468" y="122882"/>
-                </a:lnTo>
-                <a:close/>
-                <a:lnTo>
-                  <a:pt x="1074286" y="116600"/>
-                </a:lnTo>
-                <a:close/>
-                <a:lnTo>
-                  <a:pt x="1078104" y="110295"/>
-                </a:lnTo>
-                <a:close/>
-                <a:lnTo>
-                  <a:pt x="1081923" y="103967"/>
-                </a:lnTo>
-                <a:close/>
-                <a:lnTo>
-                  <a:pt x="1085742" y="97617"/>
-                </a:lnTo>
-                <a:close/>
-                <a:lnTo>
-                  <a:pt x="1089562" y="91246"/>
-                </a:lnTo>
-                <a:close/>
-                <a:lnTo>
-                  <a:pt x="1093382" y="84853"/>
-                </a:lnTo>
-                <a:close/>
-                <a:lnTo>
-                  <a:pt x="1097202" y="78439"/>
-                </a:lnTo>
-                <a:close/>
-                <a:lnTo>
-                  <a:pt x="1101022" y="72005"/>
-                </a:lnTo>
-                <a:close/>
-                <a:lnTo>
-                  <a:pt x="1104842" y="65551"/>
-                </a:lnTo>
-                <a:close/>
-                <a:lnTo>
-                  <a:pt x="1108661" y="59078"/>
-                </a:lnTo>
-                <a:close/>
-                <a:lnTo>
-                  <a:pt x="1112480" y="52585"/>
-                </a:lnTo>
-                <a:close/>
-                <a:lnTo>
-                  <a:pt x="1116298" y="46073"/>
-                </a:lnTo>
-                <a:close/>
-                <a:lnTo>
-                  <a:pt x="1120116" y="39543"/>
-                </a:lnTo>
-                <a:close/>
-                <a:lnTo>
-                  <a:pt x="1123933" y="32995"/>
-                </a:lnTo>
-                <a:close/>
-                <a:lnTo>
-                  <a:pt x="1127749" y="26430"/>
-                </a:lnTo>
-                <a:close/>
-                <a:lnTo>
-                  <a:pt x="1131563" y="19847"/>
-                </a:lnTo>
-                <a:close/>
-                <a:lnTo>
-                  <a:pt x="1135377" y="13247"/>
-                </a:lnTo>
-                <a:close/>
-                <a:lnTo>
-                  <a:pt x="1139189" y="6632"/>
-                </a:lnTo>
-                <a:close/>
-                <a:lnTo>
-                  <a:pt x="1143000" y="0"/>
+                  <a:pt x="3053" y="914397"/>
+                </a:lnTo>
+                <a:close/>
+                <a:lnTo>
+                  <a:pt x="6106" y="914390"/>
+                </a:lnTo>
+                <a:close/>
+                <a:lnTo>
+                  <a:pt x="9159" y="914377"/>
+                </a:lnTo>
+                <a:close/>
+                <a:lnTo>
+                  <a:pt x="12212" y="914359"/>
+                </a:lnTo>
+                <a:close/>
+                <a:lnTo>
+                  <a:pt x="15265" y="914336"/>
+                </a:lnTo>
+                <a:close/>
+                <a:lnTo>
+                  <a:pt x="18319" y="914308"/>
+                </a:lnTo>
+                <a:close/>
+                <a:lnTo>
+                  <a:pt x="21372" y="914275"/>
+                </a:lnTo>
+                <a:close/>
+                <a:lnTo>
+                  <a:pt x="24425" y="914237"/>
+                </a:lnTo>
+                <a:close/>
+                <a:lnTo>
+                  <a:pt x="27478" y="914194"/>
+                </a:lnTo>
+                <a:close/>
+                <a:lnTo>
+                  <a:pt x="30531" y="914145"/>
+                </a:lnTo>
+                <a:close/>
+                <a:lnTo>
+                  <a:pt x="33584" y="914092"/>
+                </a:lnTo>
+                <a:close/>
+                <a:lnTo>
+                  <a:pt x="36637" y="914033"/>
+                </a:lnTo>
+                <a:close/>
+                <a:lnTo>
+                  <a:pt x="39690" y="913969"/>
+                </a:lnTo>
+                <a:close/>
+                <a:lnTo>
+                  <a:pt x="42743" y="913901"/>
+                </a:lnTo>
+                <a:close/>
+                <a:lnTo>
+                  <a:pt x="45796" y="913827"/>
+                </a:lnTo>
+                <a:close/>
+                <a:lnTo>
+                  <a:pt x="48849" y="913748"/>
+                </a:lnTo>
+                <a:close/>
+                <a:lnTo>
+                  <a:pt x="51903" y="913664"/>
+                </a:lnTo>
+                <a:close/>
+                <a:lnTo>
+                  <a:pt x="54956" y="913574"/>
+                </a:lnTo>
+                <a:close/>
+                <a:lnTo>
+                  <a:pt x="58009" y="913480"/>
+                </a:lnTo>
+                <a:close/>
+                <a:lnTo>
+                  <a:pt x="61062" y="913381"/>
+                </a:lnTo>
+                <a:close/>
+                <a:lnTo>
+                  <a:pt x="64115" y="913276"/>
+                </a:lnTo>
+                <a:close/>
+                <a:lnTo>
+                  <a:pt x="67168" y="913167"/>
+                </a:lnTo>
+                <a:close/>
+                <a:lnTo>
+                  <a:pt x="70221" y="913052"/>
+                </a:lnTo>
+                <a:close/>
+                <a:lnTo>
+                  <a:pt x="73274" y="912932"/>
+                </a:lnTo>
+                <a:close/>
+                <a:lnTo>
+                  <a:pt x="76327" y="912807"/>
+                </a:lnTo>
+                <a:close/>
+                <a:lnTo>
+                  <a:pt x="79380" y="912677"/>
+                </a:lnTo>
+                <a:close/>
+                <a:lnTo>
+                  <a:pt x="82433" y="912542"/>
+                </a:lnTo>
+                <a:close/>
+                <a:lnTo>
+                  <a:pt x="85486" y="912402"/>
+                </a:lnTo>
+                <a:close/>
+                <a:lnTo>
+                  <a:pt x="88540" y="912257"/>
+                </a:lnTo>
+                <a:close/>
+                <a:lnTo>
+                  <a:pt x="91593" y="912106"/>
+                </a:lnTo>
+                <a:close/>
+                <a:lnTo>
+                  <a:pt x="94646" y="911951"/>
+                </a:lnTo>
+                <a:close/>
+                <a:lnTo>
+                  <a:pt x="97699" y="911790"/>
+                </a:lnTo>
+                <a:close/>
+                <a:lnTo>
+                  <a:pt x="100752" y="911625"/>
+                </a:lnTo>
+                <a:close/>
+                <a:lnTo>
+                  <a:pt x="103805" y="911454"/>
+                </a:lnTo>
+                <a:close/>
+                <a:lnTo>
+                  <a:pt x="106858" y="911278"/>
+                </a:lnTo>
+                <a:close/>
+                <a:lnTo>
+                  <a:pt x="109911" y="911097"/>
+                </a:lnTo>
+                <a:close/>
+                <a:lnTo>
+                  <a:pt x="112964" y="910911"/>
+                </a:lnTo>
+                <a:close/>
+                <a:lnTo>
+                  <a:pt x="116017" y="910720"/>
+                </a:lnTo>
+                <a:close/>
+                <a:lnTo>
+                  <a:pt x="119070" y="910524"/>
+                </a:lnTo>
+                <a:close/>
+                <a:lnTo>
+                  <a:pt x="122124" y="910323"/>
+                </a:lnTo>
+                <a:close/>
+                <a:lnTo>
+                  <a:pt x="125177" y="910116"/>
+                </a:lnTo>
+                <a:close/>
+                <a:lnTo>
+                  <a:pt x="128230" y="909905"/>
+                </a:lnTo>
+                <a:close/>
+                <a:lnTo>
+                  <a:pt x="131283" y="909688"/>
+                </a:lnTo>
+                <a:close/>
+                <a:lnTo>
+                  <a:pt x="134336" y="909466"/>
+                </a:lnTo>
+                <a:close/>
+                <a:lnTo>
+                  <a:pt x="137389" y="909240"/>
+                </a:lnTo>
+                <a:close/>
+                <a:lnTo>
+                  <a:pt x="140442" y="909008"/>
+                </a:lnTo>
+                <a:close/>
+                <a:lnTo>
+                  <a:pt x="143495" y="908771"/>
+                </a:lnTo>
+                <a:close/>
+                <a:lnTo>
+                  <a:pt x="146548" y="908529"/>
+                </a:lnTo>
+                <a:close/>
+                <a:lnTo>
+                  <a:pt x="149601" y="908281"/>
+                </a:lnTo>
+                <a:close/>
+                <a:lnTo>
+                  <a:pt x="152654" y="908029"/>
+                </a:lnTo>
+                <a:close/>
+                <a:lnTo>
+                  <a:pt x="155708" y="907772"/>
+                </a:lnTo>
+                <a:close/>
+                <a:lnTo>
+                  <a:pt x="158761" y="907509"/>
+                </a:lnTo>
+                <a:close/>
+                <a:lnTo>
+                  <a:pt x="161814" y="907242"/>
+                </a:lnTo>
+                <a:close/>
+                <a:lnTo>
+                  <a:pt x="164867" y="906969"/>
+                </a:lnTo>
+                <a:close/>
+                <a:lnTo>
+                  <a:pt x="167920" y="906691"/>
+                </a:lnTo>
+                <a:close/>
+                <a:lnTo>
+                  <a:pt x="170973" y="906408"/>
+                </a:lnTo>
+                <a:close/>
+                <a:lnTo>
+                  <a:pt x="174026" y="906120"/>
+                </a:lnTo>
+                <a:close/>
+                <a:lnTo>
+                  <a:pt x="177079" y="905827"/>
+                </a:lnTo>
+                <a:close/>
+                <a:lnTo>
+                  <a:pt x="180132" y="905529"/>
+                </a:lnTo>
+                <a:close/>
+                <a:lnTo>
+                  <a:pt x="183185" y="905226"/>
+                </a:lnTo>
+                <a:close/>
+                <a:lnTo>
+                  <a:pt x="186238" y="904918"/>
+                </a:lnTo>
+                <a:close/>
+                <a:lnTo>
+                  <a:pt x="189291" y="904604"/>
+                </a:lnTo>
+                <a:close/>
+                <a:lnTo>
+                  <a:pt x="192345" y="904286"/>
+                </a:lnTo>
+                <a:close/>
+                <a:lnTo>
+                  <a:pt x="195398" y="903962"/>
+                </a:lnTo>
+                <a:close/>
+                <a:lnTo>
+                  <a:pt x="198451" y="903633"/>
+                </a:lnTo>
+                <a:close/>
+                <a:lnTo>
+                  <a:pt x="201504" y="903299"/>
+                </a:lnTo>
+                <a:close/>
+                <a:lnTo>
+                  <a:pt x="204557" y="902960"/>
+                </a:lnTo>
+                <a:close/>
+                <a:lnTo>
+                  <a:pt x="207610" y="902616"/>
+                </a:lnTo>
+                <a:close/>
+                <a:lnTo>
+                  <a:pt x="210663" y="902267"/>
+                </a:lnTo>
+                <a:close/>
+                <a:lnTo>
+                  <a:pt x="213716" y="901913"/>
+                </a:lnTo>
+                <a:close/>
+                <a:lnTo>
+                  <a:pt x="216769" y="901554"/>
+                </a:lnTo>
+                <a:close/>
+                <a:lnTo>
+                  <a:pt x="219822" y="901189"/>
+                </a:lnTo>
+                <a:close/>
+                <a:lnTo>
+                  <a:pt x="222875" y="900820"/>
+                </a:lnTo>
+                <a:close/>
+                <a:lnTo>
+                  <a:pt x="225929" y="900445"/>
+                </a:lnTo>
+                <a:close/>
+                <a:lnTo>
+                  <a:pt x="228982" y="900065"/>
+                </a:lnTo>
+                <a:close/>
+                <a:lnTo>
+                  <a:pt x="232035" y="899681"/>
+                </a:lnTo>
+                <a:close/>
+                <a:lnTo>
+                  <a:pt x="235088" y="899291"/>
+                </a:lnTo>
+                <a:close/>
+                <a:lnTo>
+                  <a:pt x="238141" y="898896"/>
+                </a:lnTo>
+                <a:close/>
+                <a:lnTo>
+                  <a:pt x="241194" y="898496"/>
+                </a:lnTo>
+                <a:close/>
+                <a:lnTo>
+                  <a:pt x="244247" y="898090"/>
+                </a:lnTo>
+                <a:close/>
+                <a:lnTo>
+                  <a:pt x="247300" y="897680"/>
+                </a:lnTo>
+                <a:close/>
+                <a:lnTo>
+                  <a:pt x="250353" y="897265"/>
+                </a:lnTo>
+                <a:close/>
+                <a:lnTo>
+                  <a:pt x="253406" y="896844"/>
+                </a:lnTo>
+                <a:close/>
+                <a:lnTo>
+                  <a:pt x="256459" y="896419"/>
+                </a:lnTo>
+                <a:close/>
+                <a:lnTo>
+                  <a:pt x="259513" y="895988"/>
+                </a:lnTo>
+                <a:close/>
+                <a:lnTo>
+                  <a:pt x="262566" y="895552"/>
+                </a:lnTo>
+                <a:close/>
+                <a:lnTo>
+                  <a:pt x="265619" y="895111"/>
+                </a:lnTo>
+                <a:close/>
+                <a:lnTo>
+                  <a:pt x="268672" y="894665"/>
+                </a:lnTo>
+                <a:close/>
+                <a:lnTo>
+                  <a:pt x="271725" y="894214"/>
+                </a:lnTo>
+                <a:close/>
+                <a:lnTo>
+                  <a:pt x="274778" y="893758"/>
+                </a:lnTo>
+                <a:close/>
+                <a:lnTo>
+                  <a:pt x="277831" y="893297"/>
+                </a:lnTo>
+                <a:close/>
+                <a:lnTo>
+                  <a:pt x="280884" y="892831"/>
+                </a:lnTo>
+                <a:close/>
+                <a:lnTo>
+                  <a:pt x="283937" y="892359"/>
+                </a:lnTo>
+                <a:close/>
+                <a:lnTo>
+                  <a:pt x="286990" y="891883"/>
+                </a:lnTo>
+                <a:close/>
+                <a:lnTo>
+                  <a:pt x="290043" y="891401"/>
+                </a:lnTo>
+                <a:close/>
+                <a:lnTo>
+                  <a:pt x="293096" y="890914"/>
+                </a:lnTo>
+                <a:close/>
+                <a:lnTo>
+                  <a:pt x="296150" y="890422"/>
+                </a:lnTo>
+                <a:close/>
+                <a:lnTo>
+                  <a:pt x="299203" y="889926"/>
+                </a:lnTo>
+                <a:close/>
+                <a:lnTo>
+                  <a:pt x="302256" y="889423"/>
+                </a:lnTo>
+                <a:close/>
+                <a:lnTo>
+                  <a:pt x="305309" y="888916"/>
+                </a:lnTo>
+                <a:close/>
+                <a:lnTo>
+                  <a:pt x="308362" y="888404"/>
+                </a:lnTo>
+                <a:close/>
+                <a:lnTo>
+                  <a:pt x="311415" y="887887"/>
+                </a:lnTo>
+                <a:close/>
+                <a:lnTo>
+                  <a:pt x="314468" y="887364"/>
+                </a:lnTo>
+                <a:close/>
+                <a:lnTo>
+                  <a:pt x="317521" y="886837"/>
+                </a:lnTo>
+                <a:close/>
+                <a:lnTo>
+                  <a:pt x="320574" y="886304"/>
+                </a:lnTo>
+                <a:close/>
+                <a:lnTo>
+                  <a:pt x="323627" y="885767"/>
+                </a:lnTo>
+                <a:close/>
+                <a:lnTo>
+                  <a:pt x="326680" y="885224"/>
+                </a:lnTo>
+                <a:close/>
+                <a:lnTo>
+                  <a:pt x="329734" y="884676"/>
+                </a:lnTo>
+                <a:close/>
+                <a:lnTo>
+                  <a:pt x="332787" y="884123"/>
+                </a:lnTo>
+                <a:close/>
+                <a:lnTo>
+                  <a:pt x="335840" y="883565"/>
+                </a:lnTo>
+                <a:close/>
+                <a:lnTo>
+                  <a:pt x="338893" y="883002"/>
+                </a:lnTo>
+                <a:close/>
+                <a:lnTo>
+                  <a:pt x="341946" y="882433"/>
+                </a:lnTo>
+                <a:close/>
+                <a:lnTo>
+                  <a:pt x="344999" y="881860"/>
+                </a:lnTo>
+                <a:close/>
+                <a:lnTo>
+                  <a:pt x="348052" y="881281"/>
+                </a:lnTo>
+                <a:close/>
+                <a:lnTo>
+                  <a:pt x="351105" y="880698"/>
+                </a:lnTo>
+                <a:close/>
+                <a:lnTo>
+                  <a:pt x="354158" y="880109"/>
+                </a:lnTo>
+                <a:close/>
+                <a:lnTo>
+                  <a:pt x="357211" y="879515"/>
+                </a:lnTo>
+                <a:close/>
+                <a:lnTo>
+                  <a:pt x="360264" y="878917"/>
+                </a:lnTo>
+                <a:close/>
+                <a:lnTo>
+                  <a:pt x="363318" y="878313"/>
+                </a:lnTo>
+                <a:close/>
+                <a:lnTo>
+                  <a:pt x="366371" y="877704"/>
+                </a:lnTo>
+                <a:close/>
+                <a:lnTo>
+                  <a:pt x="369424" y="877089"/>
+                </a:lnTo>
+                <a:close/>
+                <a:lnTo>
+                  <a:pt x="372477" y="876470"/>
+                </a:lnTo>
+                <a:close/>
+                <a:lnTo>
+                  <a:pt x="375530" y="875846"/>
+                </a:lnTo>
+                <a:close/>
+                <a:lnTo>
+                  <a:pt x="378583" y="875216"/>
+                </a:lnTo>
+                <a:close/>
+                <a:lnTo>
+                  <a:pt x="381636" y="874582"/>
+                </a:lnTo>
+                <a:close/>
+                <a:lnTo>
+                  <a:pt x="384689" y="873942"/>
+                </a:lnTo>
+                <a:close/>
+                <a:lnTo>
+                  <a:pt x="387742" y="873297"/>
+                </a:lnTo>
+                <a:close/>
+                <a:lnTo>
+                  <a:pt x="390795" y="872648"/>
+                </a:lnTo>
+                <a:close/>
+                <a:lnTo>
+                  <a:pt x="393848" y="871993"/>
+                </a:lnTo>
+                <a:close/>
+                <a:lnTo>
+                  <a:pt x="396902" y="871333"/>
+                </a:lnTo>
+                <a:close/>
+                <a:lnTo>
+                  <a:pt x="399955" y="870668"/>
+                </a:lnTo>
+                <a:close/>
+                <a:lnTo>
+                  <a:pt x="403008" y="869997"/>
+                </a:lnTo>
+                <a:close/>
+                <a:lnTo>
+                  <a:pt x="406061" y="869322"/>
+                </a:lnTo>
+                <a:close/>
+                <a:lnTo>
+                  <a:pt x="409114" y="868642"/>
+                </a:lnTo>
+                <a:close/>
+                <a:lnTo>
+                  <a:pt x="412167" y="867956"/>
+                </a:lnTo>
+                <a:close/>
+                <a:lnTo>
+                  <a:pt x="415220" y="867265"/>
+                </a:lnTo>
+                <a:close/>
+                <a:lnTo>
+                  <a:pt x="418273" y="866570"/>
+                </a:lnTo>
+                <a:close/>
+                <a:lnTo>
+                  <a:pt x="421326" y="865869"/>
+                </a:lnTo>
+                <a:close/>
+                <a:lnTo>
+                  <a:pt x="424379" y="865163"/>
+                </a:lnTo>
+                <a:close/>
+                <a:lnTo>
+                  <a:pt x="427432" y="864452"/>
+                </a:lnTo>
+                <a:close/>
+                <a:lnTo>
+                  <a:pt x="430485" y="863736"/>
+                </a:lnTo>
+                <a:close/>
+                <a:lnTo>
+                  <a:pt x="433539" y="863015"/>
+                </a:lnTo>
+                <a:close/>
+                <a:lnTo>
+                  <a:pt x="436592" y="862289"/>
+                </a:lnTo>
+                <a:close/>
+                <a:lnTo>
+                  <a:pt x="439645" y="861557"/>
+                </a:lnTo>
+                <a:close/>
+                <a:lnTo>
+                  <a:pt x="442698" y="860821"/>
+                </a:lnTo>
+                <a:close/>
+                <a:lnTo>
+                  <a:pt x="445751" y="860079"/>
+                </a:lnTo>
+                <a:close/>
+                <a:lnTo>
+                  <a:pt x="448804" y="859332"/>
+                </a:lnTo>
+                <a:close/>
+                <a:lnTo>
+                  <a:pt x="451857" y="858581"/>
+                </a:lnTo>
+                <a:close/>
+                <a:lnTo>
+                  <a:pt x="454910" y="857824"/>
+                </a:lnTo>
+                <a:close/>
+                <a:lnTo>
+                  <a:pt x="457963" y="857062"/>
+                </a:lnTo>
+                <a:close/>
+                <a:lnTo>
+                  <a:pt x="461016" y="856295"/>
+                </a:lnTo>
+                <a:close/>
+                <a:lnTo>
+                  <a:pt x="464069" y="855523"/>
+                </a:lnTo>
+                <a:close/>
+                <a:lnTo>
+                  <a:pt x="467123" y="854745"/>
+                </a:lnTo>
+                <a:close/>
+                <a:lnTo>
+                  <a:pt x="470176" y="853963"/>
+                </a:lnTo>
+                <a:close/>
+                <a:lnTo>
+                  <a:pt x="473229" y="853176"/>
+                </a:lnTo>
+                <a:close/>
+                <a:lnTo>
+                  <a:pt x="476282" y="852383"/>
+                </a:lnTo>
+                <a:close/>
+                <a:lnTo>
+                  <a:pt x="479335" y="851585"/>
+                </a:lnTo>
+                <a:close/>
+                <a:lnTo>
+                  <a:pt x="482388" y="850783"/>
+                </a:lnTo>
+                <a:close/>
+                <a:lnTo>
+                  <a:pt x="485441" y="849975"/>
+                </a:lnTo>
+                <a:close/>
+                <a:lnTo>
+                  <a:pt x="488494" y="849162"/>
+                </a:lnTo>
+                <a:close/>
+                <a:lnTo>
+                  <a:pt x="491547" y="848344"/>
+                </a:lnTo>
+                <a:close/>
+                <a:lnTo>
+                  <a:pt x="494600" y="847521"/>
+                </a:lnTo>
+                <a:close/>
+                <a:lnTo>
+                  <a:pt x="497653" y="846693"/>
+                </a:lnTo>
+                <a:close/>
+                <a:lnTo>
+                  <a:pt x="500707" y="845859"/>
+                </a:lnTo>
+                <a:close/>
+                <a:lnTo>
+                  <a:pt x="503760" y="845021"/>
+                </a:lnTo>
+                <a:close/>
+                <a:lnTo>
+                  <a:pt x="506813" y="844177"/>
+                </a:lnTo>
+                <a:close/>
+                <a:lnTo>
+                  <a:pt x="509866" y="843329"/>
+                </a:lnTo>
+                <a:close/>
+                <a:lnTo>
+                  <a:pt x="512919" y="842475"/>
+                </a:lnTo>
+                <a:close/>
+                <a:lnTo>
+                  <a:pt x="515972" y="841616"/>
+                </a:lnTo>
+                <a:close/>
+                <a:lnTo>
+                  <a:pt x="519025" y="840752"/>
+                </a:lnTo>
+                <a:close/>
+                <a:lnTo>
+                  <a:pt x="522078" y="839883"/>
+                </a:lnTo>
+                <a:close/>
+                <a:lnTo>
+                  <a:pt x="525131" y="839009"/>
+                </a:lnTo>
+                <a:close/>
+                <a:lnTo>
+                  <a:pt x="528184" y="838130"/>
+                </a:lnTo>
+                <a:close/>
+                <a:lnTo>
+                  <a:pt x="531237" y="837246"/>
+                </a:lnTo>
+                <a:close/>
+                <a:lnTo>
+                  <a:pt x="534290" y="836356"/>
+                </a:lnTo>
+                <a:close/>
+                <a:lnTo>
+                  <a:pt x="537344" y="835462"/>
+                </a:lnTo>
+                <a:close/>
+                <a:lnTo>
+                  <a:pt x="540397" y="834562"/>
+                </a:lnTo>
+                <a:close/>
+                <a:lnTo>
+                  <a:pt x="543450" y="833658"/>
+                </a:lnTo>
+                <a:close/>
+                <a:lnTo>
+                  <a:pt x="546503" y="832748"/>
+                </a:lnTo>
+                <a:close/>
+                <a:lnTo>
+                  <a:pt x="549556" y="831833"/>
+                </a:lnTo>
+                <a:close/>
+                <a:lnTo>
+                  <a:pt x="552609" y="830913"/>
+                </a:lnTo>
+                <a:close/>
+                <a:lnTo>
+                  <a:pt x="555662" y="829988"/>
+                </a:lnTo>
+                <a:close/>
+                <a:lnTo>
+                  <a:pt x="558715" y="829058"/>
+                </a:lnTo>
+                <a:close/>
+                <a:lnTo>
+                  <a:pt x="561768" y="828123"/>
+                </a:lnTo>
+                <a:close/>
+                <a:lnTo>
+                  <a:pt x="564821" y="827182"/>
+                </a:lnTo>
+                <a:close/>
+                <a:lnTo>
+                  <a:pt x="567874" y="826237"/>
+                </a:lnTo>
+                <a:close/>
+                <a:lnTo>
+                  <a:pt x="570928" y="825286"/>
+                </a:lnTo>
+                <a:close/>
+                <a:lnTo>
+                  <a:pt x="573981" y="824331"/>
+                </a:lnTo>
+                <a:close/>
+                <a:lnTo>
+                  <a:pt x="577034" y="823370"/>
+                </a:lnTo>
+                <a:close/>
+                <a:lnTo>
+                  <a:pt x="580087" y="822404"/>
+                </a:lnTo>
+                <a:close/>
+                <a:lnTo>
+                  <a:pt x="583140" y="821433"/>
+                </a:lnTo>
+                <a:close/>
+                <a:lnTo>
+                  <a:pt x="586193" y="820457"/>
+                </a:lnTo>
+                <a:close/>
+                <a:lnTo>
+                  <a:pt x="589246" y="819476"/>
+                </a:lnTo>
+                <a:close/>
+                <a:lnTo>
+                  <a:pt x="592299" y="818490"/>
+                </a:lnTo>
+                <a:close/>
+                <a:lnTo>
+                  <a:pt x="595352" y="817498"/>
+                </a:lnTo>
+                <a:close/>
+                <a:lnTo>
+                  <a:pt x="598405" y="816502"/>
+                </a:lnTo>
+                <a:close/>
+                <a:lnTo>
+                  <a:pt x="601458" y="815501"/>
+                </a:lnTo>
+                <a:close/>
+                <a:lnTo>
+                  <a:pt x="604512" y="814494"/>
+                </a:lnTo>
+                <a:close/>
+                <a:lnTo>
+                  <a:pt x="607565" y="813482"/>
+                </a:lnTo>
+                <a:close/>
+                <a:lnTo>
+                  <a:pt x="610618" y="812465"/>
+                </a:lnTo>
+                <a:close/>
+                <a:lnTo>
+                  <a:pt x="613671" y="811444"/>
+                </a:lnTo>
+                <a:close/>
+                <a:lnTo>
+                  <a:pt x="616724" y="810417"/>
+                </a:lnTo>
+                <a:close/>
+                <a:lnTo>
+                  <a:pt x="619777" y="809385"/>
+                </a:lnTo>
+                <a:close/>
+                <a:lnTo>
+                  <a:pt x="622830" y="808347"/>
+                </a:lnTo>
+                <a:close/>
+                <a:lnTo>
+                  <a:pt x="625883" y="807305"/>
+                </a:lnTo>
+                <a:close/>
+                <a:lnTo>
+                  <a:pt x="628936" y="806258"/>
+                </a:lnTo>
+                <a:close/>
+                <a:lnTo>
+                  <a:pt x="631989" y="805205"/>
+                </a:lnTo>
+                <a:close/>
+                <a:lnTo>
+                  <a:pt x="635042" y="804148"/>
+                </a:lnTo>
+                <a:close/>
+                <a:lnTo>
+                  <a:pt x="638095" y="803085"/>
+                </a:lnTo>
+                <a:close/>
+                <a:lnTo>
+                  <a:pt x="641149" y="802017"/>
+                </a:lnTo>
+                <a:close/>
+                <a:lnTo>
+                  <a:pt x="644202" y="800944"/>
+                </a:lnTo>
+                <a:close/>
+                <a:lnTo>
+                  <a:pt x="647255" y="799866"/>
+                </a:lnTo>
+                <a:close/>
+                <a:lnTo>
+                  <a:pt x="650308" y="798783"/>
+                </a:lnTo>
+                <a:close/>
+                <a:lnTo>
+                  <a:pt x="653361" y="797695"/>
+                </a:lnTo>
+                <a:close/>
+                <a:lnTo>
+                  <a:pt x="656414" y="796602"/>
+                </a:lnTo>
+                <a:close/>
+                <a:lnTo>
+                  <a:pt x="659467" y="795504"/>
+                </a:lnTo>
+                <a:close/>
+                <a:lnTo>
+                  <a:pt x="662520" y="794400"/>
+                </a:lnTo>
+                <a:close/>
+                <a:lnTo>
+                  <a:pt x="665573" y="793292"/>
+                </a:lnTo>
+                <a:close/>
+                <a:lnTo>
+                  <a:pt x="668626" y="792178"/>
+                </a:lnTo>
+                <a:close/>
+                <a:lnTo>
+                  <a:pt x="671679" y="791059"/>
+                </a:lnTo>
+                <a:close/>
+                <a:lnTo>
+                  <a:pt x="674733" y="789935"/>
+                </a:lnTo>
+                <a:close/>
+                <a:lnTo>
+                  <a:pt x="677786" y="788806"/>
+                </a:lnTo>
+                <a:close/>
+                <a:lnTo>
+                  <a:pt x="680839" y="787672"/>
+                </a:lnTo>
+                <a:close/>
+                <a:lnTo>
+                  <a:pt x="683892" y="786533"/>
+                </a:lnTo>
+                <a:close/>
+                <a:lnTo>
+                  <a:pt x="686945" y="785389"/>
+                </a:lnTo>
+                <a:close/>
+                <a:lnTo>
+                  <a:pt x="689998" y="784240"/>
+                </a:lnTo>
+                <a:close/>
+                <a:lnTo>
+                  <a:pt x="693051" y="783085"/>
+                </a:lnTo>
+                <a:close/>
+                <a:lnTo>
+                  <a:pt x="696104" y="781926"/>
+                </a:lnTo>
+                <a:close/>
+                <a:lnTo>
+                  <a:pt x="699157" y="780761"/>
+                </a:lnTo>
+                <a:close/>
+                <a:lnTo>
+                  <a:pt x="702210" y="779592"/>
+                </a:lnTo>
+                <a:close/>
+                <a:lnTo>
+                  <a:pt x="705263" y="778417"/>
+                </a:lnTo>
+                <a:close/>
+                <a:lnTo>
+                  <a:pt x="708317" y="777237"/>
+                </a:lnTo>
+                <a:close/>
+                <a:lnTo>
+                  <a:pt x="711370" y="776052"/>
+                </a:lnTo>
+                <a:close/>
+                <a:lnTo>
+                  <a:pt x="714423" y="774862"/>
+                </a:lnTo>
+                <a:close/>
+                <a:lnTo>
+                  <a:pt x="717476" y="773667"/>
+                </a:lnTo>
+                <a:close/>
+                <a:lnTo>
+                  <a:pt x="720529" y="772467"/>
+                </a:lnTo>
+                <a:close/>
+                <a:lnTo>
+                  <a:pt x="723582" y="771261"/>
+                </a:lnTo>
+                <a:close/>
+                <a:lnTo>
+                  <a:pt x="726635" y="770051"/>
+                </a:lnTo>
+                <a:close/>
+                <a:lnTo>
+                  <a:pt x="729688" y="768835"/>
+                </a:lnTo>
+                <a:close/>
+                <a:lnTo>
+                  <a:pt x="732741" y="767615"/>
+                </a:lnTo>
+                <a:close/>
+                <a:lnTo>
+                  <a:pt x="735794" y="766389"/>
+                </a:lnTo>
+                <a:close/>
+                <a:lnTo>
+                  <a:pt x="738847" y="765158"/>
+                </a:lnTo>
+                <a:close/>
+                <a:lnTo>
+                  <a:pt x="741901" y="763922"/>
+                </a:lnTo>
+                <a:close/>
+                <a:lnTo>
+                  <a:pt x="744954" y="762681"/>
+                </a:lnTo>
+                <a:close/>
+                <a:lnTo>
+                  <a:pt x="748007" y="761435"/>
+                </a:lnTo>
+                <a:close/>
+                <a:lnTo>
+                  <a:pt x="751060" y="760183"/>
+                </a:lnTo>
+                <a:close/>
+                <a:lnTo>
+                  <a:pt x="754113" y="758927"/>
+                </a:lnTo>
+                <a:close/>
+                <a:lnTo>
+                  <a:pt x="757166" y="757665"/>
+                </a:lnTo>
+                <a:close/>
+                <a:lnTo>
+                  <a:pt x="760219" y="756398"/>
+                </a:lnTo>
+                <a:close/>
+                <a:lnTo>
+                  <a:pt x="763272" y="755126"/>
+                </a:lnTo>
+                <a:close/>
+                <a:lnTo>
+                  <a:pt x="766325" y="753849"/>
+                </a:lnTo>
+                <a:close/>
+                <a:lnTo>
+                  <a:pt x="769378" y="752567"/>
+                </a:lnTo>
+                <a:close/>
+                <a:lnTo>
+                  <a:pt x="772431" y="751280"/>
+                </a:lnTo>
+                <a:close/>
+                <a:lnTo>
+                  <a:pt x="775484" y="749987"/>
+                </a:lnTo>
+                <a:close/>
+                <a:lnTo>
+                  <a:pt x="778538" y="748690"/>
+                </a:lnTo>
+                <a:close/>
+                <a:lnTo>
+                  <a:pt x="781591" y="747388"/>
+                </a:lnTo>
+                <a:close/>
+                <a:lnTo>
+                  <a:pt x="784644" y="746080"/>
+                </a:lnTo>
+                <a:close/>
+                <a:lnTo>
+                  <a:pt x="787697" y="744768"/>
+                </a:lnTo>
+                <a:close/>
+                <a:lnTo>
+                  <a:pt x="790750" y="743450"/>
+                </a:lnTo>
+                <a:close/>
+                <a:lnTo>
+                  <a:pt x="793803" y="742128"/>
+                </a:lnTo>
+                <a:close/>
+                <a:lnTo>
+                  <a:pt x="796856" y="740800"/>
+                </a:lnTo>
+                <a:close/>
+                <a:lnTo>
+                  <a:pt x="799909" y="739468"/>
+                </a:lnTo>
+                <a:close/>
+                <a:lnTo>
+                  <a:pt x="802962" y="738130"/>
+                </a:lnTo>
+                <a:close/>
+                <a:lnTo>
+                  <a:pt x="806015" y="736788"/>
+                </a:lnTo>
+                <a:close/>
+                <a:lnTo>
+                  <a:pt x="809068" y="735440"/>
+                </a:lnTo>
+                <a:close/>
+                <a:lnTo>
+                  <a:pt x="812122" y="734088"/>
+                </a:lnTo>
+                <a:close/>
+                <a:lnTo>
+                  <a:pt x="815175" y="732730"/>
+                </a:lnTo>
+                <a:close/>
+                <a:lnTo>
+                  <a:pt x="818228" y="731367"/>
+                </a:lnTo>
+                <a:close/>
+                <a:lnTo>
+                  <a:pt x="821281" y="730000"/>
+                </a:lnTo>
+                <a:close/>
+                <a:lnTo>
+                  <a:pt x="824334" y="728627"/>
+                </a:lnTo>
+                <a:close/>
+                <a:lnTo>
+                  <a:pt x="827387" y="727249"/>
+                </a:lnTo>
+                <a:close/>
+                <a:lnTo>
+                  <a:pt x="830440" y="725866"/>
+                </a:lnTo>
+                <a:close/>
+                <a:lnTo>
+                  <a:pt x="833493" y="724478"/>
+                </a:lnTo>
+                <a:close/>
+                <a:lnTo>
+                  <a:pt x="836546" y="723085"/>
+                </a:lnTo>
+                <a:close/>
+                <a:lnTo>
+                  <a:pt x="839599" y="721687"/>
+                </a:lnTo>
+                <a:close/>
+                <a:lnTo>
+                  <a:pt x="842652" y="720283"/>
+                </a:lnTo>
+                <a:close/>
+                <a:lnTo>
+                  <a:pt x="845706" y="718875"/>
+                </a:lnTo>
+                <a:close/>
+                <a:lnTo>
+                  <a:pt x="848759" y="717461"/>
+                </a:lnTo>
+                <a:close/>
+                <a:lnTo>
+                  <a:pt x="851812" y="716042"/>
+                </a:lnTo>
+                <a:close/>
+                <a:lnTo>
+                  <a:pt x="854865" y="714618"/>
+                </a:lnTo>
+                <a:close/>
+                <a:lnTo>
+                  <a:pt x="857918" y="713189"/>
+                </a:lnTo>
+                <a:close/>
+                <a:lnTo>
+                  <a:pt x="860971" y="711755"/>
+                </a:lnTo>
+                <a:close/>
+                <a:lnTo>
+                  <a:pt x="864024" y="710316"/>
+                </a:lnTo>
+                <a:close/>
+                <a:lnTo>
+                  <a:pt x="867077" y="708872"/>
+                </a:lnTo>
+                <a:close/>
+                <a:lnTo>
+                  <a:pt x="870130" y="707422"/>
+                </a:lnTo>
+                <a:close/>
+                <a:lnTo>
+                  <a:pt x="873183" y="705967"/>
+                </a:lnTo>
+                <a:close/>
+                <a:lnTo>
+                  <a:pt x="876236" y="704508"/>
+                </a:lnTo>
+                <a:close/>
+                <a:lnTo>
+                  <a:pt x="879289" y="703043"/>
+                </a:lnTo>
+                <a:close/>
+                <a:lnTo>
+                  <a:pt x="882343" y="701573"/>
+                </a:lnTo>
+                <a:close/>
+                <a:lnTo>
+                  <a:pt x="885396" y="700098"/>
+                </a:lnTo>
+                <a:close/>
+                <a:lnTo>
+                  <a:pt x="888449" y="698617"/>
+                </a:lnTo>
+                <a:close/>
+                <a:lnTo>
+                  <a:pt x="891502" y="697132"/>
+                </a:lnTo>
+                <a:close/>
+                <a:lnTo>
+                  <a:pt x="894555" y="695642"/>
+                </a:lnTo>
+                <a:close/>
+                <a:lnTo>
+                  <a:pt x="897608" y="694146"/>
+                </a:lnTo>
+                <a:close/>
+                <a:lnTo>
+                  <a:pt x="900661" y="692645"/>
+                </a:lnTo>
+                <a:close/>
+                <a:lnTo>
+                  <a:pt x="903714" y="691140"/>
+                </a:lnTo>
+                <a:close/>
+                <a:lnTo>
+                  <a:pt x="906767" y="689629"/>
+                </a:lnTo>
+                <a:close/>
+                <a:lnTo>
+                  <a:pt x="909820" y="688113"/>
+                </a:lnTo>
+                <a:close/>
+                <a:lnTo>
+                  <a:pt x="912873" y="686592"/>
+                </a:lnTo>
+                <a:close/>
+                <a:lnTo>
+                  <a:pt x="915927" y="685066"/>
+                </a:lnTo>
+                <a:close/>
+                <a:lnTo>
+                  <a:pt x="918980" y="683534"/>
+                </a:lnTo>
+                <a:close/>
+                <a:lnTo>
+                  <a:pt x="922033" y="681998"/>
+                </a:lnTo>
+                <a:close/>
+                <a:lnTo>
+                  <a:pt x="925086" y="680457"/>
+                </a:lnTo>
+                <a:close/>
+                <a:lnTo>
+                  <a:pt x="928139" y="678910"/>
+                </a:lnTo>
+                <a:close/>
+                <a:lnTo>
+                  <a:pt x="931192" y="677358"/>
+                </a:lnTo>
+                <a:close/>
+                <a:lnTo>
+                  <a:pt x="934245" y="675802"/>
+                </a:lnTo>
+                <a:close/>
+                <a:lnTo>
+                  <a:pt x="937298" y="674240"/>
+                </a:lnTo>
+                <a:close/>
+                <a:lnTo>
+                  <a:pt x="940351" y="672673"/>
+                </a:lnTo>
+                <a:close/>
+                <a:lnTo>
+                  <a:pt x="943404" y="671101"/>
+                </a:lnTo>
+                <a:close/>
+                <a:lnTo>
+                  <a:pt x="946457" y="669524"/>
+                </a:lnTo>
+                <a:close/>
+                <a:lnTo>
+                  <a:pt x="949511" y="667942"/>
+                </a:lnTo>
+                <a:close/>
+                <a:lnTo>
+                  <a:pt x="952564" y="666354"/>
+                </a:lnTo>
+                <a:close/>
+                <a:lnTo>
+                  <a:pt x="955617" y="664762"/>
+                </a:lnTo>
+                <a:close/>
+                <a:lnTo>
+                  <a:pt x="958670" y="663164"/>
+                </a:lnTo>
+                <a:close/>
+                <a:lnTo>
+                  <a:pt x="961723" y="661562"/>
+                </a:lnTo>
+                <a:close/>
+                <a:lnTo>
+                  <a:pt x="964776" y="659954"/>
+                </a:lnTo>
+                <a:close/>
+                <a:lnTo>
+                  <a:pt x="967829" y="658341"/>
+                </a:lnTo>
+                <a:close/>
+                <a:lnTo>
+                  <a:pt x="970882" y="656723"/>
+                </a:lnTo>
+                <a:close/>
+                <a:lnTo>
+                  <a:pt x="973935" y="655100"/>
+                </a:lnTo>
+                <a:close/>
+                <a:lnTo>
+                  <a:pt x="976988" y="653472"/>
+                </a:lnTo>
+                <a:close/>
+                <a:lnTo>
+                  <a:pt x="980041" y="651839"/>
+                </a:lnTo>
+                <a:close/>
+                <a:lnTo>
+                  <a:pt x="983094" y="650201"/>
+                </a:lnTo>
+                <a:close/>
+                <a:lnTo>
+                  <a:pt x="986148" y="648558"/>
+                </a:lnTo>
+                <a:close/>
+                <a:lnTo>
+                  <a:pt x="989201" y="646909"/>
+                </a:lnTo>
+                <a:close/>
+                <a:lnTo>
+                  <a:pt x="992254" y="645256"/>
+                </a:lnTo>
+                <a:close/>
+                <a:lnTo>
+                  <a:pt x="995307" y="643597"/>
+                </a:lnTo>
+                <a:close/>
+                <a:lnTo>
+                  <a:pt x="998360" y="641933"/>
+                </a:lnTo>
+                <a:close/>
+                <a:lnTo>
+                  <a:pt x="1001413" y="640264"/>
+                </a:lnTo>
+                <a:close/>
+                <a:lnTo>
+                  <a:pt x="1004466" y="638590"/>
+                </a:lnTo>
+                <a:close/>
+                <a:lnTo>
+                  <a:pt x="1007519" y="636911"/>
+                </a:lnTo>
+                <a:close/>
+                <a:lnTo>
+                  <a:pt x="1010572" y="635227"/>
+                </a:lnTo>
+                <a:close/>
+                <a:lnTo>
+                  <a:pt x="1013625" y="633538"/>
+                </a:lnTo>
+                <a:close/>
+                <a:lnTo>
+                  <a:pt x="1016678" y="631844"/>
+                </a:lnTo>
+                <a:close/>
+                <a:lnTo>
+                  <a:pt x="1019732" y="630144"/>
+                </a:lnTo>
+                <a:close/>
+                <a:lnTo>
+                  <a:pt x="1022785" y="628440"/>
+                </a:lnTo>
+                <a:close/>
+                <a:lnTo>
+                  <a:pt x="1025838" y="626730"/>
+                </a:lnTo>
+                <a:close/>
+                <a:lnTo>
+                  <a:pt x="1028891" y="625015"/>
+                </a:lnTo>
+                <a:close/>
+                <a:lnTo>
+                  <a:pt x="1031944" y="623295"/>
+                </a:lnTo>
+                <a:close/>
+                <a:lnTo>
+                  <a:pt x="1034997" y="621571"/>
+                </a:lnTo>
+                <a:close/>
+                <a:lnTo>
+                  <a:pt x="1038050" y="619841"/>
+                </a:lnTo>
+                <a:close/>
+                <a:lnTo>
+                  <a:pt x="1041103" y="618105"/>
+                </a:lnTo>
+                <a:close/>
+                <a:lnTo>
+                  <a:pt x="1044156" y="616365"/>
+                </a:lnTo>
+                <a:close/>
+                <a:lnTo>
+                  <a:pt x="1047209" y="614620"/>
+                </a:lnTo>
+                <a:close/>
+                <a:lnTo>
+                  <a:pt x="1050262" y="612870"/>
+                </a:lnTo>
+                <a:close/>
+                <a:lnTo>
+                  <a:pt x="1053316" y="611114"/>
+                </a:lnTo>
+                <a:close/>
+                <a:lnTo>
+                  <a:pt x="1056369" y="609353"/>
+                </a:lnTo>
+                <a:close/>
+                <a:lnTo>
+                  <a:pt x="1059422" y="607588"/>
+                </a:lnTo>
+                <a:close/>
+                <a:lnTo>
+                  <a:pt x="1062475" y="605817"/>
+                </a:lnTo>
+                <a:close/>
+                <a:lnTo>
+                  <a:pt x="1065528" y="604041"/>
+                </a:lnTo>
+                <a:close/>
+                <a:lnTo>
+                  <a:pt x="1068581" y="602260"/>
+                </a:lnTo>
+                <a:close/>
+                <a:lnTo>
+                  <a:pt x="1071634" y="600474"/>
+                </a:lnTo>
+                <a:close/>
+                <a:lnTo>
+                  <a:pt x="1074687" y="598683"/>
+                </a:lnTo>
+                <a:close/>
+                <a:lnTo>
+                  <a:pt x="1077740" y="596887"/>
+                </a:lnTo>
+                <a:close/>
+                <a:lnTo>
+                  <a:pt x="1080793" y="595085"/>
+                </a:lnTo>
+                <a:close/>
+                <a:lnTo>
+                  <a:pt x="1083846" y="593279"/>
+                </a:lnTo>
+                <a:close/>
+                <a:lnTo>
+                  <a:pt x="1086899" y="591467"/>
+                </a:lnTo>
+                <a:close/>
+                <a:lnTo>
+                  <a:pt x="1089953" y="589651"/>
+                </a:lnTo>
+                <a:close/>
+                <a:lnTo>
+                  <a:pt x="1093006" y="587829"/>
+                </a:lnTo>
+                <a:close/>
+                <a:lnTo>
+                  <a:pt x="1096059" y="586002"/>
+                </a:lnTo>
+                <a:close/>
+                <a:lnTo>
+                  <a:pt x="1099112" y="584170"/>
+                </a:lnTo>
+                <a:close/>
+                <a:lnTo>
+                  <a:pt x="1102165" y="582333"/>
+                </a:lnTo>
+                <a:close/>
+                <a:lnTo>
+                  <a:pt x="1105218" y="580491"/>
+                </a:lnTo>
+                <a:close/>
+                <a:lnTo>
+                  <a:pt x="1108271" y="578644"/>
+                </a:lnTo>
+                <a:close/>
+                <a:lnTo>
+                  <a:pt x="1111324" y="576791"/>
+                </a:lnTo>
+                <a:close/>
+                <a:lnTo>
+                  <a:pt x="1114377" y="574934"/>
+                </a:lnTo>
+                <a:close/>
+                <a:lnTo>
+                  <a:pt x="1117430" y="573071"/>
+                </a:lnTo>
+                <a:close/>
+                <a:lnTo>
+                  <a:pt x="1120483" y="571204"/>
+                </a:lnTo>
+                <a:close/>
+                <a:lnTo>
+                  <a:pt x="1123537" y="569331"/>
+                </a:lnTo>
+                <a:close/>
+                <a:lnTo>
+                  <a:pt x="1126590" y="567453"/>
+                </a:lnTo>
+                <a:close/>
+                <a:lnTo>
+                  <a:pt x="1129643" y="565570"/>
+                </a:lnTo>
+                <a:close/>
+                <a:lnTo>
+                  <a:pt x="1132696" y="563682"/>
+                </a:lnTo>
+                <a:close/>
+                <a:lnTo>
+                  <a:pt x="1135749" y="561789"/>
+                </a:lnTo>
+                <a:close/>
+                <a:lnTo>
+                  <a:pt x="1138802" y="559891"/>
+                </a:lnTo>
+                <a:close/>
+                <a:lnTo>
+                  <a:pt x="1141855" y="557988"/>
+                </a:lnTo>
+                <a:close/>
+                <a:lnTo>
+                  <a:pt x="1144908" y="556079"/>
+                </a:lnTo>
+                <a:close/>
+                <a:lnTo>
+                  <a:pt x="1147961" y="554166"/>
+                </a:lnTo>
+                <a:close/>
+                <a:lnTo>
+                  <a:pt x="1151014" y="552247"/>
+                </a:lnTo>
+                <a:close/>
+                <a:lnTo>
+                  <a:pt x="1154067" y="550323"/>
+                </a:lnTo>
+                <a:close/>
+                <a:lnTo>
+                  <a:pt x="1157121" y="548395"/>
+                </a:lnTo>
+                <a:close/>
+                <a:lnTo>
+                  <a:pt x="1160174" y="546461"/>
+                </a:lnTo>
+                <a:close/>
+                <a:lnTo>
+                  <a:pt x="1163227" y="544522"/>
+                </a:lnTo>
+                <a:close/>
+                <a:lnTo>
+                  <a:pt x="1166280" y="542578"/>
+                </a:lnTo>
+                <a:close/>
+                <a:lnTo>
+                  <a:pt x="1169333" y="540629"/>
+                </a:lnTo>
+                <a:close/>
+                <a:lnTo>
+                  <a:pt x="1172386" y="538674"/>
+                </a:lnTo>
+                <a:close/>
+                <a:lnTo>
+                  <a:pt x="1175439" y="536715"/>
+                </a:lnTo>
+                <a:close/>
+                <a:lnTo>
+                  <a:pt x="1178492" y="534751"/>
+                </a:lnTo>
+                <a:close/>
+                <a:lnTo>
+                  <a:pt x="1181545" y="532781"/>
+                </a:lnTo>
+                <a:close/>
+                <a:lnTo>
+                  <a:pt x="1184598" y="530806"/>
+                </a:lnTo>
+                <a:close/>
+                <a:lnTo>
+                  <a:pt x="1187651" y="528827"/>
+                </a:lnTo>
+                <a:close/>
+                <a:lnTo>
+                  <a:pt x="1190705" y="526842"/>
+                </a:lnTo>
+                <a:close/>
+                <a:lnTo>
+                  <a:pt x="1193758" y="524852"/>
+                </a:lnTo>
+                <a:close/>
+                <a:lnTo>
+                  <a:pt x="1196811" y="522857"/>
+                </a:lnTo>
+                <a:close/>
+                <a:lnTo>
+                  <a:pt x="1199864" y="520857"/>
+                </a:lnTo>
+                <a:close/>
+                <a:lnTo>
+                  <a:pt x="1202917" y="518851"/>
+                </a:lnTo>
+                <a:close/>
+                <a:lnTo>
+                  <a:pt x="1205970" y="516841"/>
+                </a:lnTo>
+                <a:close/>
+                <a:lnTo>
+                  <a:pt x="1209023" y="514826"/>
+                </a:lnTo>
+                <a:close/>
+                <a:lnTo>
+                  <a:pt x="1212076" y="512805"/>
+                </a:lnTo>
+                <a:close/>
+                <a:lnTo>
+                  <a:pt x="1215129" y="510779"/>
+                </a:lnTo>
+                <a:close/>
+                <a:lnTo>
+                  <a:pt x="1218182" y="508749"/>
+                </a:lnTo>
+                <a:close/>
+                <a:lnTo>
+                  <a:pt x="1221235" y="506713"/>
+                </a:lnTo>
+                <a:close/>
+                <a:lnTo>
+                  <a:pt x="1224288" y="504672"/>
+                </a:lnTo>
+                <a:close/>
+                <a:lnTo>
+                  <a:pt x="1227342" y="502626"/>
+                </a:lnTo>
+                <a:close/>
+                <a:lnTo>
+                  <a:pt x="1230395" y="500575"/>
+                </a:lnTo>
+                <a:close/>
+                <a:lnTo>
+                  <a:pt x="1233448" y="498519"/>
+                </a:lnTo>
+                <a:close/>
+                <a:lnTo>
+                  <a:pt x="1236501" y="496457"/>
+                </a:lnTo>
+                <a:close/>
+                <a:lnTo>
+                  <a:pt x="1239554" y="494391"/>
+                </a:lnTo>
+                <a:close/>
+                <a:lnTo>
+                  <a:pt x="1242607" y="492320"/>
+                </a:lnTo>
+                <a:close/>
+                <a:lnTo>
+                  <a:pt x="1245660" y="490243"/>
+                </a:lnTo>
+                <a:close/>
+                <a:lnTo>
+                  <a:pt x="1248713" y="488161"/>
+                </a:lnTo>
+                <a:close/>
+                <a:lnTo>
+                  <a:pt x="1251766" y="486074"/>
+                </a:lnTo>
+                <a:close/>
+                <a:lnTo>
+                  <a:pt x="1254819" y="483983"/>
+                </a:lnTo>
+                <a:close/>
+                <a:lnTo>
+                  <a:pt x="1257872" y="481886"/>
+                </a:lnTo>
+                <a:close/>
+                <a:lnTo>
+                  <a:pt x="1260926" y="479784"/>
+                </a:lnTo>
+                <a:close/>
+                <a:lnTo>
+                  <a:pt x="1263979" y="477676"/>
+                </a:lnTo>
+                <a:close/>
+                <a:lnTo>
+                  <a:pt x="1267032" y="475564"/>
+                </a:lnTo>
+                <a:close/>
+                <a:lnTo>
+                  <a:pt x="1270085" y="473447"/>
+                </a:lnTo>
+                <a:close/>
+                <a:lnTo>
+                  <a:pt x="1273138" y="471324"/>
+                </a:lnTo>
+                <a:close/>
+                <a:lnTo>
+                  <a:pt x="1276191" y="469197"/>
+                </a:lnTo>
+                <a:close/>
+                <a:lnTo>
+                  <a:pt x="1279244" y="467064"/>
+                </a:lnTo>
+                <a:close/>
+                <a:lnTo>
+                  <a:pt x="1282297" y="464926"/>
+                </a:lnTo>
+                <a:close/>
+                <a:lnTo>
+                  <a:pt x="1285350" y="462783"/>
+                </a:lnTo>
+                <a:close/>
+                <a:lnTo>
+                  <a:pt x="1288403" y="460636"/>
+                </a:lnTo>
+                <a:close/>
+                <a:lnTo>
+                  <a:pt x="1291456" y="458482"/>
+                </a:lnTo>
+                <a:close/>
+                <a:lnTo>
+                  <a:pt x="1294510" y="456324"/>
+                </a:lnTo>
+                <a:close/>
+                <a:lnTo>
+                  <a:pt x="1297563" y="454161"/>
+                </a:lnTo>
+                <a:close/>
+                <a:lnTo>
+                  <a:pt x="1300616" y="451993"/>
+                </a:lnTo>
+                <a:close/>
+                <a:lnTo>
+                  <a:pt x="1303669" y="449819"/>
+                </a:lnTo>
+                <a:close/>
+                <a:lnTo>
+                  <a:pt x="1306722" y="447641"/>
+                </a:lnTo>
+                <a:close/>
+                <a:lnTo>
+                  <a:pt x="1309775" y="445457"/>
+                </a:lnTo>
+                <a:close/>
+                <a:lnTo>
+                  <a:pt x="1312828" y="443269"/>
+                </a:lnTo>
+                <a:close/>
+                <a:lnTo>
+                  <a:pt x="1315881" y="441075"/>
+                </a:lnTo>
+                <a:close/>
+                <a:lnTo>
+                  <a:pt x="1318934" y="438876"/>
+                </a:lnTo>
+                <a:close/>
+                <a:lnTo>
+                  <a:pt x="1321987" y="436672"/>
+                </a:lnTo>
+                <a:close/>
+                <a:lnTo>
+                  <a:pt x="1325040" y="434463"/>
+                </a:lnTo>
+                <a:close/>
+                <a:lnTo>
+                  <a:pt x="1328093" y="432248"/>
+                </a:lnTo>
+                <a:close/>
+                <a:lnTo>
+                  <a:pt x="1331147" y="430029"/>
+                </a:lnTo>
+                <a:close/>
+                <a:lnTo>
+                  <a:pt x="1334200" y="427805"/>
+                </a:lnTo>
+                <a:close/>
+                <a:lnTo>
+                  <a:pt x="1337253" y="425575"/>
+                </a:lnTo>
+                <a:close/>
+                <a:lnTo>
+                  <a:pt x="1340306" y="423341"/>
+                </a:lnTo>
+                <a:close/>
+                <a:lnTo>
+                  <a:pt x="1343359" y="421101"/>
+                </a:lnTo>
+                <a:close/>
+                <a:lnTo>
+                  <a:pt x="1346412" y="418856"/>
+                </a:lnTo>
+                <a:close/>
+                <a:lnTo>
+                  <a:pt x="1349465" y="416606"/>
+                </a:lnTo>
+                <a:close/>
+                <a:lnTo>
+                  <a:pt x="1352518" y="414351"/>
+                </a:lnTo>
+                <a:close/>
+                <a:lnTo>
+                  <a:pt x="1355571" y="412091"/>
+                </a:lnTo>
+                <a:close/>
+                <a:lnTo>
+                  <a:pt x="1358624" y="409826"/>
+                </a:lnTo>
+                <a:close/>
+                <a:lnTo>
+                  <a:pt x="1361677" y="407556"/>
+                </a:lnTo>
+                <a:close/>
+                <a:lnTo>
+                  <a:pt x="1364731" y="405281"/>
+                </a:lnTo>
+                <a:close/>
+                <a:lnTo>
+                  <a:pt x="1367784" y="403000"/>
+                </a:lnTo>
+                <a:close/>
+                <a:lnTo>
+                  <a:pt x="1370837" y="400715"/>
+                </a:lnTo>
+                <a:close/>
+                <a:lnTo>
+                  <a:pt x="1373890" y="398424"/>
+                </a:lnTo>
+                <a:close/>
+                <a:lnTo>
+                  <a:pt x="1376943" y="396128"/>
+                </a:lnTo>
+                <a:close/>
+                <a:lnTo>
+                  <a:pt x="1379996" y="393827"/>
+                </a:lnTo>
+                <a:close/>
+                <a:lnTo>
+                  <a:pt x="1383049" y="391521"/>
+                </a:lnTo>
+                <a:close/>
+                <a:lnTo>
+                  <a:pt x="1386102" y="389210"/>
+                </a:lnTo>
+                <a:close/>
+                <a:lnTo>
+                  <a:pt x="1389155" y="386894"/>
+                </a:lnTo>
+                <a:close/>
+                <a:lnTo>
+                  <a:pt x="1392208" y="384573"/>
+                </a:lnTo>
+                <a:close/>
+                <a:lnTo>
+                  <a:pt x="1395261" y="382247"/>
+                </a:lnTo>
+                <a:close/>
+                <a:lnTo>
+                  <a:pt x="1398315" y="379915"/>
+                </a:lnTo>
+                <a:close/>
+                <a:lnTo>
+                  <a:pt x="1401368" y="377579"/>
+                </a:lnTo>
+                <a:close/>
+                <a:lnTo>
+                  <a:pt x="1404421" y="375237"/>
+                </a:lnTo>
+                <a:close/>
+                <a:lnTo>
+                  <a:pt x="1407474" y="372890"/>
+                </a:lnTo>
+                <a:close/>
+                <a:lnTo>
+                  <a:pt x="1410527" y="370539"/>
+                </a:lnTo>
+                <a:close/>
+                <a:lnTo>
+                  <a:pt x="1413580" y="368182"/>
+                </a:lnTo>
+                <a:close/>
+                <a:lnTo>
+                  <a:pt x="1416633" y="365820"/>
+                </a:lnTo>
+                <a:close/>
+                <a:lnTo>
+                  <a:pt x="1419686" y="363453"/>
+                </a:lnTo>
+                <a:close/>
+                <a:lnTo>
+                  <a:pt x="1422739" y="361080"/>
+                </a:lnTo>
+                <a:close/>
+                <a:lnTo>
+                  <a:pt x="1425792" y="358703"/>
+                </a:lnTo>
+                <a:close/>
+                <a:lnTo>
+                  <a:pt x="1428845" y="356321"/>
+                </a:lnTo>
+                <a:close/>
+                <a:lnTo>
+                  <a:pt x="1431898" y="353933"/>
+                </a:lnTo>
+                <a:close/>
+                <a:lnTo>
+                  <a:pt x="1434952" y="351541"/>
+                </a:lnTo>
+                <a:close/>
+                <a:lnTo>
+                  <a:pt x="1438005" y="349143"/>
+                </a:lnTo>
+                <a:close/>
+                <a:lnTo>
+                  <a:pt x="1441058" y="346740"/>
+                </a:lnTo>
+                <a:close/>
+                <a:lnTo>
+                  <a:pt x="1444111" y="344332"/>
+                </a:lnTo>
+                <a:close/>
+                <a:lnTo>
+                  <a:pt x="1447164" y="341919"/>
+                </a:lnTo>
+                <a:close/>
+                <a:lnTo>
+                  <a:pt x="1450217" y="339501"/>
+                </a:lnTo>
+                <a:close/>
+                <a:lnTo>
+                  <a:pt x="1453270" y="337078"/>
+                </a:lnTo>
+                <a:close/>
+                <a:lnTo>
+                  <a:pt x="1456323" y="334650"/>
+                </a:lnTo>
+                <a:close/>
+                <a:lnTo>
+                  <a:pt x="1459376" y="332216"/>
+                </a:lnTo>
+                <a:close/>
+                <a:lnTo>
+                  <a:pt x="1462429" y="329778"/>
+                </a:lnTo>
+                <a:close/>
+                <a:lnTo>
+                  <a:pt x="1465482" y="327334"/>
+                </a:lnTo>
+                <a:close/>
+                <a:lnTo>
+                  <a:pt x="1468536" y="324886"/>
+                </a:lnTo>
+                <a:close/>
+                <a:lnTo>
+                  <a:pt x="1471589" y="322432"/>
+                </a:lnTo>
+                <a:close/>
+                <a:lnTo>
+                  <a:pt x="1474642" y="319973"/>
+                </a:lnTo>
+                <a:close/>
+                <a:lnTo>
+                  <a:pt x="1477695" y="317509"/>
+                </a:lnTo>
+                <a:close/>
+                <a:lnTo>
+                  <a:pt x="1480748" y="315040"/>
+                </a:lnTo>
+                <a:close/>
+                <a:lnTo>
+                  <a:pt x="1483801" y="312566"/>
+                </a:lnTo>
+                <a:close/>
+                <a:lnTo>
+                  <a:pt x="1486854" y="310087"/>
+                </a:lnTo>
+                <a:close/>
+                <a:lnTo>
+                  <a:pt x="1489907" y="307602"/>
+                </a:lnTo>
+                <a:close/>
+                <a:lnTo>
+                  <a:pt x="1492960" y="305113"/>
+                </a:lnTo>
+                <a:close/>
+                <a:lnTo>
+                  <a:pt x="1496013" y="302619"/>
+                </a:lnTo>
+                <a:close/>
+                <a:lnTo>
+                  <a:pt x="1499066" y="300119"/>
+                </a:lnTo>
+                <a:close/>
+                <a:lnTo>
+                  <a:pt x="1502120" y="297614"/>
+                </a:lnTo>
+                <a:close/>
+                <a:lnTo>
+                  <a:pt x="1505173" y="295104"/>
+                </a:lnTo>
+                <a:close/>
+                <a:lnTo>
+                  <a:pt x="1508226" y="292589"/>
+                </a:lnTo>
+                <a:close/>
+                <a:lnTo>
+                  <a:pt x="1511279" y="290069"/>
+                </a:lnTo>
+                <a:close/>
+                <a:lnTo>
+                  <a:pt x="1514332" y="287544"/>
+                </a:lnTo>
+                <a:close/>
+                <a:lnTo>
+                  <a:pt x="1517385" y="285014"/>
+                </a:lnTo>
+                <a:close/>
+                <a:lnTo>
+                  <a:pt x="1520438" y="282479"/>
+                </a:lnTo>
+                <a:close/>
+                <a:lnTo>
+                  <a:pt x="1523491" y="279939"/>
+                </a:lnTo>
+                <a:close/>
+                <a:lnTo>
+                  <a:pt x="1526544" y="277393"/>
+                </a:lnTo>
+                <a:close/>
+                <a:lnTo>
+                  <a:pt x="1529597" y="274842"/>
+                </a:lnTo>
+                <a:close/>
+                <a:lnTo>
+                  <a:pt x="1532650" y="272287"/>
+                </a:lnTo>
+                <a:close/>
+                <a:lnTo>
+                  <a:pt x="1535704" y="269726"/>
+                </a:lnTo>
+                <a:close/>
+                <a:lnTo>
+                  <a:pt x="1538757" y="267160"/>
+                </a:lnTo>
+                <a:close/>
+                <a:lnTo>
+                  <a:pt x="1541810" y="264589"/>
+                </a:lnTo>
+                <a:close/>
+                <a:lnTo>
+                  <a:pt x="1544863" y="262013"/>
+                </a:lnTo>
+                <a:close/>
+                <a:lnTo>
+                  <a:pt x="1547916" y="259432"/>
+                </a:lnTo>
+                <a:close/>
+                <a:lnTo>
+                  <a:pt x="1550969" y="256846"/>
+                </a:lnTo>
+                <a:close/>
+                <a:lnTo>
+                  <a:pt x="1554022" y="254254"/>
+                </a:lnTo>
+                <a:close/>
+                <a:lnTo>
+                  <a:pt x="1557075" y="251658"/>
+                </a:lnTo>
+                <a:close/>
+                <a:lnTo>
+                  <a:pt x="1560128" y="249056"/>
+                </a:lnTo>
+                <a:close/>
+                <a:lnTo>
+                  <a:pt x="1563181" y="246450"/>
+                </a:lnTo>
+                <a:close/>
+                <a:lnTo>
+                  <a:pt x="1566234" y="243838"/>
+                </a:lnTo>
+                <a:close/>
+                <a:lnTo>
+                  <a:pt x="1569287" y="241221"/>
+                </a:lnTo>
+                <a:close/>
+                <a:lnTo>
+                  <a:pt x="1572341" y="238599"/>
+                </a:lnTo>
+                <a:close/>
+                <a:lnTo>
+                  <a:pt x="1575394" y="235972"/>
+                </a:lnTo>
+                <a:close/>
+                <a:lnTo>
+                  <a:pt x="1578447" y="233340"/>
+                </a:lnTo>
+                <a:close/>
+                <a:lnTo>
+                  <a:pt x="1581500" y="230703"/>
+                </a:lnTo>
+                <a:close/>
+                <a:lnTo>
+                  <a:pt x="1584553" y="228060"/>
+                </a:lnTo>
+                <a:close/>
+                <a:lnTo>
+                  <a:pt x="1587606" y="225413"/>
+                </a:lnTo>
+                <a:close/>
+                <a:lnTo>
+                  <a:pt x="1590659" y="222760"/>
+                </a:lnTo>
+                <a:close/>
+                <a:lnTo>
+                  <a:pt x="1593712" y="220103"/>
+                </a:lnTo>
+                <a:close/>
+                <a:lnTo>
+                  <a:pt x="1596765" y="217440"/>
+                </a:lnTo>
+                <a:close/>
+                <a:lnTo>
+                  <a:pt x="1599818" y="214772"/>
+                </a:lnTo>
+                <a:close/>
+                <a:lnTo>
+                  <a:pt x="1602871" y="212099"/>
+                </a:lnTo>
+                <a:close/>
+                <a:lnTo>
+                  <a:pt x="1605925" y="209421"/>
+                </a:lnTo>
+                <a:close/>
+                <a:lnTo>
+                  <a:pt x="1608978" y="206738"/>
+                </a:lnTo>
+                <a:close/>
+                <a:lnTo>
+                  <a:pt x="1612031" y="204050"/>
+                </a:lnTo>
+                <a:close/>
+                <a:lnTo>
+                  <a:pt x="1615084" y="201357"/>
+                </a:lnTo>
+                <a:close/>
+                <a:lnTo>
+                  <a:pt x="1618137" y="198658"/>
+                </a:lnTo>
+                <a:close/>
+                <a:lnTo>
+                  <a:pt x="1621190" y="195955"/>
+                </a:lnTo>
+                <a:close/>
+                <a:lnTo>
+                  <a:pt x="1624243" y="193246"/>
+                </a:lnTo>
+                <a:close/>
+                <a:lnTo>
+                  <a:pt x="1627296" y="190533"/>
+                </a:lnTo>
+                <a:close/>
+                <a:lnTo>
+                  <a:pt x="1630349" y="187814"/>
+                </a:lnTo>
+                <a:close/>
+                <a:lnTo>
+                  <a:pt x="1633402" y="185090"/>
+                </a:lnTo>
+                <a:close/>
+                <a:lnTo>
+                  <a:pt x="1636455" y="182361"/>
+                </a:lnTo>
+                <a:close/>
+                <a:lnTo>
+                  <a:pt x="1639509" y="179627"/>
+                </a:lnTo>
+                <a:close/>
+                <a:lnTo>
+                  <a:pt x="1642562" y="176888"/>
+                </a:lnTo>
+                <a:close/>
+                <a:lnTo>
+                  <a:pt x="1645615" y="174144"/>
+                </a:lnTo>
+                <a:close/>
+                <a:lnTo>
+                  <a:pt x="1648668" y="171394"/>
+                </a:lnTo>
+                <a:close/>
+                <a:lnTo>
+                  <a:pt x="1651721" y="168640"/>
+                </a:lnTo>
+                <a:close/>
+                <a:lnTo>
+                  <a:pt x="1654774" y="165881"/>
+                </a:lnTo>
+                <a:close/>
+                <a:lnTo>
+                  <a:pt x="1657827" y="163116"/>
+                </a:lnTo>
+                <a:close/>
+                <a:lnTo>
+                  <a:pt x="1660880" y="160346"/>
+                </a:lnTo>
+                <a:close/>
+                <a:lnTo>
+                  <a:pt x="1663933" y="157572"/>
+                </a:lnTo>
+                <a:close/>
+                <a:lnTo>
+                  <a:pt x="1666986" y="154792"/>
+                </a:lnTo>
+                <a:close/>
+                <a:lnTo>
+                  <a:pt x="1670039" y="152007"/>
+                </a:lnTo>
+                <a:close/>
+                <a:lnTo>
+                  <a:pt x="1673092" y="149216"/>
+                </a:lnTo>
+                <a:close/>
+                <a:lnTo>
+                  <a:pt x="1676146" y="146421"/>
+                </a:lnTo>
+                <a:close/>
+                <a:lnTo>
+                  <a:pt x="1679199" y="143621"/>
+                </a:lnTo>
+                <a:close/>
+                <a:lnTo>
+                  <a:pt x="1682252" y="140815"/>
+                </a:lnTo>
+                <a:close/>
+                <a:lnTo>
+                  <a:pt x="1685305" y="138005"/>
+                </a:lnTo>
+                <a:close/>
+                <a:lnTo>
+                  <a:pt x="1688358" y="135189"/>
+                </a:lnTo>
+                <a:close/>
+                <a:lnTo>
+                  <a:pt x="1691411" y="132368"/>
+                </a:lnTo>
+                <a:close/>
+                <a:lnTo>
+                  <a:pt x="1694464" y="129542"/>
+                </a:lnTo>
+                <a:close/>
+                <a:lnTo>
+                  <a:pt x="1697517" y="126711"/>
+                </a:lnTo>
+                <a:close/>
+                <a:lnTo>
+                  <a:pt x="1700570" y="123874"/>
+                </a:lnTo>
+                <a:close/>
+                <a:lnTo>
+                  <a:pt x="1703623" y="121033"/>
+                </a:lnTo>
+                <a:close/>
+                <a:lnTo>
+                  <a:pt x="1706676" y="118186"/>
+                </a:lnTo>
+                <a:close/>
+                <a:lnTo>
+                  <a:pt x="1709730" y="115335"/>
+                </a:lnTo>
+                <a:close/>
+                <a:lnTo>
+                  <a:pt x="1712783" y="112478"/>
+                </a:lnTo>
+                <a:close/>
+                <a:lnTo>
+                  <a:pt x="1715836" y="109617"/>
+                </a:lnTo>
+                <a:close/>
+                <a:lnTo>
+                  <a:pt x="1718889" y="106750"/>
+                </a:lnTo>
+                <a:close/>
+                <a:lnTo>
+                  <a:pt x="1721942" y="103879"/>
+                </a:lnTo>
+                <a:close/>
+                <a:lnTo>
+                  <a:pt x="1724995" y="101002"/>
+                </a:lnTo>
+                <a:close/>
+                <a:lnTo>
+                  <a:pt x="1728048" y="98121"/>
+                </a:lnTo>
+                <a:close/>
+                <a:lnTo>
+                  <a:pt x="1731101" y="95234"/>
+                </a:lnTo>
+                <a:close/>
+                <a:lnTo>
+                  <a:pt x="1734154" y="92343"/>
+                </a:lnTo>
+                <a:close/>
+                <a:lnTo>
+                  <a:pt x="1737207" y="89446"/>
+                </a:lnTo>
+                <a:close/>
+                <a:lnTo>
+                  <a:pt x="1740260" y="86545"/>
+                </a:lnTo>
+                <a:close/>
+                <a:lnTo>
+                  <a:pt x="1743314" y="83639"/>
+                </a:lnTo>
+                <a:close/>
+                <a:lnTo>
+                  <a:pt x="1746367" y="80728"/>
+                </a:lnTo>
+                <a:close/>
+                <a:lnTo>
+                  <a:pt x="1749420" y="77811"/>
+                </a:lnTo>
+                <a:close/>
+                <a:lnTo>
+                  <a:pt x="1752473" y="74889"/>
+                </a:lnTo>
+                <a:close/>
+                <a:lnTo>
+                  <a:pt x="1755526" y="71963"/>
+                </a:lnTo>
+                <a:close/>
+                <a:lnTo>
+                  <a:pt x="1758579" y="69030"/>
+                </a:lnTo>
+                <a:close/>
+                <a:lnTo>
+                  <a:pt x="1761632" y="66093"/>
+                </a:lnTo>
+                <a:close/>
+                <a:lnTo>
+                  <a:pt x="1764685" y="63150"/>
+                </a:lnTo>
+                <a:close/>
+                <a:lnTo>
+                  <a:pt x="1767738" y="60202"/>
+                </a:lnTo>
+                <a:close/>
+                <a:lnTo>
+                  <a:pt x="1770791" y="57248"/>
+                </a:lnTo>
+                <a:close/>
+                <a:lnTo>
+                  <a:pt x="1773844" y="54288"/>
+                </a:lnTo>
+                <a:close/>
+                <a:lnTo>
+                  <a:pt x="1776897" y="51323"/>
+                </a:lnTo>
+                <a:close/>
+                <a:lnTo>
+                  <a:pt x="1779951" y="48352"/>
+                </a:lnTo>
+                <a:close/>
+                <a:lnTo>
+                  <a:pt x="1783004" y="45376"/>
+                </a:lnTo>
+                <a:close/>
+                <a:lnTo>
+                  <a:pt x="1786057" y="42393"/>
+                </a:lnTo>
+                <a:close/>
+                <a:lnTo>
+                  <a:pt x="1789110" y="39405"/>
+                </a:lnTo>
+                <a:close/>
+                <a:lnTo>
+                  <a:pt x="1792163" y="36411"/>
+                </a:lnTo>
+                <a:close/>
+                <a:lnTo>
+                  <a:pt x="1795216" y="33411"/>
+                </a:lnTo>
+                <a:close/>
+                <a:lnTo>
+                  <a:pt x="1798269" y="30405"/>
+                </a:lnTo>
+                <a:close/>
+                <a:lnTo>
+                  <a:pt x="1801322" y="27393"/>
+                </a:lnTo>
+                <a:close/>
+                <a:lnTo>
+                  <a:pt x="1804375" y="24374"/>
+                </a:lnTo>
+                <a:close/>
+                <a:lnTo>
+                  <a:pt x="1807428" y="21350"/>
+                </a:lnTo>
+                <a:close/>
+                <a:lnTo>
+                  <a:pt x="1810481" y="18319"/>
+                </a:lnTo>
+                <a:close/>
+                <a:lnTo>
+                  <a:pt x="1813535" y="15282"/>
+                </a:lnTo>
+                <a:close/>
+                <a:lnTo>
+                  <a:pt x="1816588" y="12239"/>
+                </a:lnTo>
+                <a:close/>
+                <a:lnTo>
+                  <a:pt x="1819641" y="9189"/>
+                </a:lnTo>
+                <a:close/>
+                <a:lnTo>
+                  <a:pt x="1822694" y="6132"/>
+                </a:lnTo>
+                <a:close/>
+                <a:lnTo>
+                  <a:pt x="1825747" y="3069"/>
+                </a:lnTo>
+                <a:close/>
+                <a:lnTo>
+                  <a:pt x="1828800" y="0"/>
                 </a:lnTo>
                 <a:close/>
               </a:path>
             </a:pathLst>
           </a:custGeom>
-          <a:ln w="31750">
+          <a:ln w="38100">
             <a:solidFill>
               <a:srgbClr val="000000"/>
             </a:solidFill>
@@ -5672,8 +8072,8 @@
         </p:nvCxnSpPr>
         <p:spPr>
           <a:xfrm flipV="1">
-            <a:off x="5943600.0" y="1004468.4000000001"/>
-            <a:ext cx="0.0" cy="652881.5999999999"/>
+            <a:off x="6400800.0" y="285750.0"/>
+            <a:ext cx="0.0" cy="2286000.0"/>
           </a:xfrm>
           <a:prstGeom prst="line">
             <a:avLst/>
@@ -5708,8 +8108,8 @@
         </p:nvSpPr>
         <p:spPr>
           <a:xfrm>
-            <a:off x="5867400" y="928268"/>
-            <a:ext cx="152400" cy="152400"/>
+            <a:off x="6311900" y="196850"/>
+            <a:ext cx="177800" cy="177800"/>
           </a:xfrm>
           <a:prstGeom prst="ellipse">
             <a:avLst/>
@@ -5717,500 +8117,6 @@
           <a:solidFill>
             <a:srgbClr val="000000"/>
           </a:solidFill>
-          <a:ln w="12700">
-            <a:solidFill>
-              <a:srgbClr val="FFFFFF"/>
-            </a:solidFill>
-          </a:ln>
-        </p:spPr>
-        <p:style>
-          <a:lnRef idx="1">
-            <a:schemeClr val="accent1"/>
-          </a:lnRef>
-          <a:fillRef idx="3">
-            <a:schemeClr val="accent1"/>
-          </a:fillRef>
-          <a:effectRef idx="2">
-            <a:schemeClr val="accent1"/>
-          </a:effectRef>
-          <a:fontRef idx="minor">
-            <a:schemeClr val="lt1"/>
-          </a:fontRef>
-        </p:style>
-        <p:txBody>
-          <a:bodyPr rtlCol="0" anchor="ctr"/>
-          <a:lstStyle/>
-          <a:p>
-            <a:pPr algn="ctr"/>
-          </a:p>
-        </p:txBody>
-      </p:sp>
-      <p:sp>
-        <p:nvSpPr>
-          <p:cNvPr id="8" name="Oval 7"/>
-          <p:cNvSpPr/>
-          <p:nvPr/>
-        </p:nvSpPr>
-        <p:spPr>
-          <a:xfrm>
-            <a:off x="5867400" y="1581150"/>
-            <a:ext cx="152400" cy="152400"/>
-          </a:xfrm>
-          <a:prstGeom prst="ellipse">
-            <a:avLst/>
-          </a:prstGeom>
-          <a:solidFill>
-            <a:srgbClr val="FFFFFF"/>
-          </a:solidFill>
-          <a:ln w="12700">
-            <a:solidFill>
-              <a:srgbClr val="FFFFFF"/>
-            </a:solidFill>
-          </a:ln>
-        </p:spPr>
-        <p:style>
-          <a:lnRef idx="1">
-            <a:schemeClr val="accent1"/>
-          </a:lnRef>
-          <a:fillRef idx="3">
-            <a:schemeClr val="accent1"/>
-          </a:fillRef>
-          <a:effectRef idx="2">
-            <a:schemeClr val="accent1"/>
-          </a:effectRef>
-          <a:fontRef idx="minor">
-            <a:schemeClr val="lt1"/>
-          </a:fontRef>
-        </p:style>
-        <p:txBody>
-          <a:bodyPr rtlCol="0" anchor="ctr"/>
-          <a:lstStyle/>
-          <a:p>
-            <a:pPr algn="ctr"/>
-          </a:p>
-        </p:txBody>
-      </p:sp>
-      <p:sp>
-        <p:nvSpPr>
-          <p:cNvPr id="9" name="Freeform 8"/>
-          <p:cNvSpPr/>
-          <p:nvPr/>
-        </p:nvSpPr>
-        <p:spPr>
-          <a:xfrm>
-            <a:off x="5257800" y="1025042"/>
-            <a:ext cx="594360" cy="341529"/>
-          </a:xfrm>
-          <a:custGeom>
-            <a:avLst/>
-            <a:gdLst/>
-            <a:ahLst/>
-            <a:cxnLst/>
-            <a:rect l="l" t="t" r="r" b="b"/>
-            <a:pathLst>
-              <a:path w="594360" h="341529">
-                <a:moveTo>
-                  <a:pt x="0" y="341529"/>
-                </a:moveTo>
-                <a:lnTo>
-                  <a:pt x="5925" y="337391"/>
-                </a:lnTo>
-                <a:close/>
-                <a:lnTo>
-                  <a:pt x="11865" y="333276"/>
-                </a:lnTo>
-                <a:close/>
-                <a:lnTo>
-                  <a:pt x="17820" y="329183"/>
-                </a:lnTo>
-                <a:close/>
-                <a:lnTo>
-                  <a:pt x="23788" y="325111"/>
-                </a:lnTo>
-                <a:close/>
-                <a:lnTo>
-                  <a:pt x="29768" y="321060"/>
-                </a:lnTo>
-                <a:close/>
-                <a:lnTo>
-                  <a:pt x="35759" y="317030"/>
-                </a:lnTo>
-                <a:close/>
-                <a:lnTo>
-                  <a:pt x="41760" y="313020"/>
-                </a:lnTo>
-                <a:close/>
-                <a:lnTo>
-                  <a:pt x="47769" y="309031"/>
-                </a:lnTo>
-                <a:close/>
-                <a:lnTo>
-                  <a:pt x="53786" y="305061"/>
-                </a:lnTo>
-                <a:close/>
-                <a:lnTo>
-                  <a:pt x="59809" y="301111"/>
-                </a:lnTo>
-                <a:close/>
-                <a:lnTo>
-                  <a:pt x="65837" y="297180"/>
-                </a:lnTo>
-                <a:close/>
-                <a:lnTo>
-                  <a:pt x="71868" y="293269"/>
-                </a:lnTo>
-                <a:close/>
-                <a:lnTo>
-                  <a:pt x="77903" y="289375"/>
-                </a:lnTo>
-                <a:close/>
-                <a:lnTo>
-                  <a:pt x="83938" y="285500"/>
-                </a:lnTo>
-                <a:close/>
-                <a:lnTo>
-                  <a:pt x="89974" y="281643"/>
-                </a:lnTo>
-                <a:close/>
-                <a:lnTo>
-                  <a:pt x="96009" y="277803"/>
-                </a:lnTo>
-                <a:close/>
-                <a:lnTo>
-                  <a:pt x="102042" y="273981"/>
-                </a:lnTo>
-                <a:close/>
-                <a:lnTo>
-                  <a:pt x="108071" y="270176"/>
-                </a:lnTo>
-                <a:close/>
-                <a:lnTo>
-                  <a:pt x="114096" y="266387"/>
-                </a:lnTo>
-                <a:close/>
-                <a:lnTo>
-                  <a:pt x="120115" y="262615"/>
-                </a:lnTo>
-                <a:close/>
-                <a:lnTo>
-                  <a:pt x="126127" y="258859"/>
-                </a:lnTo>
-                <a:close/>
-                <a:lnTo>
-                  <a:pt x="132131" y="255118"/>
-                </a:lnTo>
-                <a:close/>
-                <a:lnTo>
-                  <a:pt x="138126" y="251393"/>
-                </a:lnTo>
-                <a:close/>
-                <a:lnTo>
-                  <a:pt x="144114" y="247682"/>
-                </a:lnTo>
-                <a:close/>
-                <a:lnTo>
-                  <a:pt x="150096" y="243986"/>
-                </a:lnTo>
-                <a:close/>
-                <a:lnTo>
-                  <a:pt x="156074" y="240304"/>
-                </a:lnTo>
-                <a:close/>
-                <a:lnTo>
-                  <a:pt x="162050" y="236636"/>
-                </a:lnTo>
-                <a:close/>
-                <a:lnTo>
-                  <a:pt x="168026" y="232981"/>
-                </a:lnTo>
-                <a:close/>
-                <a:lnTo>
-                  <a:pt x="174004" y="229338"/>
-                </a:lnTo>
-                <a:close/>
-                <a:lnTo>
-                  <a:pt x="179985" y="225708"/>
-                </a:lnTo>
-                <a:close/>
-                <a:lnTo>
-                  <a:pt x="185971" y="222089"/>
-                </a:lnTo>
-                <a:close/>
-                <a:lnTo>
-                  <a:pt x="191965" y="218481"/>
-                </a:lnTo>
-                <a:close/>
-                <a:lnTo>
-                  <a:pt x="197968" y="214884"/>
-                </a:lnTo>
-                <a:close/>
-                <a:lnTo>
-                  <a:pt x="203980" y="211298"/>
-                </a:lnTo>
-                <a:close/>
-                <a:lnTo>
-                  <a:pt x="210002" y="207722"/>
-                </a:lnTo>
-                <a:close/>
-                <a:lnTo>
-                  <a:pt x="216030" y="204157"/>
-                </a:lnTo>
-                <a:close/>
-                <a:lnTo>
-                  <a:pt x="222063" y="200602"/>
-                </a:lnTo>
-                <a:close/>
-                <a:lnTo>
-                  <a:pt x="228099" y="197058"/>
-                </a:lnTo>
-                <a:close/>
-                <a:lnTo>
-                  <a:pt x="234136" y="193525"/>
-                </a:lnTo>
-                <a:close/>
-                <a:lnTo>
-                  <a:pt x="240171" y="190002"/>
-                </a:lnTo>
-                <a:close/>
-                <a:lnTo>
-                  <a:pt x="246204" y="186491"/>
-                </a:lnTo>
-                <a:close/>
-                <a:lnTo>
-                  <a:pt x="252231" y="182990"/>
-                </a:lnTo>
-                <a:close/>
-                <a:lnTo>
-                  <a:pt x="258251" y="179501"/>
-                </a:lnTo>
-                <a:close/>
-                <a:lnTo>
-                  <a:pt x="264262" y="176022"/>
-                </a:lnTo>
-                <a:close/>
-                <a:lnTo>
-                  <a:pt x="270262" y="172555"/>
-                </a:lnTo>
-                <a:close/>
-                <a:lnTo>
-                  <a:pt x="276253" y="169100"/>
-                </a:lnTo>
-                <a:close/>
-                <a:lnTo>
-                  <a:pt x="282237" y="165656"/>
-                </a:lnTo>
-                <a:close/>
-                <a:lnTo>
-                  <a:pt x="288216" y="162223"/>
-                </a:lnTo>
-                <a:close/>
-                <a:lnTo>
-                  <a:pt x="294192" y="158803"/>
-                </a:lnTo>
-                <a:close/>
-                <a:lnTo>
-                  <a:pt x="300168" y="155394"/>
-                </a:lnTo>
-                <a:close/>
-                <a:lnTo>
-                  <a:pt x="306144" y="151997"/>
-                </a:lnTo>
-                <a:close/>
-                <a:lnTo>
-                  <a:pt x="312123" y="148612"/>
-                </a:lnTo>
-                <a:close/>
-                <a:lnTo>
-                  <a:pt x="318107" y="145240"/>
-                </a:lnTo>
-                <a:close/>
-                <a:lnTo>
-                  <a:pt x="324098" y="141880"/>
-                </a:lnTo>
-                <a:close/>
-                <a:lnTo>
-                  <a:pt x="330098" y="138532"/>
-                </a:lnTo>
-                <a:close/>
-                <a:lnTo>
-                  <a:pt x="336109" y="135197"/>
-                </a:lnTo>
-                <a:close/>
-                <a:lnTo>
-                  <a:pt x="342129" y="131873"/>
-                </a:lnTo>
-                <a:close/>
-                <a:lnTo>
-                  <a:pt x="348156" y="128562"/>
-                </a:lnTo>
-                <a:close/>
-                <a:lnTo>
-                  <a:pt x="354189" y="125261"/>
-                </a:lnTo>
-                <a:close/>
-                <a:lnTo>
-                  <a:pt x="360224" y="121970"/>
-                </a:lnTo>
-                <a:close/>
-                <a:lnTo>
-                  <a:pt x="366261" y="118689"/>
-                </a:lnTo>
-                <a:close/>
-                <a:lnTo>
-                  <a:pt x="372297" y="115418"/>
-                </a:lnTo>
-                <a:close/>
-                <a:lnTo>
-                  <a:pt x="378330" y="112155"/>
-                </a:lnTo>
-                <a:close/>
-                <a:lnTo>
-                  <a:pt x="384358" y="108900"/>
-                </a:lnTo>
-                <a:close/>
-                <a:lnTo>
-                  <a:pt x="390380" y="105653"/>
-                </a:lnTo>
-                <a:close/>
-                <a:lnTo>
-                  <a:pt x="396392" y="102413"/>
-                </a:lnTo>
-                <a:close/>
-                <a:lnTo>
-                  <a:pt x="402395" y="99180"/>
-                </a:lnTo>
-                <a:close/>
-                <a:lnTo>
-                  <a:pt x="408389" y="95953"/>
-                </a:lnTo>
-                <a:close/>
-                <a:lnTo>
-                  <a:pt x="414375" y="92732"/>
-                </a:lnTo>
-                <a:close/>
-                <a:lnTo>
-                  <a:pt x="420356" y="89518"/>
-                </a:lnTo>
-                <a:close/>
-                <a:lnTo>
-                  <a:pt x="426334" y="86311"/>
-                </a:lnTo>
-                <a:close/>
-                <a:lnTo>
-                  <a:pt x="432310" y="83111"/>
-                </a:lnTo>
-                <a:close/>
-                <a:lnTo>
-                  <a:pt x="438286" y="79917"/>
-                </a:lnTo>
-                <a:close/>
-                <a:lnTo>
-                  <a:pt x="444264" y="76729"/>
-                </a:lnTo>
-                <a:close/>
-                <a:lnTo>
-                  <a:pt x="450246" y="73549"/>
-                </a:lnTo>
-                <a:close/>
-                <a:lnTo>
-                  <a:pt x="456234" y="70376"/>
-                </a:lnTo>
-                <a:close/>
-                <a:lnTo>
-                  <a:pt x="462229" y="67209"/>
-                </a:lnTo>
-                <a:close/>
-                <a:lnTo>
-                  <a:pt x="468233" y="64049"/>
-                </a:lnTo>
-                <a:close/>
-                <a:lnTo>
-                  <a:pt x="474245" y="60897"/>
-                </a:lnTo>
-                <a:close/>
-                <a:lnTo>
-                  <a:pt x="480264" y="57752"/>
-                </a:lnTo>
-                <a:close/>
-                <a:lnTo>
-                  <a:pt x="486289" y="54615"/>
-                </a:lnTo>
-                <a:close/>
-                <a:lnTo>
-                  <a:pt x="492318" y="51487"/>
-                </a:lnTo>
-                <a:close/>
-                <a:lnTo>
-                  <a:pt x="498351" y="48368"/>
-                </a:lnTo>
-                <a:close/>
-                <a:lnTo>
-                  <a:pt x="504386" y="45258"/>
-                </a:lnTo>
-                <a:close/>
-                <a:lnTo>
-                  <a:pt x="510422" y="42157"/>
-                </a:lnTo>
-                <a:close/>
-                <a:lnTo>
-                  <a:pt x="516457" y="39067"/>
-                </a:lnTo>
-                <a:close/>
-                <a:lnTo>
-                  <a:pt x="522492" y="35987"/>
-                </a:lnTo>
-                <a:close/>
-                <a:lnTo>
-                  <a:pt x="528523" y="32919"/>
-                </a:lnTo>
-                <a:close/>
-                <a:lnTo>
-                  <a:pt x="534551" y="29861"/>
-                </a:lnTo>
-                <a:close/>
-                <a:lnTo>
-                  <a:pt x="540574" y="26816"/>
-                </a:lnTo>
-                <a:close/>
-                <a:lnTo>
-                  <a:pt x="546591" y="23782"/>
-                </a:lnTo>
-                <a:close/>
-                <a:lnTo>
-                  <a:pt x="552600" y="20761"/>
-                </a:lnTo>
-                <a:close/>
-                <a:lnTo>
-                  <a:pt x="558601" y="17753"/>
-                </a:lnTo>
-                <a:close/>
-                <a:lnTo>
-                  <a:pt x="564592" y="14759"/>
-                </a:lnTo>
-                <a:close/>
-                <a:lnTo>
-                  <a:pt x="570572" y="11778"/>
-                </a:lnTo>
-                <a:close/>
-                <a:lnTo>
-                  <a:pt x="576540" y="8811"/>
-                </a:lnTo>
-                <a:close/>
-                <a:lnTo>
-                  <a:pt x="582495" y="5859"/>
-                </a:lnTo>
-                <a:close/>
-                <a:lnTo>
-                  <a:pt x="588435" y="2922"/>
-                </a:lnTo>
-                <a:close/>
-                <a:lnTo>
-                  <a:pt x="594360" y="0"/>
-                </a:lnTo>
-                <a:close/>
-              </a:path>
-            </a:pathLst>
-          </a:custGeom>
           <a:ln w="19050">
             <a:solidFill>
               <a:srgbClr val="FFFFFF"/>
@@ -6241,425 +8147,21 @@
       </p:sp>
       <p:sp>
         <p:nvSpPr>
-          <p:cNvPr id="10" name="Freeform 9"/>
+          <p:cNvPr id="8" name="Oval 7"/>
           <p:cNvSpPr/>
           <p:nvPr/>
         </p:nvSpPr>
         <p:spPr>
           <a:xfrm>
-            <a:off x="6035040" y="1271473"/>
-            <a:ext cx="594360" cy="274320"/>
+            <a:off x="6311900" y="1111250"/>
+            <a:ext cx="177800" cy="177800"/>
           </a:xfrm>
-          <a:custGeom>
+          <a:prstGeom prst="ellipse">
             <a:avLst/>
-            <a:gdLst/>
-            <a:ahLst/>
-            <a:cxnLst/>
-            <a:rect l="l" t="t" r="r" b="b"/>
-            <a:pathLst>
-              <a:path w="594360" h="274320">
-                <a:moveTo>
-                  <a:pt x="594360" y="0"/>
-                </a:moveTo>
-                <a:lnTo>
-                  <a:pt x="588435" y="5290"/>
-                </a:lnTo>
-                <a:close/>
-                <a:lnTo>
-                  <a:pt x="582495" y="10528"/>
-                </a:lnTo>
-                <a:close/>
-                <a:lnTo>
-                  <a:pt x="576540" y="15715"/>
-                </a:lnTo>
-                <a:close/>
-                <a:lnTo>
-                  <a:pt x="570572" y="20849"/>
-                </a:lnTo>
-                <a:close/>
-                <a:lnTo>
-                  <a:pt x="564592" y="25931"/>
-                </a:lnTo>
-                <a:close/>
-                <a:lnTo>
-                  <a:pt x="558601" y="30960"/>
-                </a:lnTo>
-                <a:close/>
-                <a:lnTo>
-                  <a:pt x="552600" y="35938"/>
-                </a:lnTo>
-                <a:close/>
-                <a:lnTo>
-                  <a:pt x="546591" y="40863"/>
-                </a:lnTo>
-                <a:close/>
-                <a:lnTo>
-                  <a:pt x="540574" y="45735"/>
-                </a:lnTo>
-                <a:close/>
-                <a:lnTo>
-                  <a:pt x="534551" y="50555"/>
-                </a:lnTo>
-                <a:close/>
-                <a:lnTo>
-                  <a:pt x="528523" y="55321"/>
-                </a:lnTo>
-                <a:close/>
-                <a:lnTo>
-                  <a:pt x="522492" y="60035"/>
-                </a:lnTo>
-                <a:close/>
-                <a:lnTo>
-                  <a:pt x="516457" y="64696"/>
-                </a:lnTo>
-                <a:close/>
-                <a:lnTo>
-                  <a:pt x="510422" y="69304"/>
-                </a:lnTo>
-                <a:close/>
-                <a:lnTo>
-                  <a:pt x="504386" y="73859"/>
-                </a:lnTo>
-                <a:close/>
-                <a:lnTo>
-                  <a:pt x="498351" y="78360"/>
-                </a:lnTo>
-                <a:close/>
-                <a:lnTo>
-                  <a:pt x="492318" y="82808"/>
-                </a:lnTo>
-                <a:close/>
-                <a:lnTo>
-                  <a:pt x="486289" y="87202"/>
-                </a:lnTo>
-                <a:close/>
-                <a:lnTo>
-                  <a:pt x="480264" y="91543"/>
-                </a:lnTo>
-                <a:close/>
-                <a:lnTo>
-                  <a:pt x="474245" y="95830"/>
-                </a:lnTo>
-                <a:close/>
-                <a:lnTo>
-                  <a:pt x="468233" y="100063"/>
-                </a:lnTo>
-                <a:close/>
-                <a:lnTo>
-                  <a:pt x="462229" y="104242"/>
-                </a:lnTo>
-                <a:close/>
-                <a:lnTo>
-                  <a:pt x="456234" y="108367"/>
-                </a:lnTo>
-                <a:close/>
-                <a:lnTo>
-                  <a:pt x="450246" y="112439"/>
-                </a:lnTo>
-                <a:close/>
-                <a:lnTo>
-                  <a:pt x="444264" y="116457"/>
-                </a:lnTo>
-                <a:close/>
-                <a:lnTo>
-                  <a:pt x="438286" y="120423"/>
-                </a:lnTo>
-                <a:close/>
-                <a:lnTo>
-                  <a:pt x="432310" y="124338"/>
-                </a:lnTo>
-                <a:close/>
-                <a:lnTo>
-                  <a:pt x="426334" y="128200"/>
-                </a:lnTo>
-                <a:close/>
-                <a:lnTo>
-                  <a:pt x="420356" y="132012"/>
-                </a:lnTo>
-                <a:close/>
-                <a:lnTo>
-                  <a:pt x="414375" y="135774"/>
-                </a:lnTo>
-                <a:close/>
-                <a:lnTo>
-                  <a:pt x="408389" y="139485"/>
-                </a:lnTo>
-                <a:close/>
-                <a:lnTo>
-                  <a:pt x="402395" y="143148"/>
-                </a:lnTo>
-                <a:close/>
-                <a:lnTo>
-                  <a:pt x="396392" y="146761"/>
-                </a:lnTo>
-                <a:close/>
-                <a:lnTo>
-                  <a:pt x="390380" y="150327"/>
-                </a:lnTo>
-                <a:close/>
-                <a:lnTo>
-                  <a:pt x="384358" y="153844"/>
-                </a:lnTo>
-                <a:close/>
-                <a:lnTo>
-                  <a:pt x="378330" y="157313"/>
-                </a:lnTo>
-                <a:close/>
-                <a:lnTo>
-                  <a:pt x="372297" y="160733"/>
-                </a:lnTo>
-                <a:close/>
-                <a:lnTo>
-                  <a:pt x="366261" y="164106"/>
-                </a:lnTo>
-                <a:close/>
-                <a:lnTo>
-                  <a:pt x="360224" y="167431"/>
-                </a:lnTo>
-                <a:close/>
-                <a:lnTo>
-                  <a:pt x="354189" y="170708"/>
-                </a:lnTo>
-                <a:close/>
-                <a:lnTo>
-                  <a:pt x="348156" y="173937"/>
-                </a:lnTo>
-                <a:close/>
-                <a:lnTo>
-                  <a:pt x="342129" y="177118"/>
-                </a:lnTo>
-                <a:close/>
-                <a:lnTo>
-                  <a:pt x="336109" y="180252"/>
-                </a:lnTo>
-                <a:close/>
-                <a:lnTo>
-                  <a:pt x="330098" y="183337"/>
-                </a:lnTo>
-                <a:close/>
-                <a:lnTo>
-                  <a:pt x="324098" y="186375"/>
-                </a:lnTo>
-                <a:close/>
-                <a:lnTo>
-                  <a:pt x="318107" y="189365"/>
-                </a:lnTo>
-                <a:close/>
-                <a:lnTo>
-                  <a:pt x="312123" y="192306"/>
-                </a:lnTo>
-                <a:close/>
-                <a:lnTo>
-                  <a:pt x="306144" y="195196"/>
-                </a:lnTo>
-                <a:close/>
-                <a:lnTo>
-                  <a:pt x="300168" y="198036"/>
-                </a:lnTo>
-                <a:close/>
-                <a:lnTo>
-                  <a:pt x="294192" y="200825"/>
-                </a:lnTo>
-                <a:close/>
-                <a:lnTo>
-                  <a:pt x="288216" y="203561"/>
-                </a:lnTo>
-                <a:close/>
-                <a:lnTo>
-                  <a:pt x="282237" y="206245"/>
-                </a:lnTo>
-                <a:close/>
-                <a:lnTo>
-                  <a:pt x="276253" y="208875"/>
-                </a:lnTo>
-                <a:close/>
-                <a:lnTo>
-                  <a:pt x="270262" y="211450"/>
-                </a:lnTo>
-                <a:close/>
-                <a:lnTo>
-                  <a:pt x="264262" y="213970"/>
-                </a:lnTo>
-                <a:close/>
-                <a:lnTo>
-                  <a:pt x="258251" y="216434"/>
-                </a:lnTo>
-                <a:close/>
-                <a:lnTo>
-                  <a:pt x="252231" y="218843"/>
-                </a:lnTo>
-                <a:close/>
-                <a:lnTo>
-                  <a:pt x="246204" y="221198"/>
-                </a:lnTo>
-                <a:close/>
-                <a:lnTo>
-                  <a:pt x="240171" y="223500"/>
-                </a:lnTo>
-                <a:close/>
-                <a:lnTo>
-                  <a:pt x="234136" y="225750"/>
-                </a:lnTo>
-                <a:close/>
-                <a:lnTo>
-                  <a:pt x="228099" y="227948"/>
-                </a:lnTo>
-                <a:close/>
-                <a:lnTo>
-                  <a:pt x="222063" y="230096"/>
-                </a:lnTo>
-                <a:close/>
-                <a:lnTo>
-                  <a:pt x="216030" y="232194"/>
-                </a:lnTo>
-                <a:close/>
-                <a:lnTo>
-                  <a:pt x="210002" y="234244"/>
-                </a:lnTo>
-                <a:close/>
-                <a:lnTo>
-                  <a:pt x="203980" y="236246"/>
-                </a:lnTo>
-                <a:close/>
-                <a:lnTo>
-                  <a:pt x="197968" y="238201"/>
-                </a:lnTo>
-                <a:close/>
-                <a:lnTo>
-                  <a:pt x="191965" y="240111"/>
-                </a:lnTo>
-                <a:close/>
-                <a:lnTo>
-                  <a:pt x="185971" y="241973"/>
-                </a:lnTo>
-                <a:close/>
-                <a:lnTo>
-                  <a:pt x="179985" y="243788"/>
-                </a:lnTo>
-                <a:close/>
-                <a:lnTo>
-                  <a:pt x="174004" y="245555"/>
-                </a:lnTo>
-                <a:close/>
-                <a:lnTo>
-                  <a:pt x="168026" y="247272"/>
-                </a:lnTo>
-                <a:close/>
-                <a:lnTo>
-                  <a:pt x="162050" y="248939"/>
-                </a:lnTo>
-                <a:close/>
-                <a:lnTo>
-                  <a:pt x="156074" y="250555"/>
-                </a:lnTo>
-                <a:close/>
-                <a:lnTo>
-                  <a:pt x="150096" y="252119"/>
-                </a:lnTo>
-                <a:close/>
-                <a:lnTo>
-                  <a:pt x="144114" y="253630"/>
-                </a:lnTo>
-                <a:close/>
-                <a:lnTo>
-                  <a:pt x="138126" y="255087"/>
-                </a:lnTo>
-                <a:close/>
-                <a:lnTo>
-                  <a:pt x="132131" y="256489"/>
-                </a:lnTo>
-                <a:close/>
-                <a:lnTo>
-                  <a:pt x="126127" y="257836"/>
-                </a:lnTo>
-                <a:close/>
-                <a:lnTo>
-                  <a:pt x="120115" y="259128"/>
-                </a:lnTo>
-                <a:close/>
-                <a:lnTo>
-                  <a:pt x="114096" y="260366"/>
-                </a:lnTo>
-                <a:close/>
-                <a:lnTo>
-                  <a:pt x="108071" y="261549"/>
-                </a:lnTo>
-                <a:close/>
-                <a:lnTo>
-                  <a:pt x="102042" y="262680"/>
-                </a:lnTo>
-                <a:close/>
-                <a:lnTo>
-                  <a:pt x="96009" y="263757"/>
-                </a:lnTo>
-                <a:close/>
-                <a:lnTo>
-                  <a:pt x="89974" y="264783"/>
-                </a:lnTo>
-                <a:close/>
-                <a:lnTo>
-                  <a:pt x="83938" y="265757"/>
-                </a:lnTo>
-                <a:close/>
-                <a:lnTo>
-                  <a:pt x="77903" y="266680"/>
-                </a:lnTo>
-                <a:close/>
-                <a:lnTo>
-                  <a:pt x="71868" y="267553"/>
-                </a:lnTo>
-                <a:close/>
-                <a:lnTo>
-                  <a:pt x="65837" y="268377"/>
-                </a:lnTo>
-                <a:close/>
-                <a:lnTo>
-                  <a:pt x="59809" y="269151"/>
-                </a:lnTo>
-                <a:close/>
-                <a:lnTo>
-                  <a:pt x="53786" y="269876"/>
-                </a:lnTo>
-                <a:close/>
-                <a:lnTo>
-                  <a:pt x="47769" y="270554"/>
-                </a:lnTo>
-                <a:close/>
-                <a:lnTo>
-                  <a:pt x="41760" y="271184"/>
-                </a:lnTo>
-                <a:close/>
-                <a:lnTo>
-                  <a:pt x="35759" y="271768"/>
-                </a:lnTo>
-                <a:close/>
-                <a:lnTo>
-                  <a:pt x="29768" y="272305"/>
-                </a:lnTo>
-                <a:close/>
-                <a:lnTo>
-                  <a:pt x="23788" y="272797"/>
-                </a:lnTo>
-                <a:close/>
-                <a:lnTo>
-                  <a:pt x="17820" y="273244"/>
-                </a:lnTo>
-                <a:close/>
-                <a:lnTo>
-                  <a:pt x="11865" y="273646"/>
-                </a:lnTo>
-                <a:close/>
-                <a:lnTo>
-                  <a:pt x="5925" y="274005"/>
-                </a:lnTo>
-                <a:close/>
-                <a:lnTo>
-                  <a:pt x="0" y="274320"/>
-                </a:lnTo>
-                <a:close/>
-              </a:path>
-            </a:pathLst>
-          </a:custGeom>
+          </a:prstGeom>
+          <a:solidFill>
+            <a:srgbClr val="FFFFFF"/>
+          </a:solidFill>
           <a:ln w="19050">
             <a:solidFill>
               <a:srgbClr val="FFFFFF"/>
@@ -6688,6 +8190,76 @@
           </a:p>
         </p:txBody>
       </p:sp>
+      <p:cxnSp>
+        <p:nvCxnSpPr>
+          <p:cNvPr id="9" name="Connector 8"/>
+          <p:cNvCxnSpPr/>
+          <p:nvPr/>
+        </p:nvCxnSpPr>
+        <p:spPr>
+          <a:xfrm flipV="1">
+            <a:off x="5715000.0" y="403059.9806565256"/>
+            <a:ext cx="457200.0" cy="256085.1986865776"/>
+          </a:xfrm>
+          <a:prstGeom prst="line">
+            <a:avLst/>
+          </a:prstGeom>
+          <a:ln w="15240">
+            <a:solidFill>
+              <a:srgbClr val="FFFFFF"/>
+            </a:solidFill>
+          </a:ln>
+        </p:spPr>
+        <p:style>
+          <a:lnRef idx="2">
+            <a:schemeClr val="accent1"/>
+          </a:lnRef>
+          <a:fillRef idx="0">
+            <a:schemeClr val="accent1"/>
+          </a:fillRef>
+          <a:effectRef idx="1">
+            <a:schemeClr val="accent1"/>
+          </a:effectRef>
+          <a:fontRef idx="minor">
+            <a:schemeClr val="tx1"/>
+          </a:fontRef>
+        </p:style>
+      </p:cxnSp>
+      <p:cxnSp>
+        <p:nvCxnSpPr>
+          <p:cNvPr id="10" name="Connector 9"/>
+          <p:cNvCxnSpPr/>
+          <p:nvPr/>
+        </p:nvCxnSpPr>
+        <p:spPr>
+          <a:xfrm flipH="1">
+            <a:off x="7086600.0" y="842962.5"/>
+            <a:ext cx="457200.0" cy="228600.0"/>
+          </a:xfrm>
+          <a:prstGeom prst="line">
+            <a:avLst/>
+          </a:prstGeom>
+          <a:ln w="15240">
+            <a:solidFill>
+              <a:srgbClr val="FFFFFF"/>
+            </a:solidFill>
+          </a:ln>
+        </p:spPr>
+        <p:style>
+          <a:lnRef idx="2">
+            <a:schemeClr val="accent1"/>
+          </a:lnRef>
+          <a:fillRef idx="0">
+            <a:schemeClr val="accent1"/>
+          </a:fillRef>
+          <a:effectRef idx="1">
+            <a:schemeClr val="accent1"/>
+          </a:effectRef>
+          <a:fontRef idx="minor">
+            <a:schemeClr val="tx1"/>
+          </a:fontRef>
+        </p:style>
+      </p:cxnSp>
       <p:sp>
         <p:nvSpPr>
           <p:cNvPr id="11" name="TextBox 10"/>
@@ -6696,7 +8268,7 @@
         </p:nvSpPr>
         <p:spPr>
           <a:xfrm>
-            <a:off x="5689600" y="2391410"/>
+            <a:off x="6604000" y="-717550"/>
             <a:ext cx="1524000" cy="508000"/>
           </a:xfrm>
           <a:prstGeom prst="rect">
@@ -6711,15 +8283,87 @@
           <a:lstStyle/>
           <a:p>
             <a:pPr>
-              <a:defRPr sz="1800" b="1">
+              <a:defRPr sz="2200" b="1">
                 <a:solidFill>
                   <a:srgbClr val="FFFFFF"/>
                 </a:solidFill>
-                <a:latin typeface="Inter"/>
+                <a:latin typeface="Arial"/>
+              </a:defRPr>
+            </a:pPr>
+            <a:r>
+              <a:t>y=f(x)</a:t>
+            </a:r>
+          </a:p>
+        </p:txBody>
+      </p:sp>
+      <p:sp>
+        <p:nvSpPr>
+          <p:cNvPr id="12" name="TextBox 11"/>
+          <p:cNvSpPr txBox="1"/>
+          <p:nvPr/>
+        </p:nvSpPr>
+        <p:spPr>
+          <a:xfrm>
+            <a:off x="6146800" y="2437130"/>
+            <a:ext cx="1524000" cy="508000"/>
+          </a:xfrm>
+          <a:prstGeom prst="rect">
+            <a:avLst/>
+          </a:prstGeom>
+          <a:noFill/>
+        </p:spPr>
+        <p:txBody>
+          <a:bodyPr wrap="none">
+            <a:spAutoFit/>
+          </a:bodyPr>
+          <a:lstStyle/>
+          <a:p>
+            <a:pPr>
+              <a:defRPr sz="2200" b="1">
+                <a:solidFill>
+                  <a:srgbClr val="FFFFFF"/>
+                </a:solidFill>
+                <a:latin typeface="Arial"/>
               </a:defRPr>
             </a:pPr>
             <a:r>
               <a:t>a</a:t>
+            </a:r>
+          </a:p>
+        </p:txBody>
+      </p:sp>
+      <p:sp>
+        <p:nvSpPr>
+          <p:cNvPr id="13" name="TextBox 12"/>
+          <p:cNvSpPr txBox="1"/>
+          <p:nvPr/>
+        </p:nvSpPr>
+        <p:spPr>
+          <a:xfrm>
+            <a:off x="4180840" y="2391410"/>
+            <a:ext cx="1524000" cy="508000"/>
+          </a:xfrm>
+          <a:prstGeom prst="rect">
+            <a:avLst/>
+          </a:prstGeom>
+          <a:noFill/>
+        </p:spPr>
+        <p:txBody>
+          <a:bodyPr wrap="none">
+            <a:spAutoFit/>
+          </a:bodyPr>
+          <a:lstStyle/>
+          <a:p>
+            <a:pPr>
+              <a:defRPr sz="2200" b="1">
+                <a:solidFill>
+                  <a:srgbClr val="FFFFFF"/>
+                </a:solidFill>
+                <a:latin typeface="Arial"/>
+              </a:defRPr>
+            </a:pPr>
+            <a:r>
+              <a:t>O</a:t>
             </a:r>
           </a:p>
         </p:txBody>
